--- a/presentations/output/P2_Атрибуты_качества.pptx
+++ b/presentations/output/P2_Атрибуты_качества.pptx
@@ -20,9 +20,10 @@
     <p:sldId id="268" r:id="rId14"/>
     <p:sldId id="269" r:id="rId15"/>
     <p:sldId id="270" r:id="rId16"/>
+    <p:sldId id="271" r:id="rId17"/>
   </p:sldIdLst>
   <p:notesMasterIdLst>
-    <p:notesMasterId r:id="rId17"/>
+    <p:notesMasterId r:id="rId18"/>
   </p:notesMasterIdLst>
   <p:sldSz cx="9144000" cy="5143500"/>
   <p:notesSz cx="5143500" cy="9144000"/>
@@ -1068,6 +1069,94 @@
             <a:fld id="{F7021451-1387-4CA6-816F-3879F97B5CBC}" type="slidenum">
               <a:rPr lang="en-US"/>
               <a:t>15</a:t>
+            </a:fld>
+            <a:endParaRPr lang="en-US"/>
+          </a:p>
+        </p:txBody>
+      </p:sp>
+    </p:spTree>
+    <p:extLst>
+      <p:ext uri="{BB962C8B-B14F-4D97-AF65-F5344CB8AC3E}">
+        <p14:creationId xmlns:p14="http://schemas.microsoft.com/office/powerpoint/2010/main" val="1024086991"/>
+      </p:ext>
+    </p:extLst>
+  </p:cSld>
+  <p:clrMapOvr>
+    <a:masterClrMapping/>
+  </p:clrMapOvr>
+</p:notes>
+</file>
+
+<file path=ppt/notesSlides/notesSlide16.xml><?xml version="1.0" encoding="utf-8"?>
+<p:notes xmlns:a="http://schemas.openxmlformats.org/drawingml/2006/main" xmlns:r="http://schemas.openxmlformats.org/officeDocument/2006/relationships" xmlns:p="http://schemas.openxmlformats.org/presentationml/2006/main">
+  <p:cSld>
+    <p:spTree>
+      <p:nvGrpSpPr>
+        <p:cNvPr id="1" name=""/>
+        <p:cNvGrpSpPr/>
+        <p:nvPr/>
+      </p:nvGrpSpPr>
+      <p:grpSpPr>
+        <a:xfrm>
+          <a:off x="0" y="0"/>
+          <a:ext cx="0" cy="0"/>
+          <a:chOff x="0" y="0"/>
+          <a:chExt cx="0" cy="0"/>
+        </a:xfrm>
+      </p:grpSpPr>
+      <p:sp>
+        <p:nvSpPr>
+          <p:cNvPr id="2" name="Slide Image Placeholder 1"/>
+          <p:cNvSpPr>
+            <a:spLocks noGrp="1" noRot="1" noChangeAspect="1"/>
+          </p:cNvSpPr>
+          <p:nvPr>
+            <p:ph type="sldImg"/>
+          </p:nvPr>
+        </p:nvSpPr>
+        <p:spPr/>
+      </p:sp>
+      <p:sp>
+        <p:nvSpPr>
+          <p:cNvPr id="3" name="Notes Placeholder 2"/>
+          <p:cNvSpPr>
+            <a:spLocks noGrp="1"/>
+          </p:cNvSpPr>
+          <p:nvPr>
+            <p:ph type="body" idx="1"/>
+          </p:nvPr>
+        </p:nvSpPr>
+        <p:spPr/>
+        <p:txBody>
+          <a:bodyPr/>
+          <a:lstStyle/>
+          <a:p>
+            <a:r>
+              <a:rPr lang="en-US" dirty="0"/>
+              <a:t/>
+            </a:r>
+            <a:endParaRPr lang="en-US" dirty="0"/>
+          </a:p>
+        </p:txBody>
+      </p:sp>
+      <p:sp>
+        <p:nvSpPr>
+          <p:cNvPr id="4" name="Slide Number Placeholder 3"/>
+          <p:cNvSpPr>
+            <a:spLocks noGrp="1"/>
+          </p:cNvSpPr>
+          <p:nvPr>
+            <p:ph type="sldNum" sz="quarter" idx="10"/>
+          </p:nvPr>
+        </p:nvSpPr>
+        <p:spPr/>
+        <p:txBody>
+          <a:bodyPr/>
+          <a:lstStyle/>
+          <a:p>
+            <a:fld id="{F7021451-1387-4CA6-816F-3879F97B5CBC}" type="slidenum">
+              <a:rPr lang="en-US"/>
+              <a:t>16</a:t>
             </a:fld>
             <a:endParaRPr lang="en-US"/>
           </a:p>
@@ -2103,7 +2192,7 @@
     <p:bg>
       <p:bgPr>
         <a:solidFill>
-          <a:srgbClr val="0F1E36"/>
+          <a:srgbClr val="000000"/>
         </a:solidFill>
       </p:bgPr>
     </p:bg>
@@ -2129,21 +2218,21 @@
         </p:nvSpPr>
         <p:spPr>
           <a:xfrm>
-            <a:off x="6675120" y="-822960"/>
-            <a:ext cx="3200400" cy="3200400"/>
+            <a:off x="6217920" y="-914400"/>
+            <a:ext cx="3657600" cy="3657600"/>
           </a:xfrm>
           <a:prstGeom prst="ellipse">
             <a:avLst/>
           </a:prstGeom>
           <a:solidFill>
-            <a:srgbClr val="EA580C">
-              <a:alpha val="20000"/>
+            <a:srgbClr val="F5A623">
+              <a:alpha val="30000"/>
             </a:srgbClr>
           </a:solidFill>
           <a:ln w="12700">
             <a:solidFill>
-              <a:srgbClr val="EA580C">
-                <a:alpha val="20000"/>
+              <a:srgbClr val="F5A623">
+                <a:alpha val="30000"/>
               </a:srgbClr>
             </a:solidFill>
             <a:prstDash val="solid"/>
@@ -2158,21 +2247,21 @@
         </p:nvSpPr>
         <p:spPr>
           <a:xfrm>
-            <a:off x="-457200" y="3566160"/>
-            <a:ext cx="2377440" cy="2377440"/>
+            <a:off x="-548640" y="3474720"/>
+            <a:ext cx="2011680" cy="2011680"/>
           </a:xfrm>
           <a:prstGeom prst="ellipse">
             <a:avLst/>
           </a:prstGeom>
           <a:solidFill>
-            <a:srgbClr val="FFEDD5">
-              <a:alpha val="13000"/>
+            <a:srgbClr val="E94560">
+              <a:alpha val="40000"/>
             </a:srgbClr>
           </a:solidFill>
           <a:ln w="12700">
             <a:solidFill>
-              <a:srgbClr val="FFEDD5">
-                <a:alpha val="13000"/>
+              <a:srgbClr val="E94560">
+                <a:alpha val="40000"/>
               </a:srgbClr>
             </a:solidFill>
             <a:prstDash val="solid"/>
@@ -2196,11 +2285,11 @@
             </a:avLst>
           </a:prstGeom>
           <a:solidFill>
-            <a:srgbClr val="EA580C"/>
+            <a:srgbClr val="E94560"/>
           </a:solidFill>
           <a:ln w="12700">
             <a:solidFill>
-              <a:srgbClr val="EA580C"/>
+              <a:srgbClr val="E94560"/>
             </a:solidFill>
             <a:prstDash val="solid"/>
           </a:ln>
@@ -2235,9 +2324,9 @@
                 <a:solidFill>
                   <a:srgbClr val="FFFFFF"/>
                 </a:solidFill>
-                <a:latin typeface="Calibri" pitchFamily="34" charset="0"/>
-                <a:ea typeface="Calibri" pitchFamily="34" charset="-122"/>
-                <a:cs typeface="Calibri" pitchFamily="34" charset="-120"/>
+                <a:latin typeface="Times New Roman" pitchFamily="34" charset="0"/>
+                <a:ea typeface="Times New Roman" pitchFamily="34" charset="-122"/>
+                <a:cs typeface="Times New Roman" pitchFamily="34" charset="-120"/>
               </a:rPr>
               <a:t>Тема 2</a:t>
             </a:r>
@@ -2270,34 +2359,34 @@
               <a:buNone/>
             </a:pPr>
             <a:r>
-              <a:rPr lang="en-US" sz="2500" b="1" dirty="0">
+              <a:rPr lang="en-US" sz="2600" b="1" dirty="0">
                 <a:solidFill>
                   <a:srgbClr val="FFFFFF"/>
                 </a:solidFill>
-                <a:latin typeface="Cambria" pitchFamily="34" charset="0"/>
-                <a:ea typeface="Cambria" pitchFamily="34" charset="-122"/>
-                <a:cs typeface="Cambria" pitchFamily="34" charset="-120"/>
+                <a:latin typeface="Georgia" pitchFamily="34" charset="0"/>
+                <a:ea typeface="Georgia" pitchFamily="34" charset="-122"/>
+                <a:cs typeface="Georgia" pitchFamily="34" charset="-120"/>
               </a:rPr>
               <a:t>Атрибуты качества для разработчиков</a:t>
             </a:r>
-            <a:endParaRPr lang="en-US" sz="2500" dirty="0"/>
-          </a:p>
-          <a:p>
-            <a:pPr algn="l" indent="0" marL="0">
-              <a:buNone/>
-            </a:pPr>
-            <a:r>
-              <a:rPr lang="en-US" sz="2500" b="1" dirty="0">
+            <a:endParaRPr lang="en-US" sz="2600" dirty="0"/>
+          </a:p>
+          <a:p>
+            <a:pPr algn="l" indent="0" marL="0">
+              <a:buNone/>
+            </a:pPr>
+            <a:r>
+              <a:rPr lang="en-US" sz="2600" b="1" dirty="0">
                 <a:solidFill>
                   <a:srgbClr val="FFFFFF"/>
                 </a:solidFill>
-                <a:latin typeface="Cambria" pitchFamily="34" charset="0"/>
-                <a:ea typeface="Cambria" pitchFamily="34" charset="-122"/>
-                <a:cs typeface="Cambria" pitchFamily="34" charset="-120"/>
+                <a:latin typeface="Georgia" pitchFamily="34" charset="0"/>
+                <a:ea typeface="Georgia" pitchFamily="34" charset="-122"/>
+                <a:cs typeface="Georgia" pitchFamily="34" charset="-120"/>
               </a:rPr>
               <a:t>Developer-Oriented Quality Attributes</a:t>
             </a:r>
-            <a:endParaRPr lang="en-US" sz="2500" dirty="0"/>
+            <a:endParaRPr lang="en-US" sz="2600" dirty="0"/>
           </a:p>
         </p:txBody>
       </p:sp>
@@ -2326,17 +2415,17 @@
               <a:buNone/>
             </a:pPr>
             <a:r>
-              <a:rPr lang="en-US" sz="1300" dirty="0">
-                <a:solidFill>
-                  <a:srgbClr val="FFF7ED"/>
-                </a:solidFill>
-                <a:latin typeface="Calibri" pitchFamily="34" charset="0"/>
-                <a:ea typeface="Calibri" pitchFamily="34" charset="-122"/>
-                <a:cs typeface="Calibri" pitchFamily="34" charset="-120"/>
+              <a:rPr lang="en-US" sz="1200" dirty="0">
+                <a:solidFill>
+                  <a:srgbClr val="F8F4F0"/>
+                </a:solidFill>
+                <a:latin typeface="Times New Roman" pitchFamily="34" charset="0"/>
+                <a:ea typeface="Times New Roman" pitchFamily="34" charset="-122"/>
+                <a:cs typeface="Times New Roman" pitchFamily="34" charset="-120"/>
               </a:rPr>
               <a:t>Проект ТППО: «Личный кабинет для клиентов компании»</a:t>
             </a:r>
-            <a:endParaRPr lang="en-US" sz="1300" dirty="0"/>
+            <a:endParaRPr lang="en-US" sz="1200" dirty="0"/>
           </a:p>
         </p:txBody>
       </p:sp>
@@ -2355,11 +2444,11 @@
             <a:avLst/>
           </a:prstGeom>
           <a:solidFill>
-            <a:srgbClr val="0A1424"/>
+            <a:srgbClr val="0D0D1A"/>
           </a:solidFill>
           <a:ln w="12700">
             <a:solidFill>
-              <a:srgbClr val="0A1424"/>
+              <a:srgbClr val="0D0D1A"/>
             </a:solidFill>
             <a:prstDash val="solid"/>
           </a:ln>
@@ -2392,13 +2481,13 @@
             <a:r>
               <a:rPr lang="en-US" sz="1100" dirty="0">
                 <a:solidFill>
-                  <a:srgbClr val="7B9BC0"/>
-                </a:solidFill>
-                <a:latin typeface="Calibri" pitchFamily="34" charset="0"/>
-                <a:ea typeface="Calibri" pitchFamily="34" charset="-122"/>
-                <a:cs typeface="Calibri" pitchFamily="34" charset="-120"/>
-              </a:rPr>
-              <a:t>Выполнила: Ломазина А., гр.22307   |   Руководитель: Корзун Д.Ж.   |   ИМИТ ПетрГУ, 2024/25</a:t>
+                  <a:srgbClr val="B8B0C0"/>
+                </a:solidFill>
+                <a:latin typeface="Times New Roman" pitchFamily="34" charset="0"/>
+                <a:ea typeface="Times New Roman" pitchFamily="34" charset="-122"/>
+                <a:cs typeface="Times New Roman" pitchFamily="34" charset="-120"/>
+              </a:rPr>
+              <a:t>Выполнила: Ломазина Александра, гр 22307   |   Руководитель: Корзун Дмитрий Жоржевич   |   ИМИТ ПетрГУ, 2026</a:t>
             </a:r>
             <a:endParaRPr lang="en-US" sz="1100" dirty="0"/>
           </a:p>
@@ -2461,17 +2550,17 @@
               <a:buNone/>
             </a:pPr>
             <a:r>
-              <a:rPr lang="en-US" sz="2000" b="1" dirty="0">
-                <a:solidFill>
-                  <a:srgbClr val="0F1E36"/>
-                </a:solidFill>
-                <a:latin typeface="Cambria" pitchFamily="34" charset="0"/>
-                <a:ea typeface="Cambria" pitchFamily="34" charset="-122"/>
-                <a:cs typeface="Cambria" pitchFamily="34" charset="-120"/>
-              </a:rPr>
-              <a:t>Расширяемость: плагины и паттерны</a:t>
-            </a:r>
-            <a:endParaRPr lang="en-US" sz="2000" dirty="0"/>
+              <a:rPr lang="en-US" sz="1600" b="1" dirty="0">
+                <a:solidFill>
+                  <a:srgbClr val="1A1A2E"/>
+                </a:solidFill>
+                <a:latin typeface="Georgia" pitchFamily="34" charset="0"/>
+                <a:ea typeface="Georgia" pitchFamily="34" charset="-122"/>
+                <a:cs typeface="Georgia" pitchFamily="34" charset="-120"/>
+              </a:rPr>
+              <a:t>Схемы валидации данных (Zod)</a:t>
+            </a:r>
+            <a:endParaRPr lang="en-US" sz="1600" dirty="0"/>
           </a:p>
         </p:txBody>
       </p:sp>
@@ -2484,26 +2573,26 @@
         <p:spPr>
           <a:xfrm>
             <a:off x="384048" y="822960"/>
-            <a:ext cx="4023360" cy="4119372"/>
+            <a:ext cx="3474720" cy="4119372"/>
           </a:xfrm>
           <a:prstGeom prst="roundRect">
             <a:avLst>
-              <a:gd name="adj" fmla="val 2273"/>
+              <a:gd name="adj" fmla="val 2632"/>
             </a:avLst>
           </a:prstGeom>
           <a:solidFill>
-            <a:srgbClr val="FFF7ED"/>
+            <a:srgbClr val="F8F4F0"/>
           </a:solidFill>
           <a:ln w="12700">
             <a:solidFill>
-              <a:srgbClr val="FFF7ED"/>
+              <a:srgbClr val="EFEAE3"/>
             </a:solidFill>
             <a:prstDash val="solid"/>
           </a:ln>
           <a:effectLst>
-            <a:outerShdw sx="100000" sy="100000" kx="0" ky="0" algn="bl" rotWithShape="0" blurRad="88900" dist="25400" dir="2700000">
+            <a:outerShdw sx="100000" sy="100000" kx="0" ky="0" algn="bl" rotWithShape="0" blurRad="152400" dist="38100" dir="2700000">
               <a:srgbClr val="000000">
-                <a:alpha val="9000"/>
+                <a:alpha val="12000"/>
               </a:srgbClr>
             </a:outerShdw>
           </a:effectLst>
@@ -2517,8 +2606,8 @@
         </p:nvSpPr>
         <p:spPr>
           <a:xfrm>
-            <a:off x="548640" y="932688"/>
-            <a:ext cx="3694176" cy="365760"/>
+            <a:off x="521208" y="932688"/>
+            <a:ext cx="3200400" cy="320040"/>
           </a:xfrm>
           <a:prstGeom prst="rect">
             <a:avLst/>
@@ -2534,17 +2623,17 @@
               <a:buNone/>
             </a:pPr>
             <a:r>
-              <a:rPr lang="en-US" sz="1300" b="1" dirty="0">
-                <a:solidFill>
-                  <a:srgbClr val="0F1E36"/>
+              <a:rPr lang="en-US" sz="1200" b="1" dirty="0">
+                <a:solidFill>
+                  <a:srgbClr val="1A1A2E"/>
                 </a:solidFill>
                 <a:latin typeface="Cambria" pitchFamily="34" charset="0"/>
                 <a:ea typeface="Cambria" pitchFamily="34" charset="-122"/>
                 <a:cs typeface="Cambria" pitchFamily="34" charset="-120"/>
               </a:rPr>
-              <a:t>Паттерн Стратегия (Strategy)</a:t>
-            </a:r>
-            <a:endParaRPr lang="en-US" sz="1300" dirty="0"/>
+              <a:t>Безопасный парсинг данных</a:t>
+            </a:r>
+            <a:endParaRPr lang="en-US" sz="1200" dirty="0"/>
           </a:p>
         </p:txBody>
       </p:sp>
@@ -2556,8 +2645,8 @@
         </p:nvSpPr>
         <p:spPr>
           <a:xfrm>
-            <a:off x="548640" y="1389888"/>
-            <a:ext cx="3694176" cy="2926080"/>
+            <a:off x="521208" y="1325880"/>
+            <a:ext cx="3200400" cy="3387852"/>
           </a:xfrm>
           <a:prstGeom prst="rect">
             <a:avLst/>
@@ -2566,22 +2655,73 @@
           <a:ln/>
         </p:spPr>
         <p:txBody>
-          <a:bodyPr wrap="square" rtlCol="0" anchor="ctr"/>
+          <a:bodyPr wrap="square" rtlCol="0" anchor="t"/>
           <a:lstStyle/>
           <a:p>
-            <a:pPr indent="0" marL="0">
+            <a:pPr algn="l" indent="0" marL="0">
               <a:buNone/>
             </a:pPr>
             <a:r>
               <a:rPr lang="en-US" sz="1100" dirty="0">
                 <a:solidFill>
-                  <a:srgbClr val="1E293B"/>
-                </a:solidFill>
-                <a:latin typeface="Calibri" pitchFamily="34" charset="0"/>
-                <a:ea typeface="Calibri" pitchFamily="34" charset="-122"/>
-                <a:cs typeface="Calibri" pitchFamily="34" charset="-120"/>
-              </a:rPr>
-              <a:t>Для отправки уведомлений используется паттерн 'Стратегия'. Это позволяет легко добавить новый канал (например, Telegram, E-mail, Push) без изменения логики создания тикета. Достаточно зарегистрировать класс, реализующий интерфейс `INotificationProvider`.</a:t>
+                  <a:srgbClr val="2D2D3A"/>
+                </a:solidFill>
+                <a:latin typeface="Times New Roman" pitchFamily="34" charset="0"/>
+                <a:ea typeface="Times New Roman" pitchFamily="34" charset="-122"/>
+                <a:cs typeface="Times New Roman" pitchFamily="34" charset="-120"/>
+              </a:rPr>
+              <a:t>• Zod проверяет входящие HTTP-запросы (body, query, params) до выполнения логики.</a:t>
+            </a:r>
+            <a:endParaRPr lang="en-US" sz="1100" dirty="0"/>
+          </a:p>
+          <a:p>
+            <a:pPr algn="l" indent="0" marL="0">
+              <a:buNone/>
+            </a:pPr>
+            <a:r>
+              <a:rPr lang="en-US" sz="1100" dirty="0">
+                <a:solidFill>
+                  <a:srgbClr val="2D2D3A"/>
+                </a:solidFill>
+                <a:latin typeface="Times New Roman" pitchFamily="34" charset="0"/>
+                <a:ea typeface="Times New Roman" pitchFamily="34" charset="-122"/>
+                <a:cs typeface="Times New Roman" pitchFamily="34" charset="-120"/>
+              </a:rPr>
+              <a:t>• Автоматически отсекает лишние поля (защита от mass assignment).</a:t>
+            </a:r>
+            <a:endParaRPr lang="en-US" sz="1100" dirty="0"/>
+          </a:p>
+          <a:p>
+            <a:pPr algn="l" indent="0" marL="0">
+              <a:buNone/>
+            </a:pPr>
+            <a:r>
+              <a:rPr lang="en-US" sz="1100" dirty="0">
+                <a:solidFill>
+                  <a:srgbClr val="2D2D3A"/>
+                </a:solidFill>
+                <a:latin typeface="Times New Roman" pitchFamily="34" charset="0"/>
+                <a:ea typeface="Times New Roman" pitchFamily="34" charset="-122"/>
+                <a:cs typeface="Times New Roman" pitchFamily="34" charset="-120"/>
+              </a:rPr>
+              <a:t>• Преобразует строковые типы в числа/даты.</a:t>
+            </a:r>
+            <a:endParaRPr lang="en-US" sz="1100" dirty="0"/>
+          </a:p>
+          <a:p>
+            <a:pPr algn="l" indent="0" marL="0">
+              <a:buNone/>
+            </a:pPr>
+            <a:r>
+              <a:rPr lang="en-US" sz="1100" dirty="0">
+                <a:solidFill>
+                  <a:srgbClr val="2D2D3A"/>
+                </a:solidFill>
+                <a:latin typeface="Times New Roman" pitchFamily="34" charset="0"/>
+                <a:ea typeface="Times New Roman" pitchFamily="34" charset="-122"/>
+                <a:cs typeface="Times New Roman" pitchFamily="34" charset="-120"/>
+              </a:rPr>
+              <a:t>• Из схем Zod автоматически выводятся типы TS (`z.infer&lt;T&gt;`).</a:t>
             </a:r>
             <a:endParaRPr lang="en-US" sz="1100" dirty="0"/>
           </a:p>
@@ -2595,30 +2735,23 @@
         </p:nvSpPr>
         <p:spPr>
           <a:xfrm>
-            <a:off x="4681728" y="822960"/>
-            <a:ext cx="4078224" cy="4119372"/>
+            <a:off x="4133088" y="822960"/>
+            <a:ext cx="4626864" cy="4119372"/>
           </a:xfrm>
           <a:prstGeom prst="roundRect">
             <a:avLst>
-              <a:gd name="adj" fmla="val 2242"/>
+              <a:gd name="adj" fmla="val 1776"/>
             </a:avLst>
           </a:prstGeom>
           <a:solidFill>
-            <a:srgbClr val="D1FAE5"/>
+            <a:srgbClr val="1A1A2E"/>
           </a:solidFill>
           <a:ln w="12700">
             <a:solidFill>
-              <a:srgbClr val="D1FAE5"/>
+              <a:srgbClr val="2A2A4A"/>
             </a:solidFill>
             <a:prstDash val="solid"/>
           </a:ln>
-          <a:effectLst>
-            <a:outerShdw sx="100000" sy="100000" kx="0" ky="0" algn="bl" rotWithShape="0" blurRad="88900" dist="25400" dir="2700000">
-              <a:srgbClr val="000000">
-                <a:alpha val="9000"/>
-              </a:srgbClr>
-            </a:outerShdw>
-          </a:effectLst>
         </p:spPr>
       </p:sp>
       <p:sp>
@@ -2629,8 +2762,8 @@
         </p:nvSpPr>
         <p:spPr>
           <a:xfrm>
-            <a:off x="4846320" y="932688"/>
-            <a:ext cx="3749040" cy="365760"/>
+            <a:off x="4270248" y="905256"/>
+            <a:ext cx="4352544" cy="3954780"/>
           </a:xfrm>
           <a:prstGeom prst="rect">
             <a:avLst/>
@@ -2639,63 +2772,155 @@
           <a:ln/>
         </p:spPr>
         <p:txBody>
-          <a:bodyPr wrap="square" rtlCol="0" anchor="ctr"/>
+          <a:bodyPr wrap="square" rtlCol="0" anchor="t"/>
           <a:lstStyle/>
           <a:p>
-            <a:pPr indent="0" marL="0">
-              <a:buNone/>
-            </a:pPr>
-            <a:r>
-              <a:rPr lang="en-US" sz="1300" b="1" dirty="0">
-                <a:solidFill>
-                  <a:srgbClr val="0F1E36"/>
-                </a:solidFill>
-                <a:latin typeface="Cambria" pitchFamily="34" charset="0"/>
-                <a:ea typeface="Cambria" pitchFamily="34" charset="-122"/>
-                <a:cs typeface="Cambria" pitchFamily="34" charset="-120"/>
-              </a:rPr>
-              <a:t>Слабая связанность хранилищ файлов</a:t>
-            </a:r>
-            <a:endParaRPr lang="en-US" sz="1300" dirty="0"/>
-          </a:p>
-        </p:txBody>
-      </p:sp>
-      <p:sp>
-        <p:nvSpPr>
-          <p:cNvPr id="8" name="Text 6"/>
-          <p:cNvSpPr/>
-          <p:nvPr/>
-        </p:nvSpPr>
-        <p:spPr>
-          <a:xfrm>
-            <a:off x="4846320" y="1389888"/>
-            <a:ext cx="3749040" cy="2926080"/>
-          </a:xfrm>
-          <a:prstGeom prst="rect">
-            <a:avLst/>
-          </a:prstGeom>
-          <a:noFill/>
-          <a:ln/>
-        </p:spPr>
-        <p:txBody>
-          <a:bodyPr wrap="square" rtlCol="0" anchor="ctr"/>
-          <a:lstStyle/>
-          <a:p>
-            <a:pPr indent="0" marL="0">
-              <a:buNone/>
-            </a:pPr>
-            <a:r>
-              <a:rPr lang="en-US" sz="1100" dirty="0">
-                <a:solidFill>
-                  <a:srgbClr val="1E293B"/>
-                </a:solidFill>
-                <a:latin typeface="Calibri" pitchFamily="34" charset="0"/>
-                <a:ea typeface="Calibri" pitchFamily="34" charset="-122"/>
-                <a:cs typeface="Calibri" pitchFamily="34" charset="-120"/>
-              </a:rPr>
-              <a:t>Интеграция с S3 скрыта за абстракцией `IFileStorage`. В процессе разработки мы используем локальный MinIO, но при развертывании в облаке можем переключиться на AWS S3 или Yandex Object Storage простым изменением переменной среды в `.env`.</a:t>
-            </a:r>
-            <a:endParaRPr lang="en-US" sz="1100" dirty="0"/>
+            <a:pPr algn="l" indent="0" marL="0">
+              <a:buNone/>
+            </a:pPr>
+            <a:r>
+              <a:rPr lang="en-US" sz="1000" dirty="0">
+                <a:solidFill>
+                  <a:srgbClr val="F8F4F0"/>
+                </a:solidFill>
+                <a:latin typeface="Courier New" pitchFamily="34" charset="0"/>
+                <a:ea typeface="Courier New" pitchFamily="34" charset="-122"/>
+                <a:cs typeface="Courier New" pitchFamily="34" charset="-120"/>
+              </a:rPr>
+              <a:t>import { z } from 'zod';</a:t>
+            </a:r>
+            <a:endParaRPr lang="en-US" sz="1000" dirty="0"/>
+          </a:p>
+          <a:p>
+            <a:pPr algn="l" indent="0" marL="0">
+              <a:buNone/>
+            </a:pPr>
+            <a:endParaRPr lang="en-US" sz="1000" dirty="0"/>
+          </a:p>
+          <a:p>
+            <a:pPr algn="l" indent="0" marL="0">
+              <a:buNone/>
+            </a:pPr>
+            <a:r>
+              <a:rPr lang="en-US" sz="1000" dirty="0">
+                <a:solidFill>
+                  <a:srgbClr val="F8F4F0"/>
+                </a:solidFill>
+                <a:latin typeface="Courier New" pitchFamily="34" charset="0"/>
+                <a:ea typeface="Courier New" pitchFamily="34" charset="-122"/>
+                <a:cs typeface="Courier New" pitchFamily="34" charset="-120"/>
+              </a:rPr>
+              <a:t>export const CreateTicketSchema = z.object({</a:t>
+            </a:r>
+            <a:endParaRPr lang="en-US" sz="1000" dirty="0"/>
+          </a:p>
+          <a:p>
+            <a:pPr algn="l" indent="0" marL="0">
+              <a:buNone/>
+            </a:pPr>
+            <a:r>
+              <a:rPr lang="en-US" sz="1000" dirty="0">
+                <a:solidFill>
+                  <a:srgbClr val="F8F4F0"/>
+                </a:solidFill>
+                <a:latin typeface="Courier New" pitchFamily="34" charset="0"/>
+                <a:ea typeface="Courier New" pitchFamily="34" charset="-122"/>
+                <a:cs typeface="Courier New" pitchFamily="34" charset="-120"/>
+              </a:rPr>
+              <a:t>  title: z.string().min(3).max(100),</a:t>
+            </a:r>
+            <a:endParaRPr lang="en-US" sz="1000" dirty="0"/>
+          </a:p>
+          <a:p>
+            <a:pPr algn="l" indent="0" marL="0">
+              <a:buNone/>
+            </a:pPr>
+            <a:r>
+              <a:rPr lang="en-US" sz="1000" dirty="0">
+                <a:solidFill>
+                  <a:srgbClr val="F8F4F0"/>
+                </a:solidFill>
+                <a:latin typeface="Courier New" pitchFamily="34" charset="0"/>
+                <a:ea typeface="Courier New" pitchFamily="34" charset="-122"/>
+                <a:cs typeface="Courier New" pitchFamily="34" charset="-120"/>
+              </a:rPr>
+              <a:t>  description: z.string().min(10),</a:t>
+            </a:r>
+            <a:endParaRPr lang="en-US" sz="1000" dirty="0"/>
+          </a:p>
+          <a:p>
+            <a:pPr algn="l" indent="0" marL="0">
+              <a:buNone/>
+            </a:pPr>
+            <a:r>
+              <a:rPr lang="en-US" sz="1000" dirty="0">
+                <a:solidFill>
+                  <a:srgbClr val="F8F4F0"/>
+                </a:solidFill>
+                <a:latin typeface="Courier New" pitchFamily="34" charset="0"/>
+                <a:ea typeface="Courier New" pitchFamily="34" charset="-122"/>
+                <a:cs typeface="Courier New" pitchFamily="34" charset="-120"/>
+              </a:rPr>
+              <a:t>  category: z.enum(['1C_ERP', '1C_Accounting', 'Other']),</a:t>
+            </a:r>
+            <a:endParaRPr lang="en-US" sz="1000" dirty="0"/>
+          </a:p>
+          <a:p>
+            <a:pPr algn="l" indent="0" marL="0">
+              <a:buNone/>
+            </a:pPr>
+            <a:r>
+              <a:rPr lang="en-US" sz="1000" dirty="0">
+                <a:solidFill>
+                  <a:srgbClr val="F8F4F0"/>
+                </a:solidFill>
+                <a:latin typeface="Courier New" pitchFamily="34" charset="0"/>
+                <a:ea typeface="Courier New" pitchFamily="34" charset="-122"/>
+                <a:cs typeface="Courier New" pitchFamily="34" charset="-120"/>
+              </a:rPr>
+              <a:t>  attachments: z.array(z.string().uuid()).optional(),</a:t>
+            </a:r>
+            <a:endParaRPr lang="en-US" sz="1000" dirty="0"/>
+          </a:p>
+          <a:p>
+            <a:pPr algn="l" indent="0" marL="0">
+              <a:buNone/>
+            </a:pPr>
+            <a:r>
+              <a:rPr lang="en-US" sz="1000" dirty="0">
+                <a:solidFill>
+                  <a:srgbClr val="F8F4F0"/>
+                </a:solidFill>
+                <a:latin typeface="Courier New" pitchFamily="34" charset="0"/>
+                <a:ea typeface="Courier New" pitchFamily="34" charset="-122"/>
+                <a:cs typeface="Courier New" pitchFamily="34" charset="-120"/>
+              </a:rPr>
+              <a:t>});</a:t>
+            </a:r>
+            <a:endParaRPr lang="en-US" sz="1000" dirty="0"/>
+          </a:p>
+          <a:p>
+            <a:pPr algn="l" indent="0" marL="0">
+              <a:buNone/>
+            </a:pPr>
+            <a:endParaRPr lang="en-US" sz="1000" dirty="0"/>
+          </a:p>
+          <a:p>
+            <a:pPr algn="l" indent="0" marL="0">
+              <a:buNone/>
+            </a:pPr>
+            <a:r>
+              <a:rPr lang="en-US" sz="1000" dirty="0">
+                <a:solidFill>
+                  <a:srgbClr val="F8F4F0"/>
+                </a:solidFill>
+                <a:latin typeface="Courier New" pitchFamily="34" charset="0"/>
+                <a:ea typeface="Courier New" pitchFamily="34" charset="-122"/>
+                <a:cs typeface="Courier New" pitchFamily="34" charset="-120"/>
+              </a:rPr>
+              <a:t>type CreateTicketDto = z.infer&lt;typeof CreateTicketSchema&gt;;</a:t>
+            </a:r>
+            <a:endParaRPr lang="en-US" sz="1000" dirty="0"/>
           </a:p>
         </p:txBody>
       </p:sp>
@@ -2756,17 +2981,17 @@
               <a:buNone/>
             </a:pPr>
             <a:r>
-              <a:rPr lang="en-US" sz="2000" b="1" dirty="0">
-                <a:solidFill>
-                  <a:srgbClr val="0F1E36"/>
-                </a:solidFill>
-                <a:latin typeface="Cambria" pitchFamily="34" charset="0"/>
-                <a:ea typeface="Cambria" pitchFamily="34" charset="-122"/>
-                <a:cs typeface="Cambria" pitchFamily="34" charset="-120"/>
-              </a:rPr>
-              <a:t>Безопасность: авторизация JWT + SMS OTP</a:t>
-            </a:r>
-            <a:endParaRPr lang="en-US" sz="2000" dirty="0"/>
+              <a:rPr lang="en-US" sz="1600" b="1" dirty="0">
+                <a:solidFill>
+                  <a:srgbClr val="1A1A2E"/>
+                </a:solidFill>
+                <a:latin typeface="Georgia" pitchFamily="34" charset="0"/>
+                <a:ea typeface="Georgia" pitchFamily="34" charset="-122"/>
+                <a:cs typeface="Georgia" pitchFamily="34" charset="-120"/>
+              </a:rPr>
+              <a:t>Расширяемость: плагины и паттерны</a:t>
+            </a:r>
+            <a:endParaRPr lang="en-US" sz="1600" dirty="0"/>
           </a:p>
         </p:txBody>
       </p:sp>
@@ -2779,26 +3004,26 @@
         <p:spPr>
           <a:xfrm>
             <a:off x="384048" y="822960"/>
-            <a:ext cx="4023360" cy="4119372"/>
+            <a:ext cx="8375904" cy="4119372"/>
           </a:xfrm>
           <a:prstGeom prst="roundRect">
             <a:avLst>
-              <a:gd name="adj" fmla="val 2273"/>
+              <a:gd name="adj" fmla="val 2220"/>
             </a:avLst>
           </a:prstGeom>
           <a:solidFill>
-            <a:srgbClr val="FFF7ED"/>
+            <a:srgbClr val="F8F4F0"/>
           </a:solidFill>
           <a:ln w="12700">
             <a:solidFill>
-              <a:srgbClr val="FFF7ED"/>
+              <a:srgbClr val="EFEAE3"/>
             </a:solidFill>
             <a:prstDash val="solid"/>
           </a:ln>
           <a:effectLst>
-            <a:outerShdw sx="100000" sy="100000" kx="0" ky="0" algn="bl" rotWithShape="0" blurRad="88900" dist="25400" dir="2700000">
+            <a:outerShdw sx="100000" sy="100000" kx="0" ky="0" algn="bl" rotWithShape="0" blurRad="152400" dist="38100" dir="2700000">
               <a:srgbClr val="000000">
-                <a:alpha val="9000"/>
+                <a:alpha val="12000"/>
               </a:srgbClr>
             </a:outerShdw>
           </a:effectLst>
@@ -2813,7 +3038,7 @@
         <p:spPr>
           <a:xfrm>
             <a:off x="548640" y="932688"/>
-            <a:ext cx="3694176" cy="365760"/>
+            <a:ext cx="8046720" cy="411480"/>
           </a:xfrm>
           <a:prstGeom prst="rect">
             <a:avLst/>
@@ -2829,17 +3054,17 @@
               <a:buNone/>
             </a:pPr>
             <a:r>
-              <a:rPr lang="en-US" sz="1300" b="1" dirty="0">
-                <a:solidFill>
-                  <a:srgbClr val="0F1E36"/>
+              <a:rPr lang="en-US" sz="1200" b="1" dirty="0">
+                <a:solidFill>
+                  <a:srgbClr val="1A1A2E"/>
                 </a:solidFill>
                 <a:latin typeface="Cambria" pitchFamily="34" charset="0"/>
                 <a:ea typeface="Cambria" pitchFamily="34" charset="-122"/>
                 <a:cs typeface="Cambria" pitchFamily="34" charset="-120"/>
               </a:rPr>
-              <a:t>Двухфакторный вход по SMS</a:t>
-            </a:r>
-            <a:endParaRPr lang="en-US" sz="1300" dirty="0"/>
+              <a:t>Паттерн Стратегия и слабая связанность хранилищ</a:t>
+            </a:r>
+            <a:endParaRPr lang="en-US" sz="1200" dirty="0"/>
           </a:p>
         </p:txBody>
       </p:sp>
@@ -2851,8 +3076,8 @@
         </p:nvSpPr>
         <p:spPr>
           <a:xfrm>
-            <a:off x="548640" y="1389888"/>
-            <a:ext cx="3694176" cy="2926080"/>
+            <a:off x="548640" y="1417320"/>
+            <a:ext cx="8046720" cy="3296412"/>
           </a:xfrm>
           <a:prstGeom prst="rect">
             <a:avLst/>
@@ -2861,170 +3086,81 @@
           <a:ln/>
         </p:spPr>
         <p:txBody>
-          <a:bodyPr wrap="square" rtlCol="0" anchor="ctr"/>
+          <a:bodyPr wrap="square" rtlCol="0" anchor="t"/>
           <a:lstStyle/>
           <a:p>
-            <a:pPr indent="0" marL="0">
-              <a:buNone/>
-            </a:pPr>
-            <a:r>
-              <a:rPr lang="en-US" sz="1100" dirty="0">
-                <a:solidFill>
-                  <a:srgbClr val="1E293B"/>
-                </a:solidFill>
-                <a:latin typeface="Calibri" pitchFamily="34" charset="0"/>
-                <a:ea typeface="Calibri" pitchFamily="34" charset="-122"/>
-                <a:cs typeface="Calibri" pitchFamily="34" charset="-120"/>
-              </a:rPr>
-              <a:t>Пользователь вводит номер телефона, система генерирует случайный 6-значный код и отправляет по SMS. Код хэшируется в БД с ограничением жизни в 5 минут. При успешном вводе генерируется пара токенов.</a:t>
-            </a:r>
-            <a:endParaRPr lang="en-US" sz="1100" dirty="0"/>
-          </a:p>
-        </p:txBody>
-      </p:sp>
-      <p:sp>
-        <p:nvSpPr>
-          <p:cNvPr id="6" name="Shape 4"/>
-          <p:cNvSpPr/>
-          <p:nvPr/>
-        </p:nvSpPr>
-        <p:spPr>
-          <a:xfrm>
-            <a:off x="4681728" y="822960"/>
-            <a:ext cx="4078224" cy="4119372"/>
-          </a:xfrm>
-          <a:prstGeom prst="roundRect">
-            <a:avLst>
-              <a:gd name="adj" fmla="val 2242"/>
-            </a:avLst>
-          </a:prstGeom>
-          <a:solidFill>
-            <a:srgbClr val="D1FAE5"/>
-          </a:solidFill>
-          <a:ln w="12700">
-            <a:solidFill>
-              <a:srgbClr val="D1FAE5"/>
-            </a:solidFill>
-            <a:prstDash val="solid"/>
-          </a:ln>
-          <a:effectLst>
-            <a:outerShdw sx="100000" sy="100000" kx="0" ky="0" algn="bl" rotWithShape="0" blurRad="88900" dist="25400" dir="2700000">
-              <a:srgbClr val="000000">
-                <a:alpha val="9000"/>
-              </a:srgbClr>
-            </a:outerShdw>
-          </a:effectLst>
-        </p:spPr>
-      </p:sp>
-      <p:sp>
-        <p:nvSpPr>
-          <p:cNvPr id="7" name="Text 5"/>
-          <p:cNvSpPr/>
-          <p:nvPr/>
-        </p:nvSpPr>
-        <p:spPr>
-          <a:xfrm>
-            <a:off x="4846320" y="932688"/>
-            <a:ext cx="3749040" cy="365760"/>
-          </a:xfrm>
-          <a:prstGeom prst="rect">
-            <a:avLst/>
-          </a:prstGeom>
-          <a:noFill/>
-          <a:ln/>
-        </p:spPr>
-        <p:txBody>
-          <a:bodyPr wrap="square" rtlCol="0" anchor="ctr"/>
-          <a:lstStyle/>
-          <a:p>
-            <a:pPr indent="0" marL="0">
-              <a:buNone/>
-            </a:pPr>
-            <a:r>
-              <a:rPr lang="en-US" sz="1300" b="1" dirty="0">
-                <a:solidFill>
-                  <a:srgbClr val="0F1E36"/>
-                </a:solidFill>
-                <a:latin typeface="Cambria" pitchFamily="34" charset="0"/>
-                <a:ea typeface="Cambria" pitchFamily="34" charset="-122"/>
-                <a:cs typeface="Cambria" pitchFamily="34" charset="-120"/>
-              </a:rPr>
-              <a:t>Bearer JWT (Access &amp; Refresh)</a:t>
-            </a:r>
-            <a:endParaRPr lang="en-US" sz="1300" dirty="0"/>
-          </a:p>
-        </p:txBody>
-      </p:sp>
-      <p:sp>
-        <p:nvSpPr>
-          <p:cNvPr id="8" name="Text 6"/>
-          <p:cNvSpPr/>
-          <p:nvPr/>
-        </p:nvSpPr>
-        <p:spPr>
-          <a:xfrm>
-            <a:off x="4846320" y="1389888"/>
-            <a:ext cx="3749040" cy="2926080"/>
-          </a:xfrm>
-          <a:prstGeom prst="rect">
-            <a:avLst/>
-          </a:prstGeom>
-          <a:noFill/>
-          <a:ln/>
-        </p:spPr>
-        <p:txBody>
-          <a:bodyPr wrap="square" rtlCol="0" anchor="ctr"/>
-          <a:lstStyle/>
-          <a:p>
-            <a:pPr indent="0" marL="0">
-              <a:buNone/>
-            </a:pPr>
-            <a:r>
-              <a:rPr lang="en-US" sz="1100" dirty="0">
-                <a:solidFill>
-                  <a:srgbClr val="1E293B"/>
-                </a:solidFill>
-                <a:latin typeface="Calibri" pitchFamily="34" charset="0"/>
-                <a:ea typeface="Calibri" pitchFamily="34" charset="-122"/>
-                <a:cs typeface="Calibri" pitchFamily="34" charset="-120"/>
-              </a:rPr>
-              <a:t>• Access Token: живет 15 минут, хранится в памяти, используется для авторизации запросов.</a:t>
-            </a:r>
-            <a:endParaRPr lang="en-US" sz="1100" dirty="0"/>
-          </a:p>
-          <a:p>
-            <a:pPr indent="0" marL="0">
-              <a:buNone/>
-            </a:pPr>
-            <a:r>
-              <a:rPr lang="en-US" sz="1100" dirty="0">
-                <a:solidFill>
-                  <a:srgbClr val="1E293B"/>
-                </a:solidFill>
-                <a:latin typeface="Calibri" pitchFamily="34" charset="0"/>
-                <a:ea typeface="Calibri" pitchFamily="34" charset="-122"/>
-                <a:cs typeface="Calibri" pitchFamily="34" charset="-120"/>
-              </a:rPr>
-              <a:t>• Refresh Token: живет 7 дней, хранится в Cookie HTTPOnly, используется для безопасного обновления access-токена.</a:t>
-            </a:r>
-            <a:endParaRPr lang="en-US" sz="1100" dirty="0"/>
-          </a:p>
-          <a:p>
-            <a:pPr indent="0" marL="0">
-              <a:buNone/>
-            </a:pPr>
-            <a:r>
-              <a:rPr lang="en-US" sz="1100" dirty="0">
-                <a:solidFill>
-                  <a:srgbClr val="1E293B"/>
-                </a:solidFill>
-                <a:latin typeface="Calibri" pitchFamily="34" charset="0"/>
-                <a:ea typeface="Calibri" pitchFamily="34" charset="-122"/>
-                <a:cs typeface="Calibri" pitchFamily="34" charset="-120"/>
-              </a:rPr>
-              <a:t>• Это исключает кражу токенов через XSS-скрипты.</a:t>
-            </a:r>
-            <a:endParaRPr lang="en-US" sz="1100" dirty="0"/>
+            <a:pPr algn="l" indent="0" marL="0">
+              <a:buNone/>
+            </a:pPr>
+            <a:r>
+              <a:rPr lang="en-US" sz="1600" dirty="0">
+                <a:solidFill>
+                  <a:srgbClr val="2D2D3A"/>
+                </a:solidFill>
+                <a:latin typeface="Times New Roman" pitchFamily="34" charset="0"/>
+                <a:ea typeface="Times New Roman" pitchFamily="34" charset="-122"/>
+                <a:cs typeface="Times New Roman" pitchFamily="34" charset="-120"/>
+              </a:rPr>
+              <a:t>Паттерн Стратегия (Strategy):</a:t>
+            </a:r>
+            <a:endParaRPr lang="en-US" sz="1600" dirty="0"/>
+          </a:p>
+          <a:p>
+            <a:pPr algn="l" indent="0" marL="0">
+              <a:buNone/>
+            </a:pPr>
+            <a:r>
+              <a:rPr lang="en-US" sz="1600" dirty="0">
+                <a:solidFill>
+                  <a:srgbClr val="2D2D3A"/>
+                </a:solidFill>
+                <a:latin typeface="Times New Roman" pitchFamily="34" charset="0"/>
+                <a:ea typeface="Times New Roman" pitchFamily="34" charset="-122"/>
+                <a:cs typeface="Times New Roman" pitchFamily="34" charset="-120"/>
+              </a:rPr>
+              <a:t>Для отправки уведомлений используется паттерн 'Стратегия'. Это позволяет легко добавить новый канал (например, Telegram, E-mail, Push) без изменения логики создания тикета. Достаточно зарегистрировать класс, реализующий интерфейс `INotificationProvider`.</a:t>
+            </a:r>
+            <a:endParaRPr lang="en-US" sz="1600" dirty="0"/>
+          </a:p>
+          <a:p>
+            <a:pPr algn="l" indent="0" marL="0">
+              <a:buNone/>
+            </a:pPr>
+            <a:endParaRPr lang="en-US" sz="1600" dirty="0"/>
+          </a:p>
+          <a:p>
+            <a:pPr algn="l" indent="0" marL="0">
+              <a:buNone/>
+            </a:pPr>
+            <a:r>
+              <a:rPr lang="en-US" sz="1600" dirty="0">
+                <a:solidFill>
+                  <a:srgbClr val="2D2D3A"/>
+                </a:solidFill>
+                <a:latin typeface="Times New Roman" pitchFamily="34" charset="0"/>
+                <a:ea typeface="Times New Roman" pitchFamily="34" charset="-122"/>
+                <a:cs typeface="Times New Roman" pitchFamily="34" charset="-120"/>
+              </a:rPr>
+              <a:t>Слабая связанность хранилищ файлов:</a:t>
+            </a:r>
+            <a:endParaRPr lang="en-US" sz="1600" dirty="0"/>
+          </a:p>
+          <a:p>
+            <a:pPr algn="l" indent="0" marL="0">
+              <a:buNone/>
+            </a:pPr>
+            <a:r>
+              <a:rPr lang="en-US" sz="1600" dirty="0">
+                <a:solidFill>
+                  <a:srgbClr val="2D2D3A"/>
+                </a:solidFill>
+                <a:latin typeface="Times New Roman" pitchFamily="34" charset="0"/>
+                <a:ea typeface="Times New Roman" pitchFamily="34" charset="-122"/>
+                <a:cs typeface="Times New Roman" pitchFamily="34" charset="-120"/>
+              </a:rPr>
+              <a:t>Интеграция с S3 скрыта за абстракцией `IFileStorage`. В процессе разработки мы используем локальный MinIO, но при развертывании в облаке можем переключиться на AWS S3 или Yandex Object Storage простым изменением переменной среды в `.env`.</a:t>
+            </a:r>
+            <a:endParaRPr lang="en-US" sz="1600" dirty="0"/>
           </a:p>
         </p:txBody>
       </p:sp>
@@ -3085,17 +3221,17 @@
               <a:buNone/>
             </a:pPr>
             <a:r>
-              <a:rPr lang="en-US" sz="2000" b="1" dirty="0">
-                <a:solidFill>
-                  <a:srgbClr val="0F1E36"/>
-                </a:solidFill>
-                <a:latin typeface="Cambria" pitchFamily="34" charset="0"/>
-                <a:ea typeface="Cambria" pitchFamily="34" charset="-122"/>
-                <a:cs typeface="Cambria" pitchFamily="34" charset="-120"/>
-              </a:rPr>
-              <a:t>Безопасность: защита от сетевых атак</a:t>
-            </a:r>
-            <a:endParaRPr lang="en-US" sz="2000" dirty="0"/>
+              <a:rPr lang="en-US" sz="1600" b="1" dirty="0">
+                <a:solidFill>
+                  <a:srgbClr val="1A1A2E"/>
+                </a:solidFill>
+                <a:latin typeface="Georgia" pitchFamily="34" charset="0"/>
+                <a:ea typeface="Georgia" pitchFamily="34" charset="-122"/>
+                <a:cs typeface="Georgia" pitchFamily="34" charset="-120"/>
+              </a:rPr>
+              <a:t>Безопасность: авторизация JWT + SMS OTP</a:t>
+            </a:r>
+            <a:endParaRPr lang="en-US" sz="1600" dirty="0"/>
           </a:p>
         </p:txBody>
       </p:sp>
@@ -3108,26 +3244,26 @@
         <p:spPr>
           <a:xfrm>
             <a:off x="384048" y="822960"/>
-            <a:ext cx="4023360" cy="4119372"/>
+            <a:ext cx="8375904" cy="4119372"/>
           </a:xfrm>
           <a:prstGeom prst="roundRect">
             <a:avLst>
-              <a:gd name="adj" fmla="val 2273"/>
+              <a:gd name="adj" fmla="val 2220"/>
             </a:avLst>
           </a:prstGeom>
           <a:solidFill>
-            <a:srgbClr val="FFF7ED"/>
+            <a:srgbClr val="F8F4F0"/>
           </a:solidFill>
           <a:ln w="12700">
             <a:solidFill>
-              <a:srgbClr val="FFF7ED"/>
+              <a:srgbClr val="EFEAE3"/>
             </a:solidFill>
             <a:prstDash val="solid"/>
           </a:ln>
           <a:effectLst>
-            <a:outerShdw sx="100000" sy="100000" kx="0" ky="0" algn="bl" rotWithShape="0" blurRad="88900" dist="25400" dir="2700000">
+            <a:outerShdw sx="100000" sy="100000" kx="0" ky="0" algn="bl" rotWithShape="0" blurRad="152400" dist="38100" dir="2700000">
               <a:srgbClr val="000000">
-                <a:alpha val="9000"/>
+                <a:alpha val="12000"/>
               </a:srgbClr>
             </a:outerShdw>
           </a:effectLst>
@@ -3142,7 +3278,7 @@
         <p:spPr>
           <a:xfrm>
             <a:off x="548640" y="932688"/>
-            <a:ext cx="3694176" cy="365760"/>
+            <a:ext cx="8046720" cy="411480"/>
           </a:xfrm>
           <a:prstGeom prst="rect">
             <a:avLst/>
@@ -3151,24 +3287,24 @@
           <a:ln/>
         </p:spPr>
         <p:txBody>
-          <a:bodyPr wrap="square" rtlCol="0" anchor="ctr"/>
+          <a:bodyPr wrap="square" rtlCol="0" anchor="t"/>
           <a:lstStyle/>
           <a:p>
-            <a:pPr indent="0" marL="0">
-              <a:buNone/>
-            </a:pPr>
-            <a:r>
-              <a:rPr lang="en-US" sz="1300" b="1" dirty="0">
-                <a:solidFill>
-                  <a:srgbClr val="0F1E36"/>
+            <a:pPr algn="l" indent="0" marL="0">
+              <a:buNone/>
+            </a:pPr>
+            <a:r>
+              <a:rPr lang="en-US" sz="1200" b="1" dirty="0">
+                <a:solidFill>
+                  <a:srgbClr val="1A1A2E"/>
                 </a:solidFill>
                 <a:latin typeface="Cambria" pitchFamily="34" charset="0"/>
                 <a:ea typeface="Cambria" pitchFamily="34" charset="-122"/>
                 <a:cs typeface="Cambria" pitchFamily="34" charset="-120"/>
               </a:rPr>
-              <a:t>Защита данных и S3</a:t>
-            </a:r>
-            <a:endParaRPr lang="en-US" sz="1300" dirty="0"/>
+              <a:t>Двухфакторный вход и Bearer JWT</a:t>
+            </a:r>
+            <a:endParaRPr lang="en-US" sz="1200" dirty="0"/>
           </a:p>
         </p:txBody>
       </p:sp>
@@ -3180,8 +3316,8 @@
         </p:nvSpPr>
         <p:spPr>
           <a:xfrm>
-            <a:off x="548640" y="1389888"/>
-            <a:ext cx="3694176" cy="2926080"/>
+            <a:off x="548640" y="1417320"/>
+            <a:ext cx="8046720" cy="3296412"/>
           </a:xfrm>
           <a:prstGeom prst="rect">
             <a:avLst/>
@@ -3190,170 +3326,115 @@
           <a:ln/>
         </p:spPr>
         <p:txBody>
-          <a:bodyPr wrap="square" rtlCol="0" anchor="ctr"/>
+          <a:bodyPr wrap="square" rtlCol="0" anchor="t"/>
           <a:lstStyle/>
           <a:p>
-            <a:pPr indent="0" marL="0">
-              <a:buNone/>
-            </a:pPr>
-            <a:r>
-              <a:rPr lang="en-US" sz="1100" dirty="0">
-                <a:solidFill>
-                  <a:srgbClr val="1E293B"/>
-                </a:solidFill>
-                <a:latin typeface="Calibri" pitchFamily="34" charset="0"/>
-                <a:ea typeface="Calibri" pitchFamily="34" charset="-122"/>
-                <a:cs typeface="Calibri" pitchFamily="34" charset="-120"/>
-              </a:rPr>
-              <a:t>Файлы клиентов не хранятся в публичном доступе. Ссылка на скачивание имеет срок жизни 15 минут. На сервере включена библиотека `helmet` для защиты заголовков HTTP и CORS для блокировки посторонних доменов.</a:t>
-            </a:r>
-            <a:endParaRPr lang="en-US" sz="1100" dirty="0"/>
-          </a:p>
-        </p:txBody>
-      </p:sp>
-      <p:sp>
-        <p:nvSpPr>
-          <p:cNvPr id="6" name="Shape 4"/>
-          <p:cNvSpPr/>
-          <p:nvPr/>
-        </p:nvSpPr>
-        <p:spPr>
-          <a:xfrm>
-            <a:off x="4681728" y="822960"/>
-            <a:ext cx="4078224" cy="4119372"/>
-          </a:xfrm>
-          <a:prstGeom prst="roundRect">
-            <a:avLst>
-              <a:gd name="adj" fmla="val 2242"/>
-            </a:avLst>
-          </a:prstGeom>
-          <a:solidFill>
-            <a:srgbClr val="D1FAE5"/>
-          </a:solidFill>
-          <a:ln w="12700">
-            <a:solidFill>
-              <a:srgbClr val="D1FAE5"/>
-            </a:solidFill>
-            <a:prstDash val="solid"/>
-          </a:ln>
-          <a:effectLst>
-            <a:outerShdw sx="100000" sy="100000" kx="0" ky="0" algn="bl" rotWithShape="0" blurRad="88900" dist="25400" dir="2700000">
-              <a:srgbClr val="000000">
-                <a:alpha val="9000"/>
-              </a:srgbClr>
-            </a:outerShdw>
-          </a:effectLst>
-        </p:spPr>
-      </p:sp>
-      <p:sp>
-        <p:nvSpPr>
-          <p:cNvPr id="7" name="Text 5"/>
-          <p:cNvSpPr/>
-          <p:nvPr/>
-        </p:nvSpPr>
-        <p:spPr>
-          <a:xfrm>
-            <a:off x="4846320" y="932688"/>
-            <a:ext cx="3749040" cy="365760"/>
-          </a:xfrm>
-          <a:prstGeom prst="rect">
-            <a:avLst/>
-          </a:prstGeom>
-          <a:noFill/>
-          <a:ln/>
-        </p:spPr>
-        <p:txBody>
-          <a:bodyPr wrap="square" rtlCol="0" anchor="ctr"/>
-          <a:lstStyle/>
-          <a:p>
-            <a:pPr indent="0" marL="0">
-              <a:buNone/>
-            </a:pPr>
-            <a:r>
-              <a:rPr lang="en-US" sz="1300" b="1" dirty="0">
-                <a:solidFill>
-                  <a:srgbClr val="0F1E36"/>
-                </a:solidFill>
-                <a:latin typeface="Cambria" pitchFamily="34" charset="0"/>
-                <a:ea typeface="Cambria" pitchFamily="34" charset="-122"/>
-                <a:cs typeface="Cambria" pitchFamily="34" charset="-120"/>
-              </a:rPr>
-              <a:t>Валидация входящего трафика</a:t>
-            </a:r>
-            <a:endParaRPr lang="en-US" sz="1300" dirty="0"/>
-          </a:p>
-        </p:txBody>
-      </p:sp>
-      <p:sp>
-        <p:nvSpPr>
-          <p:cNvPr id="8" name="Text 6"/>
-          <p:cNvSpPr/>
-          <p:nvPr/>
-        </p:nvSpPr>
-        <p:spPr>
-          <a:xfrm>
-            <a:off x="4846320" y="1389888"/>
-            <a:ext cx="3749040" cy="2926080"/>
-          </a:xfrm>
-          <a:prstGeom prst="rect">
-            <a:avLst/>
-          </a:prstGeom>
-          <a:noFill/>
-          <a:ln/>
-        </p:spPr>
-        <p:txBody>
-          <a:bodyPr wrap="square" rtlCol="0" anchor="ctr"/>
-          <a:lstStyle/>
-          <a:p>
-            <a:pPr indent="0" marL="0">
-              <a:buNone/>
-            </a:pPr>
-            <a:r>
-              <a:rPr lang="en-US" sz="1100" dirty="0">
-                <a:solidFill>
-                  <a:srgbClr val="1E293B"/>
-                </a:solidFill>
-                <a:latin typeface="Calibri" pitchFamily="34" charset="0"/>
-                <a:ea typeface="Calibri" pitchFamily="34" charset="-122"/>
-                <a:cs typeface="Calibri" pitchFamily="34" charset="-120"/>
-              </a:rPr>
-              <a:t>• Полная очистка входящих строк от HTML-тегов (XSS Clean).</a:t>
-            </a:r>
-            <a:endParaRPr lang="en-US" sz="1100" dirty="0"/>
-          </a:p>
-          <a:p>
-            <a:pPr indent="0" marL="0">
-              <a:buNone/>
-            </a:pPr>
-            <a:r>
-              <a:rPr lang="en-US" sz="1100" dirty="0">
-                <a:solidFill>
-                  <a:srgbClr val="1E293B"/>
-                </a:solidFill>
-                <a:latin typeface="Calibri" pitchFamily="34" charset="0"/>
-                <a:ea typeface="Calibri" pitchFamily="34" charset="-122"/>
-                <a:cs typeface="Calibri" pitchFamily="34" charset="-120"/>
-              </a:rPr>
-              <a:t>• Параметризованные SQL-запросы в Drizzle полностью исключают SQL-инъекции.</a:t>
-            </a:r>
-            <a:endParaRPr lang="en-US" sz="1100" dirty="0"/>
-          </a:p>
-          <a:p>
-            <a:pPr indent="0" marL="0">
-              <a:buNone/>
-            </a:pPr>
-            <a:r>
-              <a:rPr lang="en-US" sz="1100" dirty="0">
-                <a:solidFill>
-                  <a:srgbClr val="1E293B"/>
-                </a:solidFill>
-                <a:latin typeface="Calibri" pitchFamily="34" charset="0"/>
-                <a:ea typeface="Calibri" pitchFamily="34" charset="-122"/>
-                <a:cs typeface="Calibri" pitchFamily="34" charset="-120"/>
-              </a:rPr>
-              <a:t>• Ограничение частоты запросов (Rate Limiter) спасает авторизацию и отправку SMS от перебора (Brute Force).</a:t>
-            </a:r>
-            <a:endParaRPr lang="en-US" sz="1100" dirty="0"/>
+            <a:pPr algn="l" indent="0" marL="0">
+              <a:buNone/>
+            </a:pPr>
+            <a:r>
+              <a:rPr lang="en-US" sz="1600" dirty="0">
+                <a:solidFill>
+                  <a:srgbClr val="2D2D3A"/>
+                </a:solidFill>
+                <a:latin typeface="Times New Roman" pitchFamily="34" charset="0"/>
+                <a:ea typeface="Times New Roman" pitchFamily="34" charset="-122"/>
+                <a:cs typeface="Times New Roman" pitchFamily="34" charset="-120"/>
+              </a:rPr>
+              <a:t>Двухфакторный вход по SMS:</a:t>
+            </a:r>
+            <a:endParaRPr lang="en-US" sz="1600" dirty="0"/>
+          </a:p>
+          <a:p>
+            <a:pPr algn="l" indent="0" marL="0">
+              <a:buNone/>
+            </a:pPr>
+            <a:r>
+              <a:rPr lang="en-US" sz="1600" dirty="0">
+                <a:solidFill>
+                  <a:srgbClr val="2D2D3A"/>
+                </a:solidFill>
+                <a:latin typeface="Times New Roman" pitchFamily="34" charset="0"/>
+                <a:ea typeface="Times New Roman" pitchFamily="34" charset="-122"/>
+                <a:cs typeface="Times New Roman" pitchFamily="34" charset="-120"/>
+              </a:rPr>
+              <a:t>Пользователь вводит номер телефона, система генерирует случайный 6-значный код и отправляет по SMS. Код хэшируется в БД с ограничением жизни в 5 минут. При успешном вводе генерируется пара токенов.</a:t>
+            </a:r>
+            <a:endParaRPr lang="en-US" sz="1600" dirty="0"/>
+          </a:p>
+          <a:p>
+            <a:pPr algn="l" indent="0" marL="0">
+              <a:buNone/>
+            </a:pPr>
+            <a:endParaRPr lang="en-US" sz="1600" dirty="0"/>
+          </a:p>
+          <a:p>
+            <a:pPr algn="l" indent="0" marL="0">
+              <a:buNone/>
+            </a:pPr>
+            <a:r>
+              <a:rPr lang="en-US" sz="1600" dirty="0">
+                <a:solidFill>
+                  <a:srgbClr val="2D2D3A"/>
+                </a:solidFill>
+                <a:latin typeface="Times New Roman" pitchFamily="34" charset="0"/>
+                <a:ea typeface="Times New Roman" pitchFamily="34" charset="-122"/>
+                <a:cs typeface="Times New Roman" pitchFamily="34" charset="-120"/>
+              </a:rPr>
+              <a:t>Bearer JWT (Access &amp; Refresh):</a:t>
+            </a:r>
+            <a:endParaRPr lang="en-US" sz="1600" dirty="0"/>
+          </a:p>
+          <a:p>
+            <a:pPr algn="l" indent="0" marL="0">
+              <a:buNone/>
+            </a:pPr>
+            <a:r>
+              <a:rPr lang="en-US" sz="1600" dirty="0">
+                <a:solidFill>
+                  <a:srgbClr val="2D2D3A"/>
+                </a:solidFill>
+                <a:latin typeface="Times New Roman" pitchFamily="34" charset="0"/>
+                <a:ea typeface="Times New Roman" pitchFamily="34" charset="-122"/>
+                <a:cs typeface="Times New Roman" pitchFamily="34" charset="-120"/>
+              </a:rPr>
+              <a:t>• Access Token: живет 15 минут, хранится в памяти, используется для авторизации запросов.</a:t>
+            </a:r>
+            <a:endParaRPr lang="en-US" sz="1600" dirty="0"/>
+          </a:p>
+          <a:p>
+            <a:pPr algn="l" indent="0" marL="0">
+              <a:buNone/>
+            </a:pPr>
+            <a:r>
+              <a:rPr lang="en-US" sz="1600" dirty="0">
+                <a:solidFill>
+                  <a:srgbClr val="2D2D3A"/>
+                </a:solidFill>
+                <a:latin typeface="Times New Roman" pitchFamily="34" charset="0"/>
+                <a:ea typeface="Times New Roman" pitchFamily="34" charset="-122"/>
+                <a:cs typeface="Times New Roman" pitchFamily="34" charset="-120"/>
+              </a:rPr>
+              <a:t>• Refresh Token: живет 7 дней, хранится в Cookie HTTPOnly, используется для безопасного обновления access-токена.</a:t>
+            </a:r>
+            <a:endParaRPr lang="en-US" sz="1600" dirty="0"/>
+          </a:p>
+          <a:p>
+            <a:pPr algn="l" indent="0" marL="0">
+              <a:buNone/>
+            </a:pPr>
+            <a:r>
+              <a:rPr lang="en-US" sz="1600" dirty="0">
+                <a:solidFill>
+                  <a:srgbClr val="2D2D3A"/>
+                </a:solidFill>
+                <a:latin typeface="Times New Roman" pitchFamily="34" charset="0"/>
+                <a:ea typeface="Times New Roman" pitchFamily="34" charset="-122"/>
+                <a:cs typeface="Times New Roman" pitchFamily="34" charset="-120"/>
+              </a:rPr>
+              <a:t>• Это исключает кражу токенов через XSS-скрипты.</a:t>
+            </a:r>
+            <a:endParaRPr lang="en-US" sz="1600" dirty="0"/>
           </a:p>
         </p:txBody>
       </p:sp>
@@ -3414,17 +3495,17 @@
               <a:buNone/>
             </a:pPr>
             <a:r>
-              <a:rPr lang="en-US" sz="2000" b="1" dirty="0">
-                <a:solidFill>
-                  <a:srgbClr val="0F1E36"/>
-                </a:solidFill>
-                <a:latin typeface="Cambria" pitchFamily="34" charset="0"/>
-                <a:ea typeface="Cambria" pitchFamily="34" charset="-122"/>
-                <a:cs typeface="Cambria" pitchFamily="34" charset="-120"/>
-              </a:rPr>
-              <a:t>Многопользовательский доступ: Optimistic Locking</a:t>
-            </a:r>
-            <a:endParaRPr lang="en-US" sz="2000" dirty="0"/>
+              <a:rPr lang="en-US" sz="1600" b="1" dirty="0">
+                <a:solidFill>
+                  <a:srgbClr val="1A1A2E"/>
+                </a:solidFill>
+                <a:latin typeface="Georgia" pitchFamily="34" charset="0"/>
+                <a:ea typeface="Georgia" pitchFamily="34" charset="-122"/>
+                <a:cs typeface="Georgia" pitchFamily="34" charset="-120"/>
+              </a:rPr>
+              <a:t>Безопасность: защита от сетевых атак</a:t>
+            </a:r>
+            <a:endParaRPr lang="en-US" sz="1600" dirty="0"/>
           </a:p>
         </p:txBody>
       </p:sp>
@@ -3437,26 +3518,26 @@
         <p:spPr>
           <a:xfrm>
             <a:off x="384048" y="822960"/>
-            <a:ext cx="4023360" cy="4119372"/>
+            <a:ext cx="8375904" cy="4119372"/>
           </a:xfrm>
           <a:prstGeom prst="roundRect">
             <a:avLst>
-              <a:gd name="adj" fmla="val 2273"/>
+              <a:gd name="adj" fmla="val 2220"/>
             </a:avLst>
           </a:prstGeom>
           <a:solidFill>
-            <a:srgbClr val="FFF7ED"/>
+            <a:srgbClr val="F8F4F0"/>
           </a:solidFill>
           <a:ln w="12700">
             <a:solidFill>
-              <a:srgbClr val="FFF7ED"/>
+              <a:srgbClr val="EFEAE3"/>
             </a:solidFill>
             <a:prstDash val="solid"/>
           </a:ln>
           <a:effectLst>
-            <a:outerShdw sx="100000" sy="100000" kx="0" ky="0" algn="bl" rotWithShape="0" blurRad="88900" dist="25400" dir="2700000">
+            <a:outerShdw sx="100000" sy="100000" kx="0" ky="0" algn="bl" rotWithShape="0" blurRad="152400" dist="38100" dir="2700000">
               <a:srgbClr val="000000">
-                <a:alpha val="9000"/>
+                <a:alpha val="12000"/>
               </a:srgbClr>
             </a:outerShdw>
           </a:effectLst>
@@ -3471,7 +3552,7 @@
         <p:spPr>
           <a:xfrm>
             <a:off x="548640" y="932688"/>
-            <a:ext cx="3694176" cy="365760"/>
+            <a:ext cx="8046720" cy="411480"/>
           </a:xfrm>
           <a:prstGeom prst="rect">
             <a:avLst/>
@@ -3480,24 +3561,24 @@
           <a:ln/>
         </p:spPr>
         <p:txBody>
-          <a:bodyPr wrap="square" rtlCol="0" anchor="ctr"/>
+          <a:bodyPr wrap="square" rtlCol="0" anchor="t"/>
           <a:lstStyle/>
           <a:p>
-            <a:pPr indent="0" marL="0">
-              <a:buNone/>
-            </a:pPr>
-            <a:r>
-              <a:rPr lang="en-US" sz="1300" b="1" dirty="0">
-                <a:solidFill>
-                  <a:srgbClr val="0F1E36"/>
+            <a:pPr algn="l" indent="0" marL="0">
+              <a:buNone/>
+            </a:pPr>
+            <a:r>
+              <a:rPr lang="en-US" sz="1200" b="1" dirty="0">
+                <a:solidFill>
+                  <a:srgbClr val="1A1A2E"/>
                 </a:solidFill>
                 <a:latin typeface="Cambria" pitchFamily="34" charset="0"/>
                 <a:ea typeface="Cambria" pitchFamily="34" charset="-122"/>
                 <a:cs typeface="Cambria" pitchFamily="34" charset="-120"/>
               </a:rPr>
-              <a:t>Зачем нужна блокировка?</a:t>
-            </a:r>
-            <a:endParaRPr lang="en-US" sz="1300" dirty="0"/>
+              <a:t>Защита данных и валидация трафика</a:t>
+            </a:r>
+            <a:endParaRPr lang="en-US" sz="1200" dirty="0"/>
           </a:p>
         </p:txBody>
       </p:sp>
@@ -3509,8 +3590,8 @@
         </p:nvSpPr>
         <p:spPr>
           <a:xfrm>
-            <a:off x="548640" y="1389888"/>
-            <a:ext cx="3694176" cy="2926080"/>
+            <a:off x="548640" y="1417320"/>
+            <a:ext cx="8046720" cy="3296412"/>
           </a:xfrm>
           <a:prstGeom prst="rect">
             <a:avLst/>
@@ -3519,170 +3600,115 @@
           <a:ln/>
         </p:spPr>
         <p:txBody>
-          <a:bodyPr wrap="square" rtlCol="0" anchor="ctr"/>
+          <a:bodyPr wrap="square" rtlCol="0" anchor="t"/>
           <a:lstStyle/>
           <a:p>
-            <a:pPr indent="0" marL="0">
-              <a:buNone/>
-            </a:pPr>
-            <a:r>
-              <a:rPr lang="en-US" sz="1100" dirty="0">
-                <a:solidFill>
-                  <a:srgbClr val="1E293B"/>
-                </a:solidFill>
-                <a:latin typeface="Calibri" pitchFamily="34" charset="0"/>
-                <a:ea typeface="Calibri" pitchFamily="34" charset="-122"/>
-                <a:cs typeface="Calibri" pitchFamily="34" charset="-120"/>
-              </a:rPr>
-              <a:t>Если Клиент и Менеджер откроют один и тот же тикет одновременно, сделают разные правки и сохранят, то последнее сохранение перезапишет первое (проблема 'lost update'). Оптимистичная блокировка решает это без блокирования таблиц БД.</a:t>
-            </a:r>
-            <a:endParaRPr lang="en-US" sz="1100" dirty="0"/>
-          </a:p>
-        </p:txBody>
-      </p:sp>
-      <p:sp>
-        <p:nvSpPr>
-          <p:cNvPr id="6" name="Shape 4"/>
-          <p:cNvSpPr/>
-          <p:nvPr/>
-        </p:nvSpPr>
-        <p:spPr>
-          <a:xfrm>
-            <a:off x="4681728" y="822960"/>
-            <a:ext cx="4078224" cy="4119372"/>
-          </a:xfrm>
-          <a:prstGeom prst="roundRect">
-            <a:avLst>
-              <a:gd name="adj" fmla="val 2242"/>
-            </a:avLst>
-          </a:prstGeom>
-          <a:solidFill>
-            <a:srgbClr val="D1FAE5"/>
-          </a:solidFill>
-          <a:ln w="12700">
-            <a:solidFill>
-              <a:srgbClr val="D1FAE5"/>
-            </a:solidFill>
-            <a:prstDash val="solid"/>
-          </a:ln>
-          <a:effectLst>
-            <a:outerShdw sx="100000" sy="100000" kx="0" ky="0" algn="bl" rotWithShape="0" blurRad="88900" dist="25400" dir="2700000">
-              <a:srgbClr val="000000">
-                <a:alpha val="9000"/>
-              </a:srgbClr>
-            </a:outerShdw>
-          </a:effectLst>
-        </p:spPr>
-      </p:sp>
-      <p:sp>
-        <p:nvSpPr>
-          <p:cNvPr id="7" name="Text 5"/>
-          <p:cNvSpPr/>
-          <p:nvPr/>
-        </p:nvSpPr>
-        <p:spPr>
-          <a:xfrm>
-            <a:off x="4846320" y="932688"/>
-            <a:ext cx="3749040" cy="365760"/>
-          </a:xfrm>
-          <a:prstGeom prst="rect">
-            <a:avLst/>
-          </a:prstGeom>
-          <a:noFill/>
-          <a:ln/>
-        </p:spPr>
-        <p:txBody>
-          <a:bodyPr wrap="square" rtlCol="0" anchor="ctr"/>
-          <a:lstStyle/>
-          <a:p>
-            <a:pPr indent="0" marL="0">
-              <a:buNone/>
-            </a:pPr>
-            <a:r>
-              <a:rPr lang="en-US" sz="1300" b="1" dirty="0">
-                <a:solidFill>
-                  <a:srgbClr val="0F1E36"/>
-                </a:solidFill>
-                <a:latin typeface="Cambria" pitchFamily="34" charset="0"/>
-                <a:ea typeface="Cambria" pitchFamily="34" charset="-122"/>
-                <a:cs typeface="Cambria" pitchFamily="34" charset="-120"/>
-              </a:rPr>
-              <a:t>Механизм версии (version)</a:t>
-            </a:r>
-            <a:endParaRPr lang="en-US" sz="1300" dirty="0"/>
-          </a:p>
-        </p:txBody>
-      </p:sp>
-      <p:sp>
-        <p:nvSpPr>
-          <p:cNvPr id="8" name="Text 6"/>
-          <p:cNvSpPr/>
-          <p:nvPr/>
-        </p:nvSpPr>
-        <p:spPr>
-          <a:xfrm>
-            <a:off x="4846320" y="1389888"/>
-            <a:ext cx="3749040" cy="2926080"/>
-          </a:xfrm>
-          <a:prstGeom prst="rect">
-            <a:avLst/>
-          </a:prstGeom>
-          <a:noFill/>
-          <a:ln/>
-        </p:spPr>
-        <p:txBody>
-          <a:bodyPr wrap="square" rtlCol="0" anchor="ctr"/>
-          <a:lstStyle/>
-          <a:p>
-            <a:pPr indent="0" marL="0">
-              <a:buNone/>
-            </a:pPr>
-            <a:r>
-              <a:rPr lang="en-US" sz="1100" dirty="0">
-                <a:solidFill>
-                  <a:srgbClr val="1E293B"/>
-                </a:solidFill>
-                <a:latin typeface="Calibri" pitchFamily="34" charset="0"/>
-                <a:ea typeface="Calibri" pitchFamily="34" charset="-122"/>
-                <a:cs typeface="Calibri" pitchFamily="34" charset="-120"/>
-              </a:rPr>
-              <a:t>• Каждая запись тикета содержит поле `version` (например, 5).</a:t>
-            </a:r>
-            <a:endParaRPr lang="en-US" sz="1100" dirty="0"/>
-          </a:p>
-          <a:p>
-            <a:pPr indent="0" marL="0">
-              <a:buNone/>
-            </a:pPr>
-            <a:r>
-              <a:rPr lang="en-US" sz="1100" dirty="0">
-                <a:solidFill>
-                  <a:srgbClr val="1E293B"/>
-                </a:solidFill>
-                <a:latin typeface="Calibri" pitchFamily="34" charset="0"/>
-                <a:ea typeface="Calibri" pitchFamily="34" charset="-122"/>
-                <a:cs typeface="Calibri" pitchFamily="34" charset="-120"/>
-              </a:rPr>
-              <a:t>• При PUT-запросе бэкенд проверяет: `UPDATE tickets SET title = ?, version = version + 1 WHERE id = ? AND version = 5`.</a:t>
-            </a:r>
-            <a:endParaRPr lang="en-US" sz="1100" dirty="0"/>
-          </a:p>
-          <a:p>
-            <a:pPr indent="0" marL="0">
-              <a:buNone/>
-            </a:pPr>
-            <a:r>
-              <a:rPr lang="en-US" sz="1100" dirty="0">
-                <a:solidFill>
-                  <a:srgbClr val="1E293B"/>
-                </a:solidFill>
-                <a:latin typeface="Calibri" pitchFamily="34" charset="0"/>
-                <a:ea typeface="Calibri" pitchFamily="34" charset="-122"/>
-                <a:cs typeface="Calibri" pitchFamily="34" charset="-120"/>
-              </a:rPr>
-              <a:t>• Если версия в базе изменилась, запрос вернет 0 измененных строк. Система выдаст конфликт 409.</a:t>
-            </a:r>
-            <a:endParaRPr lang="en-US" sz="1100" dirty="0"/>
+            <a:pPr algn="l" indent="0" marL="0">
+              <a:buNone/>
+            </a:pPr>
+            <a:r>
+              <a:rPr lang="en-US" sz="1600" dirty="0">
+                <a:solidFill>
+                  <a:srgbClr val="2D2D3A"/>
+                </a:solidFill>
+                <a:latin typeface="Times New Roman" pitchFamily="34" charset="0"/>
+                <a:ea typeface="Times New Roman" pitchFamily="34" charset="-122"/>
+                <a:cs typeface="Times New Roman" pitchFamily="34" charset="-120"/>
+              </a:rPr>
+              <a:t>Защита данных и S3:</a:t>
+            </a:r>
+            <a:endParaRPr lang="en-US" sz="1600" dirty="0"/>
+          </a:p>
+          <a:p>
+            <a:pPr algn="l" indent="0" marL="0">
+              <a:buNone/>
+            </a:pPr>
+            <a:r>
+              <a:rPr lang="en-US" sz="1600" dirty="0">
+                <a:solidFill>
+                  <a:srgbClr val="2D2D3A"/>
+                </a:solidFill>
+                <a:latin typeface="Times New Roman" pitchFamily="34" charset="0"/>
+                <a:ea typeface="Times New Roman" pitchFamily="34" charset="-122"/>
+                <a:cs typeface="Times New Roman" pitchFamily="34" charset="-120"/>
+              </a:rPr>
+              <a:t>Файлы клиентов не хранятся в публичном доступе. Ссылка на скачивание имеет срок жизни 15 минут. На сервере включена библиотека `helmet` для защиты заголовков HTTP и CORS для блокировки посторонних доменов.</a:t>
+            </a:r>
+            <a:endParaRPr lang="en-US" sz="1600" dirty="0"/>
+          </a:p>
+          <a:p>
+            <a:pPr algn="l" indent="0" marL="0">
+              <a:buNone/>
+            </a:pPr>
+            <a:endParaRPr lang="en-US" sz="1600" dirty="0"/>
+          </a:p>
+          <a:p>
+            <a:pPr algn="l" indent="0" marL="0">
+              <a:buNone/>
+            </a:pPr>
+            <a:r>
+              <a:rPr lang="en-US" sz="1600" dirty="0">
+                <a:solidFill>
+                  <a:srgbClr val="2D2D3A"/>
+                </a:solidFill>
+                <a:latin typeface="Times New Roman" pitchFamily="34" charset="0"/>
+                <a:ea typeface="Times New Roman" pitchFamily="34" charset="-122"/>
+                <a:cs typeface="Times New Roman" pitchFamily="34" charset="-120"/>
+              </a:rPr>
+              <a:t>Валидация входящего трафика:</a:t>
+            </a:r>
+            <a:endParaRPr lang="en-US" sz="1600" dirty="0"/>
+          </a:p>
+          <a:p>
+            <a:pPr algn="l" indent="0" marL="0">
+              <a:buNone/>
+            </a:pPr>
+            <a:r>
+              <a:rPr lang="en-US" sz="1600" dirty="0">
+                <a:solidFill>
+                  <a:srgbClr val="2D2D3A"/>
+                </a:solidFill>
+                <a:latin typeface="Times New Roman" pitchFamily="34" charset="0"/>
+                <a:ea typeface="Times New Roman" pitchFamily="34" charset="-122"/>
+                <a:cs typeface="Times New Roman" pitchFamily="34" charset="-120"/>
+              </a:rPr>
+              <a:t>• Полная очистка входящих строк от HTML-тегов (XSS Clean).</a:t>
+            </a:r>
+            <a:endParaRPr lang="en-US" sz="1600" dirty="0"/>
+          </a:p>
+          <a:p>
+            <a:pPr algn="l" indent="0" marL="0">
+              <a:buNone/>
+            </a:pPr>
+            <a:r>
+              <a:rPr lang="en-US" sz="1600" dirty="0">
+                <a:solidFill>
+                  <a:srgbClr val="2D2D3A"/>
+                </a:solidFill>
+                <a:latin typeface="Times New Roman" pitchFamily="34" charset="0"/>
+                <a:ea typeface="Times New Roman" pitchFamily="34" charset="-122"/>
+                <a:cs typeface="Times New Roman" pitchFamily="34" charset="-120"/>
+              </a:rPr>
+              <a:t>• Параметризованные SQL-запросы в Drizzle полностью исключают SQL-инъекции.</a:t>
+            </a:r>
+            <a:endParaRPr lang="en-US" sz="1600" dirty="0"/>
+          </a:p>
+          <a:p>
+            <a:pPr algn="l" indent="0" marL="0">
+              <a:buNone/>
+            </a:pPr>
+            <a:r>
+              <a:rPr lang="en-US" sz="1600" dirty="0">
+                <a:solidFill>
+                  <a:srgbClr val="2D2D3A"/>
+                </a:solidFill>
+                <a:latin typeface="Times New Roman" pitchFamily="34" charset="0"/>
+                <a:ea typeface="Times New Roman" pitchFamily="34" charset="-122"/>
+                <a:cs typeface="Times New Roman" pitchFamily="34" charset="-120"/>
+              </a:rPr>
+              <a:t>• Ограничение частоты запросов (Rate Limiter) спасает авторизацию и отправку SMS от перебора (Brute Force).</a:t>
+            </a:r>
+            <a:endParaRPr lang="en-US" sz="1600" dirty="0"/>
           </a:p>
         </p:txBody>
       </p:sp>
@@ -3743,23 +3769,297 @@
               <a:buNone/>
             </a:pPr>
             <a:r>
-              <a:rPr lang="en-US" sz="2000" b="1" dirty="0">
-                <a:solidFill>
-                  <a:srgbClr val="0F1E36"/>
+              <a:rPr lang="en-US" sz="1600" b="1" dirty="0">
+                <a:solidFill>
+                  <a:srgbClr val="1A1A2E"/>
+                </a:solidFill>
+                <a:latin typeface="Georgia" pitchFamily="34" charset="0"/>
+                <a:ea typeface="Georgia" pitchFamily="34" charset="-122"/>
+                <a:cs typeface="Georgia" pitchFamily="34" charset="-120"/>
+              </a:rPr>
+              <a:t>Многопользовательский доступ: Optimistic Locking</a:t>
+            </a:r>
+            <a:endParaRPr lang="en-US" sz="1600" dirty="0"/>
+          </a:p>
+        </p:txBody>
+      </p:sp>
+      <p:sp>
+        <p:nvSpPr>
+          <p:cNvPr id="3" name="Shape 1"/>
+          <p:cNvSpPr/>
+          <p:nvPr/>
+        </p:nvSpPr>
+        <p:spPr>
+          <a:xfrm>
+            <a:off x="384048" y="822960"/>
+            <a:ext cx="8375904" cy="4119372"/>
+          </a:xfrm>
+          <a:prstGeom prst="roundRect">
+            <a:avLst>
+              <a:gd name="adj" fmla="val 2220"/>
+            </a:avLst>
+          </a:prstGeom>
+          <a:solidFill>
+            <a:srgbClr val="F8F4F0"/>
+          </a:solidFill>
+          <a:ln w="12700">
+            <a:solidFill>
+              <a:srgbClr val="EFEAE3"/>
+            </a:solidFill>
+            <a:prstDash val="solid"/>
+          </a:ln>
+          <a:effectLst>
+            <a:outerShdw sx="100000" sy="100000" kx="0" ky="0" algn="bl" rotWithShape="0" blurRad="152400" dist="38100" dir="2700000">
+              <a:srgbClr val="000000">
+                <a:alpha val="12000"/>
+              </a:srgbClr>
+            </a:outerShdw>
+          </a:effectLst>
+        </p:spPr>
+      </p:sp>
+      <p:sp>
+        <p:nvSpPr>
+          <p:cNvPr id="4" name="Text 2"/>
+          <p:cNvSpPr/>
+          <p:nvPr/>
+        </p:nvSpPr>
+        <p:spPr>
+          <a:xfrm>
+            <a:off x="548640" y="932688"/>
+            <a:ext cx="8046720" cy="411480"/>
+          </a:xfrm>
+          <a:prstGeom prst="rect">
+            <a:avLst/>
+          </a:prstGeom>
+          <a:noFill/>
+          <a:ln/>
+        </p:spPr>
+        <p:txBody>
+          <a:bodyPr wrap="square" rtlCol="0" anchor="t"/>
+          <a:lstStyle/>
+          <a:p>
+            <a:pPr algn="l" indent="0" marL="0">
+              <a:buNone/>
+            </a:pPr>
+            <a:r>
+              <a:rPr lang="en-US" sz="1200" b="1" dirty="0">
+                <a:solidFill>
+                  <a:srgbClr val="1A1A2E"/>
                 </a:solidFill>
                 <a:latin typeface="Cambria" pitchFamily="34" charset="0"/>
                 <a:ea typeface="Cambria" pitchFamily="34" charset="-122"/>
                 <a:cs typeface="Cambria" pitchFamily="34" charset="-120"/>
               </a:rPr>
+              <a:t>Зачем нужна блокировка и механизм версии</a:t>
+            </a:r>
+            <a:endParaRPr lang="en-US" sz="1200" dirty="0"/>
+          </a:p>
+        </p:txBody>
+      </p:sp>
+      <p:sp>
+        <p:nvSpPr>
+          <p:cNvPr id="5" name="Text 3"/>
+          <p:cNvSpPr/>
+          <p:nvPr/>
+        </p:nvSpPr>
+        <p:spPr>
+          <a:xfrm>
+            <a:off x="548640" y="1417320"/>
+            <a:ext cx="8046720" cy="3296412"/>
+          </a:xfrm>
+          <a:prstGeom prst="rect">
+            <a:avLst/>
+          </a:prstGeom>
+          <a:noFill/>
+          <a:ln/>
+        </p:spPr>
+        <p:txBody>
+          <a:bodyPr wrap="square" rtlCol="0" anchor="t"/>
+          <a:lstStyle/>
+          <a:p>
+            <a:pPr algn="l" indent="0" marL="0">
+              <a:buNone/>
+            </a:pPr>
+            <a:r>
+              <a:rPr lang="en-US" sz="1600" dirty="0">
+                <a:solidFill>
+                  <a:srgbClr val="2D2D3A"/>
+                </a:solidFill>
+                <a:latin typeface="Times New Roman" pitchFamily="34" charset="0"/>
+                <a:ea typeface="Times New Roman" pitchFamily="34" charset="-122"/>
+                <a:cs typeface="Times New Roman" pitchFamily="34" charset="-120"/>
+              </a:rPr>
+              <a:t>Зачем нужна блокировка?</a:t>
+            </a:r>
+            <a:endParaRPr lang="en-US" sz="1600" dirty="0"/>
+          </a:p>
+          <a:p>
+            <a:pPr algn="l" indent="0" marL="0">
+              <a:buNone/>
+            </a:pPr>
+            <a:r>
+              <a:rPr lang="en-US" sz="1600" dirty="0">
+                <a:solidFill>
+                  <a:srgbClr val="2D2D3A"/>
+                </a:solidFill>
+                <a:latin typeface="Times New Roman" pitchFamily="34" charset="0"/>
+                <a:ea typeface="Times New Roman" pitchFamily="34" charset="-122"/>
+                <a:cs typeface="Times New Roman" pitchFamily="34" charset="-120"/>
+              </a:rPr>
+              <a:t>Если Клиент и Менеджер откроют один и тот же тикет одновременно, сделают разные правки и сохранят, то последнее сохранение перезапишет первое (проблема 'lost update'). Оптимистичная блокировка решает это без блокирования таблиц БД.</a:t>
+            </a:r>
+            <a:endParaRPr lang="en-US" sz="1600" dirty="0"/>
+          </a:p>
+          <a:p>
+            <a:pPr algn="l" indent="0" marL="0">
+              <a:buNone/>
+            </a:pPr>
+            <a:endParaRPr lang="en-US" sz="1600" dirty="0"/>
+          </a:p>
+          <a:p>
+            <a:pPr algn="l" indent="0" marL="0">
+              <a:buNone/>
+            </a:pPr>
+            <a:r>
+              <a:rPr lang="en-US" sz="1600" dirty="0">
+                <a:solidFill>
+                  <a:srgbClr val="2D2D3A"/>
+                </a:solidFill>
+                <a:latin typeface="Times New Roman" pitchFamily="34" charset="0"/>
+                <a:ea typeface="Times New Roman" pitchFamily="34" charset="-122"/>
+                <a:cs typeface="Times New Roman" pitchFamily="34" charset="-120"/>
+              </a:rPr>
+              <a:t>Механизм версии (version):</a:t>
+            </a:r>
+            <a:endParaRPr lang="en-US" sz="1600" dirty="0"/>
+          </a:p>
+          <a:p>
+            <a:pPr algn="l" indent="0" marL="0">
+              <a:buNone/>
+            </a:pPr>
+            <a:r>
+              <a:rPr lang="en-US" sz="1600" dirty="0">
+                <a:solidFill>
+                  <a:srgbClr val="2D2D3A"/>
+                </a:solidFill>
+                <a:latin typeface="Times New Roman" pitchFamily="34" charset="0"/>
+                <a:ea typeface="Times New Roman" pitchFamily="34" charset="-122"/>
+                <a:cs typeface="Times New Roman" pitchFamily="34" charset="-120"/>
+              </a:rPr>
+              <a:t>• Каждая запись тикета содержит поле `version` (например, 5).</a:t>
+            </a:r>
+            <a:endParaRPr lang="en-US" sz="1600" dirty="0"/>
+          </a:p>
+          <a:p>
+            <a:pPr algn="l" indent="0" marL="0">
+              <a:buNone/>
+            </a:pPr>
+            <a:r>
+              <a:rPr lang="en-US" sz="1600" dirty="0">
+                <a:solidFill>
+                  <a:srgbClr val="2D2D3A"/>
+                </a:solidFill>
+                <a:latin typeface="Times New Roman" pitchFamily="34" charset="0"/>
+                <a:ea typeface="Times New Roman" pitchFamily="34" charset="-122"/>
+                <a:cs typeface="Times New Roman" pitchFamily="34" charset="-120"/>
+              </a:rPr>
+              <a:t>• При PUT-запросе бэкенд проверяет: `UPDATE tickets SET title = ?, version = version + 1 WHERE id = ? AND version = 5`.</a:t>
+            </a:r>
+            <a:endParaRPr lang="en-US" sz="1600" dirty="0"/>
+          </a:p>
+          <a:p>
+            <a:pPr algn="l" indent="0" marL="0">
+              <a:buNone/>
+            </a:pPr>
+            <a:r>
+              <a:rPr lang="en-US" sz="1600" dirty="0">
+                <a:solidFill>
+                  <a:srgbClr val="2D2D3A"/>
+                </a:solidFill>
+                <a:latin typeface="Times New Roman" pitchFamily="34" charset="0"/>
+                <a:ea typeface="Times New Roman" pitchFamily="34" charset="-122"/>
+                <a:cs typeface="Times New Roman" pitchFamily="34" charset="-120"/>
+              </a:rPr>
+              <a:t>• Если версия в базе изменилась, запрос вернет 0 измененных строк. Система выдаст конфликт 409.</a:t>
+            </a:r>
+            <a:endParaRPr lang="en-US" sz="1600" dirty="0"/>
+          </a:p>
+        </p:txBody>
+      </p:sp>
+    </p:spTree>
+  </p:cSld>
+  <p:clrMapOvr>
+    <a:masterClrMapping/>
+  </p:clrMapOvr>
+</p:sld>
+</file>
+
+<file path=ppt/slides/slide15.xml><?xml version="1.0" encoding="utf-8"?>
+<p:sld xmlns:a="http://schemas.openxmlformats.org/drawingml/2006/main" xmlns:r="http://schemas.openxmlformats.org/officeDocument/2006/relationships" xmlns:p="http://schemas.openxmlformats.org/presentationml/2006/main">
+  <p:cSld name="Slide 15">
+    <p:bg>
+      <p:bgPr>
+        <a:solidFill>
+          <a:srgbClr val="FFFFFF"/>
+        </a:solidFill>
+      </p:bgPr>
+    </p:bg>
+    <p:spTree>
+      <p:nvGrpSpPr>
+        <p:cNvPr id="1" name=""/>
+        <p:cNvGrpSpPr/>
+        <p:nvPr/>
+      </p:nvGrpSpPr>
+      <p:grpSpPr>
+        <a:xfrm>
+          <a:off x="0" y="0"/>
+          <a:ext cx="0" cy="0"/>
+          <a:chOff x="0" y="0"/>
+          <a:chExt cx="0" cy="0"/>
+        </a:xfrm>
+      </p:grpSpPr>
+      <p:sp>
+        <p:nvSpPr>
+          <p:cNvPr id="2" name="Text 0"/>
+          <p:cNvSpPr/>
+          <p:nvPr/>
+        </p:nvSpPr>
+        <p:spPr>
+          <a:xfrm>
+            <a:off x="384048" y="164592"/>
+            <a:ext cx="8375904" cy="548640"/>
+          </a:xfrm>
+          <a:prstGeom prst="rect">
+            <a:avLst/>
+          </a:prstGeom>
+          <a:noFill/>
+          <a:ln/>
+        </p:spPr>
+        <p:txBody>
+          <a:bodyPr wrap="square" rtlCol="0" anchor="b"/>
+          <a:lstStyle/>
+          <a:p>
+            <a:pPr algn="l" indent="0" marL="0">
+              <a:buNone/>
+            </a:pPr>
+            <a:r>
+              <a:rPr lang="en-US" sz="1600" b="1" dirty="0">
+                <a:solidFill>
+                  <a:srgbClr val="1A1A2E"/>
+                </a:solidFill>
+                <a:latin typeface="Georgia" pitchFamily="34" charset="0"/>
+                <a:ea typeface="Georgia" pitchFamily="34" charset="-122"/>
+                <a:cs typeface="Georgia" pitchFamily="34" charset="-120"/>
+              </a:rPr>
               <a:t>Инструменты контроля качества</a:t>
             </a:r>
-            <a:endParaRPr lang="en-US" sz="2000" dirty="0"/>
+            <a:endParaRPr lang="en-US" sz="1600" dirty="0"/>
           </a:p>
         </p:txBody>
       </p:sp>
       <p:graphicFrame>
         <p:nvGraphicFramePr>
-          <p:cNvPr id="15" name="Table 0"/>
+          <p:cNvPr id="16" name="Table 0"/>
           <p:cNvGraphicFramePr>
             <a:graphicFrameLocks noGrp="1"/>
           </p:cNvGraphicFramePr>
@@ -3798,23 +4098,23 @@
                           <a:solidFill>
                             <a:srgbClr val="FFFFFF"/>
                           </a:solidFill>
-                          <a:latin typeface="Calibri" pitchFamily="34" charset="0"/>
-                          <a:ea typeface="Calibri" pitchFamily="34" charset="-122"/>
-                          <a:cs typeface="Calibri" pitchFamily="34" charset="-120"/>
+                          <a:latin typeface="Times New Roman" pitchFamily="34" charset="0"/>
+                          <a:ea typeface="Times New Roman" pitchFamily="34" charset="-122"/>
+                          <a:cs typeface="Times New Roman" pitchFamily="34" charset="-120"/>
                         </a:rPr>
                         <a:t>Инструмент</a:t>
                       </a:r>
                       <a:endParaRPr lang="en-US" sz="1100" dirty="0">
-                        <a:latin typeface="Calibri" charset="0"/>
-                        <a:ea typeface="Calibri" charset="0"/>
-                        <a:cs typeface="Calibri" charset="0"/>
+                        <a:latin typeface="Times New Roman" charset="0"/>
+                        <a:ea typeface="Times New Roman" charset="0"/>
+                        <a:cs typeface="Times New Roman" charset="0"/>
                       </a:endParaRPr>
                     </a:p>
                   </a:txBody>
                   <a:tcPr marL="91440" marR="91440" marT="45720" marB="45720" anchor="ctr">
                     <a:lnL w="6350" cap="flat" cmpd="sng" algn="ctr">
                       <a:solidFill>
-                        <a:srgbClr val="FFEDD5"/>
+                        <a:srgbClr val="EFEAE3"/>
                       </a:solidFill>
                       <a:prstDash val="solid"/>
                       <a:round/>
@@ -3823,7 +4123,7 @@
                     </a:lnL>
                     <a:lnR w="6350" cap="flat" cmpd="sng" algn="ctr">
                       <a:solidFill>
-                        <a:srgbClr val="FFEDD5"/>
+                        <a:srgbClr val="EFEAE3"/>
                       </a:solidFill>
                       <a:prstDash val="solid"/>
                       <a:round/>
@@ -3832,7 +4132,7 @@
                     </a:lnR>
                     <a:lnT w="6350" cap="flat" cmpd="sng" algn="ctr">
                       <a:solidFill>
-                        <a:srgbClr val="FFEDD5"/>
+                        <a:srgbClr val="EFEAE3"/>
                       </a:solidFill>
                       <a:prstDash val="solid"/>
                       <a:round/>
@@ -3841,7 +4141,7 @@
                     </a:lnT>
                     <a:lnB w="6350" cap="flat" cmpd="sng" algn="ctr">
                       <a:solidFill>
-                        <a:srgbClr val="FFEDD5"/>
+                        <a:srgbClr val="EFEAE3"/>
                       </a:solidFill>
                       <a:prstDash val="solid"/>
                       <a:round/>
@@ -3849,7 +4149,7 @@
                       <a:tailEnd type="none" w="med" len="med"/>
                     </a:lnB>
                     <a:solidFill>
-                      <a:srgbClr val="0F1E36"/>
+                      <a:srgbClr val="1A1A2E"/>
                     </a:solidFill>
                   </a:tcPr>
                 </a:tc>
@@ -3866,23 +4166,23 @@
                           <a:solidFill>
                             <a:srgbClr val="FFFFFF"/>
                           </a:solidFill>
-                          <a:latin typeface="Calibri" pitchFamily="34" charset="0"/>
-                          <a:ea typeface="Calibri" pitchFamily="34" charset="-122"/>
-                          <a:cs typeface="Calibri" pitchFamily="34" charset="-120"/>
+                          <a:latin typeface="Times New Roman" pitchFamily="34" charset="0"/>
+                          <a:ea typeface="Times New Roman" pitchFamily="34" charset="-122"/>
+                          <a:cs typeface="Times New Roman" pitchFamily="34" charset="-120"/>
                         </a:rPr>
                         <a:t>Тип анализа</a:t>
                       </a:r>
                       <a:endParaRPr lang="en-US" sz="1100" dirty="0">
-                        <a:latin typeface="Calibri" charset="0"/>
-                        <a:ea typeface="Calibri" charset="0"/>
-                        <a:cs typeface="Calibri" charset="0"/>
+                        <a:latin typeface="Times New Roman" charset="0"/>
+                        <a:ea typeface="Times New Roman" charset="0"/>
+                        <a:cs typeface="Times New Roman" charset="0"/>
                       </a:endParaRPr>
                     </a:p>
                   </a:txBody>
                   <a:tcPr marL="91440" marR="91440" marT="45720" marB="45720" anchor="ctr">
                     <a:lnL w="6350" cap="flat" cmpd="sng" algn="ctr">
                       <a:solidFill>
-                        <a:srgbClr val="FFEDD5"/>
+                        <a:srgbClr val="EFEAE3"/>
                       </a:solidFill>
                       <a:prstDash val="solid"/>
                       <a:round/>
@@ -3891,7 +4191,7 @@
                     </a:lnL>
                     <a:lnR w="6350" cap="flat" cmpd="sng" algn="ctr">
                       <a:solidFill>
-                        <a:srgbClr val="FFEDD5"/>
+                        <a:srgbClr val="EFEAE3"/>
                       </a:solidFill>
                       <a:prstDash val="solid"/>
                       <a:round/>
@@ -3900,7 +4200,7 @@
                     </a:lnR>
                     <a:lnT w="6350" cap="flat" cmpd="sng" algn="ctr">
                       <a:solidFill>
-                        <a:srgbClr val="FFEDD5"/>
+                        <a:srgbClr val="EFEAE3"/>
                       </a:solidFill>
                       <a:prstDash val="solid"/>
                       <a:round/>
@@ -3909,7 +4209,7 @@
                     </a:lnT>
                     <a:lnB w="6350" cap="flat" cmpd="sng" algn="ctr">
                       <a:solidFill>
-                        <a:srgbClr val="FFEDD5"/>
+                        <a:srgbClr val="EFEAE3"/>
                       </a:solidFill>
                       <a:prstDash val="solid"/>
                       <a:round/>
@@ -3917,7 +4217,7 @@
                       <a:tailEnd type="none" w="med" len="med"/>
                     </a:lnB>
                     <a:solidFill>
-                      <a:srgbClr val="0F1E36"/>
+                      <a:srgbClr val="1A1A2E"/>
                     </a:solidFill>
                   </a:tcPr>
                 </a:tc>
@@ -3934,23 +4234,23 @@
                           <a:solidFill>
                             <a:srgbClr val="FFFFFF"/>
                           </a:solidFill>
-                          <a:latin typeface="Calibri" pitchFamily="34" charset="0"/>
-                          <a:ea typeface="Calibri" pitchFamily="34" charset="-122"/>
-                          <a:cs typeface="Calibri" pitchFamily="34" charset="-120"/>
+                          <a:latin typeface="Times New Roman" pitchFamily="34" charset="0"/>
+                          <a:ea typeface="Times New Roman" pitchFamily="34" charset="-122"/>
+                          <a:cs typeface="Times New Roman" pitchFamily="34" charset="-120"/>
                         </a:rPr>
                         <a:t>Что проверяет в нашем проекте</a:t>
                       </a:r>
                       <a:endParaRPr lang="en-US" sz="1100" dirty="0">
-                        <a:latin typeface="Calibri" charset="0"/>
-                        <a:ea typeface="Calibri" charset="0"/>
-                        <a:cs typeface="Calibri" charset="0"/>
+                        <a:latin typeface="Times New Roman" charset="0"/>
+                        <a:ea typeface="Times New Roman" charset="0"/>
+                        <a:cs typeface="Times New Roman" charset="0"/>
                       </a:endParaRPr>
                     </a:p>
                   </a:txBody>
                   <a:tcPr marL="91440" marR="91440" marT="45720" marB="45720" anchor="ctr">
                     <a:lnL w="6350" cap="flat" cmpd="sng" algn="ctr">
                       <a:solidFill>
-                        <a:srgbClr val="FFEDD5"/>
+                        <a:srgbClr val="EFEAE3"/>
                       </a:solidFill>
                       <a:prstDash val="solid"/>
                       <a:round/>
@@ -3959,7 +4259,7 @@
                     </a:lnL>
                     <a:lnR w="6350" cap="flat" cmpd="sng" algn="ctr">
                       <a:solidFill>
-                        <a:srgbClr val="FFEDD5"/>
+                        <a:srgbClr val="EFEAE3"/>
                       </a:solidFill>
                       <a:prstDash val="solid"/>
                       <a:round/>
@@ -3968,7 +4268,7 @@
                     </a:lnR>
                     <a:lnT w="6350" cap="flat" cmpd="sng" algn="ctr">
                       <a:solidFill>
-                        <a:srgbClr val="FFEDD5"/>
+                        <a:srgbClr val="EFEAE3"/>
                       </a:solidFill>
                       <a:prstDash val="solid"/>
                       <a:round/>
@@ -3977,7 +4277,7 @@
                     </a:lnT>
                     <a:lnB w="6350" cap="flat" cmpd="sng" algn="ctr">
                       <a:solidFill>
-                        <a:srgbClr val="FFEDD5"/>
+                        <a:srgbClr val="EFEAE3"/>
                       </a:solidFill>
                       <a:prstDash val="solid"/>
                       <a:round/>
@@ -3985,7 +4285,7 @@
                       <a:tailEnd type="none" w="med" len="med"/>
                     </a:lnB>
                     <a:solidFill>
-                      <a:srgbClr val="0F1E36"/>
+                      <a:srgbClr val="1A1A2E"/>
                     </a:solidFill>
                   </a:tcPr>
                 </a:tc>
@@ -4002,25 +4302,25 @@
                       <a:r>
                         <a:rPr lang="en-US" sz="1100" dirty="0">
                           <a:solidFill>
-                            <a:srgbClr val="1E293B"/>
+                            <a:srgbClr val="2D2D3A"/>
                           </a:solidFill>
-                          <a:latin typeface="Calibri" pitchFamily="34" charset="0"/>
-                          <a:ea typeface="Calibri" pitchFamily="34" charset="-122"/>
-                          <a:cs typeface="Calibri" pitchFamily="34" charset="-120"/>
+                          <a:latin typeface="Times New Roman" pitchFamily="34" charset="0"/>
+                          <a:ea typeface="Times New Roman" pitchFamily="34" charset="-122"/>
+                          <a:cs typeface="Times New Roman" pitchFamily="34" charset="-120"/>
                         </a:rPr>
                         <a:t>ESLint</a:t>
                       </a:r>
                       <a:endParaRPr lang="en-US" sz="1100" dirty="0">
-                        <a:latin typeface="Calibri" charset="0"/>
-                        <a:ea typeface="Calibri" charset="0"/>
-                        <a:cs typeface="Calibri" charset="0"/>
+                        <a:latin typeface="Times New Roman" charset="0"/>
+                        <a:ea typeface="Times New Roman" charset="0"/>
+                        <a:cs typeface="Times New Roman" charset="0"/>
                       </a:endParaRPr>
                     </a:p>
                   </a:txBody>
                   <a:tcPr marL="91440" marR="91440" marT="45720" marB="45720" anchor="ctr">
                     <a:lnL w="6350" cap="flat" cmpd="sng" algn="ctr">
                       <a:solidFill>
-                        <a:srgbClr val="FFEDD5"/>
+                        <a:srgbClr val="EFEAE3"/>
                       </a:solidFill>
                       <a:prstDash val="solid"/>
                       <a:round/>
@@ -4029,7 +4329,7 @@
                     </a:lnL>
                     <a:lnR w="6350" cap="flat" cmpd="sng" algn="ctr">
                       <a:solidFill>
-                        <a:srgbClr val="FFEDD5"/>
+                        <a:srgbClr val="EFEAE3"/>
                       </a:solidFill>
                       <a:prstDash val="solid"/>
                       <a:round/>
@@ -4038,7 +4338,7 @@
                     </a:lnR>
                     <a:lnT w="6350" cap="flat" cmpd="sng" algn="ctr">
                       <a:solidFill>
-                        <a:srgbClr val="FFEDD5"/>
+                        <a:srgbClr val="EFEAE3"/>
                       </a:solidFill>
                       <a:prstDash val="solid"/>
                       <a:round/>
@@ -4047,7 +4347,7 @@
                     </a:lnT>
                     <a:lnB w="6350" cap="flat" cmpd="sng" algn="ctr">
                       <a:solidFill>
-                        <a:srgbClr val="FFEDD5"/>
+                        <a:srgbClr val="EFEAE3"/>
                       </a:solidFill>
                       <a:prstDash val="solid"/>
                       <a:round/>
@@ -4055,7 +4355,7 @@
                       <a:tailEnd type="none" w="med" len="med"/>
                     </a:lnB>
                     <a:solidFill>
-                      <a:srgbClr val="FFF7ED"/>
+                      <a:srgbClr val="F8F4F0"/>
                     </a:solidFill>
                   </a:tcPr>
                 </a:tc>
@@ -4070,25 +4370,25 @@
                       <a:r>
                         <a:rPr lang="en-US" sz="1100" dirty="0">
                           <a:solidFill>
-                            <a:srgbClr val="1E293B"/>
+                            <a:srgbClr val="2D2D3A"/>
                           </a:solidFill>
-                          <a:latin typeface="Calibri" pitchFamily="34" charset="0"/>
-                          <a:ea typeface="Calibri" pitchFamily="34" charset="-122"/>
-                          <a:cs typeface="Calibri" pitchFamily="34" charset="-120"/>
+                          <a:latin typeface="Times New Roman" pitchFamily="34" charset="0"/>
+                          <a:ea typeface="Times New Roman" pitchFamily="34" charset="-122"/>
+                          <a:cs typeface="Times New Roman" pitchFamily="34" charset="-120"/>
                         </a:rPr>
                         <a:t>Статический</a:t>
                       </a:r>
                       <a:endParaRPr lang="en-US" sz="1100" dirty="0">
-                        <a:latin typeface="Calibri" charset="0"/>
-                        <a:ea typeface="Calibri" charset="0"/>
-                        <a:cs typeface="Calibri" charset="0"/>
+                        <a:latin typeface="Times New Roman" charset="0"/>
+                        <a:ea typeface="Times New Roman" charset="0"/>
+                        <a:cs typeface="Times New Roman" charset="0"/>
                       </a:endParaRPr>
                     </a:p>
                   </a:txBody>
                   <a:tcPr marL="91440" marR="91440" marT="45720" marB="45720" anchor="ctr">
                     <a:lnL w="6350" cap="flat" cmpd="sng" algn="ctr">
                       <a:solidFill>
-                        <a:srgbClr val="FFEDD5"/>
+                        <a:srgbClr val="EFEAE3"/>
                       </a:solidFill>
                       <a:prstDash val="solid"/>
                       <a:round/>
@@ -4097,7 +4397,7 @@
                     </a:lnL>
                     <a:lnR w="6350" cap="flat" cmpd="sng" algn="ctr">
                       <a:solidFill>
-                        <a:srgbClr val="FFEDD5"/>
+                        <a:srgbClr val="EFEAE3"/>
                       </a:solidFill>
                       <a:prstDash val="solid"/>
                       <a:round/>
@@ -4106,7 +4406,7 @@
                     </a:lnR>
                     <a:lnT w="6350" cap="flat" cmpd="sng" algn="ctr">
                       <a:solidFill>
-                        <a:srgbClr val="FFEDD5"/>
+                        <a:srgbClr val="EFEAE3"/>
                       </a:solidFill>
                       <a:prstDash val="solid"/>
                       <a:round/>
@@ -4115,7 +4415,7 @@
                     </a:lnT>
                     <a:lnB w="6350" cap="flat" cmpd="sng" algn="ctr">
                       <a:solidFill>
-                        <a:srgbClr val="FFEDD5"/>
+                        <a:srgbClr val="EFEAE3"/>
                       </a:solidFill>
                       <a:prstDash val="solid"/>
                       <a:round/>
@@ -4123,7 +4423,7 @@
                       <a:tailEnd type="none" w="med" len="med"/>
                     </a:lnB>
                     <a:solidFill>
-                      <a:srgbClr val="FFF7ED"/>
+                      <a:srgbClr val="F8F4F0"/>
                     </a:solidFill>
                   </a:tcPr>
                 </a:tc>
@@ -4138,25 +4438,25 @@
                       <a:r>
                         <a:rPr lang="en-US" sz="1100" dirty="0">
                           <a:solidFill>
-                            <a:srgbClr val="1E293B"/>
+                            <a:srgbClr val="2D2D3A"/>
                           </a:solidFill>
-                          <a:latin typeface="Calibri" pitchFamily="34" charset="0"/>
-                          <a:ea typeface="Calibri" pitchFamily="34" charset="-122"/>
-                          <a:cs typeface="Calibri" pitchFamily="34" charset="-120"/>
+                          <a:latin typeface="Times New Roman" pitchFamily="34" charset="0"/>
+                          <a:ea typeface="Times New Roman" pitchFamily="34" charset="-122"/>
+                          <a:cs typeface="Times New Roman" pitchFamily="34" charset="-120"/>
                         </a:rPr>
                         <a:t>Качество синтаксиса JS/TS, соответствие стандартам кодирования</a:t>
                       </a:r>
                       <a:endParaRPr lang="en-US" sz="1100" dirty="0">
-                        <a:latin typeface="Calibri" charset="0"/>
-                        <a:ea typeface="Calibri" charset="0"/>
-                        <a:cs typeface="Calibri" charset="0"/>
+                        <a:latin typeface="Times New Roman" charset="0"/>
+                        <a:ea typeface="Times New Roman" charset="0"/>
+                        <a:cs typeface="Times New Roman" charset="0"/>
                       </a:endParaRPr>
                     </a:p>
                   </a:txBody>
                   <a:tcPr marL="91440" marR="91440" marT="45720" marB="45720" anchor="ctr">
                     <a:lnL w="6350" cap="flat" cmpd="sng" algn="ctr">
                       <a:solidFill>
-                        <a:srgbClr val="FFEDD5"/>
+                        <a:srgbClr val="EFEAE3"/>
                       </a:solidFill>
                       <a:prstDash val="solid"/>
                       <a:round/>
@@ -4165,7 +4465,7 @@
                     </a:lnL>
                     <a:lnR w="6350" cap="flat" cmpd="sng" algn="ctr">
                       <a:solidFill>
-                        <a:srgbClr val="FFEDD5"/>
+                        <a:srgbClr val="EFEAE3"/>
                       </a:solidFill>
                       <a:prstDash val="solid"/>
                       <a:round/>
@@ -4174,7 +4474,7 @@
                     </a:lnR>
                     <a:lnT w="6350" cap="flat" cmpd="sng" algn="ctr">
                       <a:solidFill>
-                        <a:srgbClr val="FFEDD5"/>
+                        <a:srgbClr val="EFEAE3"/>
                       </a:solidFill>
                       <a:prstDash val="solid"/>
                       <a:round/>
@@ -4183,7 +4483,7 @@
                     </a:lnT>
                     <a:lnB w="6350" cap="flat" cmpd="sng" algn="ctr">
                       <a:solidFill>
-                        <a:srgbClr val="FFEDD5"/>
+                        <a:srgbClr val="EFEAE3"/>
                       </a:solidFill>
                       <a:prstDash val="solid"/>
                       <a:round/>
@@ -4191,7 +4491,7 @@
                       <a:tailEnd type="none" w="med" len="med"/>
                     </a:lnB>
                     <a:solidFill>
-                      <a:srgbClr val="FFF7ED"/>
+                      <a:srgbClr val="F8F4F0"/>
                     </a:solidFill>
                   </a:tcPr>
                 </a:tc>
@@ -4208,25 +4508,25 @@
                       <a:r>
                         <a:rPr lang="en-US" sz="1100" dirty="0">
                           <a:solidFill>
-                            <a:srgbClr val="1E293B"/>
+                            <a:srgbClr val="2D2D3A"/>
                           </a:solidFill>
-                          <a:latin typeface="Calibri" pitchFamily="34" charset="0"/>
-                          <a:ea typeface="Calibri" pitchFamily="34" charset="-122"/>
-                          <a:cs typeface="Calibri" pitchFamily="34" charset="-120"/>
+                          <a:latin typeface="Times New Roman" pitchFamily="34" charset="0"/>
+                          <a:ea typeface="Times New Roman" pitchFamily="34" charset="-122"/>
+                          <a:cs typeface="Times New Roman" pitchFamily="34" charset="-120"/>
                         </a:rPr>
                         <a:t>TypeScript</a:t>
                       </a:r>
                       <a:endParaRPr lang="en-US" sz="1100" dirty="0">
-                        <a:latin typeface="Calibri" charset="0"/>
-                        <a:ea typeface="Calibri" charset="0"/>
-                        <a:cs typeface="Calibri" charset="0"/>
+                        <a:latin typeface="Times New Roman" charset="0"/>
+                        <a:ea typeface="Times New Roman" charset="0"/>
+                        <a:cs typeface="Times New Roman" charset="0"/>
                       </a:endParaRPr>
                     </a:p>
                   </a:txBody>
                   <a:tcPr marL="91440" marR="91440" marT="45720" marB="45720" anchor="ctr">
                     <a:lnL w="6350" cap="flat" cmpd="sng" algn="ctr">
                       <a:solidFill>
-                        <a:srgbClr val="FFEDD5"/>
+                        <a:srgbClr val="EFEAE3"/>
                       </a:solidFill>
                       <a:prstDash val="solid"/>
                       <a:round/>
@@ -4235,7 +4535,7 @@
                     </a:lnL>
                     <a:lnR w="6350" cap="flat" cmpd="sng" algn="ctr">
                       <a:solidFill>
-                        <a:srgbClr val="FFEDD5"/>
+                        <a:srgbClr val="EFEAE3"/>
                       </a:solidFill>
                       <a:prstDash val="solid"/>
                       <a:round/>
@@ -4244,7 +4544,7 @@
                     </a:lnR>
                     <a:lnT w="6350" cap="flat" cmpd="sng" algn="ctr">
                       <a:solidFill>
-                        <a:srgbClr val="FFEDD5"/>
+                        <a:srgbClr val="EFEAE3"/>
                       </a:solidFill>
                       <a:prstDash val="solid"/>
                       <a:round/>
@@ -4253,7 +4553,7 @@
                     </a:lnT>
                     <a:lnB w="6350" cap="flat" cmpd="sng" algn="ctr">
                       <a:solidFill>
-                        <a:srgbClr val="FFEDD5"/>
+                        <a:srgbClr val="EFEAE3"/>
                       </a:solidFill>
                       <a:prstDash val="solid"/>
                       <a:round/>
@@ -4276,25 +4576,25 @@
                       <a:r>
                         <a:rPr lang="en-US" sz="1100" dirty="0">
                           <a:solidFill>
-                            <a:srgbClr val="1E293B"/>
+                            <a:srgbClr val="2D2D3A"/>
                           </a:solidFill>
-                          <a:latin typeface="Calibri" pitchFamily="34" charset="0"/>
-                          <a:ea typeface="Calibri" pitchFamily="34" charset="-122"/>
-                          <a:cs typeface="Calibri" pitchFamily="34" charset="-120"/>
+                          <a:latin typeface="Times New Roman" pitchFamily="34" charset="0"/>
+                          <a:ea typeface="Times New Roman" pitchFamily="34" charset="-122"/>
+                          <a:cs typeface="Times New Roman" pitchFamily="34" charset="-120"/>
                         </a:rPr>
                         <a:t>Статический</a:t>
                       </a:r>
                       <a:endParaRPr lang="en-US" sz="1100" dirty="0">
-                        <a:latin typeface="Calibri" charset="0"/>
-                        <a:ea typeface="Calibri" charset="0"/>
-                        <a:cs typeface="Calibri" charset="0"/>
+                        <a:latin typeface="Times New Roman" charset="0"/>
+                        <a:ea typeface="Times New Roman" charset="0"/>
+                        <a:cs typeface="Times New Roman" charset="0"/>
                       </a:endParaRPr>
                     </a:p>
                   </a:txBody>
                   <a:tcPr marL="91440" marR="91440" marT="45720" marB="45720" anchor="ctr">
                     <a:lnL w="6350" cap="flat" cmpd="sng" algn="ctr">
                       <a:solidFill>
-                        <a:srgbClr val="FFEDD5"/>
+                        <a:srgbClr val="EFEAE3"/>
                       </a:solidFill>
                       <a:prstDash val="solid"/>
                       <a:round/>
@@ -4303,7 +4603,7 @@
                     </a:lnL>
                     <a:lnR w="6350" cap="flat" cmpd="sng" algn="ctr">
                       <a:solidFill>
-                        <a:srgbClr val="FFEDD5"/>
+                        <a:srgbClr val="EFEAE3"/>
                       </a:solidFill>
                       <a:prstDash val="solid"/>
                       <a:round/>
@@ -4312,7 +4612,7 @@
                     </a:lnR>
                     <a:lnT w="6350" cap="flat" cmpd="sng" algn="ctr">
                       <a:solidFill>
-                        <a:srgbClr val="FFEDD5"/>
+                        <a:srgbClr val="EFEAE3"/>
                       </a:solidFill>
                       <a:prstDash val="solid"/>
                       <a:round/>
@@ -4321,7 +4621,7 @@
                     </a:lnT>
                     <a:lnB w="6350" cap="flat" cmpd="sng" algn="ctr">
                       <a:solidFill>
-                        <a:srgbClr val="FFEDD5"/>
+                        <a:srgbClr val="EFEAE3"/>
                       </a:solidFill>
                       <a:prstDash val="solid"/>
                       <a:round/>
@@ -4344,25 +4644,25 @@
                       <a:r>
                         <a:rPr lang="en-US" sz="1100" dirty="0">
                           <a:solidFill>
-                            <a:srgbClr val="1E293B"/>
+                            <a:srgbClr val="2D2D3A"/>
                           </a:solidFill>
-                          <a:latin typeface="Calibri" pitchFamily="34" charset="0"/>
-                          <a:ea typeface="Calibri" pitchFamily="34" charset="-122"/>
-                          <a:cs typeface="Calibri" pitchFamily="34" charset="-120"/>
+                          <a:latin typeface="Times New Roman" pitchFamily="34" charset="0"/>
+                          <a:ea typeface="Times New Roman" pitchFamily="34" charset="-122"/>
+                          <a:cs typeface="Times New Roman" pitchFamily="34" charset="-120"/>
                         </a:rPr>
                         <a:t>Корректность типов, сигнатур вызовов функций, отсутствие undefined</a:t>
                       </a:r>
                       <a:endParaRPr lang="en-US" sz="1100" dirty="0">
-                        <a:latin typeface="Calibri" charset="0"/>
-                        <a:ea typeface="Calibri" charset="0"/>
-                        <a:cs typeface="Calibri" charset="0"/>
+                        <a:latin typeface="Times New Roman" charset="0"/>
+                        <a:ea typeface="Times New Roman" charset="0"/>
+                        <a:cs typeface="Times New Roman" charset="0"/>
                       </a:endParaRPr>
                     </a:p>
                   </a:txBody>
                   <a:tcPr marL="91440" marR="91440" marT="45720" marB="45720" anchor="ctr">
                     <a:lnL w="6350" cap="flat" cmpd="sng" algn="ctr">
                       <a:solidFill>
-                        <a:srgbClr val="FFEDD5"/>
+                        <a:srgbClr val="EFEAE3"/>
                       </a:solidFill>
                       <a:prstDash val="solid"/>
                       <a:round/>
@@ -4371,7 +4671,7 @@
                     </a:lnL>
                     <a:lnR w="6350" cap="flat" cmpd="sng" algn="ctr">
                       <a:solidFill>
-                        <a:srgbClr val="FFEDD5"/>
+                        <a:srgbClr val="EFEAE3"/>
                       </a:solidFill>
                       <a:prstDash val="solid"/>
                       <a:round/>
@@ -4380,7 +4680,7 @@
                     </a:lnR>
                     <a:lnT w="6350" cap="flat" cmpd="sng" algn="ctr">
                       <a:solidFill>
-                        <a:srgbClr val="FFEDD5"/>
+                        <a:srgbClr val="EFEAE3"/>
                       </a:solidFill>
                       <a:prstDash val="solid"/>
                       <a:round/>
@@ -4389,7 +4689,7 @@
                     </a:lnT>
                     <a:lnB w="6350" cap="flat" cmpd="sng" algn="ctr">
                       <a:solidFill>
-                        <a:srgbClr val="FFEDD5"/>
+                        <a:srgbClr val="EFEAE3"/>
                       </a:solidFill>
                       <a:prstDash val="solid"/>
                       <a:round/>
@@ -4414,25 +4714,25 @@
                       <a:r>
                         <a:rPr lang="en-US" sz="1100" dirty="0">
                           <a:solidFill>
-                            <a:srgbClr val="1E293B"/>
+                            <a:srgbClr val="2D2D3A"/>
                           </a:solidFill>
-                          <a:latin typeface="Calibri" pitchFamily="34" charset="0"/>
-                          <a:ea typeface="Calibri" pitchFamily="34" charset="-122"/>
-                          <a:cs typeface="Calibri" pitchFamily="34" charset="-120"/>
+                          <a:latin typeface="Times New Roman" pitchFamily="34" charset="0"/>
+                          <a:ea typeface="Times New Roman" pitchFamily="34" charset="-122"/>
+                          <a:cs typeface="Times New Roman" pitchFamily="34" charset="-120"/>
                         </a:rPr>
                         <a:t>Jest Coverage</a:t>
                       </a:r>
                       <a:endParaRPr lang="en-US" sz="1100" dirty="0">
-                        <a:latin typeface="Calibri" charset="0"/>
-                        <a:ea typeface="Calibri" charset="0"/>
-                        <a:cs typeface="Calibri" charset="0"/>
+                        <a:latin typeface="Times New Roman" charset="0"/>
+                        <a:ea typeface="Times New Roman" charset="0"/>
+                        <a:cs typeface="Times New Roman" charset="0"/>
                       </a:endParaRPr>
                     </a:p>
                   </a:txBody>
                   <a:tcPr marL="91440" marR="91440" marT="45720" marB="45720" anchor="ctr">
                     <a:lnL w="6350" cap="flat" cmpd="sng" algn="ctr">
                       <a:solidFill>
-                        <a:srgbClr val="FFEDD5"/>
+                        <a:srgbClr val="EFEAE3"/>
                       </a:solidFill>
                       <a:prstDash val="solid"/>
                       <a:round/>
@@ -4441,7 +4741,7 @@
                     </a:lnL>
                     <a:lnR w="6350" cap="flat" cmpd="sng" algn="ctr">
                       <a:solidFill>
-                        <a:srgbClr val="FFEDD5"/>
+                        <a:srgbClr val="EFEAE3"/>
                       </a:solidFill>
                       <a:prstDash val="solid"/>
                       <a:round/>
@@ -4450,7 +4750,7 @@
                     </a:lnR>
                     <a:lnT w="6350" cap="flat" cmpd="sng" algn="ctr">
                       <a:solidFill>
-                        <a:srgbClr val="FFEDD5"/>
+                        <a:srgbClr val="EFEAE3"/>
                       </a:solidFill>
                       <a:prstDash val="solid"/>
                       <a:round/>
@@ -4459,7 +4759,7 @@
                     </a:lnT>
                     <a:lnB w="6350" cap="flat" cmpd="sng" algn="ctr">
                       <a:solidFill>
-                        <a:srgbClr val="FFEDD5"/>
+                        <a:srgbClr val="EFEAE3"/>
                       </a:solidFill>
                       <a:prstDash val="solid"/>
                       <a:round/>
@@ -4467,7 +4767,7 @@
                       <a:tailEnd type="none" w="med" len="med"/>
                     </a:lnB>
                     <a:solidFill>
-                      <a:srgbClr val="FFF7ED"/>
+                      <a:srgbClr val="F8F4F0"/>
                     </a:solidFill>
                   </a:tcPr>
                 </a:tc>
@@ -4482,25 +4782,25 @@
                       <a:r>
                         <a:rPr lang="en-US" sz="1100" dirty="0">
                           <a:solidFill>
-                            <a:srgbClr val="1E293B"/>
+                            <a:srgbClr val="2D2D3A"/>
                           </a:solidFill>
-                          <a:latin typeface="Calibri" pitchFamily="34" charset="0"/>
-                          <a:ea typeface="Calibri" pitchFamily="34" charset="-122"/>
-                          <a:cs typeface="Calibri" pitchFamily="34" charset="-120"/>
+                          <a:latin typeface="Times New Roman" pitchFamily="34" charset="0"/>
+                          <a:ea typeface="Times New Roman" pitchFamily="34" charset="-122"/>
+                          <a:cs typeface="Times New Roman" pitchFamily="34" charset="-120"/>
                         </a:rPr>
                         <a:t>Динамический</a:t>
                       </a:r>
                       <a:endParaRPr lang="en-US" sz="1100" dirty="0">
-                        <a:latin typeface="Calibri" charset="0"/>
-                        <a:ea typeface="Calibri" charset="0"/>
-                        <a:cs typeface="Calibri" charset="0"/>
+                        <a:latin typeface="Times New Roman" charset="0"/>
+                        <a:ea typeface="Times New Roman" charset="0"/>
+                        <a:cs typeface="Times New Roman" charset="0"/>
                       </a:endParaRPr>
                     </a:p>
                   </a:txBody>
                   <a:tcPr marL="91440" marR="91440" marT="45720" marB="45720" anchor="ctr">
                     <a:lnL w="6350" cap="flat" cmpd="sng" algn="ctr">
                       <a:solidFill>
-                        <a:srgbClr val="FFEDD5"/>
+                        <a:srgbClr val="EFEAE3"/>
                       </a:solidFill>
                       <a:prstDash val="solid"/>
                       <a:round/>
@@ -4509,7 +4809,7 @@
                     </a:lnL>
                     <a:lnR w="6350" cap="flat" cmpd="sng" algn="ctr">
                       <a:solidFill>
-                        <a:srgbClr val="FFEDD5"/>
+                        <a:srgbClr val="EFEAE3"/>
                       </a:solidFill>
                       <a:prstDash val="solid"/>
                       <a:round/>
@@ -4518,7 +4818,7 @@
                     </a:lnR>
                     <a:lnT w="6350" cap="flat" cmpd="sng" algn="ctr">
                       <a:solidFill>
-                        <a:srgbClr val="FFEDD5"/>
+                        <a:srgbClr val="EFEAE3"/>
                       </a:solidFill>
                       <a:prstDash val="solid"/>
                       <a:round/>
@@ -4527,7 +4827,7 @@
                     </a:lnT>
                     <a:lnB w="6350" cap="flat" cmpd="sng" algn="ctr">
                       <a:solidFill>
-                        <a:srgbClr val="FFEDD5"/>
+                        <a:srgbClr val="EFEAE3"/>
                       </a:solidFill>
                       <a:prstDash val="solid"/>
                       <a:round/>
@@ -4535,7 +4835,7 @@
                       <a:tailEnd type="none" w="med" len="med"/>
                     </a:lnB>
                     <a:solidFill>
-                      <a:srgbClr val="FFF7ED"/>
+                      <a:srgbClr val="F8F4F0"/>
                     </a:solidFill>
                   </a:tcPr>
                 </a:tc>
@@ -4550,25 +4850,25 @@
                       <a:r>
                         <a:rPr lang="en-US" sz="1100" dirty="0">
                           <a:solidFill>
-                            <a:srgbClr val="1E293B"/>
+                            <a:srgbClr val="2D2D3A"/>
                           </a:solidFill>
-                          <a:latin typeface="Calibri" pitchFamily="34" charset="0"/>
-                          <a:ea typeface="Calibri" pitchFamily="34" charset="-122"/>
-                          <a:cs typeface="Calibri" pitchFamily="34" charset="-120"/>
+                          <a:latin typeface="Times New Roman" pitchFamily="34" charset="0"/>
+                          <a:ea typeface="Times New Roman" pitchFamily="34" charset="-122"/>
+                          <a:cs typeface="Times New Roman" pitchFamily="34" charset="-120"/>
                         </a:rPr>
                         <a:t>Процент покрытия строк кода автотестами (цель &gt;80%)</a:t>
                       </a:r>
                       <a:endParaRPr lang="en-US" sz="1100" dirty="0">
-                        <a:latin typeface="Calibri" charset="0"/>
-                        <a:ea typeface="Calibri" charset="0"/>
-                        <a:cs typeface="Calibri" charset="0"/>
+                        <a:latin typeface="Times New Roman" charset="0"/>
+                        <a:ea typeface="Times New Roman" charset="0"/>
+                        <a:cs typeface="Times New Roman" charset="0"/>
                       </a:endParaRPr>
                     </a:p>
                   </a:txBody>
                   <a:tcPr marL="91440" marR="91440" marT="45720" marB="45720" anchor="ctr">
                     <a:lnL w="6350" cap="flat" cmpd="sng" algn="ctr">
                       <a:solidFill>
-                        <a:srgbClr val="FFEDD5"/>
+                        <a:srgbClr val="EFEAE3"/>
                       </a:solidFill>
                       <a:prstDash val="solid"/>
                       <a:round/>
@@ -4577,7 +4877,7 @@
                     </a:lnL>
                     <a:lnR w="6350" cap="flat" cmpd="sng" algn="ctr">
                       <a:solidFill>
-                        <a:srgbClr val="FFEDD5"/>
+                        <a:srgbClr val="EFEAE3"/>
                       </a:solidFill>
                       <a:prstDash val="solid"/>
                       <a:round/>
@@ -4586,7 +4886,7 @@
                     </a:lnR>
                     <a:lnT w="6350" cap="flat" cmpd="sng" algn="ctr">
                       <a:solidFill>
-                        <a:srgbClr val="FFEDD5"/>
+                        <a:srgbClr val="EFEAE3"/>
                       </a:solidFill>
                       <a:prstDash val="solid"/>
                       <a:round/>
@@ -4595,7 +4895,7 @@
                     </a:lnT>
                     <a:lnB w="6350" cap="flat" cmpd="sng" algn="ctr">
                       <a:solidFill>
-                        <a:srgbClr val="FFEDD5"/>
+                        <a:srgbClr val="EFEAE3"/>
                       </a:solidFill>
                       <a:prstDash val="solid"/>
                       <a:round/>
@@ -4603,7 +4903,7 @@
                       <a:tailEnd type="none" w="med" len="med"/>
                     </a:lnB>
                     <a:solidFill>
-                      <a:srgbClr val="FFF7ED"/>
+                      <a:srgbClr val="F8F4F0"/>
                     </a:solidFill>
                   </a:tcPr>
                 </a:tc>
@@ -4620,25 +4920,25 @@
                       <a:r>
                         <a:rPr lang="en-US" sz="1100" dirty="0">
                           <a:solidFill>
-                            <a:srgbClr val="1E293B"/>
+                            <a:srgbClr val="2D2D3A"/>
                           </a:solidFill>
-                          <a:latin typeface="Calibri" pitchFamily="34" charset="0"/>
-                          <a:ea typeface="Calibri" pitchFamily="34" charset="-122"/>
-                          <a:cs typeface="Calibri" pitchFamily="34" charset="-120"/>
+                          <a:latin typeface="Times New Roman" pitchFamily="34" charset="0"/>
+                          <a:ea typeface="Times New Roman" pitchFamily="34" charset="-122"/>
+                          <a:cs typeface="Times New Roman" pitchFamily="34" charset="-120"/>
                         </a:rPr>
                         <a:t>npm audit</a:t>
                       </a:r>
                       <a:endParaRPr lang="en-US" sz="1100" dirty="0">
-                        <a:latin typeface="Calibri" charset="0"/>
-                        <a:ea typeface="Calibri" charset="0"/>
-                        <a:cs typeface="Calibri" charset="0"/>
+                        <a:latin typeface="Times New Roman" charset="0"/>
+                        <a:ea typeface="Times New Roman" charset="0"/>
+                        <a:cs typeface="Times New Roman" charset="0"/>
                       </a:endParaRPr>
                     </a:p>
                   </a:txBody>
                   <a:tcPr marL="91440" marR="91440" marT="45720" marB="45720" anchor="ctr">
                     <a:lnL w="6350" cap="flat" cmpd="sng" algn="ctr">
                       <a:solidFill>
-                        <a:srgbClr val="FFEDD5"/>
+                        <a:srgbClr val="EFEAE3"/>
                       </a:solidFill>
                       <a:prstDash val="solid"/>
                       <a:round/>
@@ -4647,7 +4947,7 @@
                     </a:lnL>
                     <a:lnR w="6350" cap="flat" cmpd="sng" algn="ctr">
                       <a:solidFill>
-                        <a:srgbClr val="FFEDD5"/>
+                        <a:srgbClr val="EFEAE3"/>
                       </a:solidFill>
                       <a:prstDash val="solid"/>
                       <a:round/>
@@ -4656,7 +4956,7 @@
                     </a:lnR>
                     <a:lnT w="6350" cap="flat" cmpd="sng" algn="ctr">
                       <a:solidFill>
-                        <a:srgbClr val="FFEDD5"/>
+                        <a:srgbClr val="EFEAE3"/>
                       </a:solidFill>
                       <a:prstDash val="solid"/>
                       <a:round/>
@@ -4665,7 +4965,7 @@
                     </a:lnT>
                     <a:lnB w="6350" cap="flat" cmpd="sng" algn="ctr">
                       <a:solidFill>
-                        <a:srgbClr val="FFEDD5"/>
+                        <a:srgbClr val="EFEAE3"/>
                       </a:solidFill>
                       <a:prstDash val="solid"/>
                       <a:round/>
@@ -4688,25 +4988,25 @@
                       <a:r>
                         <a:rPr lang="en-US" sz="1100" dirty="0">
                           <a:solidFill>
-                            <a:srgbClr val="1E293B"/>
+                            <a:srgbClr val="2D2D3A"/>
                           </a:solidFill>
-                          <a:latin typeface="Calibri" pitchFamily="34" charset="0"/>
-                          <a:ea typeface="Calibri" pitchFamily="34" charset="-122"/>
-                          <a:cs typeface="Calibri" pitchFamily="34" charset="-120"/>
+                          <a:latin typeface="Times New Roman" pitchFamily="34" charset="0"/>
+                          <a:ea typeface="Times New Roman" pitchFamily="34" charset="-122"/>
+                          <a:cs typeface="Times New Roman" pitchFamily="34" charset="-120"/>
                         </a:rPr>
                         <a:t>Статический</a:t>
                       </a:r>
                       <a:endParaRPr lang="en-US" sz="1100" dirty="0">
-                        <a:latin typeface="Calibri" charset="0"/>
-                        <a:ea typeface="Calibri" charset="0"/>
-                        <a:cs typeface="Calibri" charset="0"/>
+                        <a:latin typeface="Times New Roman" charset="0"/>
+                        <a:ea typeface="Times New Roman" charset="0"/>
+                        <a:cs typeface="Times New Roman" charset="0"/>
                       </a:endParaRPr>
                     </a:p>
                   </a:txBody>
                   <a:tcPr marL="91440" marR="91440" marT="45720" marB="45720" anchor="ctr">
                     <a:lnL w="6350" cap="flat" cmpd="sng" algn="ctr">
                       <a:solidFill>
-                        <a:srgbClr val="FFEDD5"/>
+                        <a:srgbClr val="EFEAE3"/>
                       </a:solidFill>
                       <a:prstDash val="solid"/>
                       <a:round/>
@@ -4715,7 +5015,7 @@
                     </a:lnL>
                     <a:lnR w="6350" cap="flat" cmpd="sng" algn="ctr">
                       <a:solidFill>
-                        <a:srgbClr val="FFEDD5"/>
+                        <a:srgbClr val="EFEAE3"/>
                       </a:solidFill>
                       <a:prstDash val="solid"/>
                       <a:round/>
@@ -4724,7 +5024,7 @@
                     </a:lnR>
                     <a:lnT w="6350" cap="flat" cmpd="sng" algn="ctr">
                       <a:solidFill>
-                        <a:srgbClr val="FFEDD5"/>
+                        <a:srgbClr val="EFEAE3"/>
                       </a:solidFill>
                       <a:prstDash val="solid"/>
                       <a:round/>
@@ -4733,7 +5033,7 @@
                     </a:lnT>
                     <a:lnB w="6350" cap="flat" cmpd="sng" algn="ctr">
                       <a:solidFill>
-                        <a:srgbClr val="FFEDD5"/>
+                        <a:srgbClr val="EFEAE3"/>
                       </a:solidFill>
                       <a:prstDash val="solid"/>
                       <a:round/>
@@ -4756,25 +5056,25 @@
                       <a:r>
                         <a:rPr lang="en-US" sz="1100" dirty="0">
                           <a:solidFill>
-                            <a:srgbClr val="1E293B"/>
+                            <a:srgbClr val="2D2D3A"/>
                           </a:solidFill>
-                          <a:latin typeface="Calibri" pitchFamily="34" charset="0"/>
-                          <a:ea typeface="Calibri" pitchFamily="34" charset="-122"/>
-                          <a:cs typeface="Calibri" pitchFamily="34" charset="-120"/>
+                          <a:latin typeface="Times New Roman" pitchFamily="34" charset="0"/>
+                          <a:ea typeface="Times New Roman" pitchFamily="34" charset="-122"/>
+                          <a:cs typeface="Times New Roman" pitchFamily="34" charset="-120"/>
                         </a:rPr>
                         <a:t>Сканирование зависимостей на уязвимости (OWASP база)</a:t>
                       </a:r>
                       <a:endParaRPr lang="en-US" sz="1100" dirty="0">
-                        <a:latin typeface="Calibri" charset="0"/>
-                        <a:ea typeface="Calibri" charset="0"/>
-                        <a:cs typeface="Calibri" charset="0"/>
+                        <a:latin typeface="Times New Roman" charset="0"/>
+                        <a:ea typeface="Times New Roman" charset="0"/>
+                        <a:cs typeface="Times New Roman" charset="0"/>
                       </a:endParaRPr>
                     </a:p>
                   </a:txBody>
                   <a:tcPr marL="91440" marR="91440" marT="45720" marB="45720" anchor="ctr">
                     <a:lnL w="6350" cap="flat" cmpd="sng" algn="ctr">
                       <a:solidFill>
-                        <a:srgbClr val="FFEDD5"/>
+                        <a:srgbClr val="EFEAE3"/>
                       </a:solidFill>
                       <a:prstDash val="solid"/>
                       <a:round/>
@@ -4783,7 +5083,7 @@
                     </a:lnL>
                     <a:lnR w="6350" cap="flat" cmpd="sng" algn="ctr">
                       <a:solidFill>
-                        <a:srgbClr val="FFEDD5"/>
+                        <a:srgbClr val="EFEAE3"/>
                       </a:solidFill>
                       <a:prstDash val="solid"/>
                       <a:round/>
@@ -4792,7 +5092,7 @@
                     </a:lnR>
                     <a:lnT w="6350" cap="flat" cmpd="sng" algn="ctr">
                       <a:solidFill>
-                        <a:srgbClr val="FFEDD5"/>
+                        <a:srgbClr val="EFEAE3"/>
                       </a:solidFill>
                       <a:prstDash val="solid"/>
                       <a:round/>
@@ -4801,7 +5101,7 @@
                     </a:lnT>
                     <a:lnB w="6350" cap="flat" cmpd="sng" algn="ctr">
                       <a:solidFill>
-                        <a:srgbClr val="FFEDD5"/>
+                        <a:srgbClr val="EFEAE3"/>
                       </a:solidFill>
                       <a:prstDash val="solid"/>
                       <a:round/>
@@ -4826,25 +5126,25 @@
                       <a:r>
                         <a:rPr lang="en-US" sz="1100" dirty="0">
                           <a:solidFill>
-                            <a:srgbClr val="1E293B"/>
+                            <a:srgbClr val="2D2D3A"/>
                           </a:solidFill>
-                          <a:latin typeface="Calibri" pitchFamily="34" charset="0"/>
-                          <a:ea typeface="Calibri" pitchFamily="34" charset="-122"/>
-                          <a:cs typeface="Calibri" pitchFamily="34" charset="-120"/>
+                          <a:latin typeface="Times New Roman" pitchFamily="34" charset="0"/>
+                          <a:ea typeface="Times New Roman" pitchFamily="34" charset="-122"/>
+                          <a:cs typeface="Times New Roman" pitchFamily="34" charset="-120"/>
                         </a:rPr>
                         <a:t>Artillery</a:t>
                       </a:r>
                       <a:endParaRPr lang="en-US" sz="1100" dirty="0">
-                        <a:latin typeface="Calibri" charset="0"/>
-                        <a:ea typeface="Calibri" charset="0"/>
-                        <a:cs typeface="Calibri" charset="0"/>
+                        <a:latin typeface="Times New Roman" charset="0"/>
+                        <a:ea typeface="Times New Roman" charset="0"/>
+                        <a:cs typeface="Times New Roman" charset="0"/>
                       </a:endParaRPr>
                     </a:p>
                   </a:txBody>
                   <a:tcPr marL="91440" marR="91440" marT="45720" marB="45720" anchor="ctr">
                     <a:lnL w="6350" cap="flat" cmpd="sng" algn="ctr">
                       <a:solidFill>
-                        <a:srgbClr val="FFEDD5"/>
+                        <a:srgbClr val="EFEAE3"/>
                       </a:solidFill>
                       <a:prstDash val="solid"/>
                       <a:round/>
@@ -4853,7 +5153,7 @@
                     </a:lnL>
                     <a:lnR w="6350" cap="flat" cmpd="sng" algn="ctr">
                       <a:solidFill>
-                        <a:srgbClr val="FFEDD5"/>
+                        <a:srgbClr val="EFEAE3"/>
                       </a:solidFill>
                       <a:prstDash val="solid"/>
                       <a:round/>
@@ -4862,7 +5162,7 @@
                     </a:lnR>
                     <a:lnT w="6350" cap="flat" cmpd="sng" algn="ctr">
                       <a:solidFill>
-                        <a:srgbClr val="FFEDD5"/>
+                        <a:srgbClr val="EFEAE3"/>
                       </a:solidFill>
                       <a:prstDash val="solid"/>
                       <a:round/>
@@ -4871,7 +5171,7 @@
                     </a:lnT>
                     <a:lnB w="6350" cap="flat" cmpd="sng" algn="ctr">
                       <a:solidFill>
-                        <a:srgbClr val="FFEDD5"/>
+                        <a:srgbClr val="EFEAE3"/>
                       </a:solidFill>
                       <a:prstDash val="solid"/>
                       <a:round/>
@@ -4879,7 +5179,7 @@
                       <a:tailEnd type="none" w="med" len="med"/>
                     </a:lnB>
                     <a:solidFill>
-                      <a:srgbClr val="FFF7ED"/>
+                      <a:srgbClr val="F8F4F0"/>
                     </a:solidFill>
                   </a:tcPr>
                 </a:tc>
@@ -4894,25 +5194,25 @@
                       <a:r>
                         <a:rPr lang="en-US" sz="1100" dirty="0">
                           <a:solidFill>
-                            <a:srgbClr val="1E293B"/>
+                            <a:srgbClr val="2D2D3A"/>
                           </a:solidFill>
-                          <a:latin typeface="Calibri" pitchFamily="34" charset="0"/>
-                          <a:ea typeface="Calibri" pitchFamily="34" charset="-122"/>
-                          <a:cs typeface="Calibri" pitchFamily="34" charset="-120"/>
+                          <a:latin typeface="Times New Roman" pitchFamily="34" charset="0"/>
+                          <a:ea typeface="Times New Roman" pitchFamily="34" charset="-122"/>
+                          <a:cs typeface="Times New Roman" pitchFamily="34" charset="-120"/>
                         </a:rPr>
                         <a:t>Динамический</a:t>
                       </a:r>
                       <a:endParaRPr lang="en-US" sz="1100" dirty="0">
-                        <a:latin typeface="Calibri" charset="0"/>
-                        <a:ea typeface="Calibri" charset="0"/>
-                        <a:cs typeface="Calibri" charset="0"/>
+                        <a:latin typeface="Times New Roman" charset="0"/>
+                        <a:ea typeface="Times New Roman" charset="0"/>
+                        <a:cs typeface="Times New Roman" charset="0"/>
                       </a:endParaRPr>
                     </a:p>
                   </a:txBody>
                   <a:tcPr marL="91440" marR="91440" marT="45720" marB="45720" anchor="ctr">
                     <a:lnL w="6350" cap="flat" cmpd="sng" algn="ctr">
                       <a:solidFill>
-                        <a:srgbClr val="FFEDD5"/>
+                        <a:srgbClr val="EFEAE3"/>
                       </a:solidFill>
                       <a:prstDash val="solid"/>
                       <a:round/>
@@ -4921,7 +5221,7 @@
                     </a:lnL>
                     <a:lnR w="6350" cap="flat" cmpd="sng" algn="ctr">
                       <a:solidFill>
-                        <a:srgbClr val="FFEDD5"/>
+                        <a:srgbClr val="EFEAE3"/>
                       </a:solidFill>
                       <a:prstDash val="solid"/>
                       <a:round/>
@@ -4930,7 +5230,7 @@
                     </a:lnR>
                     <a:lnT w="6350" cap="flat" cmpd="sng" algn="ctr">
                       <a:solidFill>
-                        <a:srgbClr val="FFEDD5"/>
+                        <a:srgbClr val="EFEAE3"/>
                       </a:solidFill>
                       <a:prstDash val="solid"/>
                       <a:round/>
@@ -4939,7 +5239,7 @@
                     </a:lnT>
                     <a:lnB w="6350" cap="flat" cmpd="sng" algn="ctr">
                       <a:solidFill>
-                        <a:srgbClr val="FFEDD5"/>
+                        <a:srgbClr val="EFEAE3"/>
                       </a:solidFill>
                       <a:prstDash val="solid"/>
                       <a:round/>
@@ -4947,7 +5247,7 @@
                       <a:tailEnd type="none" w="med" len="med"/>
                     </a:lnB>
                     <a:solidFill>
-                      <a:srgbClr val="FFF7ED"/>
+                      <a:srgbClr val="F8F4F0"/>
                     </a:solidFill>
                   </a:tcPr>
                 </a:tc>
@@ -4962,25 +5262,25 @@
                       <a:r>
                         <a:rPr lang="en-US" sz="1100" dirty="0">
                           <a:solidFill>
-                            <a:srgbClr val="1E293B"/>
+                            <a:srgbClr val="2D2D3A"/>
                           </a:solidFill>
-                          <a:latin typeface="Calibri" pitchFamily="34" charset="0"/>
-                          <a:ea typeface="Calibri" pitchFamily="34" charset="-122"/>
-                          <a:cs typeface="Calibri" pitchFamily="34" charset="-120"/>
+                          <a:latin typeface="Times New Roman" pitchFamily="34" charset="0"/>
+                          <a:ea typeface="Times New Roman" pitchFamily="34" charset="-122"/>
+                          <a:cs typeface="Times New Roman" pitchFamily="34" charset="-120"/>
                         </a:rPr>
                         <a:t>Нагрузочное тестирование критических сценариев (RPS, Latency)</a:t>
                       </a:r>
                       <a:endParaRPr lang="en-US" sz="1100" dirty="0">
-                        <a:latin typeface="Calibri" charset="0"/>
-                        <a:ea typeface="Calibri" charset="0"/>
-                        <a:cs typeface="Calibri" charset="0"/>
+                        <a:latin typeface="Times New Roman" charset="0"/>
+                        <a:ea typeface="Times New Roman" charset="0"/>
+                        <a:cs typeface="Times New Roman" charset="0"/>
                       </a:endParaRPr>
                     </a:p>
                   </a:txBody>
                   <a:tcPr marL="91440" marR="91440" marT="45720" marB="45720" anchor="ctr">
                     <a:lnL w="6350" cap="flat" cmpd="sng" algn="ctr">
                       <a:solidFill>
-                        <a:srgbClr val="FFEDD5"/>
+                        <a:srgbClr val="EFEAE3"/>
                       </a:solidFill>
                       <a:prstDash val="solid"/>
                       <a:round/>
@@ -4989,7 +5289,7 @@
                     </a:lnL>
                     <a:lnR w="6350" cap="flat" cmpd="sng" algn="ctr">
                       <a:solidFill>
-                        <a:srgbClr val="FFEDD5"/>
+                        <a:srgbClr val="EFEAE3"/>
                       </a:solidFill>
                       <a:prstDash val="solid"/>
                       <a:round/>
@@ -4998,7 +5298,7 @@
                     </a:lnR>
                     <a:lnT w="6350" cap="flat" cmpd="sng" algn="ctr">
                       <a:solidFill>
-                        <a:srgbClr val="FFEDD5"/>
+                        <a:srgbClr val="EFEAE3"/>
                       </a:solidFill>
                       <a:prstDash val="solid"/>
                       <a:round/>
@@ -5007,7 +5307,7 @@
                     </a:lnT>
                     <a:lnB w="6350" cap="flat" cmpd="sng" algn="ctr">
                       <a:solidFill>
-                        <a:srgbClr val="FFEDD5"/>
+                        <a:srgbClr val="EFEAE3"/>
                       </a:solidFill>
                       <a:prstDash val="solid"/>
                       <a:round/>
@@ -5015,7 +5315,7 @@
                       <a:tailEnd type="none" w="med" len="med"/>
                     </a:lnB>
                     <a:solidFill>
-                      <a:srgbClr val="FFF7ED"/>
+                      <a:srgbClr val="F8F4F0"/>
                     </a:solidFill>
                   </a:tcPr>
                 </a:tc>
@@ -5032,9 +5332,9 @@
 </p:sld>
 </file>
 
-<file path=ppt/slides/slide15.xml><?xml version="1.0" encoding="utf-8"?>
+<file path=ppt/slides/slide16.xml><?xml version="1.0" encoding="utf-8"?>
 <p:sld xmlns:a="http://schemas.openxmlformats.org/drawingml/2006/main" xmlns:r="http://schemas.openxmlformats.org/officeDocument/2006/relationships" xmlns:p="http://schemas.openxmlformats.org/presentationml/2006/main">
-  <p:cSld name="Slide 15">
+  <p:cSld name="Slide 16">
     <p:bg>
       <p:bgPr>
         <a:solidFill>
@@ -5081,57 +5381,30 @@
               <a:buNone/>
             </a:pPr>
             <a:r>
-              <a:rPr lang="en-US" sz="2000" b="1" dirty="0">
-                <a:solidFill>
-                  <a:srgbClr val="0F1E36"/>
-                </a:solidFill>
-                <a:latin typeface="Cambria" pitchFamily="34" charset="0"/>
-                <a:ea typeface="Cambria" pitchFamily="34" charset="-122"/>
-                <a:cs typeface="Cambria" pitchFamily="34" charset="-120"/>
+              <a:rPr lang="en-US" sz="1600" b="1" dirty="0">
+                <a:solidFill>
+                  <a:srgbClr val="1A1A2E"/>
+                </a:solidFill>
+                <a:latin typeface="Georgia" pitchFamily="34" charset="0"/>
+                <a:ea typeface="Georgia" pitchFamily="34" charset="-122"/>
+                <a:cs typeface="Georgia" pitchFamily="34" charset="-120"/>
               </a:rPr>
               <a:t>Выводы по теме</a:t>
             </a:r>
-            <a:endParaRPr lang="en-US" sz="2000" dirty="0"/>
+            <a:endParaRPr lang="en-US" sz="1600" dirty="0"/>
           </a:p>
         </p:txBody>
       </p:sp>
       <p:sp>
         <p:nvSpPr>
-          <p:cNvPr id="3" name="Shape 1"/>
+          <p:cNvPr id="3" name="Text 1"/>
           <p:cNvSpPr/>
           <p:nvPr/>
         </p:nvSpPr>
         <p:spPr>
           <a:xfrm>
-            <a:off x="384048" y="3918204"/>
-            <a:ext cx="8375904" cy="960120"/>
-          </a:xfrm>
-          <a:prstGeom prst="roundRect">
-            <a:avLst>
-              <a:gd name="adj" fmla="val 9524"/>
-            </a:avLst>
-          </a:prstGeom>
-          <a:solidFill>
-            <a:srgbClr val="0F1E36"/>
-          </a:solidFill>
-          <a:ln w="12700">
-            <a:solidFill>
-              <a:srgbClr val="0F1E36"/>
-            </a:solidFill>
-            <a:prstDash val="solid"/>
-          </a:ln>
-        </p:spPr>
-      </p:sp>
-      <p:sp>
-        <p:nvSpPr>
-          <p:cNvPr id="4" name="Text 2"/>
-          <p:cNvSpPr/>
-          <p:nvPr/>
-        </p:nvSpPr>
-        <p:spPr>
-          <a:xfrm>
-            <a:off x="548640" y="3918204"/>
-            <a:ext cx="8046720" cy="960120"/>
+            <a:off x="475488" y="868680"/>
+            <a:ext cx="8193024" cy="4027932"/>
           </a:xfrm>
           <a:prstGeom prst="rect">
             <a:avLst/>
@@ -5140,24 +5413,27 @@
           <a:ln/>
         </p:spPr>
         <p:txBody>
-          <a:bodyPr wrap="square" rtlCol="0" anchor="ctr"/>
+          <a:bodyPr wrap="square" rtlCol="0" anchor="t"/>
           <a:lstStyle/>
           <a:p>
             <a:pPr algn="l" indent="0" marL="0">
-              <a:buNone/>
-            </a:pPr>
-            <a:r>
-              <a:rPr lang="en-US" sz="1200" dirty="0">
-                <a:solidFill>
-                  <a:srgbClr val="FFFFFF"/>
-                </a:solidFill>
-                <a:latin typeface="Calibri" pitchFamily="34" charset="0"/>
-                <a:ea typeface="Calibri" pitchFamily="34" charset="-122"/>
-                <a:cs typeface="Calibri" pitchFamily="34" charset="-120"/>
+              <a:lnSpc>
+                <a:spcPts val="3200"/>
+              </a:lnSpc>
+              <a:buNone/>
+            </a:pPr>
+            <a:r>
+              <a:rPr lang="en-US" sz="1800" dirty="0">
+                <a:solidFill>
+                  <a:srgbClr val="2D2D3A"/>
+                </a:solidFill>
+                <a:latin typeface="Times New Roman" pitchFamily="34" charset="0"/>
+                <a:ea typeface="Times New Roman" pitchFamily="34" charset="-122"/>
+                <a:cs typeface="Times New Roman" pitchFamily="34" charset="-120"/>
               </a:rPr>
               <a:t>Внутренние атрибуты качества (модульность, тестируемость, расширяемость, поддерживаемость, безопасность) напрямую определяют живучесть проекта «Личный кабинет». Благодаря использованию слоистой архитектуры бэкенда, строгой валидации Zod, надежной JWT-авторизации, механизма optimistic locking и автоматических тестов, команда получает чистый, защищенный код, готовый к безболезненному масштабированию и развертыванию.</a:t>
             </a:r>
-            <a:endParaRPr lang="en-US" sz="1200" dirty="0"/>
+            <a:endParaRPr lang="en-US" sz="1800" dirty="0"/>
           </a:p>
         </p:txBody>
       </p:sp>
@@ -5218,17 +5494,17 @@
               <a:buNone/>
             </a:pPr>
             <a:r>
-              <a:rPr lang="en-US" sz="2000" b="1" dirty="0">
-                <a:solidFill>
-                  <a:srgbClr val="0F1E36"/>
-                </a:solidFill>
-                <a:latin typeface="Cambria" pitchFamily="34" charset="0"/>
-                <a:ea typeface="Cambria" pitchFamily="34" charset="-122"/>
-                <a:cs typeface="Cambria" pitchFamily="34" charset="-120"/>
-              </a:rPr>
-              <a:t>Атрибуты качества: пользователь vs разработчик</a:t>
-            </a:r>
-            <a:endParaRPr lang="en-US" sz="2000" dirty="0"/>
+              <a:rPr lang="en-US" sz="1600" b="1" dirty="0">
+                <a:solidFill>
+                  <a:srgbClr val="1A1A2E"/>
+                </a:solidFill>
+                <a:latin typeface="Georgia" pitchFamily="34" charset="0"/>
+                <a:ea typeface="Georgia" pitchFamily="34" charset="-122"/>
+                <a:cs typeface="Georgia" pitchFamily="34" charset="-120"/>
+              </a:rPr>
+              <a:t>Постановка задачи моделирования</a:t>
+            </a:r>
+            <a:endParaRPr lang="en-US" sz="1600" dirty="0"/>
           </a:p>
         </p:txBody>
       </p:sp>
@@ -5241,26 +5517,26 @@
         <p:spPr>
           <a:xfrm>
             <a:off x="384048" y="822960"/>
-            <a:ext cx="4023360" cy="4119372"/>
+            <a:ext cx="8375904" cy="4119372"/>
           </a:xfrm>
           <a:prstGeom prst="roundRect">
             <a:avLst>
-              <a:gd name="adj" fmla="val 2273"/>
+              <a:gd name="adj" fmla="val 2220"/>
             </a:avLst>
           </a:prstGeom>
           <a:solidFill>
-            <a:srgbClr val="FFF7ED"/>
+            <a:srgbClr val="F8F4F0"/>
           </a:solidFill>
           <a:ln w="12700">
             <a:solidFill>
-              <a:srgbClr val="FFF7ED"/>
+              <a:srgbClr val="EFEAE3"/>
             </a:solidFill>
             <a:prstDash val="solid"/>
           </a:ln>
           <a:effectLst>
-            <a:outerShdw sx="100000" sy="100000" kx="0" ky="0" algn="bl" rotWithShape="0" blurRad="88900" dist="25400" dir="2700000">
+            <a:outerShdw sx="100000" sy="100000" kx="0" ky="0" algn="bl" rotWithShape="0" blurRad="152400" dist="38100" dir="2700000">
               <a:srgbClr val="000000">
-                <a:alpha val="9000"/>
+                <a:alpha val="12000"/>
               </a:srgbClr>
             </a:outerShdw>
           </a:effectLst>
@@ -5275,7 +5551,7 @@
         <p:spPr>
           <a:xfrm>
             <a:off x="548640" y="932688"/>
-            <a:ext cx="3694176" cy="365760"/>
+            <a:ext cx="8046720" cy="411480"/>
           </a:xfrm>
           <a:prstGeom prst="rect">
             <a:avLst/>
@@ -5291,17 +5567,17 @@
               <a:buNone/>
             </a:pPr>
             <a:r>
-              <a:rPr lang="en-US" sz="1300" b="1" dirty="0">
-                <a:solidFill>
-                  <a:srgbClr val="0F1E36"/>
+              <a:rPr lang="en-US" sz="1200" b="1" dirty="0">
+                <a:solidFill>
+                  <a:srgbClr val="1A1A2E"/>
                 </a:solidFill>
                 <a:latin typeface="Cambria" pitchFamily="34" charset="0"/>
                 <a:ea typeface="Cambria" pitchFamily="34" charset="-122"/>
                 <a:cs typeface="Cambria" pitchFamily="34" charset="-120"/>
               </a:rPr>
-              <a:t>Что видит конечный пользователь?</a:t>
-            </a:r>
-            <a:endParaRPr lang="en-US" sz="1300" dirty="0"/>
+              <a:t>Постановка практической задачи</a:t>
+            </a:r>
+            <a:endParaRPr lang="en-US" sz="1200" dirty="0"/>
           </a:p>
         </p:txBody>
       </p:sp>
@@ -5313,8 +5589,8 @@
         </p:nvSpPr>
         <p:spPr>
           <a:xfrm>
-            <a:off x="548640" y="1389888"/>
-            <a:ext cx="3694176" cy="2926080"/>
+            <a:off x="548640" y="1417320"/>
+            <a:ext cx="8046720" cy="3296412"/>
           </a:xfrm>
           <a:prstGeom prst="rect">
             <a:avLst/>
@@ -5323,210 +5599,64 @@
           <a:ln/>
         </p:spPr>
         <p:txBody>
-          <a:bodyPr wrap="square" rtlCol="0" anchor="ctr"/>
+          <a:bodyPr wrap="square" rtlCol="0" anchor="t"/>
           <a:lstStyle/>
           <a:p>
-            <a:pPr marL="342900" indent="-342900">
-              <a:buSzPct val="100000"/>
-              <a:buChar char="•"/>
-            </a:pPr>
-            <a:r>
-              <a:rPr lang="en-US" sz="1150" dirty="0">
-                <a:solidFill>
-                  <a:srgbClr val="1E293B"/>
-                </a:solidFill>
-                <a:latin typeface="Calibri" pitchFamily="34" charset="0"/>
-                <a:ea typeface="Calibri" pitchFamily="34" charset="-122"/>
-                <a:cs typeface="Calibri" pitchFamily="34" charset="-120"/>
-              </a:rPr>
-              <a:t>Простоту и отзывчивость интерфейса (Usability).</a:t>
-            </a:r>
-            <a:endParaRPr lang="en-US" sz="1150" dirty="0"/>
-          </a:p>
-          <a:p>
-            <a:pPr marL="342900" indent="-342900">
-              <a:buSzPct val="100000"/>
-              <a:buChar char="•"/>
-            </a:pPr>
-            <a:r>
-              <a:rPr lang="en-US" sz="1150" dirty="0">
-                <a:solidFill>
-                  <a:srgbClr val="1E293B"/>
-                </a:solidFill>
-                <a:latin typeface="Calibri" pitchFamily="34" charset="0"/>
-                <a:ea typeface="Calibri" pitchFamily="34" charset="-122"/>
-                <a:cs typeface="Calibri" pitchFamily="34" charset="-120"/>
-              </a:rPr>
-              <a:t>Высокую скорость отклика системы (Performance).</a:t>
-            </a:r>
-            <a:endParaRPr lang="en-US" sz="1150" dirty="0"/>
-          </a:p>
-          <a:p>
-            <a:pPr marL="342900" indent="-342900">
-              <a:buSzPct val="100000"/>
-              <a:buChar char="•"/>
-            </a:pPr>
-            <a:r>
-              <a:rPr lang="en-US" sz="1150" dirty="0">
-                <a:solidFill>
-                  <a:srgbClr val="1E293B"/>
-                </a:solidFill>
-                <a:latin typeface="Calibri" pitchFamily="34" charset="0"/>
-                <a:ea typeface="Calibri" pitchFamily="34" charset="-122"/>
-                <a:cs typeface="Calibri" pitchFamily="34" charset="-120"/>
-              </a:rPr>
-              <a:t>Постоянную доступность без сбоев (Uptime / Reliability).</a:t>
-            </a:r>
-            <a:endParaRPr lang="en-US" sz="1150" dirty="0"/>
-          </a:p>
-        </p:txBody>
-      </p:sp>
-      <p:sp>
-        <p:nvSpPr>
-          <p:cNvPr id="6" name="Shape 4"/>
-          <p:cNvSpPr/>
-          <p:nvPr/>
-        </p:nvSpPr>
-        <p:spPr>
-          <a:xfrm>
-            <a:off x="4681728" y="822960"/>
-            <a:ext cx="4078224" cy="4119372"/>
-          </a:xfrm>
-          <a:prstGeom prst="roundRect">
-            <a:avLst>
-              <a:gd name="adj" fmla="val 2242"/>
-            </a:avLst>
-          </a:prstGeom>
-          <a:solidFill>
-            <a:srgbClr val="D1FAE5"/>
-          </a:solidFill>
-          <a:ln w="12700">
-            <a:solidFill>
-              <a:srgbClr val="D1FAE5"/>
-            </a:solidFill>
-            <a:prstDash val="solid"/>
-          </a:ln>
-          <a:effectLst>
-            <a:outerShdw sx="100000" sy="100000" kx="0" ky="0" algn="bl" rotWithShape="0" blurRad="88900" dist="25400" dir="2700000">
-              <a:srgbClr val="000000">
-                <a:alpha val="9000"/>
-              </a:srgbClr>
-            </a:outerShdw>
-          </a:effectLst>
-        </p:spPr>
-      </p:sp>
-      <p:sp>
-        <p:nvSpPr>
-          <p:cNvPr id="7" name="Text 5"/>
-          <p:cNvSpPr/>
-          <p:nvPr/>
-        </p:nvSpPr>
-        <p:spPr>
-          <a:xfrm>
-            <a:off x="4846320" y="932688"/>
-            <a:ext cx="3749040" cy="365760"/>
-          </a:xfrm>
-          <a:prstGeom prst="rect">
-            <a:avLst/>
-          </a:prstGeom>
-          <a:noFill/>
-          <a:ln/>
-        </p:spPr>
-        <p:txBody>
-          <a:bodyPr wrap="square" rtlCol="0" anchor="ctr"/>
-          <a:lstStyle/>
-          <a:p>
-            <a:pPr indent="0" marL="0">
-              <a:buNone/>
-            </a:pPr>
-            <a:r>
-              <a:rPr lang="en-US" sz="1300" b="1" dirty="0">
-                <a:solidFill>
-                  <a:srgbClr val="0F1E36"/>
-                </a:solidFill>
-                <a:latin typeface="Cambria" pitchFamily="34" charset="0"/>
-                <a:ea typeface="Cambria" pitchFamily="34" charset="-122"/>
-                <a:cs typeface="Cambria" pitchFamily="34" charset="-120"/>
-              </a:rPr>
-              <a:t>Что важно инженеру и архитектору?</a:t>
-            </a:r>
-            <a:endParaRPr lang="en-US" sz="1300" dirty="0"/>
-          </a:p>
-        </p:txBody>
-      </p:sp>
-      <p:sp>
-        <p:nvSpPr>
-          <p:cNvPr id="8" name="Text 6"/>
-          <p:cNvSpPr/>
-          <p:nvPr/>
-        </p:nvSpPr>
-        <p:spPr>
-          <a:xfrm>
-            <a:off x="4846320" y="1389888"/>
-            <a:ext cx="3749040" cy="2926080"/>
-          </a:xfrm>
-          <a:prstGeom prst="rect">
-            <a:avLst/>
-          </a:prstGeom>
-          <a:noFill/>
-          <a:ln/>
-        </p:spPr>
-        <p:txBody>
-          <a:bodyPr wrap="square" rtlCol="0" anchor="ctr"/>
-          <a:lstStyle/>
-          <a:p>
-            <a:pPr marL="342900" indent="-342900">
-              <a:buSzPct val="100000"/>
-              <a:buChar char="•"/>
-            </a:pPr>
-            <a:r>
-              <a:rPr lang="en-US" sz="1150" dirty="0">
-                <a:solidFill>
-                  <a:srgbClr val="1E293B"/>
-                </a:solidFill>
-                <a:latin typeface="Calibri" pitchFamily="34" charset="0"/>
-                <a:ea typeface="Calibri" pitchFamily="34" charset="-122"/>
-                <a:cs typeface="Calibri" pitchFamily="34" charset="-120"/>
-              </a:rPr>
-              <a:t>Модульность: легкое разделение на изолированные блоки.</a:t>
-            </a:r>
-            <a:endParaRPr lang="en-US" sz="1150" dirty="0"/>
-          </a:p>
-          <a:p>
-            <a:pPr marL="342900" indent="-342900">
-              <a:buSzPct val="100000"/>
-              <a:buChar char="•"/>
-            </a:pPr>
-            <a:r>
-              <a:rPr lang="en-US" sz="1150" dirty="0">
-                <a:solidFill>
-                  <a:srgbClr val="1E293B"/>
-                </a:solidFill>
-                <a:latin typeface="Calibri" pitchFamily="34" charset="0"/>
-                <a:ea typeface="Calibri" pitchFamily="34" charset="-122"/>
-                <a:cs typeface="Calibri" pitchFamily="34" charset="-120"/>
-              </a:rPr>
-              <a:t>Тестируемость: простое написание автотестов.</a:t>
-            </a:r>
-            <a:endParaRPr lang="en-US" sz="1150" dirty="0"/>
-          </a:p>
-          <a:p>
-            <a:pPr marL="342900" indent="-342900">
-              <a:buSzPct val="100000"/>
-              <a:buChar char="•"/>
-            </a:pPr>
-            <a:r>
-              <a:rPr lang="en-US" sz="1150" dirty="0">
-                <a:solidFill>
-                  <a:srgbClr val="1E293B"/>
-                </a:solidFill>
-                <a:latin typeface="Calibri" pitchFamily="34" charset="0"/>
-                <a:ea typeface="Calibri" pitchFamily="34" charset="-122"/>
-                <a:cs typeface="Calibri" pitchFamily="34" charset="-120"/>
-              </a:rPr>
-              <a:t>Поддерживаемость и расширяемость кодовой базы.</a:t>
-            </a:r>
-            <a:endParaRPr lang="en-US" sz="1150" dirty="0"/>
+            <a:pPr algn="l" indent="0" marL="0">
+              <a:buNone/>
+            </a:pPr>
+            <a:r>
+              <a:rPr lang="en-US" sz="1600" dirty="0">
+                <a:solidFill>
+                  <a:srgbClr val="2D2D3A"/>
+                </a:solidFill>
+                <a:latin typeface="Times New Roman" pitchFamily="34" charset="0"/>
+                <a:ea typeface="Times New Roman" pitchFamily="34" charset="-122"/>
+                <a:cs typeface="Times New Roman" pitchFamily="34" charset="-120"/>
+              </a:rPr>
+              <a:t>• Команда должна длительно поддерживать и масштабировать клиентский портал (интеграция с 1С, рост числа клиентов).</a:t>
+            </a:r>
+            <a:endParaRPr lang="en-US" sz="1600" dirty="0"/>
+          </a:p>
+          <a:p>
+            <a:pPr algn="l" indent="0" marL="0">
+              <a:buNone/>
+            </a:pPr>
+            <a:endParaRPr lang="en-US" sz="1600" dirty="0"/>
+          </a:p>
+          <a:p>
+            <a:pPr algn="l" indent="0" marL="0">
+              <a:buNone/>
+            </a:pPr>
+            <a:r>
+              <a:rPr lang="en-US" sz="1600" dirty="0">
+                <a:solidFill>
+                  <a:srgbClr val="2D2D3A"/>
+                </a:solidFill>
+                <a:latin typeface="Times New Roman" pitchFamily="34" charset="0"/>
+                <a:ea typeface="Times New Roman" pitchFamily="34" charset="-122"/>
+                <a:cs typeface="Times New Roman" pitchFamily="34" charset="-120"/>
+              </a:rPr>
+              <a:t>Конкретная задача моделирования:</a:t>
+            </a:r>
+            <a:endParaRPr lang="en-US" sz="1600" dirty="0"/>
+          </a:p>
+          <a:p>
+            <a:pPr algn="l" indent="0" marL="0">
+              <a:buNone/>
+            </a:pPr>
+            <a:r>
+              <a:rPr lang="en-US" sz="1600" dirty="0">
+                <a:solidFill>
+                  <a:srgbClr val="2D2D3A"/>
+                </a:solidFill>
+                <a:latin typeface="Times New Roman" pitchFamily="34" charset="0"/>
+                <a:ea typeface="Times New Roman" pitchFamily="34" charset="-122"/>
+                <a:cs typeface="Times New Roman" pitchFamily="34" charset="-120"/>
+              </a:rPr>
+              <a:t>• Определить и оценить внутренние атрибуты качества ПО (модульность, тестируемость, поддерживаемость, безопасность), важные именно для разработчиков и архитекторов проекта TPPO.</a:t>
+            </a:r>
+            <a:endParaRPr lang="en-US" sz="1600" dirty="0"/>
           </a:p>
         </p:txBody>
       </p:sp>
@@ -5587,17 +5717,17 @@
               <a:buNone/>
             </a:pPr>
             <a:r>
-              <a:rPr lang="en-US" sz="2000" b="1" dirty="0">
-                <a:solidFill>
-                  <a:srgbClr val="0F1E36"/>
-                </a:solidFill>
-                <a:latin typeface="Cambria" pitchFamily="34" charset="0"/>
-                <a:ea typeface="Cambria" pitchFamily="34" charset="-122"/>
-                <a:cs typeface="Cambria" pitchFamily="34" charset="-120"/>
-              </a:rPr>
-              <a:t>Ключевые атрибуты качества в проекте</a:t>
-            </a:r>
-            <a:endParaRPr lang="en-US" sz="2000" dirty="0"/>
+              <a:rPr lang="en-US" sz="1600" b="1" dirty="0">
+                <a:solidFill>
+                  <a:srgbClr val="1A1A2E"/>
+                </a:solidFill>
+                <a:latin typeface="Georgia" pitchFamily="34" charset="0"/>
+                <a:ea typeface="Georgia" pitchFamily="34" charset="-122"/>
+                <a:cs typeface="Georgia" pitchFamily="34" charset="-120"/>
+              </a:rPr>
+              <a:t>Атрибуты качества: пользователь vs разработчик</a:t>
+            </a:r>
+            <a:endParaRPr lang="en-US" sz="1600" dirty="0"/>
           </a:p>
         </p:txBody>
       </p:sp>
@@ -5610,26 +5740,26 @@
         <p:spPr>
           <a:xfrm>
             <a:off x="384048" y="822960"/>
-            <a:ext cx="4096512" cy="1312164"/>
+            <a:ext cx="8375904" cy="4119372"/>
           </a:xfrm>
           <a:prstGeom prst="roundRect">
             <a:avLst>
-              <a:gd name="adj" fmla="val 6969"/>
+              <a:gd name="adj" fmla="val 2220"/>
             </a:avLst>
           </a:prstGeom>
           <a:solidFill>
-            <a:srgbClr val="FFF7ED"/>
+            <a:srgbClr val="F8F4F0"/>
           </a:solidFill>
           <a:ln w="12700">
             <a:solidFill>
-              <a:srgbClr val="FFF7ED"/>
+              <a:srgbClr val="EFEAE3"/>
             </a:solidFill>
             <a:prstDash val="solid"/>
           </a:ln>
           <a:effectLst>
-            <a:outerShdw sx="100000" sy="100000" kx="0" ky="0" algn="bl" rotWithShape="0" blurRad="88900" dist="25400" dir="2700000">
+            <a:outerShdw sx="100000" sy="100000" kx="0" ky="0" algn="bl" rotWithShape="0" blurRad="152400" dist="38100" dir="2700000">
               <a:srgbClr val="000000">
-                <a:alpha val="9000"/>
+                <a:alpha val="12000"/>
               </a:srgbClr>
             </a:outerShdw>
           </a:effectLst>
@@ -5643,8 +5773,8 @@
         </p:nvSpPr>
         <p:spPr>
           <a:xfrm>
-            <a:off x="521208" y="896112"/>
-            <a:ext cx="3822192" cy="292608"/>
+            <a:off x="548640" y="932688"/>
+            <a:ext cx="8046720" cy="411480"/>
           </a:xfrm>
           <a:prstGeom prst="rect">
             <a:avLst/>
@@ -5662,13 +5792,13 @@
             <a:r>
               <a:rPr lang="en-US" sz="1200" b="1" dirty="0">
                 <a:solidFill>
-                  <a:srgbClr val="0F1E36"/>
+                  <a:srgbClr val="1A1A2E"/>
                 </a:solidFill>
                 <a:latin typeface="Cambria" pitchFamily="34" charset="0"/>
                 <a:ea typeface="Cambria" pitchFamily="34" charset="-122"/>
                 <a:cs typeface="Cambria" pitchFamily="34" charset="-120"/>
               </a:rPr>
-              <a:t>1. Модульность</a:t>
+              <a:t>Атрибуты качества: пользователь vs разработчик</a:t>
             </a:r>
             <a:endParaRPr lang="en-US" sz="1200" dirty="0"/>
           </a:p>
@@ -5682,8 +5812,8 @@
         </p:nvSpPr>
         <p:spPr>
           <a:xfrm>
-            <a:off x="521208" y="1207008"/>
-            <a:ext cx="3822192" cy="854964"/>
+            <a:off x="548640" y="1417320"/>
+            <a:ext cx="8046720" cy="3296412"/>
           </a:xfrm>
           <a:prstGeom prst="rect">
             <a:avLst/>
@@ -5692,472 +5822,149 @@
           <a:ln/>
         </p:spPr>
         <p:txBody>
-          <a:bodyPr wrap="square" rtlCol="0" anchor="ctr"/>
+          <a:bodyPr wrap="square" rtlCol="0" anchor="t"/>
           <a:lstStyle/>
           <a:p>
-            <a:pPr indent="0" marL="0">
-              <a:buNone/>
-            </a:pPr>
-            <a:r>
-              <a:rPr lang="en-US" sz="1050" dirty="0">
-                <a:solidFill>
-                  <a:srgbClr val="1E293B"/>
-                </a:solidFill>
-                <a:latin typeface="Calibri" pitchFamily="34" charset="0"/>
-                <a:ea typeface="Calibri" pitchFamily="34" charset="-122"/>
-                <a:cs typeface="Calibri" pitchFamily="34" charset="-120"/>
-              </a:rPr>
-              <a:t>Строгое разделение ответственности слоев (REST, Services, DB) для снижения зацепления (coupling).</a:t>
-            </a:r>
-            <a:endParaRPr lang="en-US" sz="1050" dirty="0"/>
-          </a:p>
-        </p:txBody>
-      </p:sp>
-      <p:sp>
-        <p:nvSpPr>
-          <p:cNvPr id="6" name="Shape 4"/>
-          <p:cNvSpPr/>
-          <p:nvPr/>
-        </p:nvSpPr>
-        <p:spPr>
-          <a:xfrm>
-            <a:off x="4663440" y="822960"/>
-            <a:ext cx="4096512" cy="1312164"/>
-          </a:xfrm>
-          <a:prstGeom prst="roundRect">
-            <a:avLst>
-              <a:gd name="adj" fmla="val 6969"/>
-            </a:avLst>
-          </a:prstGeom>
-          <a:solidFill>
-            <a:srgbClr val="D1FAE5"/>
-          </a:solidFill>
-          <a:ln w="12700">
-            <a:solidFill>
-              <a:srgbClr val="D1FAE5"/>
-            </a:solidFill>
-            <a:prstDash val="solid"/>
-          </a:ln>
-          <a:effectLst>
-            <a:outerShdw sx="100000" sy="100000" kx="0" ky="0" algn="bl" rotWithShape="0" blurRad="88900" dist="25400" dir="2700000">
-              <a:srgbClr val="000000">
-                <a:alpha val="9000"/>
-              </a:srgbClr>
-            </a:outerShdw>
-          </a:effectLst>
-        </p:spPr>
-      </p:sp>
-      <p:sp>
-        <p:nvSpPr>
-          <p:cNvPr id="7" name="Text 5"/>
-          <p:cNvSpPr/>
-          <p:nvPr/>
-        </p:nvSpPr>
-        <p:spPr>
-          <a:xfrm>
-            <a:off x="4800600" y="896112"/>
-            <a:ext cx="3822192" cy="292608"/>
-          </a:xfrm>
-          <a:prstGeom prst="rect">
-            <a:avLst/>
-          </a:prstGeom>
-          <a:noFill/>
-          <a:ln/>
-        </p:spPr>
-        <p:txBody>
-          <a:bodyPr wrap="square" rtlCol="0" anchor="ctr"/>
-          <a:lstStyle/>
-          <a:p>
-            <a:pPr indent="0" marL="0">
-              <a:buNone/>
-            </a:pPr>
-            <a:r>
-              <a:rPr lang="en-US" sz="1200" b="1" dirty="0">
-                <a:solidFill>
-                  <a:srgbClr val="0F1E36"/>
-                </a:solidFill>
-                <a:latin typeface="Cambria" pitchFamily="34" charset="0"/>
-                <a:ea typeface="Cambria" pitchFamily="34" charset="-122"/>
-                <a:cs typeface="Cambria" pitchFamily="34" charset="-120"/>
-              </a:rPr>
-              <a:t>2. Тестируемость</a:t>
-            </a:r>
-            <a:endParaRPr lang="en-US" sz="1200" dirty="0"/>
-          </a:p>
-        </p:txBody>
-      </p:sp>
-      <p:sp>
-        <p:nvSpPr>
-          <p:cNvPr id="8" name="Text 6"/>
-          <p:cNvSpPr/>
-          <p:nvPr/>
-        </p:nvSpPr>
-        <p:spPr>
-          <a:xfrm>
-            <a:off x="4800600" y="1207008"/>
-            <a:ext cx="3822192" cy="854964"/>
-          </a:xfrm>
-          <a:prstGeom prst="rect">
-            <a:avLst/>
-          </a:prstGeom>
-          <a:noFill/>
-          <a:ln/>
-        </p:spPr>
-        <p:txBody>
-          <a:bodyPr wrap="square" rtlCol="0" anchor="ctr"/>
-          <a:lstStyle/>
-          <a:p>
-            <a:pPr indent="0" marL="0">
-              <a:buNone/>
-            </a:pPr>
-            <a:r>
-              <a:rPr lang="en-US" sz="1050" dirty="0">
-                <a:solidFill>
-                  <a:srgbClr val="1E293B"/>
-                </a:solidFill>
-                <a:latin typeface="Calibri" pitchFamily="34" charset="0"/>
-                <a:ea typeface="Calibri" pitchFamily="34" charset="-122"/>
-                <a:cs typeface="Calibri" pitchFamily="34" charset="-120"/>
-              </a:rPr>
-              <a:t>Возможность легкого модульного, интеграционного и нагрузочного автоматического тестирования.</a:t>
-            </a:r>
-            <a:endParaRPr lang="en-US" sz="1050" dirty="0"/>
-          </a:p>
-        </p:txBody>
-      </p:sp>
-      <p:sp>
-        <p:nvSpPr>
-          <p:cNvPr id="9" name="Shape 7"/>
-          <p:cNvSpPr/>
-          <p:nvPr/>
-        </p:nvSpPr>
-        <p:spPr>
-          <a:xfrm>
-            <a:off x="384048" y="2226564"/>
-            <a:ext cx="4096512" cy="1312164"/>
-          </a:xfrm>
-          <a:prstGeom prst="roundRect">
-            <a:avLst>
-              <a:gd name="adj" fmla="val 6969"/>
-            </a:avLst>
-          </a:prstGeom>
-          <a:solidFill>
-            <a:srgbClr val="FFF7ED"/>
-          </a:solidFill>
-          <a:ln w="12700">
-            <a:solidFill>
-              <a:srgbClr val="FFF7ED"/>
-            </a:solidFill>
-            <a:prstDash val="solid"/>
-          </a:ln>
-          <a:effectLst>
-            <a:outerShdw sx="100000" sy="100000" kx="0" ky="0" algn="bl" rotWithShape="0" blurRad="88900" dist="25400" dir="2700000">
-              <a:srgbClr val="000000">
-                <a:alpha val="9000"/>
-              </a:srgbClr>
-            </a:outerShdw>
-          </a:effectLst>
-        </p:spPr>
-      </p:sp>
-      <p:sp>
-        <p:nvSpPr>
-          <p:cNvPr id="10" name="Text 8"/>
-          <p:cNvSpPr/>
-          <p:nvPr/>
-        </p:nvSpPr>
-        <p:spPr>
-          <a:xfrm>
-            <a:off x="521208" y="2299716"/>
-            <a:ext cx="3822192" cy="292608"/>
-          </a:xfrm>
-          <a:prstGeom prst="rect">
-            <a:avLst/>
-          </a:prstGeom>
-          <a:noFill/>
-          <a:ln/>
-        </p:spPr>
-        <p:txBody>
-          <a:bodyPr wrap="square" rtlCol="0" anchor="ctr"/>
-          <a:lstStyle/>
-          <a:p>
-            <a:pPr indent="0" marL="0">
-              <a:buNone/>
-            </a:pPr>
-            <a:r>
-              <a:rPr lang="en-US" sz="1200" b="1" dirty="0">
-                <a:solidFill>
-                  <a:srgbClr val="0F1E36"/>
-                </a:solidFill>
-                <a:latin typeface="Cambria" pitchFamily="34" charset="0"/>
-                <a:ea typeface="Cambria" pitchFamily="34" charset="-122"/>
-                <a:cs typeface="Cambria" pitchFamily="34" charset="-120"/>
-              </a:rPr>
-              <a:t>3. Читаемость/Поддерживаемость</a:t>
-            </a:r>
-            <a:endParaRPr lang="en-US" sz="1200" dirty="0"/>
-          </a:p>
-        </p:txBody>
-      </p:sp>
-      <p:sp>
-        <p:nvSpPr>
-          <p:cNvPr id="11" name="Text 9"/>
-          <p:cNvSpPr/>
-          <p:nvPr/>
-        </p:nvSpPr>
-        <p:spPr>
-          <a:xfrm>
-            <a:off x="521208" y="2610612"/>
-            <a:ext cx="3822192" cy="854964"/>
-          </a:xfrm>
-          <a:prstGeom prst="rect">
-            <a:avLst/>
-          </a:prstGeom>
-          <a:noFill/>
-          <a:ln/>
-        </p:spPr>
-        <p:txBody>
-          <a:bodyPr wrap="square" rtlCol="0" anchor="ctr"/>
-          <a:lstStyle/>
-          <a:p>
-            <a:pPr indent="0" marL="0">
-              <a:buNone/>
-            </a:pPr>
-            <a:r>
-              <a:rPr lang="en-US" sz="1050" dirty="0">
-                <a:solidFill>
-                  <a:srgbClr val="1E293B"/>
-                </a:solidFill>
-                <a:latin typeface="Calibri" pitchFamily="34" charset="0"/>
-                <a:ea typeface="Calibri" pitchFamily="34" charset="-122"/>
-                <a:cs typeface="Calibri" pitchFamily="34" charset="-120"/>
-              </a:rPr>
-              <a:t>Единообразие структуры кода, строгая типизация и самодокументируемость.</a:t>
-            </a:r>
-            <a:endParaRPr lang="en-US" sz="1050" dirty="0"/>
-          </a:p>
-        </p:txBody>
-      </p:sp>
-      <p:sp>
-        <p:nvSpPr>
-          <p:cNvPr id="12" name="Shape 10"/>
-          <p:cNvSpPr/>
-          <p:nvPr/>
-        </p:nvSpPr>
-        <p:spPr>
-          <a:xfrm>
-            <a:off x="4663440" y="2226564"/>
-            <a:ext cx="4096512" cy="1312164"/>
-          </a:xfrm>
-          <a:prstGeom prst="roundRect">
-            <a:avLst>
-              <a:gd name="adj" fmla="val 6969"/>
-            </a:avLst>
-          </a:prstGeom>
-          <a:solidFill>
-            <a:srgbClr val="D1FAE5"/>
-          </a:solidFill>
-          <a:ln w="12700">
-            <a:solidFill>
-              <a:srgbClr val="D1FAE5"/>
-            </a:solidFill>
-            <a:prstDash val="solid"/>
-          </a:ln>
-          <a:effectLst>
-            <a:outerShdw sx="100000" sy="100000" kx="0" ky="0" algn="bl" rotWithShape="0" blurRad="88900" dist="25400" dir="2700000">
-              <a:srgbClr val="000000">
-                <a:alpha val="9000"/>
-              </a:srgbClr>
-            </a:outerShdw>
-          </a:effectLst>
-        </p:spPr>
-      </p:sp>
-      <p:sp>
-        <p:nvSpPr>
-          <p:cNvPr id="13" name="Text 11"/>
-          <p:cNvSpPr/>
-          <p:nvPr/>
-        </p:nvSpPr>
-        <p:spPr>
-          <a:xfrm>
-            <a:off x="4800600" y="2299716"/>
-            <a:ext cx="3822192" cy="292608"/>
-          </a:xfrm>
-          <a:prstGeom prst="rect">
-            <a:avLst/>
-          </a:prstGeom>
-          <a:noFill/>
-          <a:ln/>
-        </p:spPr>
-        <p:txBody>
-          <a:bodyPr wrap="square" rtlCol="0" anchor="ctr"/>
-          <a:lstStyle/>
-          <a:p>
-            <a:pPr indent="0" marL="0">
-              <a:buNone/>
-            </a:pPr>
-            <a:r>
-              <a:rPr lang="en-US" sz="1200" b="1" dirty="0">
-                <a:solidFill>
-                  <a:srgbClr val="0F1E36"/>
-                </a:solidFill>
-                <a:latin typeface="Cambria" pitchFamily="34" charset="0"/>
-                <a:ea typeface="Cambria" pitchFamily="34" charset="-122"/>
-                <a:cs typeface="Cambria" pitchFamily="34" charset="-120"/>
-              </a:rPr>
-              <a:t>4. Расширяемость</a:t>
-            </a:r>
-            <a:endParaRPr lang="en-US" sz="1200" dirty="0"/>
-          </a:p>
-        </p:txBody>
-      </p:sp>
-      <p:sp>
-        <p:nvSpPr>
-          <p:cNvPr id="14" name="Text 12"/>
-          <p:cNvSpPr/>
-          <p:nvPr/>
-        </p:nvSpPr>
-        <p:spPr>
-          <a:xfrm>
-            <a:off x="4800600" y="2610612"/>
-            <a:ext cx="3822192" cy="854964"/>
-          </a:xfrm>
-          <a:prstGeom prst="rect">
-            <a:avLst/>
-          </a:prstGeom>
-          <a:noFill/>
-          <a:ln/>
-        </p:spPr>
-        <p:txBody>
-          <a:bodyPr wrap="square" rtlCol="0" anchor="ctr"/>
-          <a:lstStyle/>
-          <a:p>
-            <a:pPr indent="0" marL="0">
-              <a:buNone/>
-            </a:pPr>
-            <a:r>
-              <a:rPr lang="en-US" sz="1050" dirty="0">
-                <a:solidFill>
-                  <a:srgbClr val="1E293B"/>
-                </a:solidFill>
-                <a:latin typeface="Calibri" pitchFamily="34" charset="0"/>
-                <a:ea typeface="Calibri" pitchFamily="34" charset="-122"/>
-                <a:cs typeface="Calibri" pitchFamily="34" charset="-120"/>
-              </a:rPr>
-              <a:t>Слабая связанность модулей позволяет быстро добавлять новые типы услуг и уведомлений.</a:t>
-            </a:r>
-            <a:endParaRPr lang="en-US" sz="1050" dirty="0"/>
-          </a:p>
-        </p:txBody>
-      </p:sp>
-      <p:sp>
-        <p:nvSpPr>
-          <p:cNvPr id="15" name="Shape 13"/>
-          <p:cNvSpPr/>
-          <p:nvPr/>
-        </p:nvSpPr>
-        <p:spPr>
-          <a:xfrm>
-            <a:off x="384048" y="3630168"/>
-            <a:ext cx="4096512" cy="1312164"/>
-          </a:xfrm>
-          <a:prstGeom prst="roundRect">
-            <a:avLst>
-              <a:gd name="adj" fmla="val 6969"/>
-            </a:avLst>
-          </a:prstGeom>
-          <a:solidFill>
-            <a:srgbClr val="FFF7ED"/>
-          </a:solidFill>
-          <a:ln w="12700">
-            <a:solidFill>
-              <a:srgbClr val="FFF7ED"/>
-            </a:solidFill>
-            <a:prstDash val="solid"/>
-          </a:ln>
-          <a:effectLst>
-            <a:outerShdw sx="100000" sy="100000" kx="0" ky="0" algn="bl" rotWithShape="0" blurRad="88900" dist="25400" dir="2700000">
-              <a:srgbClr val="000000">
-                <a:alpha val="9000"/>
-              </a:srgbClr>
-            </a:outerShdw>
-          </a:effectLst>
-        </p:spPr>
-      </p:sp>
-      <p:sp>
-        <p:nvSpPr>
-          <p:cNvPr id="16" name="Text 14"/>
-          <p:cNvSpPr/>
-          <p:nvPr/>
-        </p:nvSpPr>
-        <p:spPr>
-          <a:xfrm>
-            <a:off x="521208" y="3703320"/>
-            <a:ext cx="3822192" cy="292608"/>
-          </a:xfrm>
-          <a:prstGeom prst="rect">
-            <a:avLst/>
-          </a:prstGeom>
-          <a:noFill/>
-          <a:ln/>
-        </p:spPr>
-        <p:txBody>
-          <a:bodyPr wrap="square" rtlCol="0" anchor="ctr"/>
-          <a:lstStyle/>
-          <a:p>
-            <a:pPr indent="0" marL="0">
-              <a:buNone/>
-            </a:pPr>
-            <a:r>
-              <a:rPr lang="en-US" sz="1200" b="1" dirty="0">
-                <a:solidFill>
-                  <a:srgbClr val="0F1E36"/>
-                </a:solidFill>
-                <a:latin typeface="Cambria" pitchFamily="34" charset="0"/>
-                <a:ea typeface="Cambria" pitchFamily="34" charset="-122"/>
-                <a:cs typeface="Cambria" pitchFamily="34" charset="-120"/>
-              </a:rPr>
-              <a:t>5. Безопасность</a:t>
-            </a:r>
-            <a:endParaRPr lang="en-US" sz="1200" dirty="0"/>
-          </a:p>
-        </p:txBody>
-      </p:sp>
-      <p:sp>
-        <p:nvSpPr>
-          <p:cNvPr id="17" name="Text 15"/>
-          <p:cNvSpPr/>
-          <p:nvPr/>
-        </p:nvSpPr>
-        <p:spPr>
-          <a:xfrm>
-            <a:off x="521208" y="4014216"/>
-            <a:ext cx="3822192" cy="854964"/>
-          </a:xfrm>
-          <a:prstGeom prst="rect">
-            <a:avLst/>
-          </a:prstGeom>
-          <a:noFill/>
-          <a:ln/>
-        </p:spPr>
-        <p:txBody>
-          <a:bodyPr wrap="square" rtlCol="0" anchor="ctr"/>
-          <a:lstStyle/>
-          <a:p>
-            <a:pPr indent="0" marL="0">
-              <a:buNone/>
-            </a:pPr>
-            <a:r>
-              <a:rPr lang="en-US" sz="1050" dirty="0">
-                <a:solidFill>
-                  <a:srgbClr val="1E293B"/>
-                </a:solidFill>
-                <a:latin typeface="Calibri" pitchFamily="34" charset="0"/>
-                <a:ea typeface="Calibri" pitchFamily="34" charset="-122"/>
-                <a:cs typeface="Calibri" pitchFamily="34" charset="-120"/>
-              </a:rPr>
-              <a:t>Надежная авторизация, разграничение прав и защита от внедрения вредоносного кода.</a:t>
-            </a:r>
-            <a:endParaRPr lang="en-US" sz="1050" dirty="0"/>
+            <a:pPr algn="l" indent="0" marL="0">
+              <a:buNone/>
+            </a:pPr>
+            <a:r>
+              <a:rPr lang="en-US" sz="1600" dirty="0">
+                <a:solidFill>
+                  <a:srgbClr val="2D2D3A"/>
+                </a:solidFill>
+                <a:latin typeface="Times New Roman" pitchFamily="34" charset="0"/>
+                <a:ea typeface="Times New Roman" pitchFamily="34" charset="-122"/>
+                <a:cs typeface="Times New Roman" pitchFamily="34" charset="-120"/>
+              </a:rPr>
+              <a:t>Что видит конечный пользователь?</a:t>
+            </a:r>
+            <a:endParaRPr lang="en-US" sz="1600" dirty="0"/>
+          </a:p>
+          <a:p>
+            <a:pPr algn="l" indent="0" marL="0">
+              <a:buNone/>
+            </a:pPr>
+            <a:r>
+              <a:rPr lang="en-US" sz="1600" dirty="0">
+                <a:solidFill>
+                  <a:srgbClr val="2D2D3A"/>
+                </a:solidFill>
+                <a:latin typeface="Times New Roman" pitchFamily="34" charset="0"/>
+                <a:ea typeface="Times New Roman" pitchFamily="34" charset="-122"/>
+                <a:cs typeface="Times New Roman" pitchFamily="34" charset="-120"/>
+              </a:rPr>
+              <a:t>• Простоту и отзывчивость интерфейса (Usability).</a:t>
+            </a:r>
+            <a:endParaRPr lang="en-US" sz="1600" dirty="0"/>
+          </a:p>
+          <a:p>
+            <a:pPr algn="l" indent="0" marL="0">
+              <a:buNone/>
+            </a:pPr>
+            <a:r>
+              <a:rPr lang="en-US" sz="1600" dirty="0">
+                <a:solidFill>
+                  <a:srgbClr val="2D2D3A"/>
+                </a:solidFill>
+                <a:latin typeface="Times New Roman" pitchFamily="34" charset="0"/>
+                <a:ea typeface="Times New Roman" pitchFamily="34" charset="-122"/>
+                <a:cs typeface="Times New Roman" pitchFamily="34" charset="-120"/>
+              </a:rPr>
+              <a:t>• Высокую скорость отклика системы (Performance).</a:t>
+            </a:r>
+            <a:endParaRPr lang="en-US" sz="1600" dirty="0"/>
+          </a:p>
+          <a:p>
+            <a:pPr algn="l" indent="0" marL="0">
+              <a:buNone/>
+            </a:pPr>
+            <a:r>
+              <a:rPr lang="en-US" sz="1600" dirty="0">
+                <a:solidFill>
+                  <a:srgbClr val="2D2D3A"/>
+                </a:solidFill>
+                <a:latin typeface="Times New Roman" pitchFamily="34" charset="0"/>
+                <a:ea typeface="Times New Roman" pitchFamily="34" charset="-122"/>
+                <a:cs typeface="Times New Roman" pitchFamily="34" charset="-120"/>
+              </a:rPr>
+              <a:t>• Постоянную доступность без сбоев (Uptime / Reliability).</a:t>
+            </a:r>
+            <a:endParaRPr lang="en-US" sz="1600" dirty="0"/>
+          </a:p>
+          <a:p>
+            <a:pPr algn="l" indent="0" marL="0">
+              <a:buNone/>
+            </a:pPr>
+            <a:endParaRPr lang="en-US" sz="1600" dirty="0"/>
+          </a:p>
+          <a:p>
+            <a:pPr algn="l" indent="0" marL="0">
+              <a:buNone/>
+            </a:pPr>
+            <a:r>
+              <a:rPr lang="en-US" sz="1600" dirty="0">
+                <a:solidFill>
+                  <a:srgbClr val="2D2D3A"/>
+                </a:solidFill>
+                <a:latin typeface="Times New Roman" pitchFamily="34" charset="0"/>
+                <a:ea typeface="Times New Roman" pitchFamily="34" charset="-122"/>
+                <a:cs typeface="Times New Roman" pitchFamily="34" charset="-120"/>
+              </a:rPr>
+              <a:t>Что важно инженеру и архитектору?</a:t>
+            </a:r>
+            <a:endParaRPr lang="en-US" sz="1600" dirty="0"/>
+          </a:p>
+          <a:p>
+            <a:pPr algn="l" indent="0" marL="0">
+              <a:buNone/>
+            </a:pPr>
+            <a:r>
+              <a:rPr lang="en-US" sz="1600" dirty="0">
+                <a:solidFill>
+                  <a:srgbClr val="2D2D3A"/>
+                </a:solidFill>
+                <a:latin typeface="Times New Roman" pitchFamily="34" charset="0"/>
+                <a:ea typeface="Times New Roman" pitchFamily="34" charset="-122"/>
+                <a:cs typeface="Times New Roman" pitchFamily="34" charset="-120"/>
+              </a:rPr>
+              <a:t>• Модульность: легкое разделение на изолированные блоки.</a:t>
+            </a:r>
+            <a:endParaRPr lang="en-US" sz="1600" dirty="0"/>
+          </a:p>
+          <a:p>
+            <a:pPr algn="l" indent="0" marL="0">
+              <a:buNone/>
+            </a:pPr>
+            <a:r>
+              <a:rPr lang="en-US" sz="1600" dirty="0">
+                <a:solidFill>
+                  <a:srgbClr val="2D2D3A"/>
+                </a:solidFill>
+                <a:latin typeface="Times New Roman" pitchFamily="34" charset="0"/>
+                <a:ea typeface="Times New Roman" pitchFamily="34" charset="-122"/>
+                <a:cs typeface="Times New Roman" pitchFamily="34" charset="-120"/>
+              </a:rPr>
+              <a:t>• Тестируемость: простое написание автотестов.</a:t>
+            </a:r>
+            <a:endParaRPr lang="en-US" sz="1600" dirty="0"/>
+          </a:p>
+          <a:p>
+            <a:pPr algn="l" indent="0" marL="0">
+              <a:buNone/>
+            </a:pPr>
+            <a:r>
+              <a:rPr lang="en-US" sz="1600" dirty="0">
+                <a:solidFill>
+                  <a:srgbClr val="2D2D3A"/>
+                </a:solidFill>
+                <a:latin typeface="Times New Roman" pitchFamily="34" charset="0"/>
+                <a:ea typeface="Times New Roman" pitchFamily="34" charset="-122"/>
+                <a:cs typeface="Times New Roman" pitchFamily="34" charset="-120"/>
+              </a:rPr>
+              <a:t>• Поддерживаемость и расширяемость кодовой базы.</a:t>
+            </a:r>
+            <a:endParaRPr lang="en-US" sz="1600" dirty="0"/>
           </a:p>
         </p:txBody>
       </p:sp>
@@ -6218,23 +6025,654 @@
               <a:buNone/>
             </a:pPr>
             <a:r>
-              <a:rPr lang="en-US" sz="2000" b="1" dirty="0">
-                <a:solidFill>
-                  <a:srgbClr val="0F1E36"/>
+              <a:rPr lang="en-US" sz="1600" b="1" dirty="0">
+                <a:solidFill>
+                  <a:srgbClr val="1A1A2E"/>
+                </a:solidFill>
+                <a:latin typeface="Georgia" pitchFamily="34" charset="0"/>
+                <a:ea typeface="Georgia" pitchFamily="34" charset="-122"/>
+                <a:cs typeface="Georgia" pitchFamily="34" charset="-120"/>
+              </a:rPr>
+              <a:t>Ключевые атрибуты качества в проекте</a:t>
+            </a:r>
+            <a:endParaRPr lang="en-US" sz="1600" dirty="0"/>
+          </a:p>
+        </p:txBody>
+      </p:sp>
+      <p:sp>
+        <p:nvSpPr>
+          <p:cNvPr id="3" name="Shape 1"/>
+          <p:cNvSpPr/>
+          <p:nvPr/>
+        </p:nvSpPr>
+        <p:spPr>
+          <a:xfrm>
+            <a:off x="384048" y="822960"/>
+            <a:ext cx="4096512" cy="1312164"/>
+          </a:xfrm>
+          <a:prstGeom prst="roundRect">
+            <a:avLst>
+              <a:gd name="adj" fmla="val 6969"/>
+            </a:avLst>
+          </a:prstGeom>
+          <a:solidFill>
+            <a:srgbClr val="F8F4F0"/>
+          </a:solidFill>
+          <a:ln w="12700">
+            <a:solidFill>
+              <a:srgbClr val="EFEAE3"/>
+            </a:solidFill>
+            <a:prstDash val="solid"/>
+          </a:ln>
+          <a:effectLst>
+            <a:outerShdw sx="100000" sy="100000" kx="0" ky="0" algn="bl" rotWithShape="0" blurRad="152400" dist="38100" dir="2700000">
+              <a:srgbClr val="000000">
+                <a:alpha val="12000"/>
+              </a:srgbClr>
+            </a:outerShdw>
+          </a:effectLst>
+        </p:spPr>
+      </p:sp>
+      <p:sp>
+        <p:nvSpPr>
+          <p:cNvPr id="4" name="Text 2"/>
+          <p:cNvSpPr/>
+          <p:nvPr/>
+        </p:nvSpPr>
+        <p:spPr>
+          <a:xfrm>
+            <a:off x="521208" y="896112"/>
+            <a:ext cx="3822192" cy="292608"/>
+          </a:xfrm>
+          <a:prstGeom prst="rect">
+            <a:avLst/>
+          </a:prstGeom>
+          <a:noFill/>
+          <a:ln/>
+        </p:spPr>
+        <p:txBody>
+          <a:bodyPr wrap="square" rtlCol="0" anchor="ctr"/>
+          <a:lstStyle/>
+          <a:p>
+            <a:pPr indent="0" marL="0">
+              <a:buNone/>
+            </a:pPr>
+            <a:r>
+              <a:rPr lang="en-US" sz="1200" b="1" dirty="0">
+                <a:solidFill>
+                  <a:srgbClr val="1A1A2E"/>
                 </a:solidFill>
                 <a:latin typeface="Cambria" pitchFamily="34" charset="0"/>
                 <a:ea typeface="Cambria" pitchFamily="34" charset="-122"/>
                 <a:cs typeface="Cambria" pitchFamily="34" charset="-120"/>
               </a:rPr>
+              <a:t>1. Модульность</a:t>
+            </a:r>
+            <a:endParaRPr lang="en-US" sz="1200" dirty="0"/>
+          </a:p>
+        </p:txBody>
+      </p:sp>
+      <p:sp>
+        <p:nvSpPr>
+          <p:cNvPr id="5" name="Text 3"/>
+          <p:cNvSpPr/>
+          <p:nvPr/>
+        </p:nvSpPr>
+        <p:spPr>
+          <a:xfrm>
+            <a:off x="521208" y="1207008"/>
+            <a:ext cx="3822192" cy="854964"/>
+          </a:xfrm>
+          <a:prstGeom prst="rect">
+            <a:avLst/>
+          </a:prstGeom>
+          <a:noFill/>
+          <a:ln/>
+        </p:spPr>
+        <p:txBody>
+          <a:bodyPr wrap="square" rtlCol="0" anchor="ctr"/>
+          <a:lstStyle/>
+          <a:p>
+            <a:pPr indent="0" marL="0">
+              <a:buNone/>
+            </a:pPr>
+            <a:r>
+              <a:rPr lang="en-US" sz="1200" dirty="0">
+                <a:solidFill>
+                  <a:srgbClr val="2D2D3A"/>
+                </a:solidFill>
+                <a:latin typeface="Times New Roman" pitchFamily="34" charset="0"/>
+                <a:ea typeface="Times New Roman" pitchFamily="34" charset="-122"/>
+                <a:cs typeface="Times New Roman" pitchFamily="34" charset="-120"/>
+              </a:rPr>
+              <a:t>Строгое разделение ответственности слоев (REST, Services, DB) для снижения зацепления (coupling).</a:t>
+            </a:r>
+            <a:endParaRPr lang="en-US" sz="1200" dirty="0"/>
+          </a:p>
+        </p:txBody>
+      </p:sp>
+      <p:sp>
+        <p:nvSpPr>
+          <p:cNvPr id="6" name="Shape 4"/>
+          <p:cNvSpPr/>
+          <p:nvPr/>
+        </p:nvSpPr>
+        <p:spPr>
+          <a:xfrm>
+            <a:off x="4663440" y="822960"/>
+            <a:ext cx="4096512" cy="1312164"/>
+          </a:xfrm>
+          <a:prstGeom prst="roundRect">
+            <a:avLst>
+              <a:gd name="adj" fmla="val 6969"/>
+            </a:avLst>
+          </a:prstGeom>
+          <a:solidFill>
+            <a:srgbClr val="D4EDDA"/>
+          </a:solidFill>
+          <a:ln w="12700">
+            <a:solidFill>
+              <a:srgbClr val="EFEAE3"/>
+            </a:solidFill>
+            <a:prstDash val="solid"/>
+          </a:ln>
+          <a:effectLst>
+            <a:outerShdw sx="100000" sy="100000" kx="0" ky="0" algn="bl" rotWithShape="0" blurRad="152400" dist="38100" dir="2700000">
+              <a:srgbClr val="000000">
+                <a:alpha val="12000"/>
+              </a:srgbClr>
+            </a:outerShdw>
+          </a:effectLst>
+        </p:spPr>
+      </p:sp>
+      <p:sp>
+        <p:nvSpPr>
+          <p:cNvPr id="7" name="Text 5"/>
+          <p:cNvSpPr/>
+          <p:nvPr/>
+        </p:nvSpPr>
+        <p:spPr>
+          <a:xfrm>
+            <a:off x="4800600" y="896112"/>
+            <a:ext cx="3822192" cy="292608"/>
+          </a:xfrm>
+          <a:prstGeom prst="rect">
+            <a:avLst/>
+          </a:prstGeom>
+          <a:noFill/>
+          <a:ln/>
+        </p:spPr>
+        <p:txBody>
+          <a:bodyPr wrap="square" rtlCol="0" anchor="ctr"/>
+          <a:lstStyle/>
+          <a:p>
+            <a:pPr indent="0" marL="0">
+              <a:buNone/>
+            </a:pPr>
+            <a:r>
+              <a:rPr lang="en-US" sz="1200" b="1" dirty="0">
+                <a:solidFill>
+                  <a:srgbClr val="1A1A2E"/>
+                </a:solidFill>
+                <a:latin typeface="Cambria" pitchFamily="34" charset="0"/>
+                <a:ea typeface="Cambria" pitchFamily="34" charset="-122"/>
+                <a:cs typeface="Cambria" pitchFamily="34" charset="-120"/>
+              </a:rPr>
+              <a:t>2. Тестируемость</a:t>
+            </a:r>
+            <a:endParaRPr lang="en-US" sz="1200" dirty="0"/>
+          </a:p>
+        </p:txBody>
+      </p:sp>
+      <p:sp>
+        <p:nvSpPr>
+          <p:cNvPr id="8" name="Text 6"/>
+          <p:cNvSpPr/>
+          <p:nvPr/>
+        </p:nvSpPr>
+        <p:spPr>
+          <a:xfrm>
+            <a:off x="4800600" y="1207008"/>
+            <a:ext cx="3822192" cy="854964"/>
+          </a:xfrm>
+          <a:prstGeom prst="rect">
+            <a:avLst/>
+          </a:prstGeom>
+          <a:noFill/>
+          <a:ln/>
+        </p:spPr>
+        <p:txBody>
+          <a:bodyPr wrap="square" rtlCol="0" anchor="ctr"/>
+          <a:lstStyle/>
+          <a:p>
+            <a:pPr indent="0" marL="0">
+              <a:buNone/>
+            </a:pPr>
+            <a:r>
+              <a:rPr lang="en-US" sz="1200" dirty="0">
+                <a:solidFill>
+                  <a:srgbClr val="2D2D3A"/>
+                </a:solidFill>
+                <a:latin typeface="Times New Roman" pitchFamily="34" charset="0"/>
+                <a:ea typeface="Times New Roman" pitchFamily="34" charset="-122"/>
+                <a:cs typeface="Times New Roman" pitchFamily="34" charset="-120"/>
+              </a:rPr>
+              <a:t>Возможность легкого модульного, интеграционного и нагрузочного автоматического тестирования.</a:t>
+            </a:r>
+            <a:endParaRPr lang="en-US" sz="1200" dirty="0"/>
+          </a:p>
+        </p:txBody>
+      </p:sp>
+      <p:sp>
+        <p:nvSpPr>
+          <p:cNvPr id="9" name="Shape 7"/>
+          <p:cNvSpPr/>
+          <p:nvPr/>
+        </p:nvSpPr>
+        <p:spPr>
+          <a:xfrm>
+            <a:off x="384048" y="2226564"/>
+            <a:ext cx="4096512" cy="1312164"/>
+          </a:xfrm>
+          <a:prstGeom prst="roundRect">
+            <a:avLst>
+              <a:gd name="adj" fmla="val 6969"/>
+            </a:avLst>
+          </a:prstGeom>
+          <a:solidFill>
+            <a:srgbClr val="F8F4F0"/>
+          </a:solidFill>
+          <a:ln w="12700">
+            <a:solidFill>
+              <a:srgbClr val="EFEAE3"/>
+            </a:solidFill>
+            <a:prstDash val="solid"/>
+          </a:ln>
+          <a:effectLst>
+            <a:outerShdw sx="100000" sy="100000" kx="0" ky="0" algn="bl" rotWithShape="0" blurRad="152400" dist="38100" dir="2700000">
+              <a:srgbClr val="000000">
+                <a:alpha val="12000"/>
+              </a:srgbClr>
+            </a:outerShdw>
+          </a:effectLst>
+        </p:spPr>
+      </p:sp>
+      <p:sp>
+        <p:nvSpPr>
+          <p:cNvPr id="10" name="Text 8"/>
+          <p:cNvSpPr/>
+          <p:nvPr/>
+        </p:nvSpPr>
+        <p:spPr>
+          <a:xfrm>
+            <a:off x="521208" y="2299716"/>
+            <a:ext cx="3822192" cy="292608"/>
+          </a:xfrm>
+          <a:prstGeom prst="rect">
+            <a:avLst/>
+          </a:prstGeom>
+          <a:noFill/>
+          <a:ln/>
+        </p:spPr>
+        <p:txBody>
+          <a:bodyPr wrap="square" rtlCol="0" anchor="ctr"/>
+          <a:lstStyle/>
+          <a:p>
+            <a:pPr indent="0" marL="0">
+              <a:buNone/>
+            </a:pPr>
+            <a:r>
+              <a:rPr lang="en-US" sz="1200" b="1" dirty="0">
+                <a:solidFill>
+                  <a:srgbClr val="1A1A2E"/>
+                </a:solidFill>
+                <a:latin typeface="Cambria" pitchFamily="34" charset="0"/>
+                <a:ea typeface="Cambria" pitchFamily="34" charset="-122"/>
+                <a:cs typeface="Cambria" pitchFamily="34" charset="-120"/>
+              </a:rPr>
+              <a:t>3. Читаемость/Поддерживаемость</a:t>
+            </a:r>
+            <a:endParaRPr lang="en-US" sz="1200" dirty="0"/>
+          </a:p>
+        </p:txBody>
+      </p:sp>
+      <p:sp>
+        <p:nvSpPr>
+          <p:cNvPr id="11" name="Text 9"/>
+          <p:cNvSpPr/>
+          <p:nvPr/>
+        </p:nvSpPr>
+        <p:spPr>
+          <a:xfrm>
+            <a:off x="521208" y="2610612"/>
+            <a:ext cx="3822192" cy="854964"/>
+          </a:xfrm>
+          <a:prstGeom prst="rect">
+            <a:avLst/>
+          </a:prstGeom>
+          <a:noFill/>
+          <a:ln/>
+        </p:spPr>
+        <p:txBody>
+          <a:bodyPr wrap="square" rtlCol="0" anchor="ctr"/>
+          <a:lstStyle/>
+          <a:p>
+            <a:pPr indent="0" marL="0">
+              <a:buNone/>
+            </a:pPr>
+            <a:r>
+              <a:rPr lang="en-US" sz="1200" dirty="0">
+                <a:solidFill>
+                  <a:srgbClr val="2D2D3A"/>
+                </a:solidFill>
+                <a:latin typeface="Times New Roman" pitchFamily="34" charset="0"/>
+                <a:ea typeface="Times New Roman" pitchFamily="34" charset="-122"/>
+                <a:cs typeface="Times New Roman" pitchFamily="34" charset="-120"/>
+              </a:rPr>
+              <a:t>Единообразие структуры кода, строгая типизация и самодокументируемость.</a:t>
+            </a:r>
+            <a:endParaRPr lang="en-US" sz="1200" dirty="0"/>
+          </a:p>
+        </p:txBody>
+      </p:sp>
+      <p:sp>
+        <p:nvSpPr>
+          <p:cNvPr id="12" name="Shape 10"/>
+          <p:cNvSpPr/>
+          <p:nvPr/>
+        </p:nvSpPr>
+        <p:spPr>
+          <a:xfrm>
+            <a:off x="4663440" y="2226564"/>
+            <a:ext cx="4096512" cy="1312164"/>
+          </a:xfrm>
+          <a:prstGeom prst="roundRect">
+            <a:avLst>
+              <a:gd name="adj" fmla="val 6969"/>
+            </a:avLst>
+          </a:prstGeom>
+          <a:solidFill>
+            <a:srgbClr val="D4EDDA"/>
+          </a:solidFill>
+          <a:ln w="12700">
+            <a:solidFill>
+              <a:srgbClr val="EFEAE3"/>
+            </a:solidFill>
+            <a:prstDash val="solid"/>
+          </a:ln>
+          <a:effectLst>
+            <a:outerShdw sx="100000" sy="100000" kx="0" ky="0" algn="bl" rotWithShape="0" blurRad="152400" dist="38100" dir="2700000">
+              <a:srgbClr val="000000">
+                <a:alpha val="12000"/>
+              </a:srgbClr>
+            </a:outerShdw>
+          </a:effectLst>
+        </p:spPr>
+      </p:sp>
+      <p:sp>
+        <p:nvSpPr>
+          <p:cNvPr id="13" name="Text 11"/>
+          <p:cNvSpPr/>
+          <p:nvPr/>
+        </p:nvSpPr>
+        <p:spPr>
+          <a:xfrm>
+            <a:off x="4800600" y="2299716"/>
+            <a:ext cx="3822192" cy="292608"/>
+          </a:xfrm>
+          <a:prstGeom prst="rect">
+            <a:avLst/>
+          </a:prstGeom>
+          <a:noFill/>
+          <a:ln/>
+        </p:spPr>
+        <p:txBody>
+          <a:bodyPr wrap="square" rtlCol="0" anchor="ctr"/>
+          <a:lstStyle/>
+          <a:p>
+            <a:pPr indent="0" marL="0">
+              <a:buNone/>
+            </a:pPr>
+            <a:r>
+              <a:rPr lang="en-US" sz="1200" b="1" dirty="0">
+                <a:solidFill>
+                  <a:srgbClr val="1A1A2E"/>
+                </a:solidFill>
+                <a:latin typeface="Cambria" pitchFamily="34" charset="0"/>
+                <a:ea typeface="Cambria" pitchFamily="34" charset="-122"/>
+                <a:cs typeface="Cambria" pitchFamily="34" charset="-120"/>
+              </a:rPr>
+              <a:t>4. Расширяемость</a:t>
+            </a:r>
+            <a:endParaRPr lang="en-US" sz="1200" dirty="0"/>
+          </a:p>
+        </p:txBody>
+      </p:sp>
+      <p:sp>
+        <p:nvSpPr>
+          <p:cNvPr id="14" name="Text 12"/>
+          <p:cNvSpPr/>
+          <p:nvPr/>
+        </p:nvSpPr>
+        <p:spPr>
+          <a:xfrm>
+            <a:off x="4800600" y="2610612"/>
+            <a:ext cx="3822192" cy="854964"/>
+          </a:xfrm>
+          <a:prstGeom prst="rect">
+            <a:avLst/>
+          </a:prstGeom>
+          <a:noFill/>
+          <a:ln/>
+        </p:spPr>
+        <p:txBody>
+          <a:bodyPr wrap="square" rtlCol="0" anchor="ctr"/>
+          <a:lstStyle/>
+          <a:p>
+            <a:pPr indent="0" marL="0">
+              <a:buNone/>
+            </a:pPr>
+            <a:r>
+              <a:rPr lang="en-US" sz="1200" dirty="0">
+                <a:solidFill>
+                  <a:srgbClr val="2D2D3A"/>
+                </a:solidFill>
+                <a:latin typeface="Times New Roman" pitchFamily="34" charset="0"/>
+                <a:ea typeface="Times New Roman" pitchFamily="34" charset="-122"/>
+                <a:cs typeface="Times New Roman" pitchFamily="34" charset="-120"/>
+              </a:rPr>
+              <a:t>Слабая связанность модулей позволяет быстро добавлять новые типы услуг и уведомлений.</a:t>
+            </a:r>
+            <a:endParaRPr lang="en-US" sz="1200" dirty="0"/>
+          </a:p>
+        </p:txBody>
+      </p:sp>
+      <p:sp>
+        <p:nvSpPr>
+          <p:cNvPr id="15" name="Shape 13"/>
+          <p:cNvSpPr/>
+          <p:nvPr/>
+        </p:nvSpPr>
+        <p:spPr>
+          <a:xfrm>
+            <a:off x="384048" y="3630168"/>
+            <a:ext cx="4096512" cy="1312164"/>
+          </a:xfrm>
+          <a:prstGeom prst="roundRect">
+            <a:avLst>
+              <a:gd name="adj" fmla="val 6969"/>
+            </a:avLst>
+          </a:prstGeom>
+          <a:solidFill>
+            <a:srgbClr val="F8F4F0"/>
+          </a:solidFill>
+          <a:ln w="12700">
+            <a:solidFill>
+              <a:srgbClr val="EFEAE3"/>
+            </a:solidFill>
+            <a:prstDash val="solid"/>
+          </a:ln>
+          <a:effectLst>
+            <a:outerShdw sx="100000" sy="100000" kx="0" ky="0" algn="bl" rotWithShape="0" blurRad="152400" dist="38100" dir="2700000">
+              <a:srgbClr val="000000">
+                <a:alpha val="12000"/>
+              </a:srgbClr>
+            </a:outerShdw>
+          </a:effectLst>
+        </p:spPr>
+      </p:sp>
+      <p:sp>
+        <p:nvSpPr>
+          <p:cNvPr id="16" name="Text 14"/>
+          <p:cNvSpPr/>
+          <p:nvPr/>
+        </p:nvSpPr>
+        <p:spPr>
+          <a:xfrm>
+            <a:off x="521208" y="3703320"/>
+            <a:ext cx="3822192" cy="292608"/>
+          </a:xfrm>
+          <a:prstGeom prst="rect">
+            <a:avLst/>
+          </a:prstGeom>
+          <a:noFill/>
+          <a:ln/>
+        </p:spPr>
+        <p:txBody>
+          <a:bodyPr wrap="square" rtlCol="0" anchor="ctr"/>
+          <a:lstStyle/>
+          <a:p>
+            <a:pPr indent="0" marL="0">
+              <a:buNone/>
+            </a:pPr>
+            <a:r>
+              <a:rPr lang="en-US" sz="1200" b="1" dirty="0">
+                <a:solidFill>
+                  <a:srgbClr val="1A1A2E"/>
+                </a:solidFill>
+                <a:latin typeface="Cambria" pitchFamily="34" charset="0"/>
+                <a:ea typeface="Cambria" pitchFamily="34" charset="-122"/>
+                <a:cs typeface="Cambria" pitchFamily="34" charset="-120"/>
+              </a:rPr>
+              <a:t>5. Безопасность</a:t>
+            </a:r>
+            <a:endParaRPr lang="en-US" sz="1200" dirty="0"/>
+          </a:p>
+        </p:txBody>
+      </p:sp>
+      <p:sp>
+        <p:nvSpPr>
+          <p:cNvPr id="17" name="Text 15"/>
+          <p:cNvSpPr/>
+          <p:nvPr/>
+        </p:nvSpPr>
+        <p:spPr>
+          <a:xfrm>
+            <a:off x="521208" y="4014216"/>
+            <a:ext cx="3822192" cy="854964"/>
+          </a:xfrm>
+          <a:prstGeom prst="rect">
+            <a:avLst/>
+          </a:prstGeom>
+          <a:noFill/>
+          <a:ln/>
+        </p:spPr>
+        <p:txBody>
+          <a:bodyPr wrap="square" rtlCol="0" anchor="ctr"/>
+          <a:lstStyle/>
+          <a:p>
+            <a:pPr indent="0" marL="0">
+              <a:buNone/>
+            </a:pPr>
+            <a:r>
+              <a:rPr lang="en-US" sz="1200" dirty="0">
+                <a:solidFill>
+                  <a:srgbClr val="2D2D3A"/>
+                </a:solidFill>
+                <a:latin typeface="Times New Roman" pitchFamily="34" charset="0"/>
+                <a:ea typeface="Times New Roman" pitchFamily="34" charset="-122"/>
+                <a:cs typeface="Times New Roman" pitchFamily="34" charset="-120"/>
+              </a:rPr>
+              <a:t>Надежная авторизация, разграничение прав и защита от внедрения вредоносного кода.</a:t>
+            </a:r>
+            <a:endParaRPr lang="en-US" sz="1200" dirty="0"/>
+          </a:p>
+        </p:txBody>
+      </p:sp>
+    </p:spTree>
+  </p:cSld>
+  <p:clrMapOvr>
+    <a:masterClrMapping/>
+  </p:clrMapOvr>
+</p:sld>
+</file>
+
+<file path=ppt/slides/slide5.xml><?xml version="1.0" encoding="utf-8"?>
+<p:sld xmlns:a="http://schemas.openxmlformats.org/drawingml/2006/main" xmlns:r="http://schemas.openxmlformats.org/officeDocument/2006/relationships" xmlns:p="http://schemas.openxmlformats.org/presentationml/2006/main">
+  <p:cSld name="Slide 5">
+    <p:bg>
+      <p:bgPr>
+        <a:solidFill>
+          <a:srgbClr val="FFFFFF"/>
+        </a:solidFill>
+      </p:bgPr>
+    </p:bg>
+    <p:spTree>
+      <p:nvGrpSpPr>
+        <p:cNvPr id="1" name=""/>
+        <p:cNvGrpSpPr/>
+        <p:nvPr/>
+      </p:nvGrpSpPr>
+      <p:grpSpPr>
+        <a:xfrm>
+          <a:off x="0" y="0"/>
+          <a:ext cx="0" cy="0"/>
+          <a:chOff x="0" y="0"/>
+          <a:chExt cx="0" cy="0"/>
+        </a:xfrm>
+      </p:grpSpPr>
+      <p:sp>
+        <p:nvSpPr>
+          <p:cNvPr id="2" name="Text 0"/>
+          <p:cNvSpPr/>
+          <p:nvPr/>
+        </p:nvSpPr>
+        <p:spPr>
+          <a:xfrm>
+            <a:off x="384048" y="164592"/>
+            <a:ext cx="8375904" cy="548640"/>
+          </a:xfrm>
+          <a:prstGeom prst="rect">
+            <a:avLst/>
+          </a:prstGeom>
+          <a:noFill/>
+          <a:ln/>
+        </p:spPr>
+        <p:txBody>
+          <a:bodyPr wrap="square" rtlCol="0" anchor="b"/>
+          <a:lstStyle/>
+          <a:p>
+            <a:pPr algn="l" indent="0" marL="0">
+              <a:buNone/>
+            </a:pPr>
+            <a:r>
+              <a:rPr lang="en-US" sz="1600" b="1" dirty="0">
+                <a:solidFill>
+                  <a:srgbClr val="1A1A2E"/>
+                </a:solidFill>
+                <a:latin typeface="Georgia" pitchFamily="34" charset="0"/>
+                <a:ea typeface="Georgia" pitchFamily="34" charset="-122"/>
+                <a:cs typeface="Georgia" pitchFamily="34" charset="-120"/>
+              </a:rPr>
               <a:t>Целевые количественные метрики качества</a:t>
             </a:r>
-            <a:endParaRPr lang="en-US" sz="2000" dirty="0"/>
+            <a:endParaRPr lang="en-US" sz="1600" dirty="0"/>
           </a:p>
         </p:txBody>
       </p:sp>
       <p:graphicFrame>
         <p:nvGraphicFramePr>
-          <p:cNvPr id="5" name="Table 0"/>
+          <p:cNvPr id="6" name="Table 0"/>
           <p:cNvGraphicFramePr>
             <a:graphicFrameLocks noGrp="1"/>
           </p:cNvGraphicFramePr>
@@ -6270,27 +6708,27 @@
                         <a:buNone/>
                       </a:pPr>
                       <a:r>
-                        <a:rPr lang="en-US" sz="1050" b="1" dirty="0">
+                        <a:rPr lang="en-US" sz="1200" b="1" dirty="0">
                           <a:solidFill>
                             <a:srgbClr val="FFFFFF"/>
                           </a:solidFill>
-                          <a:latin typeface="Calibri" pitchFamily="34" charset="0"/>
-                          <a:ea typeface="Calibri" pitchFamily="34" charset="-122"/>
-                          <a:cs typeface="Calibri" pitchFamily="34" charset="-120"/>
+                          <a:latin typeface="Times New Roman" pitchFamily="34" charset="0"/>
+                          <a:ea typeface="Times New Roman" pitchFamily="34" charset="-122"/>
+                          <a:cs typeface="Times New Roman" pitchFamily="34" charset="-120"/>
                         </a:rPr>
                         <a:t>Атрибут качества</a:t>
                       </a:r>
-                      <a:endParaRPr lang="en-US" sz="1050" dirty="0">
-                        <a:latin typeface="Calibri" charset="0"/>
-                        <a:ea typeface="Calibri" charset="0"/>
-                        <a:cs typeface="Calibri" charset="0"/>
+                      <a:endParaRPr lang="en-US" sz="1200" dirty="0">
+                        <a:latin typeface="Times New Roman" charset="0"/>
+                        <a:ea typeface="Times New Roman" charset="0"/>
+                        <a:cs typeface="Times New Roman" charset="0"/>
                       </a:endParaRPr>
                     </a:p>
                   </a:txBody>
                   <a:tcPr marL="91440" marR="91440" marT="45720" marB="45720" anchor="ctr">
                     <a:lnL w="6350" cap="flat" cmpd="sng" algn="ctr">
                       <a:solidFill>
-                        <a:srgbClr val="FFEDD5"/>
+                        <a:srgbClr val="EFEAE3"/>
                       </a:solidFill>
                       <a:prstDash val="solid"/>
                       <a:round/>
@@ -6299,7 +6737,7 @@
                     </a:lnL>
                     <a:lnR w="6350" cap="flat" cmpd="sng" algn="ctr">
                       <a:solidFill>
-                        <a:srgbClr val="FFEDD5"/>
+                        <a:srgbClr val="EFEAE3"/>
                       </a:solidFill>
                       <a:prstDash val="solid"/>
                       <a:round/>
@@ -6308,7 +6746,7 @@
                     </a:lnR>
                     <a:lnT w="6350" cap="flat" cmpd="sng" algn="ctr">
                       <a:solidFill>
-                        <a:srgbClr val="FFEDD5"/>
+                        <a:srgbClr val="EFEAE3"/>
                       </a:solidFill>
                       <a:prstDash val="solid"/>
                       <a:round/>
@@ -6317,7 +6755,7 @@
                     </a:lnT>
                     <a:lnB w="6350" cap="flat" cmpd="sng" algn="ctr">
                       <a:solidFill>
-                        <a:srgbClr val="FFEDD5"/>
+                        <a:srgbClr val="EFEAE3"/>
                       </a:solidFill>
                       <a:prstDash val="solid"/>
                       <a:round/>
@@ -6325,7 +6763,7 @@
                       <a:tailEnd type="none" w="med" len="med"/>
                     </a:lnB>
                     <a:solidFill>
-                      <a:srgbClr val="0F1E36"/>
+                      <a:srgbClr val="1A1A2E"/>
                     </a:solidFill>
                   </a:tcPr>
                 </a:tc>
@@ -6338,27 +6776,27 @@
                         <a:buNone/>
                       </a:pPr>
                       <a:r>
-                        <a:rPr lang="en-US" sz="1050" b="1" dirty="0">
+                        <a:rPr lang="en-US" sz="1200" b="1" dirty="0">
                           <a:solidFill>
                             <a:srgbClr val="FFFFFF"/>
                           </a:solidFill>
-                          <a:latin typeface="Calibri" pitchFamily="34" charset="0"/>
-                          <a:ea typeface="Calibri" pitchFamily="34" charset="-122"/>
-                          <a:cs typeface="Calibri" pitchFamily="34" charset="-120"/>
+                          <a:latin typeface="Times New Roman" pitchFamily="34" charset="0"/>
+                          <a:ea typeface="Times New Roman" pitchFamily="34" charset="-122"/>
+                          <a:cs typeface="Times New Roman" pitchFamily="34" charset="-120"/>
                         </a:rPr>
                         <a:t>Количественная метрика</a:t>
                       </a:r>
-                      <a:endParaRPr lang="en-US" sz="1050" dirty="0">
-                        <a:latin typeface="Calibri" charset="0"/>
-                        <a:ea typeface="Calibri" charset="0"/>
-                        <a:cs typeface="Calibri" charset="0"/>
+                      <a:endParaRPr lang="en-US" sz="1200" dirty="0">
+                        <a:latin typeface="Times New Roman" charset="0"/>
+                        <a:ea typeface="Times New Roman" charset="0"/>
+                        <a:cs typeface="Times New Roman" charset="0"/>
                       </a:endParaRPr>
                     </a:p>
                   </a:txBody>
                   <a:tcPr marL="91440" marR="91440" marT="45720" marB="45720" anchor="ctr">
                     <a:lnL w="6350" cap="flat" cmpd="sng" algn="ctr">
                       <a:solidFill>
-                        <a:srgbClr val="FFEDD5"/>
+                        <a:srgbClr val="EFEAE3"/>
                       </a:solidFill>
                       <a:prstDash val="solid"/>
                       <a:round/>
@@ -6367,7 +6805,7 @@
                     </a:lnL>
                     <a:lnR w="6350" cap="flat" cmpd="sng" algn="ctr">
                       <a:solidFill>
-                        <a:srgbClr val="FFEDD5"/>
+                        <a:srgbClr val="EFEAE3"/>
                       </a:solidFill>
                       <a:prstDash val="solid"/>
                       <a:round/>
@@ -6376,7 +6814,7 @@
                     </a:lnR>
                     <a:lnT w="6350" cap="flat" cmpd="sng" algn="ctr">
                       <a:solidFill>
-                        <a:srgbClr val="FFEDD5"/>
+                        <a:srgbClr val="EFEAE3"/>
                       </a:solidFill>
                       <a:prstDash val="solid"/>
                       <a:round/>
@@ -6385,7 +6823,7 @@
                     </a:lnT>
                     <a:lnB w="6350" cap="flat" cmpd="sng" algn="ctr">
                       <a:solidFill>
-                        <a:srgbClr val="FFEDD5"/>
+                        <a:srgbClr val="EFEAE3"/>
                       </a:solidFill>
                       <a:prstDash val="solid"/>
                       <a:round/>
@@ -6393,7 +6831,7 @@
                       <a:tailEnd type="none" w="med" len="med"/>
                     </a:lnB>
                     <a:solidFill>
-                      <a:srgbClr val="0F1E36"/>
+                      <a:srgbClr val="1A1A2E"/>
                     </a:solidFill>
                   </a:tcPr>
                 </a:tc>
@@ -6406,27 +6844,27 @@
                         <a:buNone/>
                       </a:pPr>
                       <a:r>
-                        <a:rPr lang="en-US" sz="1050" b="1" dirty="0">
+                        <a:rPr lang="en-US" sz="1200" b="1" dirty="0">
                           <a:solidFill>
                             <a:srgbClr val="FFFFFF"/>
                           </a:solidFill>
-                          <a:latin typeface="Calibri" pitchFamily="34" charset="0"/>
-                          <a:ea typeface="Calibri" pitchFamily="34" charset="-122"/>
-                          <a:cs typeface="Calibri" pitchFamily="34" charset="-120"/>
+                          <a:latin typeface="Times New Roman" pitchFamily="34" charset="0"/>
+                          <a:ea typeface="Times New Roman" pitchFamily="34" charset="-122"/>
+                          <a:cs typeface="Times New Roman" pitchFamily="34" charset="-120"/>
                         </a:rPr>
                         <a:t>Целевое значение</a:t>
                       </a:r>
-                      <a:endParaRPr lang="en-US" sz="1050" dirty="0">
-                        <a:latin typeface="Calibri" charset="0"/>
-                        <a:ea typeface="Calibri" charset="0"/>
-                        <a:cs typeface="Calibri" charset="0"/>
+                      <a:endParaRPr lang="en-US" sz="1200" dirty="0">
+                        <a:latin typeface="Times New Roman" charset="0"/>
+                        <a:ea typeface="Times New Roman" charset="0"/>
+                        <a:cs typeface="Times New Roman" charset="0"/>
                       </a:endParaRPr>
                     </a:p>
                   </a:txBody>
                   <a:tcPr marL="91440" marR="91440" marT="45720" marB="45720" anchor="ctr">
                     <a:lnL w="6350" cap="flat" cmpd="sng" algn="ctr">
                       <a:solidFill>
-                        <a:srgbClr val="FFEDD5"/>
+                        <a:srgbClr val="EFEAE3"/>
                       </a:solidFill>
                       <a:prstDash val="solid"/>
                       <a:round/>
@@ -6435,7 +6873,7 @@
                     </a:lnL>
                     <a:lnR w="6350" cap="flat" cmpd="sng" algn="ctr">
                       <a:solidFill>
-                        <a:srgbClr val="FFEDD5"/>
+                        <a:srgbClr val="EFEAE3"/>
                       </a:solidFill>
                       <a:prstDash val="solid"/>
                       <a:round/>
@@ -6444,7 +6882,7 @@
                     </a:lnR>
                     <a:lnT w="6350" cap="flat" cmpd="sng" algn="ctr">
                       <a:solidFill>
-                        <a:srgbClr val="FFEDD5"/>
+                        <a:srgbClr val="EFEAE3"/>
                       </a:solidFill>
                       <a:prstDash val="solid"/>
                       <a:round/>
@@ -6453,7 +6891,7 @@
                     </a:lnT>
                     <a:lnB w="6350" cap="flat" cmpd="sng" algn="ctr">
                       <a:solidFill>
-                        <a:srgbClr val="FFEDD5"/>
+                        <a:srgbClr val="EFEAE3"/>
                       </a:solidFill>
                       <a:prstDash val="solid"/>
                       <a:round/>
@@ -6461,7 +6899,7 @@
                       <a:tailEnd type="none" w="med" len="med"/>
                     </a:lnB>
                     <a:solidFill>
-                      <a:srgbClr val="0F1E36"/>
+                      <a:srgbClr val="1A1A2E"/>
                     </a:solidFill>
                   </a:tcPr>
                 </a:tc>
@@ -6474,27 +6912,27 @@
                         <a:buNone/>
                       </a:pPr>
                       <a:r>
-                        <a:rPr lang="en-US" sz="1050" b="1" dirty="0">
+                        <a:rPr lang="en-US" sz="1200" b="1" dirty="0">
                           <a:solidFill>
                             <a:srgbClr val="FFFFFF"/>
                           </a:solidFill>
-                          <a:latin typeface="Calibri" pitchFamily="34" charset="0"/>
-                          <a:ea typeface="Calibri" pitchFamily="34" charset="-122"/>
-                          <a:cs typeface="Calibri" pitchFamily="34" charset="-120"/>
+                          <a:latin typeface="Times New Roman" pitchFamily="34" charset="0"/>
+                          <a:ea typeface="Times New Roman" pitchFamily="34" charset="-122"/>
+                          <a:cs typeface="Times New Roman" pitchFamily="34" charset="-120"/>
                         </a:rPr>
                         <a:t>Способ контроля</a:t>
                       </a:r>
-                      <a:endParaRPr lang="en-US" sz="1050" dirty="0">
-                        <a:latin typeface="Calibri" charset="0"/>
-                        <a:ea typeface="Calibri" charset="0"/>
-                        <a:cs typeface="Calibri" charset="0"/>
+                      <a:endParaRPr lang="en-US" sz="1200" dirty="0">
+                        <a:latin typeface="Times New Roman" charset="0"/>
+                        <a:ea typeface="Times New Roman" charset="0"/>
+                        <a:cs typeface="Times New Roman" charset="0"/>
                       </a:endParaRPr>
                     </a:p>
                   </a:txBody>
                   <a:tcPr marL="91440" marR="91440" marT="45720" marB="45720" anchor="ctr">
                     <a:lnL w="6350" cap="flat" cmpd="sng" algn="ctr">
                       <a:solidFill>
-                        <a:srgbClr val="FFEDD5"/>
+                        <a:srgbClr val="EFEAE3"/>
                       </a:solidFill>
                       <a:prstDash val="solid"/>
                       <a:round/>
@@ -6503,7 +6941,7 @@
                     </a:lnL>
                     <a:lnR w="6350" cap="flat" cmpd="sng" algn="ctr">
                       <a:solidFill>
-                        <a:srgbClr val="FFEDD5"/>
+                        <a:srgbClr val="EFEAE3"/>
                       </a:solidFill>
                       <a:prstDash val="solid"/>
                       <a:round/>
@@ -6512,7 +6950,7 @@
                     </a:lnR>
                     <a:lnT w="6350" cap="flat" cmpd="sng" algn="ctr">
                       <a:solidFill>
-                        <a:srgbClr val="FFEDD5"/>
+                        <a:srgbClr val="EFEAE3"/>
                       </a:solidFill>
                       <a:prstDash val="solid"/>
                       <a:round/>
@@ -6521,7 +6959,7 @@
                     </a:lnT>
                     <a:lnB w="6350" cap="flat" cmpd="sng" algn="ctr">
                       <a:solidFill>
-                        <a:srgbClr val="FFEDD5"/>
+                        <a:srgbClr val="EFEAE3"/>
                       </a:solidFill>
                       <a:prstDash val="solid"/>
                       <a:round/>
@@ -6529,7 +6967,7 @@
                       <a:tailEnd type="none" w="med" len="med"/>
                     </a:lnB>
                     <a:solidFill>
-                      <a:srgbClr val="0F1E36"/>
+                      <a:srgbClr val="1A1A2E"/>
                     </a:solidFill>
                   </a:tcPr>
                 </a:tc>
@@ -6544,27 +6982,27 @@
                         <a:buNone/>
                       </a:pPr>
                       <a:r>
-                        <a:rPr lang="en-US" sz="1050" dirty="0">
+                        <a:rPr lang="en-US" sz="1200" dirty="0">
                           <a:solidFill>
-                            <a:srgbClr val="1E293B"/>
+                            <a:srgbClr val="2D2D3A"/>
                           </a:solidFill>
-                          <a:latin typeface="Calibri" pitchFamily="34" charset="0"/>
-                          <a:ea typeface="Calibri" pitchFamily="34" charset="-122"/>
-                          <a:cs typeface="Calibri" pitchFamily="34" charset="-120"/>
+                          <a:latin typeface="Times New Roman" pitchFamily="34" charset="0"/>
+                          <a:ea typeface="Times New Roman" pitchFamily="34" charset="-122"/>
+                          <a:cs typeface="Times New Roman" pitchFamily="34" charset="-120"/>
                         </a:rPr>
                         <a:t>Модульность</a:t>
                       </a:r>
-                      <a:endParaRPr lang="en-US" sz="1050" dirty="0">
-                        <a:latin typeface="Calibri" charset="0"/>
-                        <a:ea typeface="Calibri" charset="0"/>
-                        <a:cs typeface="Calibri" charset="0"/>
+                      <a:endParaRPr lang="en-US" sz="1200" dirty="0">
+                        <a:latin typeface="Times New Roman" charset="0"/>
+                        <a:ea typeface="Times New Roman" charset="0"/>
+                        <a:cs typeface="Times New Roman" charset="0"/>
                       </a:endParaRPr>
                     </a:p>
                   </a:txBody>
                   <a:tcPr marL="91440" marR="91440" marT="45720" marB="45720" anchor="ctr">
                     <a:lnL w="6350" cap="flat" cmpd="sng" algn="ctr">
                       <a:solidFill>
-                        <a:srgbClr val="FFEDD5"/>
+                        <a:srgbClr val="EFEAE3"/>
                       </a:solidFill>
                       <a:prstDash val="solid"/>
                       <a:round/>
@@ -6573,7 +7011,7 @@
                     </a:lnL>
                     <a:lnR w="6350" cap="flat" cmpd="sng" algn="ctr">
                       <a:solidFill>
-                        <a:srgbClr val="FFEDD5"/>
+                        <a:srgbClr val="EFEAE3"/>
                       </a:solidFill>
                       <a:prstDash val="solid"/>
                       <a:round/>
@@ -6582,7 +7020,7 @@
                     </a:lnR>
                     <a:lnT w="6350" cap="flat" cmpd="sng" algn="ctr">
                       <a:solidFill>
-                        <a:srgbClr val="FFEDD5"/>
+                        <a:srgbClr val="EFEAE3"/>
                       </a:solidFill>
                       <a:prstDash val="solid"/>
                       <a:round/>
@@ -6591,7 +7029,7 @@
                     </a:lnT>
                     <a:lnB w="6350" cap="flat" cmpd="sng" algn="ctr">
                       <a:solidFill>
-                        <a:srgbClr val="FFEDD5"/>
+                        <a:srgbClr val="EFEAE3"/>
                       </a:solidFill>
                       <a:prstDash val="solid"/>
                       <a:round/>
@@ -6599,7 +7037,7 @@
                       <a:tailEnd type="none" w="med" len="med"/>
                     </a:lnB>
                     <a:solidFill>
-                      <a:srgbClr val="FFF7ED"/>
+                      <a:srgbClr val="F8F4F0"/>
                     </a:solidFill>
                   </a:tcPr>
                 </a:tc>
@@ -6612,27 +7050,27 @@
                         <a:buNone/>
                       </a:pPr>
                       <a:r>
-                        <a:rPr lang="en-US" sz="1050" dirty="0">
+                        <a:rPr lang="en-US" sz="1200" dirty="0">
                           <a:solidFill>
-                            <a:srgbClr val="1E293B"/>
+                            <a:srgbClr val="2D2D3A"/>
                           </a:solidFill>
-                          <a:latin typeface="Calibri" pitchFamily="34" charset="0"/>
-                          <a:ea typeface="Calibri" pitchFamily="34" charset="-122"/>
-                          <a:cs typeface="Calibri" pitchFamily="34" charset="-120"/>
+                          <a:latin typeface="Times New Roman" pitchFamily="34" charset="0"/>
+                          <a:ea typeface="Times New Roman" pitchFamily="34" charset="-122"/>
+                          <a:cs typeface="Times New Roman" pitchFamily="34" charset="-120"/>
                         </a:rPr>
                         <a:t>Размер модуля (строк кода / SLOC)</a:t>
                       </a:r>
-                      <a:endParaRPr lang="en-US" sz="1050" dirty="0">
-                        <a:latin typeface="Calibri" charset="0"/>
-                        <a:ea typeface="Calibri" charset="0"/>
-                        <a:cs typeface="Calibri" charset="0"/>
+                      <a:endParaRPr lang="en-US" sz="1200" dirty="0">
+                        <a:latin typeface="Times New Roman" charset="0"/>
+                        <a:ea typeface="Times New Roman" charset="0"/>
+                        <a:cs typeface="Times New Roman" charset="0"/>
                       </a:endParaRPr>
                     </a:p>
                   </a:txBody>
                   <a:tcPr marL="91440" marR="91440" marT="45720" marB="45720" anchor="ctr">
                     <a:lnL w="6350" cap="flat" cmpd="sng" algn="ctr">
                       <a:solidFill>
-                        <a:srgbClr val="FFEDD5"/>
+                        <a:srgbClr val="EFEAE3"/>
                       </a:solidFill>
                       <a:prstDash val="solid"/>
                       <a:round/>
@@ -6641,7 +7079,7 @@
                     </a:lnL>
                     <a:lnR w="6350" cap="flat" cmpd="sng" algn="ctr">
                       <a:solidFill>
-                        <a:srgbClr val="FFEDD5"/>
+                        <a:srgbClr val="EFEAE3"/>
                       </a:solidFill>
                       <a:prstDash val="solid"/>
                       <a:round/>
@@ -6650,7 +7088,7 @@
                     </a:lnR>
                     <a:lnT w="6350" cap="flat" cmpd="sng" algn="ctr">
                       <a:solidFill>
-                        <a:srgbClr val="FFEDD5"/>
+                        <a:srgbClr val="EFEAE3"/>
                       </a:solidFill>
                       <a:prstDash val="solid"/>
                       <a:round/>
@@ -6659,7 +7097,7 @@
                     </a:lnT>
                     <a:lnB w="6350" cap="flat" cmpd="sng" algn="ctr">
                       <a:solidFill>
-                        <a:srgbClr val="FFEDD5"/>
+                        <a:srgbClr val="EFEAE3"/>
                       </a:solidFill>
                       <a:prstDash val="solid"/>
                       <a:round/>
@@ -6667,7 +7105,7 @@
                       <a:tailEnd type="none" w="med" len="med"/>
                     </a:lnB>
                     <a:solidFill>
-                      <a:srgbClr val="FFF7ED"/>
+                      <a:srgbClr val="F8F4F0"/>
                     </a:solidFill>
                   </a:tcPr>
                 </a:tc>
@@ -6680,27 +7118,27 @@
                         <a:buNone/>
                       </a:pPr>
                       <a:r>
-                        <a:rPr lang="en-US" sz="1050" dirty="0">
+                        <a:rPr lang="en-US" sz="1200" dirty="0">
                           <a:solidFill>
-                            <a:srgbClr val="1E293B"/>
+                            <a:srgbClr val="2D2D3A"/>
                           </a:solidFill>
-                          <a:latin typeface="Calibri" pitchFamily="34" charset="0"/>
-                          <a:ea typeface="Calibri" pitchFamily="34" charset="-122"/>
-                          <a:cs typeface="Calibri" pitchFamily="34" charset="-120"/>
+                          <a:latin typeface="Times New Roman" pitchFamily="34" charset="0"/>
+                          <a:ea typeface="Times New Roman" pitchFamily="34" charset="-122"/>
+                          <a:cs typeface="Times New Roman" pitchFamily="34" charset="-120"/>
                         </a:rPr>
                         <a:t>≤ 250 строк на файл / класс</a:t>
                       </a:r>
-                      <a:endParaRPr lang="en-US" sz="1050" dirty="0">
-                        <a:latin typeface="Calibri" charset="0"/>
-                        <a:ea typeface="Calibri" charset="0"/>
-                        <a:cs typeface="Calibri" charset="0"/>
+                      <a:endParaRPr lang="en-US" sz="1200" dirty="0">
+                        <a:latin typeface="Times New Roman" charset="0"/>
+                        <a:ea typeface="Times New Roman" charset="0"/>
+                        <a:cs typeface="Times New Roman" charset="0"/>
                       </a:endParaRPr>
                     </a:p>
                   </a:txBody>
                   <a:tcPr marL="91440" marR="91440" marT="45720" marB="45720" anchor="ctr">
                     <a:lnL w="6350" cap="flat" cmpd="sng" algn="ctr">
                       <a:solidFill>
-                        <a:srgbClr val="FFEDD5"/>
+                        <a:srgbClr val="EFEAE3"/>
                       </a:solidFill>
                       <a:prstDash val="solid"/>
                       <a:round/>
@@ -6709,7 +7147,7 @@
                     </a:lnL>
                     <a:lnR w="6350" cap="flat" cmpd="sng" algn="ctr">
                       <a:solidFill>
-                        <a:srgbClr val="FFEDD5"/>
+                        <a:srgbClr val="EFEAE3"/>
                       </a:solidFill>
                       <a:prstDash val="solid"/>
                       <a:round/>
@@ -6718,7 +7156,7 @@
                     </a:lnR>
                     <a:lnT w="6350" cap="flat" cmpd="sng" algn="ctr">
                       <a:solidFill>
-                        <a:srgbClr val="FFEDD5"/>
+                        <a:srgbClr val="EFEAE3"/>
                       </a:solidFill>
                       <a:prstDash val="solid"/>
                       <a:round/>
@@ -6727,7 +7165,7 @@
                     </a:lnT>
                     <a:lnB w="6350" cap="flat" cmpd="sng" algn="ctr">
                       <a:solidFill>
-                        <a:srgbClr val="FFEDD5"/>
+                        <a:srgbClr val="EFEAE3"/>
                       </a:solidFill>
                       <a:prstDash val="solid"/>
                       <a:round/>
@@ -6735,7 +7173,7 @@
                       <a:tailEnd type="none" w="med" len="med"/>
                     </a:lnB>
                     <a:solidFill>
-                      <a:srgbClr val="FFF7ED"/>
+                      <a:srgbClr val="F8F4F0"/>
                     </a:solidFill>
                   </a:tcPr>
                 </a:tc>
@@ -6748,27 +7186,27 @@
                         <a:buNone/>
                       </a:pPr>
                       <a:r>
-                        <a:rPr lang="en-US" sz="1050" dirty="0">
+                        <a:rPr lang="en-US" sz="1200" dirty="0">
                           <a:solidFill>
-                            <a:srgbClr val="1E293B"/>
+                            <a:srgbClr val="2D2D3A"/>
                           </a:solidFill>
-                          <a:latin typeface="Calibri" pitchFamily="34" charset="0"/>
-                          <a:ea typeface="Calibri" pitchFamily="34" charset="-122"/>
-                          <a:cs typeface="Calibri" pitchFamily="34" charset="-120"/>
+                          <a:latin typeface="Times New Roman" pitchFamily="34" charset="0"/>
+                          <a:ea typeface="Times New Roman" pitchFamily="34" charset="-122"/>
+                          <a:cs typeface="Times New Roman" pitchFamily="34" charset="-120"/>
                         </a:rPr>
                         <a:t>Линтер (ESLint max-lines)</a:t>
                       </a:r>
-                      <a:endParaRPr lang="en-US" sz="1050" dirty="0">
-                        <a:latin typeface="Calibri" charset="0"/>
-                        <a:ea typeface="Calibri" charset="0"/>
-                        <a:cs typeface="Calibri" charset="0"/>
+                      <a:endParaRPr lang="en-US" sz="1200" dirty="0">
+                        <a:latin typeface="Times New Roman" charset="0"/>
+                        <a:ea typeface="Times New Roman" charset="0"/>
+                        <a:cs typeface="Times New Roman" charset="0"/>
                       </a:endParaRPr>
                     </a:p>
                   </a:txBody>
                   <a:tcPr marL="91440" marR="91440" marT="45720" marB="45720" anchor="ctr">
                     <a:lnL w="6350" cap="flat" cmpd="sng" algn="ctr">
                       <a:solidFill>
-                        <a:srgbClr val="FFEDD5"/>
+                        <a:srgbClr val="EFEAE3"/>
                       </a:solidFill>
                       <a:prstDash val="solid"/>
                       <a:round/>
@@ -6777,7 +7215,7 @@
                     </a:lnL>
                     <a:lnR w="6350" cap="flat" cmpd="sng" algn="ctr">
                       <a:solidFill>
-                        <a:srgbClr val="FFEDD5"/>
+                        <a:srgbClr val="EFEAE3"/>
                       </a:solidFill>
                       <a:prstDash val="solid"/>
                       <a:round/>
@@ -6786,7 +7224,7 @@
                     </a:lnR>
                     <a:lnT w="6350" cap="flat" cmpd="sng" algn="ctr">
                       <a:solidFill>
-                        <a:srgbClr val="FFEDD5"/>
+                        <a:srgbClr val="EFEAE3"/>
                       </a:solidFill>
                       <a:prstDash val="solid"/>
                       <a:round/>
@@ -6795,7 +7233,7 @@
                     </a:lnT>
                     <a:lnB w="6350" cap="flat" cmpd="sng" algn="ctr">
                       <a:solidFill>
-                        <a:srgbClr val="FFEDD5"/>
+                        <a:srgbClr val="EFEAE3"/>
                       </a:solidFill>
                       <a:prstDash val="solid"/>
                       <a:round/>
@@ -6803,7 +7241,7 @@
                       <a:tailEnd type="none" w="med" len="med"/>
                     </a:lnB>
                     <a:solidFill>
-                      <a:srgbClr val="FFF7ED"/>
+                      <a:srgbClr val="F8F4F0"/>
                     </a:solidFill>
                   </a:tcPr>
                 </a:tc>
@@ -6818,27 +7256,27 @@
                         <a:buNone/>
                       </a:pPr>
                       <a:r>
-                        <a:rPr lang="en-US" sz="1050" dirty="0">
+                        <a:rPr lang="en-US" sz="1200" dirty="0">
                           <a:solidFill>
-                            <a:srgbClr val="1E293B"/>
+                            <a:srgbClr val="2D2D3A"/>
                           </a:solidFill>
-                          <a:latin typeface="Calibri" pitchFamily="34" charset="0"/>
-                          <a:ea typeface="Calibri" pitchFamily="34" charset="-122"/>
-                          <a:cs typeface="Calibri" pitchFamily="34" charset="-120"/>
+                          <a:latin typeface="Times New Roman" pitchFamily="34" charset="0"/>
+                          <a:ea typeface="Times New Roman" pitchFamily="34" charset="-122"/>
+                          <a:cs typeface="Times New Roman" pitchFamily="34" charset="-120"/>
                         </a:rPr>
                         <a:t>Тестируемость</a:t>
                       </a:r>
-                      <a:endParaRPr lang="en-US" sz="1050" dirty="0">
-                        <a:latin typeface="Calibri" charset="0"/>
-                        <a:ea typeface="Calibri" charset="0"/>
-                        <a:cs typeface="Calibri" charset="0"/>
+                      <a:endParaRPr lang="en-US" sz="1200" dirty="0">
+                        <a:latin typeface="Times New Roman" charset="0"/>
+                        <a:ea typeface="Times New Roman" charset="0"/>
+                        <a:cs typeface="Times New Roman" charset="0"/>
                       </a:endParaRPr>
                     </a:p>
                   </a:txBody>
                   <a:tcPr marL="91440" marR="91440" marT="45720" marB="45720" anchor="ctr">
                     <a:lnL w="6350" cap="flat" cmpd="sng" algn="ctr">
                       <a:solidFill>
-                        <a:srgbClr val="FFEDD5"/>
+                        <a:srgbClr val="EFEAE3"/>
                       </a:solidFill>
                       <a:prstDash val="solid"/>
                       <a:round/>
@@ -6847,7 +7285,7 @@
                     </a:lnL>
                     <a:lnR w="6350" cap="flat" cmpd="sng" algn="ctr">
                       <a:solidFill>
-                        <a:srgbClr val="FFEDD5"/>
+                        <a:srgbClr val="EFEAE3"/>
                       </a:solidFill>
                       <a:prstDash val="solid"/>
                       <a:round/>
@@ -6856,7 +7294,7 @@
                     </a:lnR>
                     <a:lnT w="6350" cap="flat" cmpd="sng" algn="ctr">
                       <a:solidFill>
-                        <a:srgbClr val="FFEDD5"/>
+                        <a:srgbClr val="EFEAE3"/>
                       </a:solidFill>
                       <a:prstDash val="solid"/>
                       <a:round/>
@@ -6865,7 +7303,7 @@
                     </a:lnT>
                     <a:lnB w="6350" cap="flat" cmpd="sng" algn="ctr">
                       <a:solidFill>
-                        <a:srgbClr val="FFEDD5"/>
+                        <a:srgbClr val="EFEAE3"/>
                       </a:solidFill>
                       <a:prstDash val="solid"/>
                       <a:round/>
@@ -6886,27 +7324,27 @@
                         <a:buNone/>
                       </a:pPr>
                       <a:r>
-                        <a:rPr lang="en-US" sz="1050" dirty="0">
+                        <a:rPr lang="en-US" sz="1200" dirty="0">
                           <a:solidFill>
-                            <a:srgbClr val="1E293B"/>
+                            <a:srgbClr val="2D2D3A"/>
                           </a:solidFill>
-                          <a:latin typeface="Calibri" pitchFamily="34" charset="0"/>
-                          <a:ea typeface="Calibri" pitchFamily="34" charset="-122"/>
-                          <a:cs typeface="Calibri" pitchFamily="34" charset="-120"/>
+                          <a:latin typeface="Times New Roman" pitchFamily="34" charset="0"/>
+                          <a:ea typeface="Times New Roman" pitchFamily="34" charset="-122"/>
+                          <a:cs typeface="Times New Roman" pitchFamily="34" charset="-120"/>
                         </a:rPr>
                         <a:t>Покрытие операторов кодовой базы</a:t>
                       </a:r>
-                      <a:endParaRPr lang="en-US" sz="1050" dirty="0">
-                        <a:latin typeface="Calibri" charset="0"/>
-                        <a:ea typeface="Calibri" charset="0"/>
-                        <a:cs typeface="Calibri" charset="0"/>
+                      <a:endParaRPr lang="en-US" sz="1200" dirty="0">
+                        <a:latin typeface="Times New Roman" charset="0"/>
+                        <a:ea typeface="Times New Roman" charset="0"/>
+                        <a:cs typeface="Times New Roman" charset="0"/>
                       </a:endParaRPr>
                     </a:p>
                   </a:txBody>
                   <a:tcPr marL="91440" marR="91440" marT="45720" marB="45720" anchor="ctr">
                     <a:lnL w="6350" cap="flat" cmpd="sng" algn="ctr">
                       <a:solidFill>
-                        <a:srgbClr val="FFEDD5"/>
+                        <a:srgbClr val="EFEAE3"/>
                       </a:solidFill>
                       <a:prstDash val="solid"/>
                       <a:round/>
@@ -6915,7 +7353,7 @@
                     </a:lnL>
                     <a:lnR w="6350" cap="flat" cmpd="sng" algn="ctr">
                       <a:solidFill>
-                        <a:srgbClr val="FFEDD5"/>
+                        <a:srgbClr val="EFEAE3"/>
                       </a:solidFill>
                       <a:prstDash val="solid"/>
                       <a:round/>
@@ -6924,7 +7362,7 @@
                     </a:lnR>
                     <a:lnT w="6350" cap="flat" cmpd="sng" algn="ctr">
                       <a:solidFill>
-                        <a:srgbClr val="FFEDD5"/>
+                        <a:srgbClr val="EFEAE3"/>
                       </a:solidFill>
                       <a:prstDash val="solid"/>
                       <a:round/>
@@ -6933,7 +7371,7 @@
                     </a:lnT>
                     <a:lnB w="6350" cap="flat" cmpd="sng" algn="ctr">
                       <a:solidFill>
-                        <a:srgbClr val="FFEDD5"/>
+                        <a:srgbClr val="EFEAE3"/>
                       </a:solidFill>
                       <a:prstDash val="solid"/>
                       <a:round/>
@@ -6954,27 +7392,27 @@
                         <a:buNone/>
                       </a:pPr>
                       <a:r>
-                        <a:rPr lang="en-US" sz="1050" dirty="0">
+                        <a:rPr lang="en-US" sz="1200" dirty="0">
                           <a:solidFill>
-                            <a:srgbClr val="1E293B"/>
+                            <a:srgbClr val="2D2D3A"/>
                           </a:solidFill>
-                          <a:latin typeface="Calibri" pitchFamily="34" charset="0"/>
-                          <a:ea typeface="Calibri" pitchFamily="34" charset="-122"/>
-                          <a:cs typeface="Calibri" pitchFamily="34" charset="-120"/>
+                          <a:latin typeface="Times New Roman" pitchFamily="34" charset="0"/>
+                          <a:ea typeface="Times New Roman" pitchFamily="34" charset="-122"/>
+                          <a:cs typeface="Times New Roman" pitchFamily="34" charset="-120"/>
                         </a:rPr>
                         <a:t>≥ 80% (для бизнес-логики)</a:t>
                       </a:r>
-                      <a:endParaRPr lang="en-US" sz="1050" dirty="0">
-                        <a:latin typeface="Calibri" charset="0"/>
-                        <a:ea typeface="Calibri" charset="0"/>
-                        <a:cs typeface="Calibri" charset="0"/>
+                      <a:endParaRPr lang="en-US" sz="1200" dirty="0">
+                        <a:latin typeface="Times New Roman" charset="0"/>
+                        <a:ea typeface="Times New Roman" charset="0"/>
+                        <a:cs typeface="Times New Roman" charset="0"/>
                       </a:endParaRPr>
                     </a:p>
                   </a:txBody>
                   <a:tcPr marL="91440" marR="91440" marT="45720" marB="45720" anchor="ctr">
                     <a:lnL w="6350" cap="flat" cmpd="sng" algn="ctr">
                       <a:solidFill>
-                        <a:srgbClr val="FFEDD5"/>
+                        <a:srgbClr val="EFEAE3"/>
                       </a:solidFill>
                       <a:prstDash val="solid"/>
                       <a:round/>
@@ -6983,7 +7421,7 @@
                     </a:lnL>
                     <a:lnR w="6350" cap="flat" cmpd="sng" algn="ctr">
                       <a:solidFill>
-                        <a:srgbClr val="FFEDD5"/>
+                        <a:srgbClr val="EFEAE3"/>
                       </a:solidFill>
                       <a:prstDash val="solid"/>
                       <a:round/>
@@ -6992,7 +7430,7 @@
                     </a:lnR>
                     <a:lnT w="6350" cap="flat" cmpd="sng" algn="ctr">
                       <a:solidFill>
-                        <a:srgbClr val="FFEDD5"/>
+                        <a:srgbClr val="EFEAE3"/>
                       </a:solidFill>
                       <a:prstDash val="solid"/>
                       <a:round/>
@@ -7001,7 +7439,7 @@
                     </a:lnT>
                     <a:lnB w="6350" cap="flat" cmpd="sng" algn="ctr">
                       <a:solidFill>
-                        <a:srgbClr val="FFEDD5"/>
+                        <a:srgbClr val="EFEAE3"/>
                       </a:solidFill>
                       <a:prstDash val="solid"/>
                       <a:round/>
@@ -7022,27 +7460,27 @@
                         <a:buNone/>
                       </a:pPr>
                       <a:r>
-                        <a:rPr lang="en-US" sz="1050" dirty="0">
+                        <a:rPr lang="en-US" sz="1200" dirty="0">
                           <a:solidFill>
-                            <a:srgbClr val="1E293B"/>
+                            <a:srgbClr val="2D2D3A"/>
                           </a:solidFill>
-                          <a:latin typeface="Calibri" pitchFamily="34" charset="0"/>
-                          <a:ea typeface="Calibri" pitchFamily="34" charset="-122"/>
-                          <a:cs typeface="Calibri" pitchFamily="34" charset="-120"/>
+                          <a:latin typeface="Times New Roman" pitchFamily="34" charset="0"/>
+                          <a:ea typeface="Times New Roman" pitchFamily="34" charset="-122"/>
+                          <a:cs typeface="Times New Roman" pitchFamily="34" charset="-120"/>
                         </a:rPr>
                         <a:t>Jest Coverage Report</a:t>
                       </a:r>
-                      <a:endParaRPr lang="en-US" sz="1050" dirty="0">
-                        <a:latin typeface="Calibri" charset="0"/>
-                        <a:ea typeface="Calibri" charset="0"/>
-                        <a:cs typeface="Calibri" charset="0"/>
+                      <a:endParaRPr lang="en-US" sz="1200" dirty="0">
+                        <a:latin typeface="Times New Roman" charset="0"/>
+                        <a:ea typeface="Times New Roman" charset="0"/>
+                        <a:cs typeface="Times New Roman" charset="0"/>
                       </a:endParaRPr>
                     </a:p>
                   </a:txBody>
                   <a:tcPr marL="91440" marR="91440" marT="45720" marB="45720" anchor="ctr">
                     <a:lnL w="6350" cap="flat" cmpd="sng" algn="ctr">
                       <a:solidFill>
-                        <a:srgbClr val="FFEDD5"/>
+                        <a:srgbClr val="EFEAE3"/>
                       </a:solidFill>
                       <a:prstDash val="solid"/>
                       <a:round/>
@@ -7051,7 +7489,7 @@
                     </a:lnL>
                     <a:lnR w="6350" cap="flat" cmpd="sng" algn="ctr">
                       <a:solidFill>
-                        <a:srgbClr val="FFEDD5"/>
+                        <a:srgbClr val="EFEAE3"/>
                       </a:solidFill>
                       <a:prstDash val="solid"/>
                       <a:round/>
@@ -7060,7 +7498,7 @@
                     </a:lnR>
                     <a:lnT w="6350" cap="flat" cmpd="sng" algn="ctr">
                       <a:solidFill>
-                        <a:srgbClr val="FFEDD5"/>
+                        <a:srgbClr val="EFEAE3"/>
                       </a:solidFill>
                       <a:prstDash val="solid"/>
                       <a:round/>
@@ -7069,7 +7507,7 @@
                     </a:lnT>
                     <a:lnB w="6350" cap="flat" cmpd="sng" algn="ctr">
                       <a:solidFill>
-                        <a:srgbClr val="FFEDD5"/>
+                        <a:srgbClr val="EFEAE3"/>
                       </a:solidFill>
                       <a:prstDash val="solid"/>
                       <a:round/>
@@ -7092,27 +7530,27 @@
                         <a:buNone/>
                       </a:pPr>
                       <a:r>
-                        <a:rPr lang="en-US" sz="1050" dirty="0">
+                        <a:rPr lang="en-US" sz="1200" dirty="0">
                           <a:solidFill>
-                            <a:srgbClr val="1E293B"/>
+                            <a:srgbClr val="2D2D3A"/>
                           </a:solidFill>
-                          <a:latin typeface="Calibri" pitchFamily="34" charset="0"/>
-                          <a:ea typeface="Calibri" pitchFamily="34" charset="-122"/>
-                          <a:cs typeface="Calibri" pitchFamily="34" charset="-120"/>
+                          <a:latin typeface="Times New Roman" pitchFamily="34" charset="0"/>
+                          <a:ea typeface="Times New Roman" pitchFamily="34" charset="-122"/>
+                          <a:cs typeface="Times New Roman" pitchFamily="34" charset="-120"/>
                         </a:rPr>
                         <a:t>Производительность</a:t>
                       </a:r>
-                      <a:endParaRPr lang="en-US" sz="1050" dirty="0">
-                        <a:latin typeface="Calibri" charset="0"/>
-                        <a:ea typeface="Calibri" charset="0"/>
-                        <a:cs typeface="Calibri" charset="0"/>
+                      <a:endParaRPr lang="en-US" sz="1200" dirty="0">
+                        <a:latin typeface="Times New Roman" charset="0"/>
+                        <a:ea typeface="Times New Roman" charset="0"/>
+                        <a:cs typeface="Times New Roman" charset="0"/>
                       </a:endParaRPr>
                     </a:p>
                   </a:txBody>
                   <a:tcPr marL="91440" marR="91440" marT="45720" marB="45720" anchor="ctr">
                     <a:lnL w="6350" cap="flat" cmpd="sng" algn="ctr">
                       <a:solidFill>
-                        <a:srgbClr val="FFEDD5"/>
+                        <a:srgbClr val="EFEAE3"/>
                       </a:solidFill>
                       <a:prstDash val="solid"/>
                       <a:round/>
@@ -7121,7 +7559,7 @@
                     </a:lnL>
                     <a:lnR w="6350" cap="flat" cmpd="sng" algn="ctr">
                       <a:solidFill>
-                        <a:srgbClr val="FFEDD5"/>
+                        <a:srgbClr val="EFEAE3"/>
                       </a:solidFill>
                       <a:prstDash val="solid"/>
                       <a:round/>
@@ -7130,7 +7568,7 @@
                     </a:lnR>
                     <a:lnT w="6350" cap="flat" cmpd="sng" algn="ctr">
                       <a:solidFill>
-                        <a:srgbClr val="FFEDD5"/>
+                        <a:srgbClr val="EFEAE3"/>
                       </a:solidFill>
                       <a:prstDash val="solid"/>
                       <a:round/>
@@ -7139,7 +7577,7 @@
                     </a:lnT>
                     <a:lnB w="6350" cap="flat" cmpd="sng" algn="ctr">
                       <a:solidFill>
-                        <a:srgbClr val="FFEDD5"/>
+                        <a:srgbClr val="EFEAE3"/>
                       </a:solidFill>
                       <a:prstDash val="solid"/>
                       <a:round/>
@@ -7147,7 +7585,7 @@
                       <a:tailEnd type="none" w="med" len="med"/>
                     </a:lnB>
                     <a:solidFill>
-                      <a:srgbClr val="FFF7ED"/>
+                      <a:srgbClr val="F8F4F0"/>
                     </a:solidFill>
                   </a:tcPr>
                 </a:tc>
@@ -7160,27 +7598,27 @@
                         <a:buNone/>
                       </a:pPr>
                       <a:r>
-                        <a:rPr lang="en-US" sz="1050" dirty="0">
+                        <a:rPr lang="en-US" sz="1200" dirty="0">
                           <a:solidFill>
-                            <a:srgbClr val="1E293B"/>
+                            <a:srgbClr val="2D2D3A"/>
                           </a:solidFill>
-                          <a:latin typeface="Calibri" pitchFamily="34" charset="0"/>
-                          <a:ea typeface="Calibri" pitchFamily="34" charset="-122"/>
-                          <a:cs typeface="Calibri" pitchFamily="34" charset="-120"/>
+                          <a:latin typeface="Times New Roman" pitchFamily="34" charset="0"/>
+                          <a:ea typeface="Times New Roman" pitchFamily="34" charset="-122"/>
+                          <a:cs typeface="Times New Roman" pitchFamily="34" charset="-120"/>
                         </a:rPr>
                         <a:t>Время отклика API (95-й процентиль)</a:t>
                       </a:r>
-                      <a:endParaRPr lang="en-US" sz="1050" dirty="0">
-                        <a:latin typeface="Calibri" charset="0"/>
-                        <a:ea typeface="Calibri" charset="0"/>
-                        <a:cs typeface="Calibri" charset="0"/>
+                      <a:endParaRPr lang="en-US" sz="1200" dirty="0">
+                        <a:latin typeface="Times New Roman" charset="0"/>
+                        <a:ea typeface="Times New Roman" charset="0"/>
+                        <a:cs typeface="Times New Roman" charset="0"/>
                       </a:endParaRPr>
                     </a:p>
                   </a:txBody>
                   <a:tcPr marL="91440" marR="91440" marT="45720" marB="45720" anchor="ctr">
                     <a:lnL w="6350" cap="flat" cmpd="sng" algn="ctr">
                       <a:solidFill>
-                        <a:srgbClr val="FFEDD5"/>
+                        <a:srgbClr val="EFEAE3"/>
                       </a:solidFill>
                       <a:prstDash val="solid"/>
                       <a:round/>
@@ -7189,7 +7627,7 @@
                     </a:lnL>
                     <a:lnR w="6350" cap="flat" cmpd="sng" algn="ctr">
                       <a:solidFill>
-                        <a:srgbClr val="FFEDD5"/>
+                        <a:srgbClr val="EFEAE3"/>
                       </a:solidFill>
                       <a:prstDash val="solid"/>
                       <a:round/>
@@ -7198,7 +7636,7 @@
                     </a:lnR>
                     <a:lnT w="6350" cap="flat" cmpd="sng" algn="ctr">
                       <a:solidFill>
-                        <a:srgbClr val="FFEDD5"/>
+                        <a:srgbClr val="EFEAE3"/>
                       </a:solidFill>
                       <a:prstDash val="solid"/>
                       <a:round/>
@@ -7207,7 +7645,7 @@
                     </a:lnT>
                     <a:lnB w="6350" cap="flat" cmpd="sng" algn="ctr">
                       <a:solidFill>
-                        <a:srgbClr val="FFEDD5"/>
+                        <a:srgbClr val="EFEAE3"/>
                       </a:solidFill>
                       <a:prstDash val="solid"/>
                       <a:round/>
@@ -7215,7 +7653,7 @@
                       <a:tailEnd type="none" w="med" len="med"/>
                     </a:lnB>
                     <a:solidFill>
-                      <a:srgbClr val="FFF7ED"/>
+                      <a:srgbClr val="F8F4F0"/>
                     </a:solidFill>
                   </a:tcPr>
                 </a:tc>
@@ -7228,27 +7666,27 @@
                         <a:buNone/>
                       </a:pPr>
                       <a:r>
-                        <a:rPr lang="en-US" sz="1050" dirty="0">
+                        <a:rPr lang="en-US" sz="1200" dirty="0">
                           <a:solidFill>
-                            <a:srgbClr val="1E293B"/>
+                            <a:srgbClr val="2D2D3A"/>
                           </a:solidFill>
-                          <a:latin typeface="Calibri" pitchFamily="34" charset="0"/>
-                          <a:ea typeface="Calibri" pitchFamily="34" charset="-122"/>
-                          <a:cs typeface="Calibri" pitchFamily="34" charset="-120"/>
+                          <a:latin typeface="Times New Roman" pitchFamily="34" charset="0"/>
+                          <a:ea typeface="Times New Roman" pitchFamily="34" charset="-122"/>
+                          <a:cs typeface="Times New Roman" pitchFamily="34" charset="-120"/>
                         </a:rPr>
                         <a:t>≤ 150 мс под нагрузкой 50 rps</a:t>
                       </a:r>
-                      <a:endParaRPr lang="en-US" sz="1050" dirty="0">
-                        <a:latin typeface="Calibri" charset="0"/>
-                        <a:ea typeface="Calibri" charset="0"/>
-                        <a:cs typeface="Calibri" charset="0"/>
+                      <a:endParaRPr lang="en-US" sz="1200" dirty="0">
+                        <a:latin typeface="Times New Roman" charset="0"/>
+                        <a:ea typeface="Times New Roman" charset="0"/>
+                        <a:cs typeface="Times New Roman" charset="0"/>
                       </a:endParaRPr>
                     </a:p>
                   </a:txBody>
                   <a:tcPr marL="91440" marR="91440" marT="45720" marB="45720" anchor="ctr">
                     <a:lnL w="6350" cap="flat" cmpd="sng" algn="ctr">
                       <a:solidFill>
-                        <a:srgbClr val="FFEDD5"/>
+                        <a:srgbClr val="EFEAE3"/>
                       </a:solidFill>
                       <a:prstDash val="solid"/>
                       <a:round/>
@@ -7257,7 +7695,7 @@
                     </a:lnL>
                     <a:lnR w="6350" cap="flat" cmpd="sng" algn="ctr">
                       <a:solidFill>
-                        <a:srgbClr val="FFEDD5"/>
+                        <a:srgbClr val="EFEAE3"/>
                       </a:solidFill>
                       <a:prstDash val="solid"/>
                       <a:round/>
@@ -7266,7 +7704,7 @@
                     </a:lnR>
                     <a:lnT w="6350" cap="flat" cmpd="sng" algn="ctr">
                       <a:solidFill>
-                        <a:srgbClr val="FFEDD5"/>
+                        <a:srgbClr val="EFEAE3"/>
                       </a:solidFill>
                       <a:prstDash val="solid"/>
                       <a:round/>
@@ -7275,7 +7713,7 @@
                     </a:lnT>
                     <a:lnB w="6350" cap="flat" cmpd="sng" algn="ctr">
                       <a:solidFill>
-                        <a:srgbClr val="FFEDD5"/>
+                        <a:srgbClr val="EFEAE3"/>
                       </a:solidFill>
                       <a:prstDash val="solid"/>
                       <a:round/>
@@ -7283,7 +7721,7 @@
                       <a:tailEnd type="none" w="med" len="med"/>
                     </a:lnB>
                     <a:solidFill>
-                      <a:srgbClr val="FFF7ED"/>
+                      <a:srgbClr val="F8F4F0"/>
                     </a:solidFill>
                   </a:tcPr>
                 </a:tc>
@@ -7296,27 +7734,27 @@
                         <a:buNone/>
                       </a:pPr>
                       <a:r>
-                        <a:rPr lang="en-US" sz="1050" dirty="0">
+                        <a:rPr lang="en-US" sz="1200" dirty="0">
                           <a:solidFill>
-                            <a:srgbClr val="1E293B"/>
+                            <a:srgbClr val="2D2D3A"/>
                           </a:solidFill>
-                          <a:latin typeface="Calibri" pitchFamily="34" charset="0"/>
-                          <a:ea typeface="Calibri" pitchFamily="34" charset="-122"/>
-                          <a:cs typeface="Calibri" pitchFamily="34" charset="-120"/>
+                          <a:latin typeface="Times New Roman" pitchFamily="34" charset="0"/>
+                          <a:ea typeface="Times New Roman" pitchFamily="34" charset="-122"/>
+                          <a:cs typeface="Times New Roman" pitchFamily="34" charset="-120"/>
                         </a:rPr>
                         <a:t>Artillery Load Test</a:t>
                       </a:r>
-                      <a:endParaRPr lang="en-US" sz="1050" dirty="0">
-                        <a:latin typeface="Calibri" charset="0"/>
-                        <a:ea typeface="Calibri" charset="0"/>
-                        <a:cs typeface="Calibri" charset="0"/>
+                      <a:endParaRPr lang="en-US" sz="1200" dirty="0">
+                        <a:latin typeface="Times New Roman" charset="0"/>
+                        <a:ea typeface="Times New Roman" charset="0"/>
+                        <a:cs typeface="Times New Roman" charset="0"/>
                       </a:endParaRPr>
                     </a:p>
                   </a:txBody>
                   <a:tcPr marL="91440" marR="91440" marT="45720" marB="45720" anchor="ctr">
                     <a:lnL w="6350" cap="flat" cmpd="sng" algn="ctr">
                       <a:solidFill>
-                        <a:srgbClr val="FFEDD5"/>
+                        <a:srgbClr val="EFEAE3"/>
                       </a:solidFill>
                       <a:prstDash val="solid"/>
                       <a:round/>
@@ -7325,7 +7763,7 @@
                     </a:lnL>
                     <a:lnR w="6350" cap="flat" cmpd="sng" algn="ctr">
                       <a:solidFill>
-                        <a:srgbClr val="FFEDD5"/>
+                        <a:srgbClr val="EFEAE3"/>
                       </a:solidFill>
                       <a:prstDash val="solid"/>
                       <a:round/>
@@ -7334,7 +7772,7 @@
                     </a:lnR>
                     <a:lnT w="6350" cap="flat" cmpd="sng" algn="ctr">
                       <a:solidFill>
-                        <a:srgbClr val="FFEDD5"/>
+                        <a:srgbClr val="EFEAE3"/>
                       </a:solidFill>
                       <a:prstDash val="solid"/>
                       <a:round/>
@@ -7343,7 +7781,7 @@
                     </a:lnT>
                     <a:lnB w="6350" cap="flat" cmpd="sng" algn="ctr">
                       <a:solidFill>
-                        <a:srgbClr val="FFEDD5"/>
+                        <a:srgbClr val="EFEAE3"/>
                       </a:solidFill>
                       <a:prstDash val="solid"/>
                       <a:round/>
@@ -7351,7 +7789,7 @@
                       <a:tailEnd type="none" w="med" len="med"/>
                     </a:lnB>
                     <a:solidFill>
-                      <a:srgbClr val="FFF7ED"/>
+                      <a:srgbClr val="F8F4F0"/>
                     </a:solidFill>
                   </a:tcPr>
                 </a:tc>
@@ -7366,27 +7804,27 @@
                         <a:buNone/>
                       </a:pPr>
                       <a:r>
-                        <a:rPr lang="en-US" sz="1050" dirty="0">
+                        <a:rPr lang="en-US" sz="1200" dirty="0">
                           <a:solidFill>
-                            <a:srgbClr val="1E293B"/>
+                            <a:srgbClr val="2D2D3A"/>
                           </a:solidFill>
-                          <a:latin typeface="Calibri" pitchFamily="34" charset="0"/>
-                          <a:ea typeface="Calibri" pitchFamily="34" charset="-122"/>
-                          <a:cs typeface="Calibri" pitchFamily="34" charset="-120"/>
+                          <a:latin typeface="Times New Roman" pitchFamily="34" charset="0"/>
+                          <a:ea typeface="Times New Roman" pitchFamily="34" charset="-122"/>
+                          <a:cs typeface="Times New Roman" pitchFamily="34" charset="-120"/>
                         </a:rPr>
                         <a:t>Надежность</a:t>
                       </a:r>
-                      <a:endParaRPr lang="en-US" sz="1050" dirty="0">
-                        <a:latin typeface="Calibri" charset="0"/>
-                        <a:ea typeface="Calibri" charset="0"/>
-                        <a:cs typeface="Calibri" charset="0"/>
+                      <a:endParaRPr lang="en-US" sz="1200" dirty="0">
+                        <a:latin typeface="Times New Roman" charset="0"/>
+                        <a:ea typeface="Times New Roman" charset="0"/>
+                        <a:cs typeface="Times New Roman" charset="0"/>
                       </a:endParaRPr>
                     </a:p>
                   </a:txBody>
                   <a:tcPr marL="91440" marR="91440" marT="45720" marB="45720" anchor="ctr">
                     <a:lnL w="6350" cap="flat" cmpd="sng" algn="ctr">
                       <a:solidFill>
-                        <a:srgbClr val="FFEDD5"/>
+                        <a:srgbClr val="EFEAE3"/>
                       </a:solidFill>
                       <a:prstDash val="solid"/>
                       <a:round/>
@@ -7395,7 +7833,7 @@
                     </a:lnL>
                     <a:lnR w="6350" cap="flat" cmpd="sng" algn="ctr">
                       <a:solidFill>
-                        <a:srgbClr val="FFEDD5"/>
+                        <a:srgbClr val="EFEAE3"/>
                       </a:solidFill>
                       <a:prstDash val="solid"/>
                       <a:round/>
@@ -7404,7 +7842,7 @@
                     </a:lnR>
                     <a:lnT w="6350" cap="flat" cmpd="sng" algn="ctr">
                       <a:solidFill>
-                        <a:srgbClr val="FFEDD5"/>
+                        <a:srgbClr val="EFEAE3"/>
                       </a:solidFill>
                       <a:prstDash val="solid"/>
                       <a:round/>
@@ -7413,7 +7851,7 @@
                     </a:lnT>
                     <a:lnB w="6350" cap="flat" cmpd="sng" algn="ctr">
                       <a:solidFill>
-                        <a:srgbClr val="FFEDD5"/>
+                        <a:srgbClr val="EFEAE3"/>
                       </a:solidFill>
                       <a:prstDash val="solid"/>
                       <a:round/>
@@ -7434,27 +7872,27 @@
                         <a:buNone/>
                       </a:pPr>
                       <a:r>
-                        <a:rPr lang="en-US" sz="1050" dirty="0">
+                        <a:rPr lang="en-US" sz="1200" dirty="0">
                           <a:solidFill>
-                            <a:srgbClr val="1E293B"/>
+                            <a:srgbClr val="2D2D3A"/>
                           </a:solidFill>
-                          <a:latin typeface="Calibri" pitchFamily="34" charset="0"/>
-                          <a:ea typeface="Calibri" pitchFamily="34" charset="-122"/>
-                          <a:cs typeface="Calibri" pitchFamily="34" charset="-120"/>
+                          <a:latin typeface="Times New Roman" pitchFamily="34" charset="0"/>
+                          <a:ea typeface="Times New Roman" pitchFamily="34" charset="-122"/>
+                          <a:cs typeface="Times New Roman" pitchFamily="34" charset="-120"/>
                         </a:rPr>
                         <a:t>Время доступности сервиса (Uptime)</a:t>
                       </a:r>
-                      <a:endParaRPr lang="en-US" sz="1050" dirty="0">
-                        <a:latin typeface="Calibri" charset="0"/>
-                        <a:ea typeface="Calibri" charset="0"/>
-                        <a:cs typeface="Calibri" charset="0"/>
+                      <a:endParaRPr lang="en-US" sz="1200" dirty="0">
+                        <a:latin typeface="Times New Roman" charset="0"/>
+                        <a:ea typeface="Times New Roman" charset="0"/>
+                        <a:cs typeface="Times New Roman" charset="0"/>
                       </a:endParaRPr>
                     </a:p>
                   </a:txBody>
                   <a:tcPr marL="91440" marR="91440" marT="45720" marB="45720" anchor="ctr">
                     <a:lnL w="6350" cap="flat" cmpd="sng" algn="ctr">
                       <a:solidFill>
-                        <a:srgbClr val="FFEDD5"/>
+                        <a:srgbClr val="EFEAE3"/>
                       </a:solidFill>
                       <a:prstDash val="solid"/>
                       <a:round/>
@@ -7463,7 +7901,7 @@
                     </a:lnL>
                     <a:lnR w="6350" cap="flat" cmpd="sng" algn="ctr">
                       <a:solidFill>
-                        <a:srgbClr val="FFEDD5"/>
+                        <a:srgbClr val="EFEAE3"/>
                       </a:solidFill>
                       <a:prstDash val="solid"/>
                       <a:round/>
@@ -7472,7 +7910,7 @@
                     </a:lnR>
                     <a:lnT w="6350" cap="flat" cmpd="sng" algn="ctr">
                       <a:solidFill>
-                        <a:srgbClr val="FFEDD5"/>
+                        <a:srgbClr val="EFEAE3"/>
                       </a:solidFill>
                       <a:prstDash val="solid"/>
                       <a:round/>
@@ -7481,7 +7919,7 @@
                     </a:lnT>
                     <a:lnB w="6350" cap="flat" cmpd="sng" algn="ctr">
                       <a:solidFill>
-                        <a:srgbClr val="FFEDD5"/>
+                        <a:srgbClr val="EFEAE3"/>
                       </a:solidFill>
                       <a:prstDash val="solid"/>
                       <a:round/>
@@ -7502,27 +7940,27 @@
                         <a:buNone/>
                       </a:pPr>
                       <a:r>
-                        <a:rPr lang="en-US" sz="1050" dirty="0">
+                        <a:rPr lang="en-US" sz="1200" dirty="0">
                           <a:solidFill>
-                            <a:srgbClr val="1E293B"/>
+                            <a:srgbClr val="2D2D3A"/>
                           </a:solidFill>
-                          <a:latin typeface="Calibri" pitchFamily="34" charset="0"/>
-                          <a:ea typeface="Calibri" pitchFamily="34" charset="-122"/>
-                          <a:cs typeface="Calibri" pitchFamily="34" charset="-120"/>
+                          <a:latin typeface="Times New Roman" pitchFamily="34" charset="0"/>
+                          <a:ea typeface="Times New Roman" pitchFamily="34" charset="-122"/>
+                          <a:cs typeface="Times New Roman" pitchFamily="34" charset="-120"/>
                         </a:rPr>
                         <a:t>≥ 99.9% годового аптайма</a:t>
                       </a:r>
-                      <a:endParaRPr lang="en-US" sz="1050" dirty="0">
-                        <a:latin typeface="Calibri" charset="0"/>
-                        <a:ea typeface="Calibri" charset="0"/>
-                        <a:cs typeface="Calibri" charset="0"/>
+                      <a:endParaRPr lang="en-US" sz="1200" dirty="0">
+                        <a:latin typeface="Times New Roman" charset="0"/>
+                        <a:ea typeface="Times New Roman" charset="0"/>
+                        <a:cs typeface="Times New Roman" charset="0"/>
                       </a:endParaRPr>
                     </a:p>
                   </a:txBody>
                   <a:tcPr marL="91440" marR="91440" marT="45720" marB="45720" anchor="ctr">
                     <a:lnL w="6350" cap="flat" cmpd="sng" algn="ctr">
                       <a:solidFill>
-                        <a:srgbClr val="FFEDD5"/>
+                        <a:srgbClr val="EFEAE3"/>
                       </a:solidFill>
                       <a:prstDash val="solid"/>
                       <a:round/>
@@ -7531,7 +7969,7 @@
                     </a:lnL>
                     <a:lnR w="6350" cap="flat" cmpd="sng" algn="ctr">
                       <a:solidFill>
-                        <a:srgbClr val="FFEDD5"/>
+                        <a:srgbClr val="EFEAE3"/>
                       </a:solidFill>
                       <a:prstDash val="solid"/>
                       <a:round/>
@@ -7540,7 +7978,7 @@
                     </a:lnR>
                     <a:lnT w="6350" cap="flat" cmpd="sng" algn="ctr">
                       <a:solidFill>
-                        <a:srgbClr val="FFEDD5"/>
+                        <a:srgbClr val="EFEAE3"/>
                       </a:solidFill>
                       <a:prstDash val="solid"/>
                       <a:round/>
@@ -7549,7 +7987,7 @@
                     </a:lnT>
                     <a:lnB w="6350" cap="flat" cmpd="sng" algn="ctr">
                       <a:solidFill>
-                        <a:srgbClr val="FFEDD5"/>
+                        <a:srgbClr val="EFEAE3"/>
                       </a:solidFill>
                       <a:prstDash val="solid"/>
                       <a:round/>
@@ -7570,27 +8008,27 @@
                         <a:buNone/>
                       </a:pPr>
                       <a:r>
-                        <a:rPr lang="en-US" sz="1050" dirty="0">
+                        <a:rPr lang="en-US" sz="1200" dirty="0">
                           <a:solidFill>
-                            <a:srgbClr val="1E293B"/>
+                            <a:srgbClr val="2D2D3A"/>
                           </a:solidFill>
-                          <a:latin typeface="Calibri" pitchFamily="34" charset="0"/>
-                          <a:ea typeface="Calibri" pitchFamily="34" charset="-122"/>
-                          <a:cs typeface="Calibri" pitchFamily="34" charset="-120"/>
+                          <a:latin typeface="Times New Roman" pitchFamily="34" charset="0"/>
+                          <a:ea typeface="Times New Roman" pitchFamily="34" charset="-122"/>
+                          <a:cs typeface="Times New Roman" pitchFamily="34" charset="-120"/>
                         </a:rPr>
                         <a:t>UptimeRobot / Promtail</a:t>
                       </a:r>
-                      <a:endParaRPr lang="en-US" sz="1050" dirty="0">
-                        <a:latin typeface="Calibri" charset="0"/>
-                        <a:ea typeface="Calibri" charset="0"/>
-                        <a:cs typeface="Calibri" charset="0"/>
+                      <a:endParaRPr lang="en-US" sz="1200" dirty="0">
+                        <a:latin typeface="Times New Roman" charset="0"/>
+                        <a:ea typeface="Times New Roman" charset="0"/>
+                        <a:cs typeface="Times New Roman" charset="0"/>
                       </a:endParaRPr>
                     </a:p>
                   </a:txBody>
                   <a:tcPr marL="91440" marR="91440" marT="45720" marB="45720" anchor="ctr">
                     <a:lnL w="6350" cap="flat" cmpd="sng" algn="ctr">
                       <a:solidFill>
-                        <a:srgbClr val="FFEDD5"/>
+                        <a:srgbClr val="EFEAE3"/>
                       </a:solidFill>
                       <a:prstDash val="solid"/>
                       <a:round/>
@@ -7599,7 +8037,7 @@
                     </a:lnL>
                     <a:lnR w="6350" cap="flat" cmpd="sng" algn="ctr">
                       <a:solidFill>
-                        <a:srgbClr val="FFEDD5"/>
+                        <a:srgbClr val="EFEAE3"/>
                       </a:solidFill>
                       <a:prstDash val="solid"/>
                       <a:round/>
@@ -7608,7 +8046,7 @@
                     </a:lnR>
                     <a:lnT w="6350" cap="flat" cmpd="sng" algn="ctr">
                       <a:solidFill>
-                        <a:srgbClr val="FFEDD5"/>
+                        <a:srgbClr val="EFEAE3"/>
                       </a:solidFill>
                       <a:prstDash val="solid"/>
                       <a:round/>
@@ -7617,7 +8055,7 @@
                     </a:lnT>
                     <a:lnB w="6350" cap="flat" cmpd="sng" algn="ctr">
                       <a:solidFill>
-                        <a:srgbClr val="FFEDD5"/>
+                        <a:srgbClr val="EFEAE3"/>
                       </a:solidFill>
                       <a:prstDash val="solid"/>
                       <a:round/>
@@ -7640,27 +8078,27 @@
                         <a:buNone/>
                       </a:pPr>
                       <a:r>
-                        <a:rPr lang="en-US" sz="1050" dirty="0">
+                        <a:rPr lang="en-US" sz="1200" dirty="0">
                           <a:solidFill>
-                            <a:srgbClr val="1E293B"/>
+                            <a:srgbClr val="2D2D3A"/>
                           </a:solidFill>
-                          <a:latin typeface="Calibri" pitchFamily="34" charset="0"/>
-                          <a:ea typeface="Calibri" pitchFamily="34" charset="-122"/>
-                          <a:cs typeface="Calibri" pitchFamily="34" charset="-120"/>
+                          <a:latin typeface="Times New Roman" pitchFamily="34" charset="0"/>
+                          <a:ea typeface="Times New Roman" pitchFamily="34" charset="-122"/>
+                          <a:cs typeface="Times New Roman" pitchFamily="34" charset="-120"/>
                         </a:rPr>
                         <a:t>Безопасность</a:t>
                       </a:r>
-                      <a:endParaRPr lang="en-US" sz="1050" dirty="0">
-                        <a:latin typeface="Calibri" charset="0"/>
-                        <a:ea typeface="Calibri" charset="0"/>
-                        <a:cs typeface="Calibri" charset="0"/>
+                      <a:endParaRPr lang="en-US" sz="1200" dirty="0">
+                        <a:latin typeface="Times New Roman" charset="0"/>
+                        <a:ea typeface="Times New Roman" charset="0"/>
+                        <a:cs typeface="Times New Roman" charset="0"/>
                       </a:endParaRPr>
                     </a:p>
                   </a:txBody>
                   <a:tcPr marL="91440" marR="91440" marT="45720" marB="45720" anchor="ctr">
                     <a:lnL w="6350" cap="flat" cmpd="sng" algn="ctr">
                       <a:solidFill>
-                        <a:srgbClr val="FFEDD5"/>
+                        <a:srgbClr val="EFEAE3"/>
                       </a:solidFill>
                       <a:prstDash val="solid"/>
                       <a:round/>
@@ -7669,7 +8107,7 @@
                     </a:lnL>
                     <a:lnR w="6350" cap="flat" cmpd="sng" algn="ctr">
                       <a:solidFill>
-                        <a:srgbClr val="FFEDD5"/>
+                        <a:srgbClr val="EFEAE3"/>
                       </a:solidFill>
                       <a:prstDash val="solid"/>
                       <a:round/>
@@ -7678,7 +8116,7 @@
                     </a:lnR>
                     <a:lnT w="6350" cap="flat" cmpd="sng" algn="ctr">
                       <a:solidFill>
-                        <a:srgbClr val="FFEDD5"/>
+                        <a:srgbClr val="EFEAE3"/>
                       </a:solidFill>
                       <a:prstDash val="solid"/>
                       <a:round/>
@@ -7687,7 +8125,7 @@
                     </a:lnT>
                     <a:lnB w="6350" cap="flat" cmpd="sng" algn="ctr">
                       <a:solidFill>
-                        <a:srgbClr val="FFEDD5"/>
+                        <a:srgbClr val="EFEAE3"/>
                       </a:solidFill>
                       <a:prstDash val="solid"/>
                       <a:round/>
@@ -7695,7 +8133,7 @@
                       <a:tailEnd type="none" w="med" len="med"/>
                     </a:lnB>
                     <a:solidFill>
-                      <a:srgbClr val="FFF7ED"/>
+                      <a:srgbClr val="F8F4F0"/>
                     </a:solidFill>
                   </a:tcPr>
                 </a:tc>
@@ -7708,27 +8146,27 @@
                         <a:buNone/>
                       </a:pPr>
                       <a:r>
-                        <a:rPr lang="en-US" sz="1050" dirty="0">
+                        <a:rPr lang="en-US" sz="1200" dirty="0">
                           <a:solidFill>
-                            <a:srgbClr val="1E293B"/>
+                            <a:srgbClr val="2D2D3A"/>
                           </a:solidFill>
-                          <a:latin typeface="Calibri" pitchFamily="34" charset="0"/>
-                          <a:ea typeface="Calibri" pitchFamily="34" charset="-122"/>
-                          <a:cs typeface="Calibri" pitchFamily="34" charset="-120"/>
+                          <a:latin typeface="Times New Roman" pitchFamily="34" charset="0"/>
+                          <a:ea typeface="Times New Roman" pitchFamily="34" charset="-122"/>
+                          <a:cs typeface="Times New Roman" pitchFamily="34" charset="-120"/>
                         </a:rPr>
                         <a:t>Критические уязвимости в зависимостях</a:t>
                       </a:r>
-                      <a:endParaRPr lang="en-US" sz="1050" dirty="0">
-                        <a:latin typeface="Calibri" charset="0"/>
-                        <a:ea typeface="Calibri" charset="0"/>
-                        <a:cs typeface="Calibri" charset="0"/>
+                      <a:endParaRPr lang="en-US" sz="1200" dirty="0">
+                        <a:latin typeface="Times New Roman" charset="0"/>
+                        <a:ea typeface="Times New Roman" charset="0"/>
+                        <a:cs typeface="Times New Roman" charset="0"/>
                       </a:endParaRPr>
                     </a:p>
                   </a:txBody>
                   <a:tcPr marL="91440" marR="91440" marT="45720" marB="45720" anchor="ctr">
                     <a:lnL w="6350" cap="flat" cmpd="sng" algn="ctr">
                       <a:solidFill>
-                        <a:srgbClr val="FFEDD5"/>
+                        <a:srgbClr val="EFEAE3"/>
                       </a:solidFill>
                       <a:prstDash val="solid"/>
                       <a:round/>
@@ -7737,7 +8175,7 @@
                     </a:lnL>
                     <a:lnR w="6350" cap="flat" cmpd="sng" algn="ctr">
                       <a:solidFill>
-                        <a:srgbClr val="FFEDD5"/>
+                        <a:srgbClr val="EFEAE3"/>
                       </a:solidFill>
                       <a:prstDash val="solid"/>
                       <a:round/>
@@ -7746,7 +8184,7 @@
                     </a:lnR>
                     <a:lnT w="6350" cap="flat" cmpd="sng" algn="ctr">
                       <a:solidFill>
-                        <a:srgbClr val="FFEDD5"/>
+                        <a:srgbClr val="EFEAE3"/>
                       </a:solidFill>
                       <a:prstDash val="solid"/>
                       <a:round/>
@@ -7755,7 +8193,7 @@
                     </a:lnT>
                     <a:lnB w="6350" cap="flat" cmpd="sng" algn="ctr">
                       <a:solidFill>
-                        <a:srgbClr val="FFEDD5"/>
+                        <a:srgbClr val="EFEAE3"/>
                       </a:solidFill>
                       <a:prstDash val="solid"/>
                       <a:round/>
@@ -7763,7 +8201,7 @@
                       <a:tailEnd type="none" w="med" len="med"/>
                     </a:lnB>
                     <a:solidFill>
-                      <a:srgbClr val="FFF7ED"/>
+                      <a:srgbClr val="F8F4F0"/>
                     </a:solidFill>
                   </a:tcPr>
                 </a:tc>
@@ -7776,27 +8214,27 @@
                         <a:buNone/>
                       </a:pPr>
                       <a:r>
-                        <a:rPr lang="en-US" sz="1050" dirty="0">
+                        <a:rPr lang="en-US" sz="1200" dirty="0">
                           <a:solidFill>
-                            <a:srgbClr val="1E293B"/>
+                            <a:srgbClr val="2D2D3A"/>
                           </a:solidFill>
-                          <a:latin typeface="Calibri" pitchFamily="34" charset="0"/>
-                          <a:ea typeface="Calibri" pitchFamily="34" charset="-122"/>
-                          <a:cs typeface="Calibri" pitchFamily="34" charset="-120"/>
+                          <a:latin typeface="Times New Roman" pitchFamily="34" charset="0"/>
+                          <a:ea typeface="Times New Roman" pitchFamily="34" charset="-122"/>
+                          <a:cs typeface="Times New Roman" pitchFamily="34" charset="-120"/>
                         </a:rPr>
                         <a:t>0 уязвимостей (High / Critical)</a:t>
                       </a:r>
-                      <a:endParaRPr lang="en-US" sz="1050" dirty="0">
-                        <a:latin typeface="Calibri" charset="0"/>
-                        <a:ea typeface="Calibri" charset="0"/>
-                        <a:cs typeface="Calibri" charset="0"/>
+                      <a:endParaRPr lang="en-US" sz="1200" dirty="0">
+                        <a:latin typeface="Times New Roman" charset="0"/>
+                        <a:ea typeface="Times New Roman" charset="0"/>
+                        <a:cs typeface="Times New Roman" charset="0"/>
                       </a:endParaRPr>
                     </a:p>
                   </a:txBody>
                   <a:tcPr marL="91440" marR="91440" marT="45720" marB="45720" anchor="ctr">
                     <a:lnL w="6350" cap="flat" cmpd="sng" algn="ctr">
                       <a:solidFill>
-                        <a:srgbClr val="FFEDD5"/>
+                        <a:srgbClr val="EFEAE3"/>
                       </a:solidFill>
                       <a:prstDash val="solid"/>
                       <a:round/>
@@ -7805,7 +8243,7 @@
                     </a:lnL>
                     <a:lnR w="6350" cap="flat" cmpd="sng" algn="ctr">
                       <a:solidFill>
-                        <a:srgbClr val="FFEDD5"/>
+                        <a:srgbClr val="EFEAE3"/>
                       </a:solidFill>
                       <a:prstDash val="solid"/>
                       <a:round/>
@@ -7814,7 +8252,7 @@
                     </a:lnR>
                     <a:lnT w="6350" cap="flat" cmpd="sng" algn="ctr">
                       <a:solidFill>
-                        <a:srgbClr val="FFEDD5"/>
+                        <a:srgbClr val="EFEAE3"/>
                       </a:solidFill>
                       <a:prstDash val="solid"/>
                       <a:round/>
@@ -7823,7 +8261,7 @@
                     </a:lnT>
                     <a:lnB w="6350" cap="flat" cmpd="sng" algn="ctr">
                       <a:solidFill>
-                        <a:srgbClr val="FFEDD5"/>
+                        <a:srgbClr val="EFEAE3"/>
                       </a:solidFill>
                       <a:prstDash val="solid"/>
                       <a:round/>
@@ -7831,7 +8269,7 @@
                       <a:tailEnd type="none" w="med" len="med"/>
                     </a:lnB>
                     <a:solidFill>
-                      <a:srgbClr val="FFF7ED"/>
+                      <a:srgbClr val="F8F4F0"/>
                     </a:solidFill>
                   </a:tcPr>
                 </a:tc>
@@ -7844,27 +8282,27 @@
                         <a:buNone/>
                       </a:pPr>
                       <a:r>
-                        <a:rPr lang="en-US" sz="1050" dirty="0">
+                        <a:rPr lang="en-US" sz="1200" dirty="0">
                           <a:solidFill>
-                            <a:srgbClr val="1E293B"/>
+                            <a:srgbClr val="2D2D3A"/>
                           </a:solidFill>
-                          <a:latin typeface="Calibri" pitchFamily="34" charset="0"/>
-                          <a:ea typeface="Calibri" pitchFamily="34" charset="-122"/>
-                          <a:cs typeface="Calibri" pitchFamily="34" charset="-120"/>
+                          <a:latin typeface="Times New Roman" pitchFamily="34" charset="0"/>
+                          <a:ea typeface="Times New Roman" pitchFamily="34" charset="-122"/>
+                          <a:cs typeface="Times New Roman" pitchFamily="34" charset="-120"/>
                         </a:rPr>
                         <a:t>npm audit / Snyk CI</a:t>
                       </a:r>
-                      <a:endParaRPr lang="en-US" sz="1050" dirty="0">
-                        <a:latin typeface="Calibri" charset="0"/>
-                        <a:ea typeface="Calibri" charset="0"/>
-                        <a:cs typeface="Calibri" charset="0"/>
+                      <a:endParaRPr lang="en-US" sz="1200" dirty="0">
+                        <a:latin typeface="Times New Roman" charset="0"/>
+                        <a:ea typeface="Times New Roman" charset="0"/>
+                        <a:cs typeface="Times New Roman" charset="0"/>
                       </a:endParaRPr>
                     </a:p>
                   </a:txBody>
                   <a:tcPr marL="91440" marR="91440" marT="45720" marB="45720" anchor="ctr">
                     <a:lnL w="6350" cap="flat" cmpd="sng" algn="ctr">
                       <a:solidFill>
-                        <a:srgbClr val="FFEDD5"/>
+                        <a:srgbClr val="EFEAE3"/>
                       </a:solidFill>
                       <a:prstDash val="solid"/>
                       <a:round/>
@@ -7873,7 +8311,7 @@
                     </a:lnL>
                     <a:lnR w="6350" cap="flat" cmpd="sng" algn="ctr">
                       <a:solidFill>
-                        <a:srgbClr val="FFEDD5"/>
+                        <a:srgbClr val="EFEAE3"/>
                       </a:solidFill>
                       <a:prstDash val="solid"/>
                       <a:round/>
@@ -7882,7 +8320,7 @@
                     </a:lnR>
                     <a:lnT w="6350" cap="flat" cmpd="sng" algn="ctr">
                       <a:solidFill>
-                        <a:srgbClr val="FFEDD5"/>
+                        <a:srgbClr val="EFEAE3"/>
                       </a:solidFill>
                       <a:prstDash val="solid"/>
                       <a:round/>
@@ -7891,7 +8329,7 @@
                     </a:lnT>
                     <a:lnB w="6350" cap="flat" cmpd="sng" algn="ctr">
                       <a:solidFill>
-                        <a:srgbClr val="FFEDD5"/>
+                        <a:srgbClr val="EFEAE3"/>
                       </a:solidFill>
                       <a:prstDash val="solid"/>
                       <a:round/>
@@ -7899,7 +8337,7 @@
                       <a:tailEnd type="none" w="med" len="med"/>
                     </a:lnB>
                     <a:solidFill>
-                      <a:srgbClr val="FFF7ED"/>
+                      <a:srgbClr val="F8F4F0"/>
                     </a:solidFill>
                   </a:tcPr>
                 </a:tc>
@@ -7908,425 +8346,6 @@
           </a:graphicData>
         </a:graphic>
       </p:graphicFrame>
-    </p:spTree>
-  </p:cSld>
-  <p:clrMapOvr>
-    <a:masterClrMapping/>
-  </p:clrMapOvr>
-</p:sld>
-</file>
-
-<file path=ppt/slides/slide5.xml><?xml version="1.0" encoding="utf-8"?>
-<p:sld xmlns:a="http://schemas.openxmlformats.org/drawingml/2006/main" xmlns:r="http://schemas.openxmlformats.org/officeDocument/2006/relationships" xmlns:p="http://schemas.openxmlformats.org/presentationml/2006/main">
-  <p:cSld name="Slide 5">
-    <p:bg>
-      <p:bgPr>
-        <a:solidFill>
-          <a:srgbClr val="FFFFFF"/>
-        </a:solidFill>
-      </p:bgPr>
-    </p:bg>
-    <p:spTree>
-      <p:nvGrpSpPr>
-        <p:cNvPr id="1" name=""/>
-        <p:cNvGrpSpPr/>
-        <p:nvPr/>
-      </p:nvGrpSpPr>
-      <p:grpSpPr>
-        <a:xfrm>
-          <a:off x="0" y="0"/>
-          <a:ext cx="0" cy="0"/>
-          <a:chOff x="0" y="0"/>
-          <a:chExt cx="0" cy="0"/>
-        </a:xfrm>
-      </p:grpSpPr>
-      <p:sp>
-        <p:nvSpPr>
-          <p:cNvPr id="2" name="Text 0"/>
-          <p:cNvSpPr/>
-          <p:nvPr/>
-        </p:nvSpPr>
-        <p:spPr>
-          <a:xfrm>
-            <a:off x="384048" y="164592"/>
-            <a:ext cx="8375904" cy="548640"/>
-          </a:xfrm>
-          <a:prstGeom prst="rect">
-            <a:avLst/>
-          </a:prstGeom>
-          <a:noFill/>
-          <a:ln/>
-        </p:spPr>
-        <p:txBody>
-          <a:bodyPr wrap="square" rtlCol="0" anchor="b"/>
-          <a:lstStyle/>
-          <a:p>
-            <a:pPr algn="l" indent="0" marL="0">
-              <a:buNone/>
-            </a:pPr>
-            <a:r>
-              <a:rPr lang="en-US" sz="2000" b="1" dirty="0">
-                <a:solidFill>
-                  <a:srgbClr val="0F1E36"/>
-                </a:solidFill>
-                <a:latin typeface="Cambria" pitchFamily="34" charset="0"/>
-                <a:ea typeface="Cambria" pitchFamily="34" charset="-122"/>
-                <a:cs typeface="Cambria" pitchFamily="34" charset="-120"/>
-              </a:rPr>
-              <a:t>Модульность: структура директорий бэкенда</a:t>
-            </a:r>
-            <a:endParaRPr lang="en-US" sz="2000" dirty="0"/>
-          </a:p>
-        </p:txBody>
-      </p:sp>
-      <p:sp>
-        <p:nvSpPr>
-          <p:cNvPr id="3" name="Shape 1"/>
-          <p:cNvSpPr/>
-          <p:nvPr/>
-        </p:nvSpPr>
-        <p:spPr>
-          <a:xfrm>
-            <a:off x="384048" y="822960"/>
-            <a:ext cx="3474720" cy="4119372"/>
-          </a:xfrm>
-          <a:prstGeom prst="roundRect">
-            <a:avLst>
-              <a:gd name="adj" fmla="val 2632"/>
-            </a:avLst>
-          </a:prstGeom>
-          <a:solidFill>
-            <a:srgbClr val="FFF7ED"/>
-          </a:solidFill>
-          <a:ln w="12700">
-            <a:solidFill>
-              <a:srgbClr val="FFF7ED"/>
-            </a:solidFill>
-            <a:prstDash val="solid"/>
-          </a:ln>
-          <a:effectLst>
-            <a:outerShdw sx="100000" sy="100000" kx="0" ky="0" algn="bl" rotWithShape="0" blurRad="88900" dist="25400" dir="2700000">
-              <a:srgbClr val="000000">
-                <a:alpha val="9000"/>
-              </a:srgbClr>
-            </a:outerShdw>
-          </a:effectLst>
-        </p:spPr>
-      </p:sp>
-      <p:sp>
-        <p:nvSpPr>
-          <p:cNvPr id="4" name="Text 2"/>
-          <p:cNvSpPr/>
-          <p:nvPr/>
-        </p:nvSpPr>
-        <p:spPr>
-          <a:xfrm>
-            <a:off x="521208" y="932688"/>
-            <a:ext cx="3200400" cy="320040"/>
-          </a:xfrm>
-          <a:prstGeom prst="rect">
-            <a:avLst/>
-          </a:prstGeom>
-          <a:noFill/>
-          <a:ln/>
-        </p:spPr>
-        <p:txBody>
-          <a:bodyPr wrap="square" rtlCol="0" anchor="ctr"/>
-          <a:lstStyle/>
-          <a:p>
-            <a:pPr indent="0" marL="0">
-              <a:buNone/>
-            </a:pPr>
-            <a:r>
-              <a:rPr lang="en-US" sz="1300" b="1" dirty="0">
-                <a:solidFill>
-                  <a:srgbClr val="0F1E36"/>
-                </a:solidFill>
-                <a:latin typeface="Cambria" pitchFamily="34" charset="0"/>
-                <a:ea typeface="Cambria" pitchFamily="34" charset="-122"/>
-                <a:cs typeface="Cambria" pitchFamily="34" charset="-120"/>
-              </a:rPr>
-              <a:t>Преимущества структуры</a:t>
-            </a:r>
-            <a:endParaRPr lang="en-US" sz="1300" dirty="0"/>
-          </a:p>
-        </p:txBody>
-      </p:sp>
-      <p:sp>
-        <p:nvSpPr>
-          <p:cNvPr id="5" name="Text 3"/>
-          <p:cNvSpPr/>
-          <p:nvPr/>
-        </p:nvSpPr>
-        <p:spPr>
-          <a:xfrm>
-            <a:off x="521208" y="1325880"/>
-            <a:ext cx="3200400" cy="3387852"/>
-          </a:xfrm>
-          <a:prstGeom prst="rect">
-            <a:avLst/>
-          </a:prstGeom>
-          <a:noFill/>
-          <a:ln/>
-        </p:spPr>
-        <p:txBody>
-          <a:bodyPr wrap="square" rtlCol="0" anchor="ctr"/>
-          <a:lstStyle/>
-          <a:p>
-            <a:pPr indent="0" marL="0">
-              <a:buNone/>
-            </a:pPr>
-            <a:r>
-              <a:rPr lang="en-US" sz="1100" dirty="0">
-                <a:solidFill>
-                  <a:srgbClr val="1E293B"/>
-                </a:solidFill>
-                <a:latin typeface="Calibri" pitchFamily="34" charset="0"/>
-                <a:ea typeface="Calibri" pitchFamily="34" charset="-122"/>
-                <a:cs typeface="Calibri" pitchFamily="34" charset="-120"/>
-              </a:rPr>
-              <a:t>• Разделение ответственности слоев.</a:t>
-            </a:r>
-            <a:endParaRPr lang="en-US" sz="1100" dirty="0"/>
-          </a:p>
-          <a:p>
-            <a:pPr indent="0" marL="0">
-              <a:buNone/>
-            </a:pPr>
-            <a:r>
-              <a:rPr lang="en-US" sz="1100" dirty="0">
-                <a:solidFill>
-                  <a:srgbClr val="1E293B"/>
-                </a:solidFill>
-                <a:latin typeface="Calibri" pitchFamily="34" charset="0"/>
-                <a:ea typeface="Calibri" pitchFamily="34" charset="-122"/>
-                <a:cs typeface="Calibri" pitchFamily="34" charset="-120"/>
-              </a:rPr>
-              <a:t>• Эндпоинты (routes) не содержат сырых запросов к SQL.</a:t>
-            </a:r>
-            <a:endParaRPr lang="en-US" sz="1100" dirty="0"/>
-          </a:p>
-          <a:p>
-            <a:pPr indent="0" marL="0">
-              <a:buNone/>
-            </a:pPr>
-            <a:r>
-              <a:rPr lang="en-US" sz="1100" dirty="0">
-                <a:solidFill>
-                  <a:srgbClr val="1E293B"/>
-                </a:solidFill>
-                <a:latin typeface="Calibri" pitchFamily="34" charset="0"/>
-                <a:ea typeface="Calibri" pitchFamily="34" charset="-122"/>
-                <a:cs typeface="Calibri" pitchFamily="34" charset="-120"/>
-              </a:rPr>
-              <a:t>• Вся бизнес-логика вынесена в сервисы (services).</a:t>
-            </a:r>
-            <a:endParaRPr lang="en-US" sz="1100" dirty="0"/>
-          </a:p>
-          <a:p>
-            <a:pPr indent="0" marL="0">
-              <a:buNone/>
-            </a:pPr>
-            <a:r>
-              <a:rPr lang="en-US" sz="1100" dirty="0">
-                <a:solidFill>
-                  <a:srgbClr val="1E293B"/>
-                </a:solidFill>
-                <a:latin typeface="Calibri" pitchFamily="34" charset="0"/>
-                <a:ea typeface="Calibri" pitchFamily="34" charset="-122"/>
-                <a:cs typeface="Calibri" pitchFamily="34" charset="-120"/>
-              </a:rPr>
-              <a:t>• Доступ к СУБД изолирован в слое миграций и репозиториев (db).</a:t>
-            </a:r>
-            <a:endParaRPr lang="en-US" sz="1100" dirty="0"/>
-          </a:p>
-        </p:txBody>
-      </p:sp>
-      <p:sp>
-        <p:nvSpPr>
-          <p:cNvPr id="6" name="Shape 4"/>
-          <p:cNvSpPr/>
-          <p:nvPr/>
-        </p:nvSpPr>
-        <p:spPr>
-          <a:xfrm>
-            <a:off x="4133088" y="822960"/>
-            <a:ext cx="4626864" cy="4119372"/>
-          </a:xfrm>
-          <a:prstGeom prst="roundRect">
-            <a:avLst>
-              <a:gd name="adj" fmla="val 1776"/>
-            </a:avLst>
-          </a:prstGeom>
-          <a:solidFill>
-            <a:srgbClr val="0B132B"/>
-          </a:solidFill>
-          <a:ln w="12700">
-            <a:solidFill>
-              <a:srgbClr val="1E4070"/>
-            </a:solidFill>
-            <a:prstDash val="solid"/>
-          </a:ln>
-        </p:spPr>
-      </p:sp>
-      <p:sp>
-        <p:nvSpPr>
-          <p:cNvPr id="7" name="Text 5"/>
-          <p:cNvSpPr/>
-          <p:nvPr/>
-        </p:nvSpPr>
-        <p:spPr>
-          <a:xfrm>
-            <a:off x="4270248" y="905256"/>
-            <a:ext cx="4352544" cy="3954780"/>
-          </a:xfrm>
-          <a:prstGeom prst="rect">
-            <a:avLst/>
-          </a:prstGeom>
-          <a:noFill/>
-          <a:ln/>
-        </p:spPr>
-        <p:txBody>
-          <a:bodyPr wrap="square" rtlCol="0" anchor="t"/>
-          <a:lstStyle/>
-          <a:p>
-            <a:pPr algn="l" indent="0" marL="0">
-              <a:buNone/>
-            </a:pPr>
-            <a:r>
-              <a:rPr lang="en-US" sz="1050" dirty="0">
-                <a:solidFill>
-                  <a:srgbClr val="FFEDD5"/>
-                </a:solidFill>
-                <a:latin typeface="Courier New" pitchFamily="34" charset="0"/>
-                <a:ea typeface="Courier New" pitchFamily="34" charset="-122"/>
-                <a:cs typeface="Courier New" pitchFamily="34" charset="-120"/>
-              </a:rPr>
-              <a:t>backend/src/</a:t>
-            </a:r>
-            <a:endParaRPr lang="en-US" sz="1050" dirty="0"/>
-          </a:p>
-          <a:p>
-            <a:pPr algn="l" indent="0" marL="0">
-              <a:buNone/>
-            </a:pPr>
-            <a:r>
-              <a:rPr lang="en-US" sz="1050" dirty="0">
-                <a:solidFill>
-                  <a:srgbClr val="FFEDD5"/>
-                </a:solidFill>
-                <a:latin typeface="Courier New" pitchFamily="34" charset="0"/>
-                <a:ea typeface="Courier New" pitchFamily="34" charset="-122"/>
-                <a:cs typeface="Courier New" pitchFamily="34" charset="-120"/>
-              </a:rPr>
-              <a:t>  ├── routes/         # REST API эндпоинты (контроллеры)</a:t>
-            </a:r>
-            <a:endParaRPr lang="en-US" sz="1050" dirty="0"/>
-          </a:p>
-          <a:p>
-            <a:pPr algn="l" indent="0" marL="0">
-              <a:buNone/>
-            </a:pPr>
-            <a:r>
-              <a:rPr lang="en-US" sz="1050" dirty="0">
-                <a:solidFill>
-                  <a:srgbClr val="FFEDD5"/>
-                </a:solidFill>
-                <a:latin typeface="Courier New" pitchFamily="34" charset="0"/>
-                <a:ea typeface="Courier New" pitchFamily="34" charset="-122"/>
-                <a:cs typeface="Courier New" pitchFamily="34" charset="-120"/>
-              </a:rPr>
-              <a:t>  ├── services/       # Бизнес-логика, воркеры, синк</a:t>
-            </a:r>
-            <a:endParaRPr lang="en-US" sz="1050" dirty="0"/>
-          </a:p>
-          <a:p>
-            <a:pPr algn="l" indent="0" marL="0">
-              <a:buNone/>
-            </a:pPr>
-            <a:r>
-              <a:rPr lang="en-US" sz="1050" dirty="0">
-                <a:solidFill>
-                  <a:srgbClr val="FFEDD5"/>
-                </a:solidFill>
-                <a:latin typeface="Courier New" pitchFamily="34" charset="0"/>
-                <a:ea typeface="Courier New" pitchFamily="34" charset="-122"/>
-                <a:cs typeface="Courier New" pitchFamily="34" charset="-120"/>
-              </a:rPr>
-              <a:t>  ├── middleware/     # Аутентификация, Zod-валидация</a:t>
-            </a:r>
-            <a:endParaRPr lang="en-US" sz="1050" dirty="0"/>
-          </a:p>
-          <a:p>
-            <a:pPr algn="l" indent="0" marL="0">
-              <a:buNone/>
-            </a:pPr>
-            <a:r>
-              <a:rPr lang="en-US" sz="1050" dirty="0">
-                <a:solidFill>
-                  <a:srgbClr val="FFEDD5"/>
-                </a:solidFill>
-                <a:latin typeface="Courier New" pitchFamily="34" charset="0"/>
-                <a:ea typeface="Courier New" pitchFamily="34" charset="-122"/>
-                <a:cs typeface="Courier New" pitchFamily="34" charset="-120"/>
-              </a:rPr>
-              <a:t>  ├── config/         # Подключения (Postgres, MinIO, 1C)</a:t>
-            </a:r>
-            <a:endParaRPr lang="en-US" sz="1050" dirty="0"/>
-          </a:p>
-          <a:p>
-            <a:pPr algn="l" indent="0" marL="0">
-              <a:buNone/>
-            </a:pPr>
-            <a:r>
-              <a:rPr lang="en-US" sz="1050" dirty="0">
-                <a:solidFill>
-                  <a:srgbClr val="FFEDD5"/>
-                </a:solidFill>
-                <a:latin typeface="Courier New" pitchFamily="34" charset="0"/>
-                <a:ea typeface="Courier New" pitchFamily="34" charset="-122"/>
-                <a:cs typeface="Courier New" pitchFamily="34" charset="-120"/>
-              </a:rPr>
-              <a:t>  ├── db/             # Схемы Drizzle ORM, миграции</a:t>
-            </a:r>
-            <a:endParaRPr lang="en-US" sz="1050" dirty="0"/>
-          </a:p>
-          <a:p>
-            <a:pPr algn="l" indent="0" marL="0">
-              <a:buNone/>
-            </a:pPr>
-            <a:r>
-              <a:rPr lang="en-US" sz="1050" dirty="0">
-                <a:solidFill>
-                  <a:srgbClr val="FFEDD5"/>
-                </a:solidFill>
-                <a:latin typeface="Courier New" pitchFamily="34" charset="0"/>
-                <a:ea typeface="Courier New" pitchFamily="34" charset="-122"/>
-                <a:cs typeface="Courier New" pitchFamily="34" charset="-120"/>
-              </a:rPr>
-              <a:t>  ├── types/          # Общие типы данных TypeScript</a:t>
-            </a:r>
-            <a:endParaRPr lang="en-US" sz="1050" dirty="0"/>
-          </a:p>
-          <a:p>
-            <a:pPr algn="l" indent="0" marL="0">
-              <a:buNone/>
-            </a:pPr>
-            <a:r>
-              <a:rPr lang="en-US" sz="1050" dirty="0">
-                <a:solidFill>
-                  <a:srgbClr val="FFEDD5"/>
-                </a:solidFill>
-                <a:latin typeface="Courier New" pitchFamily="34" charset="0"/>
-                <a:ea typeface="Courier New" pitchFamily="34" charset="-122"/>
-                <a:cs typeface="Courier New" pitchFamily="34" charset="-120"/>
-              </a:rPr>
-              <a:t>  └── index.ts        # Главный файл запуска сервера</a:t>
-            </a:r>
-            <a:endParaRPr lang="en-US" sz="1050" dirty="0"/>
-          </a:p>
-        </p:txBody>
-      </p:sp>
     </p:spTree>
   </p:cSld>
   <p:clrMapOvr>
@@ -8384,17 +8403,17 @@
               <a:buNone/>
             </a:pPr>
             <a:r>
-              <a:rPr lang="en-US" sz="2000" b="1" dirty="0">
-                <a:solidFill>
-                  <a:srgbClr val="0F1E36"/>
-                </a:solidFill>
-                <a:latin typeface="Cambria" pitchFamily="34" charset="0"/>
-                <a:ea typeface="Cambria" pitchFamily="34" charset="-122"/>
-                <a:cs typeface="Cambria" pitchFamily="34" charset="-120"/>
-              </a:rPr>
-              <a:t>Изоляция слоев и слабая связанность</a:t>
-            </a:r>
-            <a:endParaRPr lang="en-US" sz="2000" dirty="0"/>
+              <a:rPr lang="en-US" sz="1600" b="1" dirty="0">
+                <a:solidFill>
+                  <a:srgbClr val="1A1A2E"/>
+                </a:solidFill>
+                <a:latin typeface="Georgia" pitchFamily="34" charset="0"/>
+                <a:ea typeface="Georgia" pitchFamily="34" charset="-122"/>
+                <a:cs typeface="Georgia" pitchFamily="34" charset="-120"/>
+              </a:rPr>
+              <a:t>Модульность: структура директорий бэкенда</a:t>
+            </a:r>
+            <a:endParaRPr lang="en-US" sz="1600" dirty="0"/>
           </a:p>
         </p:txBody>
       </p:sp>
@@ -8407,26 +8426,26 @@
         <p:spPr>
           <a:xfrm>
             <a:off x="384048" y="822960"/>
-            <a:ext cx="4023360" cy="4119372"/>
+            <a:ext cx="3474720" cy="4119372"/>
           </a:xfrm>
           <a:prstGeom prst="roundRect">
             <a:avLst>
-              <a:gd name="adj" fmla="val 2273"/>
+              <a:gd name="adj" fmla="val 2632"/>
             </a:avLst>
           </a:prstGeom>
           <a:solidFill>
-            <a:srgbClr val="FFF7ED"/>
+            <a:srgbClr val="F8F4F0"/>
           </a:solidFill>
           <a:ln w="12700">
             <a:solidFill>
-              <a:srgbClr val="FFF7ED"/>
+              <a:srgbClr val="EFEAE3"/>
             </a:solidFill>
             <a:prstDash val="solid"/>
           </a:ln>
           <a:effectLst>
-            <a:outerShdw sx="100000" sy="100000" kx="0" ky="0" algn="bl" rotWithShape="0" blurRad="88900" dist="25400" dir="2700000">
+            <a:outerShdw sx="100000" sy="100000" kx="0" ky="0" algn="bl" rotWithShape="0" blurRad="152400" dist="38100" dir="2700000">
               <a:srgbClr val="000000">
-                <a:alpha val="9000"/>
+                <a:alpha val="12000"/>
               </a:srgbClr>
             </a:outerShdw>
           </a:effectLst>
@@ -8440,8 +8459,8 @@
         </p:nvSpPr>
         <p:spPr>
           <a:xfrm>
-            <a:off x="548640" y="932688"/>
-            <a:ext cx="3694176" cy="365760"/>
+            <a:off x="521208" y="932688"/>
+            <a:ext cx="3200400" cy="320040"/>
           </a:xfrm>
           <a:prstGeom prst="rect">
             <a:avLst/>
@@ -8457,17 +8476,17 @@
               <a:buNone/>
             </a:pPr>
             <a:r>
-              <a:rPr lang="en-US" sz="1300" b="1" dirty="0">
-                <a:solidFill>
-                  <a:srgbClr val="DC2626"/>
+              <a:rPr lang="en-US" sz="1200" b="1" dirty="0">
+                <a:solidFill>
+                  <a:srgbClr val="1A1A2E"/>
                 </a:solidFill>
                 <a:latin typeface="Cambria" pitchFamily="34" charset="0"/>
                 <a:ea typeface="Cambria" pitchFamily="34" charset="-122"/>
                 <a:cs typeface="Cambria" pitchFamily="34" charset="-120"/>
               </a:rPr>
-              <a:t>Нарушение связанности (Плохой подход)</a:t>
-            </a:r>
-            <a:endParaRPr lang="en-US" sz="1300" dirty="0"/>
+              <a:t>Преимущества структуры</a:t>
+            </a:r>
+            <a:endParaRPr lang="en-US" sz="1200" dirty="0"/>
           </a:p>
         </p:txBody>
       </p:sp>
@@ -8479,8 +8498,8 @@
         </p:nvSpPr>
         <p:spPr>
           <a:xfrm>
-            <a:off x="548640" y="1389888"/>
-            <a:ext cx="3694176" cy="2926080"/>
+            <a:off x="521208" y="1325880"/>
+            <a:ext cx="3200400" cy="3387852"/>
           </a:xfrm>
           <a:prstGeom prst="rect">
             <a:avLst/>
@@ -8498,13 +8517,13 @@
             <a:r>
               <a:rPr lang="en-US" sz="1100" dirty="0">
                 <a:solidFill>
-                  <a:srgbClr val="1E293B"/>
-                </a:solidFill>
-                <a:latin typeface="Calibri" pitchFamily="34" charset="0"/>
-                <a:ea typeface="Calibri" pitchFamily="34" charset="-122"/>
-                <a:cs typeface="Calibri" pitchFamily="34" charset="-120"/>
-              </a:rPr>
-              <a:t>• Роутер напрямую делает SQL-запрос `SELECT * FROM tickets`.</a:t>
+                  <a:srgbClr val="2D2D3A"/>
+                </a:solidFill>
+                <a:latin typeface="Times New Roman" pitchFamily="34" charset="0"/>
+                <a:ea typeface="Times New Roman" pitchFamily="34" charset="-122"/>
+                <a:cs typeface="Times New Roman" pitchFamily="34" charset="-120"/>
+              </a:rPr>
+              <a:t>• Разделение ответственности слоев.</a:t>
             </a:r>
             <a:endParaRPr lang="en-US" sz="1100" dirty="0"/>
           </a:p>
@@ -8515,13 +8534,13 @@
             <a:r>
               <a:rPr lang="en-US" sz="1100" dirty="0">
                 <a:solidFill>
-                  <a:srgbClr val="1E293B"/>
-                </a:solidFill>
-                <a:latin typeface="Calibri" pitchFamily="34" charset="0"/>
-                <a:ea typeface="Calibri" pitchFamily="34" charset="-122"/>
-                <a:cs typeface="Calibri" pitchFamily="34" charset="-120"/>
-              </a:rPr>
-              <a:t>• Смешивание логики авторизации и рендеринга.</a:t>
+                  <a:srgbClr val="2D2D3A"/>
+                </a:solidFill>
+                <a:latin typeface="Times New Roman" pitchFamily="34" charset="0"/>
+                <a:ea typeface="Times New Roman" pitchFamily="34" charset="-122"/>
+                <a:cs typeface="Times New Roman" pitchFamily="34" charset="-120"/>
+              </a:rPr>
+              <a:t>• Эндпоинты (routes) не содержат сырых запросов к SQL.</a:t>
             </a:r>
             <a:endParaRPr lang="en-US" sz="1100" dirty="0"/>
           </a:p>
@@ -8532,13 +8551,13 @@
             <a:r>
               <a:rPr lang="en-US" sz="1100" dirty="0">
                 <a:solidFill>
-                  <a:srgbClr val="1E293B"/>
-                </a:solidFill>
-                <a:latin typeface="Calibri" pitchFamily="34" charset="0"/>
-                <a:ea typeface="Calibri" pitchFamily="34" charset="-122"/>
-                <a:cs typeface="Calibri" pitchFamily="34" charset="-120"/>
-              </a:rPr>
-              <a:t>• Фронтенд обращается к базе данных напрямую.</a:t>
+                  <a:srgbClr val="2D2D3A"/>
+                </a:solidFill>
+                <a:latin typeface="Times New Roman" pitchFamily="34" charset="0"/>
+                <a:ea typeface="Times New Roman" pitchFamily="34" charset="-122"/>
+                <a:cs typeface="Times New Roman" pitchFamily="34" charset="-120"/>
+              </a:rPr>
+              <a:t>• Вся бизнес-логика вынесена в сервисы (services).</a:t>
             </a:r>
             <a:endParaRPr lang="en-US" sz="1100" dirty="0"/>
           </a:p>
@@ -8549,30 +8568,13 @@
             <a:r>
               <a:rPr lang="en-US" sz="1100" dirty="0">
                 <a:solidFill>
-                  <a:srgbClr val="1E293B"/>
-                </a:solidFill>
-                <a:latin typeface="Calibri" pitchFamily="34" charset="0"/>
-                <a:ea typeface="Calibri" pitchFamily="34" charset="-122"/>
-                <a:cs typeface="Calibri" pitchFamily="34" charset="-120"/>
-              </a:rPr>
-              <a:t>• Любые изменения в СУБД ломают клиентский код.</a:t>
-            </a:r>
-            <a:endParaRPr lang="en-US" sz="1100" dirty="0"/>
-          </a:p>
-          <a:p>
-            <a:pPr indent="0" marL="0">
-              <a:buNone/>
-            </a:pPr>
-            <a:r>
-              <a:rPr lang="en-US" sz="1100" dirty="0">
-                <a:solidFill>
-                  <a:srgbClr val="1E293B"/>
-                </a:solidFill>
-                <a:latin typeface="Calibri" pitchFamily="34" charset="0"/>
-                <a:ea typeface="Calibri" pitchFamily="34" charset="-122"/>
-                <a:cs typeface="Calibri" pitchFamily="34" charset="-120"/>
-              </a:rPr>
-              <a:t>• Сложно писать изолированные тесты, так как все связано.</a:t>
+                  <a:srgbClr val="2D2D3A"/>
+                </a:solidFill>
+                <a:latin typeface="Times New Roman" pitchFamily="34" charset="0"/>
+                <a:ea typeface="Times New Roman" pitchFamily="34" charset="-122"/>
+                <a:cs typeface="Times New Roman" pitchFamily="34" charset="-120"/>
+              </a:rPr>
+              <a:t>• Доступ к СУБД изолирован в слое миграций и репозиториев (db).</a:t>
             </a:r>
             <a:endParaRPr lang="en-US" sz="1100" dirty="0"/>
           </a:p>
@@ -8586,30 +8588,23 @@
         </p:nvSpPr>
         <p:spPr>
           <a:xfrm>
-            <a:off x="4681728" y="822960"/>
-            <a:ext cx="4078224" cy="4119372"/>
+            <a:off x="4133088" y="822960"/>
+            <a:ext cx="4626864" cy="4119372"/>
           </a:xfrm>
           <a:prstGeom prst="roundRect">
             <a:avLst>
-              <a:gd name="adj" fmla="val 2242"/>
+              <a:gd name="adj" fmla="val 1776"/>
             </a:avLst>
           </a:prstGeom>
           <a:solidFill>
-            <a:srgbClr val="D1FAE5"/>
+            <a:srgbClr val="1A1A2E"/>
           </a:solidFill>
           <a:ln w="12700">
             <a:solidFill>
-              <a:srgbClr val="D1FAE5"/>
+              <a:srgbClr val="2A2A4A"/>
             </a:solidFill>
             <a:prstDash val="solid"/>
           </a:ln>
-          <a:effectLst>
-            <a:outerShdw sx="100000" sy="100000" kx="0" ky="0" algn="bl" rotWithShape="0" blurRad="88900" dist="25400" dir="2700000">
-              <a:srgbClr val="000000">
-                <a:alpha val="9000"/>
-              </a:srgbClr>
-            </a:outerShdw>
-          </a:effectLst>
         </p:spPr>
       </p:sp>
       <p:sp>
@@ -8620,8 +8615,8 @@
         </p:nvSpPr>
         <p:spPr>
           <a:xfrm>
-            <a:off x="4846320" y="932688"/>
-            <a:ext cx="3749040" cy="365760"/>
+            <a:off x="4270248" y="905256"/>
+            <a:ext cx="4352544" cy="3954780"/>
           </a:xfrm>
           <a:prstGeom prst="rect">
             <a:avLst/>
@@ -8630,131 +8625,143 @@
           <a:ln/>
         </p:spPr>
         <p:txBody>
-          <a:bodyPr wrap="square" rtlCol="0" anchor="ctr"/>
+          <a:bodyPr wrap="square" rtlCol="0" anchor="t"/>
           <a:lstStyle/>
           <a:p>
-            <a:pPr indent="0" marL="0">
-              <a:buNone/>
-            </a:pPr>
-            <a:r>
-              <a:rPr lang="en-US" sz="1300" b="1" dirty="0">
-                <a:solidFill>
-                  <a:srgbClr val="059669"/>
-                </a:solidFill>
-                <a:latin typeface="Cambria" pitchFamily="34" charset="0"/>
-                <a:ea typeface="Cambria" pitchFamily="34" charset="-122"/>
-                <a:cs typeface="Cambria" pitchFamily="34" charset="-120"/>
-              </a:rPr>
-              <a:t>Разделение слоев (Хороший подход)</a:t>
-            </a:r>
-            <a:endParaRPr lang="en-US" sz="1300" dirty="0"/>
-          </a:p>
-        </p:txBody>
-      </p:sp>
-      <p:sp>
-        <p:nvSpPr>
-          <p:cNvPr id="8" name="Text 6"/>
-          <p:cNvSpPr/>
-          <p:nvPr/>
-        </p:nvSpPr>
-        <p:spPr>
-          <a:xfrm>
-            <a:off x="4846320" y="1389888"/>
-            <a:ext cx="3749040" cy="2926080"/>
-          </a:xfrm>
-          <a:prstGeom prst="rect">
-            <a:avLst/>
-          </a:prstGeom>
-          <a:noFill/>
-          <a:ln/>
-        </p:spPr>
-        <p:txBody>
-          <a:bodyPr wrap="square" rtlCol="0" anchor="ctr"/>
-          <a:lstStyle/>
-          <a:p>
-            <a:pPr indent="0" marL="0">
-              <a:buNone/>
-            </a:pPr>
-            <a:r>
-              <a:rPr lang="en-US" sz="1100" dirty="0">
-                <a:solidFill>
-                  <a:srgbClr val="1E293B"/>
-                </a:solidFill>
-                <a:latin typeface="Calibri" pitchFamily="34" charset="0"/>
-                <a:ea typeface="Calibri" pitchFamily="34" charset="-122"/>
-                <a:cs typeface="Calibri" pitchFamily="34" charset="-120"/>
-              </a:rPr>
-              <a:t>• Контроллер лишь принимает запрос и отдает ответ.</a:t>
-            </a:r>
-            <a:endParaRPr lang="en-US" sz="1100" dirty="0"/>
-          </a:p>
-          <a:p>
-            <a:pPr indent="0" marL="0">
-              <a:buNone/>
-            </a:pPr>
-            <a:r>
-              <a:rPr lang="en-US" sz="1100" dirty="0">
-                <a:solidFill>
-                  <a:srgbClr val="1E293B"/>
-                </a:solidFill>
-                <a:latin typeface="Calibri" pitchFamily="34" charset="0"/>
-                <a:ea typeface="Calibri" pitchFamily="34" charset="-122"/>
-                <a:cs typeface="Calibri" pitchFamily="34" charset="-120"/>
-              </a:rPr>
-              <a:t>• Бизнес-логика живет в `TicketService`.</a:t>
-            </a:r>
-            <a:endParaRPr lang="en-US" sz="1100" dirty="0"/>
-          </a:p>
-          <a:p>
-            <a:pPr indent="0" marL="0">
-              <a:buNone/>
-            </a:pPr>
-            <a:r>
-              <a:rPr lang="en-US" sz="1100" dirty="0">
-                <a:solidFill>
-                  <a:srgbClr val="1E293B"/>
-                </a:solidFill>
-                <a:latin typeface="Calibri" pitchFamily="34" charset="0"/>
-                <a:ea typeface="Calibri" pitchFamily="34" charset="-122"/>
-                <a:cs typeface="Calibri" pitchFamily="34" charset="-120"/>
-              </a:rPr>
-              <a:t>• Работа с Postgres идет через `Drizzle` репозиторий.</a:t>
-            </a:r>
-            <a:endParaRPr lang="en-US" sz="1100" dirty="0"/>
-          </a:p>
-          <a:p>
-            <a:pPr indent="0" marL="0">
-              <a:buNone/>
-            </a:pPr>
-            <a:r>
-              <a:rPr lang="en-US" sz="1100" dirty="0">
-                <a:solidFill>
-                  <a:srgbClr val="1E293B"/>
-                </a:solidFill>
-                <a:latin typeface="Calibri" pitchFamily="34" charset="0"/>
-                <a:ea typeface="Calibri" pitchFamily="34" charset="-122"/>
-                <a:cs typeface="Calibri" pitchFamily="34" charset="-120"/>
-              </a:rPr>
-              <a:t>• Интеграция с 1С асинхронна через outbox-очередь.</a:t>
-            </a:r>
-            <a:endParaRPr lang="en-US" sz="1100" dirty="0"/>
-          </a:p>
-          <a:p>
-            <a:pPr indent="0" marL="0">
-              <a:buNone/>
-            </a:pPr>
-            <a:r>
-              <a:rPr lang="en-US" sz="1100" dirty="0">
-                <a:solidFill>
-                  <a:srgbClr val="1E293B"/>
-                </a:solidFill>
-                <a:latin typeface="Calibri" pitchFamily="34" charset="0"/>
-                <a:ea typeface="Calibri" pitchFamily="34" charset="-122"/>
-                <a:cs typeface="Calibri" pitchFamily="34" charset="-120"/>
-              </a:rPr>
-              <a:t>• Любой слой можно легко заменить или протестировать.</a:t>
-            </a:r>
-            <a:endParaRPr lang="en-US" sz="1100" dirty="0"/>
+            <a:pPr algn="l" indent="0" marL="0">
+              <a:buNone/>
+            </a:pPr>
+            <a:r>
+              <a:rPr lang="en-US" sz="1050" dirty="0">
+                <a:solidFill>
+                  <a:srgbClr val="F8F4F0"/>
+                </a:solidFill>
+                <a:latin typeface="Courier New" pitchFamily="34" charset="0"/>
+                <a:ea typeface="Courier New" pitchFamily="34" charset="-122"/>
+                <a:cs typeface="Courier New" pitchFamily="34" charset="-120"/>
+              </a:rPr>
+              <a:t>backend/src/</a:t>
+            </a:r>
+            <a:endParaRPr lang="en-US" sz="1050" dirty="0"/>
+          </a:p>
+          <a:p>
+            <a:pPr algn="l" indent="0" marL="0">
+              <a:buNone/>
+            </a:pPr>
+            <a:r>
+              <a:rPr lang="en-US" sz="1050" dirty="0">
+                <a:solidFill>
+                  <a:srgbClr val="F8F4F0"/>
+                </a:solidFill>
+                <a:latin typeface="Courier New" pitchFamily="34" charset="0"/>
+                <a:ea typeface="Courier New" pitchFamily="34" charset="-122"/>
+                <a:cs typeface="Courier New" pitchFamily="34" charset="-120"/>
+              </a:rPr>
+              <a:t>  ├── routes/         # REST API эндпоинты (контроллеры)</a:t>
+            </a:r>
+            <a:endParaRPr lang="en-US" sz="1050" dirty="0"/>
+          </a:p>
+          <a:p>
+            <a:pPr algn="l" indent="0" marL="0">
+              <a:buNone/>
+            </a:pPr>
+            <a:r>
+              <a:rPr lang="en-US" sz="1050" dirty="0">
+                <a:solidFill>
+                  <a:srgbClr val="F8F4F0"/>
+                </a:solidFill>
+                <a:latin typeface="Courier New" pitchFamily="34" charset="0"/>
+                <a:ea typeface="Courier New" pitchFamily="34" charset="-122"/>
+                <a:cs typeface="Courier New" pitchFamily="34" charset="-120"/>
+              </a:rPr>
+              <a:t>  ├── services/       # Бизнес-логика, воркеры, синк</a:t>
+            </a:r>
+            <a:endParaRPr lang="en-US" sz="1050" dirty="0"/>
+          </a:p>
+          <a:p>
+            <a:pPr algn="l" indent="0" marL="0">
+              <a:buNone/>
+            </a:pPr>
+            <a:r>
+              <a:rPr lang="en-US" sz="1050" dirty="0">
+                <a:solidFill>
+                  <a:srgbClr val="F8F4F0"/>
+                </a:solidFill>
+                <a:latin typeface="Courier New" pitchFamily="34" charset="0"/>
+                <a:ea typeface="Courier New" pitchFamily="34" charset="-122"/>
+                <a:cs typeface="Courier New" pitchFamily="34" charset="-120"/>
+              </a:rPr>
+              <a:t>  ├── middleware/     # Аутентификация, Zod-валидация</a:t>
+            </a:r>
+            <a:endParaRPr lang="en-US" sz="1050" dirty="0"/>
+          </a:p>
+          <a:p>
+            <a:pPr algn="l" indent="0" marL="0">
+              <a:buNone/>
+            </a:pPr>
+            <a:r>
+              <a:rPr lang="en-US" sz="1050" dirty="0">
+                <a:solidFill>
+                  <a:srgbClr val="F8F4F0"/>
+                </a:solidFill>
+                <a:latin typeface="Courier New" pitchFamily="34" charset="0"/>
+                <a:ea typeface="Courier New" pitchFamily="34" charset="-122"/>
+                <a:cs typeface="Courier New" pitchFamily="34" charset="-120"/>
+              </a:rPr>
+              <a:t>  ├── config/         # Подключения (Postgres, MinIO, 1C)</a:t>
+            </a:r>
+            <a:endParaRPr lang="en-US" sz="1050" dirty="0"/>
+          </a:p>
+          <a:p>
+            <a:pPr algn="l" indent="0" marL="0">
+              <a:buNone/>
+            </a:pPr>
+            <a:r>
+              <a:rPr lang="en-US" sz="1050" dirty="0">
+                <a:solidFill>
+                  <a:srgbClr val="F8F4F0"/>
+                </a:solidFill>
+                <a:latin typeface="Courier New" pitchFamily="34" charset="0"/>
+                <a:ea typeface="Courier New" pitchFamily="34" charset="-122"/>
+                <a:cs typeface="Courier New" pitchFamily="34" charset="-120"/>
+              </a:rPr>
+              <a:t>  ├── db/             # Схемы Drizzle ORM, миграции</a:t>
+            </a:r>
+            <a:endParaRPr lang="en-US" sz="1050" dirty="0"/>
+          </a:p>
+          <a:p>
+            <a:pPr algn="l" indent="0" marL="0">
+              <a:buNone/>
+            </a:pPr>
+            <a:r>
+              <a:rPr lang="en-US" sz="1050" dirty="0">
+                <a:solidFill>
+                  <a:srgbClr val="F8F4F0"/>
+                </a:solidFill>
+                <a:latin typeface="Courier New" pitchFamily="34" charset="0"/>
+                <a:ea typeface="Courier New" pitchFamily="34" charset="-122"/>
+                <a:cs typeface="Courier New" pitchFamily="34" charset="-120"/>
+              </a:rPr>
+              <a:t>  ├── types/          # Общие типы данных TypeScript</a:t>
+            </a:r>
+            <a:endParaRPr lang="en-US" sz="1050" dirty="0"/>
+          </a:p>
+          <a:p>
+            <a:pPr algn="l" indent="0" marL="0">
+              <a:buNone/>
+            </a:pPr>
+            <a:r>
+              <a:rPr lang="en-US" sz="1050" dirty="0">
+                <a:solidFill>
+                  <a:srgbClr val="F8F4F0"/>
+                </a:solidFill>
+                <a:latin typeface="Courier New" pitchFamily="34" charset="0"/>
+                <a:ea typeface="Courier New" pitchFamily="34" charset="-122"/>
+                <a:cs typeface="Courier New" pitchFamily="34" charset="-120"/>
+              </a:rPr>
+              <a:t>  └── index.ts        # Главный файл запуска сервера</a:t>
+            </a:r>
+            <a:endParaRPr lang="en-US" sz="1050" dirty="0"/>
           </a:p>
         </p:txBody>
       </p:sp>
@@ -8815,17 +8822,17 @@
               <a:buNone/>
             </a:pPr>
             <a:r>
-              <a:rPr lang="en-US" sz="2000" b="1" dirty="0">
-                <a:solidFill>
-                  <a:srgbClr val="0F1E36"/>
-                </a:solidFill>
-                <a:latin typeface="Cambria" pitchFamily="34" charset="0"/>
-                <a:ea typeface="Cambria" pitchFamily="34" charset="-122"/>
-                <a:cs typeface="Cambria" pitchFamily="34" charset="-120"/>
-              </a:rPr>
-              <a:t>Тестируемость: стратегии мокирования (Mocking)</a:t>
-            </a:r>
-            <a:endParaRPr lang="en-US" sz="2000" dirty="0"/>
+              <a:rPr lang="en-US" sz="1600" b="1" dirty="0">
+                <a:solidFill>
+                  <a:srgbClr val="1A1A2E"/>
+                </a:solidFill>
+                <a:latin typeface="Georgia" pitchFamily="34" charset="0"/>
+                <a:ea typeface="Georgia" pitchFamily="34" charset="-122"/>
+                <a:cs typeface="Georgia" pitchFamily="34" charset="-120"/>
+              </a:rPr>
+              <a:t>Изоляция слоев и слабая связанность</a:t>
+            </a:r>
+            <a:endParaRPr lang="en-US" sz="1600" dirty="0"/>
           </a:p>
         </p:txBody>
       </p:sp>
@@ -8838,26 +8845,26 @@
         <p:spPr>
           <a:xfrm>
             <a:off x="384048" y="822960"/>
-            <a:ext cx="4023360" cy="4119372"/>
+            <a:ext cx="8375904" cy="4119372"/>
           </a:xfrm>
           <a:prstGeom prst="roundRect">
             <a:avLst>
-              <a:gd name="adj" fmla="val 2273"/>
+              <a:gd name="adj" fmla="val 2220"/>
             </a:avLst>
           </a:prstGeom>
           <a:solidFill>
-            <a:srgbClr val="FFF7ED"/>
+            <a:srgbClr val="F8F4F0"/>
           </a:solidFill>
           <a:ln w="12700">
             <a:solidFill>
-              <a:srgbClr val="FFF7ED"/>
+              <a:srgbClr val="EFEAE3"/>
             </a:solidFill>
             <a:prstDash val="solid"/>
           </a:ln>
           <a:effectLst>
-            <a:outerShdw sx="100000" sy="100000" kx="0" ky="0" algn="bl" rotWithShape="0" blurRad="88900" dist="25400" dir="2700000">
+            <a:outerShdw sx="100000" sy="100000" kx="0" ky="0" algn="bl" rotWithShape="0" blurRad="152400" dist="38100" dir="2700000">
               <a:srgbClr val="000000">
-                <a:alpha val="9000"/>
+                <a:alpha val="12000"/>
               </a:srgbClr>
             </a:outerShdw>
           </a:effectLst>
@@ -8872,7 +8879,7 @@
         <p:spPr>
           <a:xfrm>
             <a:off x="548640" y="932688"/>
-            <a:ext cx="3694176" cy="365760"/>
+            <a:ext cx="8046720" cy="411480"/>
           </a:xfrm>
           <a:prstGeom prst="rect">
             <a:avLst/>
@@ -8888,17 +8895,17 @@
               <a:buNone/>
             </a:pPr>
             <a:r>
-              <a:rPr lang="en-US" sz="1300" b="1" dirty="0">
-                <a:solidFill>
-                  <a:srgbClr val="0F1E36"/>
+              <a:rPr lang="en-US" sz="1200" b="1" dirty="0">
+                <a:solidFill>
+                  <a:srgbClr val="1A1A2E"/>
                 </a:solidFill>
                 <a:latin typeface="Cambria" pitchFamily="34" charset="0"/>
                 <a:ea typeface="Cambria" pitchFamily="34" charset="-122"/>
                 <a:cs typeface="Cambria" pitchFamily="34" charset="-120"/>
               </a:rPr>
-              <a:t>Изоляция базы данных</a:t>
-            </a:r>
-            <a:endParaRPr lang="en-US" sz="1300" dirty="0"/>
+              <a:t>Нарушение связанности (Плохой подход) vs Разделение слоев (Хороший подход)</a:t>
+            </a:r>
+            <a:endParaRPr lang="en-US" sz="1200" dirty="0"/>
           </a:p>
         </p:txBody>
       </p:sp>
@@ -8910,8 +8917,8 @@
         </p:nvSpPr>
         <p:spPr>
           <a:xfrm>
-            <a:off x="548640" y="1389888"/>
-            <a:ext cx="3694176" cy="2926080"/>
+            <a:off x="548640" y="1417320"/>
+            <a:ext cx="8046720" cy="3296412"/>
           </a:xfrm>
           <a:prstGeom prst="rect">
             <a:avLst/>
@@ -8920,153 +8927,217 @@
           <a:ln/>
         </p:spPr>
         <p:txBody>
-          <a:bodyPr wrap="square" rtlCol="0" anchor="ctr"/>
+          <a:bodyPr wrap="square" rtlCol="0" anchor="t"/>
           <a:lstStyle/>
           <a:p>
-            <a:pPr indent="0" marL="0">
-              <a:buNone/>
-            </a:pPr>
-            <a:r>
-              <a:rPr lang="en-US" sz="1100" dirty="0">
-                <a:solidFill>
-                  <a:srgbClr val="1E293B"/>
-                </a:solidFill>
-                <a:latin typeface="Calibri" pitchFamily="34" charset="0"/>
-                <a:ea typeface="Calibri" pitchFamily="34" charset="-122"/>
-                <a:cs typeface="Calibri" pitchFamily="34" charset="-120"/>
-              </a:rPr>
-              <a:t>Для тестирования роутов API реальная СУБД PostgreSQL подменяется мок-пулом `pg-mock`. Это исключает загрязнение тестовой базы данных и обеспечивает скорость выполнения тестов (миллисекунды вместо минут).</a:t>
-            </a:r>
-            <a:endParaRPr lang="en-US" sz="1100" dirty="0"/>
-          </a:p>
-        </p:txBody>
-      </p:sp>
-      <p:sp>
-        <p:nvSpPr>
-          <p:cNvPr id="6" name="Shape 4"/>
-          <p:cNvSpPr/>
-          <p:nvPr/>
-        </p:nvSpPr>
-        <p:spPr>
-          <a:xfrm>
-            <a:off x="4681728" y="822960"/>
-            <a:ext cx="4078224" cy="4119372"/>
-          </a:xfrm>
-          <a:prstGeom prst="roundRect">
-            <a:avLst>
-              <a:gd name="adj" fmla="val 2242"/>
-            </a:avLst>
-          </a:prstGeom>
-          <a:solidFill>
-            <a:srgbClr val="D1FAE5"/>
-          </a:solidFill>
-          <a:ln w="12700">
-            <a:solidFill>
-              <a:srgbClr val="D1FAE5"/>
-            </a:solidFill>
-            <a:prstDash val="solid"/>
-          </a:ln>
-          <a:effectLst>
-            <a:outerShdw sx="100000" sy="100000" kx="0" ky="0" algn="bl" rotWithShape="0" blurRad="88900" dist="25400" dir="2700000">
-              <a:srgbClr val="000000">
-                <a:alpha val="9000"/>
-              </a:srgbClr>
-            </a:outerShdw>
-          </a:effectLst>
-        </p:spPr>
-      </p:sp>
-      <p:sp>
-        <p:nvSpPr>
-          <p:cNvPr id="7" name="Text 5"/>
-          <p:cNvSpPr/>
-          <p:nvPr/>
-        </p:nvSpPr>
-        <p:spPr>
-          <a:xfrm>
-            <a:off x="4846320" y="932688"/>
-            <a:ext cx="3749040" cy="365760"/>
-          </a:xfrm>
-          <a:prstGeom prst="rect">
-            <a:avLst/>
-          </a:prstGeom>
-          <a:noFill/>
-          <a:ln/>
-        </p:spPr>
-        <p:txBody>
-          <a:bodyPr wrap="square" rtlCol="0" anchor="ctr"/>
-          <a:lstStyle/>
-          <a:p>
-            <a:pPr indent="0" marL="0">
-              <a:buNone/>
-            </a:pPr>
-            <a:r>
-              <a:rPr lang="en-US" sz="1300" b="1" dirty="0">
-                <a:solidFill>
-                  <a:srgbClr val="0F1E36"/>
-                </a:solidFill>
-                <a:latin typeface="Cambria" pitchFamily="34" charset="0"/>
-                <a:ea typeface="Cambria" pitchFamily="34" charset="-122"/>
-                <a:cs typeface="Cambria" pitchFamily="34" charset="-120"/>
-              </a:rPr>
-              <a:t>Имитация внешних систем (1С, MinIO)</a:t>
-            </a:r>
-            <a:endParaRPr lang="en-US" sz="1300" dirty="0"/>
-          </a:p>
-        </p:txBody>
-      </p:sp>
-      <p:sp>
-        <p:nvSpPr>
-          <p:cNvPr id="8" name="Text 6"/>
-          <p:cNvSpPr/>
-          <p:nvPr/>
-        </p:nvSpPr>
-        <p:spPr>
-          <a:xfrm>
-            <a:off x="4846320" y="1389888"/>
-            <a:ext cx="3749040" cy="2926080"/>
-          </a:xfrm>
-          <a:prstGeom prst="rect">
-            <a:avLst/>
-          </a:prstGeom>
-          <a:noFill/>
-          <a:ln/>
-        </p:spPr>
-        <p:txBody>
-          <a:bodyPr wrap="square" rtlCol="0" anchor="ctr"/>
-          <a:lstStyle/>
-          <a:p>
-            <a:pPr indent="0" marL="0">
-              <a:buNone/>
-            </a:pPr>
-            <a:r>
-              <a:rPr lang="en-US" sz="1100" dirty="0">
-                <a:solidFill>
-                  <a:srgbClr val="1E293B"/>
-                </a:solidFill>
-                <a:latin typeface="Calibri" pitchFamily="34" charset="0"/>
-                <a:ea typeface="Calibri" pitchFamily="34" charset="-122"/>
-                <a:cs typeface="Calibri" pitchFamily="34" charset="-120"/>
-              </a:rPr>
-              <a:t>• Вместо вызовов к боевому серверу 1С используется легковесный мок-сервер API.</a:t>
-            </a:r>
-            <a:endParaRPr lang="en-US" sz="1100" dirty="0"/>
-          </a:p>
-          <a:p>
-            <a:pPr indent="0" marL="0">
-              <a:buNone/>
-            </a:pPr>
-            <a:r>
-              <a:rPr lang="en-US" sz="1100" dirty="0">
-                <a:solidFill>
-                  <a:srgbClr val="1E293B"/>
-                </a:solidFill>
-                <a:latin typeface="Calibri" pitchFamily="34" charset="0"/>
-                <a:ea typeface="Calibri" pitchFamily="34" charset="-122"/>
-                <a:cs typeface="Calibri" pitchFamily="34" charset="-120"/>
-              </a:rPr>
-              <a:t>• Пакет AWS SDK S3 настраивается на локальную заглушку, которая не загружает файлы в облако, а симулирует сохранение в оперативной памяти.</a:t>
-            </a:r>
-            <a:endParaRPr lang="en-US" sz="1100" dirty="0"/>
+            <a:pPr algn="l" indent="0" marL="0">
+              <a:buNone/>
+            </a:pPr>
+            <a:r>
+              <a:rPr lang="en-US" sz="1600" dirty="0">
+                <a:solidFill>
+                  <a:srgbClr val="2D2D3A"/>
+                </a:solidFill>
+                <a:latin typeface="Times New Roman" pitchFamily="34" charset="0"/>
+                <a:ea typeface="Times New Roman" pitchFamily="34" charset="-122"/>
+                <a:cs typeface="Times New Roman" pitchFamily="34" charset="-120"/>
+              </a:rPr>
+              <a:t>Нарушение связанности (Плохой подход):</a:t>
+            </a:r>
+            <a:endParaRPr lang="en-US" sz="1600" dirty="0"/>
+          </a:p>
+          <a:p>
+            <a:pPr algn="l" indent="0" marL="0">
+              <a:buNone/>
+            </a:pPr>
+            <a:r>
+              <a:rPr lang="en-US" sz="1600" dirty="0">
+                <a:solidFill>
+                  <a:srgbClr val="2D2D3A"/>
+                </a:solidFill>
+                <a:latin typeface="Times New Roman" pitchFamily="34" charset="0"/>
+                <a:ea typeface="Times New Roman" pitchFamily="34" charset="-122"/>
+                <a:cs typeface="Times New Roman" pitchFamily="34" charset="-120"/>
+              </a:rPr>
+              <a:t>• Роутер напрямую делает SQL-запрос `SELECT * FROM tickets`.</a:t>
+            </a:r>
+            <a:endParaRPr lang="en-US" sz="1600" dirty="0"/>
+          </a:p>
+          <a:p>
+            <a:pPr algn="l" indent="0" marL="0">
+              <a:buNone/>
+            </a:pPr>
+            <a:r>
+              <a:rPr lang="en-US" sz="1600" dirty="0">
+                <a:solidFill>
+                  <a:srgbClr val="2D2D3A"/>
+                </a:solidFill>
+                <a:latin typeface="Times New Roman" pitchFamily="34" charset="0"/>
+                <a:ea typeface="Times New Roman" pitchFamily="34" charset="-122"/>
+                <a:cs typeface="Times New Roman" pitchFamily="34" charset="-120"/>
+              </a:rPr>
+              <a:t>• Смешивание логики авторизации и рендеринга.</a:t>
+            </a:r>
+            <a:endParaRPr lang="en-US" sz="1600" dirty="0"/>
+          </a:p>
+          <a:p>
+            <a:pPr algn="l" indent="0" marL="0">
+              <a:buNone/>
+            </a:pPr>
+            <a:r>
+              <a:rPr lang="en-US" sz="1600" dirty="0">
+                <a:solidFill>
+                  <a:srgbClr val="2D2D3A"/>
+                </a:solidFill>
+                <a:latin typeface="Times New Roman" pitchFamily="34" charset="0"/>
+                <a:ea typeface="Times New Roman" pitchFamily="34" charset="-122"/>
+                <a:cs typeface="Times New Roman" pitchFamily="34" charset="-120"/>
+              </a:rPr>
+              <a:t>• Фронтенд обращается к базе данных напрямую.</a:t>
+            </a:r>
+            <a:endParaRPr lang="en-US" sz="1600" dirty="0"/>
+          </a:p>
+          <a:p>
+            <a:pPr algn="l" indent="0" marL="0">
+              <a:buNone/>
+            </a:pPr>
+            <a:r>
+              <a:rPr lang="en-US" sz="1600" dirty="0">
+                <a:solidFill>
+                  <a:srgbClr val="2D2D3A"/>
+                </a:solidFill>
+                <a:latin typeface="Times New Roman" pitchFamily="34" charset="0"/>
+                <a:ea typeface="Times New Roman" pitchFamily="34" charset="-122"/>
+                <a:cs typeface="Times New Roman" pitchFamily="34" charset="-120"/>
+              </a:rPr>
+              <a:t>• Любые изменения в СУБД ломают клиентский код.</a:t>
+            </a:r>
+            <a:endParaRPr lang="en-US" sz="1600" dirty="0"/>
+          </a:p>
+          <a:p>
+            <a:pPr algn="l" indent="0" marL="0">
+              <a:buNone/>
+            </a:pPr>
+            <a:r>
+              <a:rPr lang="en-US" sz="1600" dirty="0">
+                <a:solidFill>
+                  <a:srgbClr val="2D2D3A"/>
+                </a:solidFill>
+                <a:latin typeface="Times New Roman" pitchFamily="34" charset="0"/>
+                <a:ea typeface="Times New Roman" pitchFamily="34" charset="-122"/>
+                <a:cs typeface="Times New Roman" pitchFamily="34" charset="-120"/>
+              </a:rPr>
+              <a:t>• Сложно писать изолированные тесты, так как все связано.</a:t>
+            </a:r>
+            <a:endParaRPr lang="en-US" sz="1600" dirty="0"/>
+          </a:p>
+          <a:p>
+            <a:pPr algn="l" indent="0" marL="0">
+              <a:buNone/>
+            </a:pPr>
+            <a:endParaRPr lang="en-US" sz="1600" dirty="0"/>
+          </a:p>
+          <a:p>
+            <a:pPr algn="l" indent="0" marL="0">
+              <a:buNone/>
+            </a:pPr>
+            <a:r>
+              <a:rPr lang="en-US" sz="1600" dirty="0">
+                <a:solidFill>
+                  <a:srgbClr val="2D2D3A"/>
+                </a:solidFill>
+                <a:latin typeface="Times New Roman" pitchFamily="34" charset="0"/>
+                <a:ea typeface="Times New Roman" pitchFamily="34" charset="-122"/>
+                <a:cs typeface="Times New Roman" pitchFamily="34" charset="-120"/>
+              </a:rPr>
+              <a:t>Разделение слоев (Хороший подход):</a:t>
+            </a:r>
+            <a:endParaRPr lang="en-US" sz="1600" dirty="0"/>
+          </a:p>
+          <a:p>
+            <a:pPr algn="l" indent="0" marL="0">
+              <a:buNone/>
+            </a:pPr>
+            <a:r>
+              <a:rPr lang="en-US" sz="1600" dirty="0">
+                <a:solidFill>
+                  <a:srgbClr val="2D2D3A"/>
+                </a:solidFill>
+                <a:latin typeface="Times New Roman" pitchFamily="34" charset="0"/>
+                <a:ea typeface="Times New Roman" pitchFamily="34" charset="-122"/>
+                <a:cs typeface="Times New Roman" pitchFamily="34" charset="-120"/>
+              </a:rPr>
+              <a:t>• Контроллер лишь принимает запрос и отдает ответ.</a:t>
+            </a:r>
+            <a:endParaRPr lang="en-US" sz="1600" dirty="0"/>
+          </a:p>
+          <a:p>
+            <a:pPr algn="l" indent="0" marL="0">
+              <a:buNone/>
+            </a:pPr>
+            <a:r>
+              <a:rPr lang="en-US" sz="1600" dirty="0">
+                <a:solidFill>
+                  <a:srgbClr val="2D2D3A"/>
+                </a:solidFill>
+                <a:latin typeface="Times New Roman" pitchFamily="34" charset="0"/>
+                <a:ea typeface="Times New Roman" pitchFamily="34" charset="-122"/>
+                <a:cs typeface="Times New Roman" pitchFamily="34" charset="-120"/>
+              </a:rPr>
+              <a:t>• Бизнес-логика живет в `TicketService`.</a:t>
+            </a:r>
+            <a:endParaRPr lang="en-US" sz="1600" dirty="0"/>
+          </a:p>
+          <a:p>
+            <a:pPr algn="l" indent="0" marL="0">
+              <a:buNone/>
+            </a:pPr>
+            <a:r>
+              <a:rPr lang="en-US" sz="1600" dirty="0">
+                <a:solidFill>
+                  <a:srgbClr val="2D2D3A"/>
+                </a:solidFill>
+                <a:latin typeface="Times New Roman" pitchFamily="34" charset="0"/>
+                <a:ea typeface="Times New Roman" pitchFamily="34" charset="-122"/>
+                <a:cs typeface="Times New Roman" pitchFamily="34" charset="-120"/>
+              </a:rPr>
+              <a:t>• Работа с Postgres идет через `Drizzle` репозиторий.</a:t>
+            </a:r>
+            <a:endParaRPr lang="en-US" sz="1600" dirty="0"/>
+          </a:p>
+          <a:p>
+            <a:pPr algn="l" indent="0" marL="0">
+              <a:buNone/>
+            </a:pPr>
+            <a:r>
+              <a:rPr lang="en-US" sz="1600" dirty="0">
+                <a:solidFill>
+                  <a:srgbClr val="2D2D3A"/>
+                </a:solidFill>
+                <a:latin typeface="Times New Roman" pitchFamily="34" charset="0"/>
+                <a:ea typeface="Times New Roman" pitchFamily="34" charset="-122"/>
+                <a:cs typeface="Times New Roman" pitchFamily="34" charset="-120"/>
+              </a:rPr>
+              <a:t>• Интеграция с 1С асинхронна через outbox-очередь.</a:t>
+            </a:r>
+            <a:endParaRPr lang="en-US" sz="1600" dirty="0"/>
+          </a:p>
+          <a:p>
+            <a:pPr algn="l" indent="0" marL="0">
+              <a:buNone/>
+            </a:pPr>
+            <a:r>
+              <a:rPr lang="en-US" sz="1600" dirty="0">
+                <a:solidFill>
+                  <a:srgbClr val="2D2D3A"/>
+                </a:solidFill>
+                <a:latin typeface="Times New Roman" pitchFamily="34" charset="0"/>
+                <a:ea typeface="Times New Roman" pitchFamily="34" charset="-122"/>
+                <a:cs typeface="Times New Roman" pitchFamily="34" charset="-120"/>
+              </a:rPr>
+              <a:t>• Любой слой можно легко заменить или протестировать.</a:t>
+            </a:r>
+            <a:endParaRPr lang="en-US" sz="1600" dirty="0"/>
           </a:p>
         </p:txBody>
       </p:sp>
@@ -9127,17 +9198,17 @@
               <a:buNone/>
             </a:pPr>
             <a:r>
-              <a:rPr lang="en-US" sz="2000" b="1" dirty="0">
-                <a:solidFill>
-                  <a:srgbClr val="0F1E36"/>
-                </a:solidFill>
-                <a:latin typeface="Cambria" pitchFamily="34" charset="0"/>
-                <a:ea typeface="Cambria" pitchFamily="34" charset="-122"/>
-                <a:cs typeface="Cambria" pitchFamily="34" charset="-120"/>
-              </a:rPr>
-              <a:t>Поддерживаемость: типизация TypeScript</a:t>
-            </a:r>
-            <a:endParaRPr lang="en-US" sz="2000" dirty="0"/>
+              <a:rPr lang="en-US" sz="1600" b="1" dirty="0">
+                <a:solidFill>
+                  <a:srgbClr val="1A1A2E"/>
+                </a:solidFill>
+                <a:latin typeface="Georgia" pitchFamily="34" charset="0"/>
+                <a:ea typeface="Georgia" pitchFamily="34" charset="-122"/>
+                <a:cs typeface="Georgia" pitchFamily="34" charset="-120"/>
+              </a:rPr>
+              <a:t>Тестируемость: стратегии мокирования (Mocking)</a:t>
+            </a:r>
+            <a:endParaRPr lang="en-US" sz="1600" dirty="0"/>
           </a:p>
         </p:txBody>
       </p:sp>
@@ -9150,26 +9221,26 @@
         <p:spPr>
           <a:xfrm>
             <a:off x="384048" y="822960"/>
-            <a:ext cx="3474720" cy="4119372"/>
+            <a:ext cx="8375904" cy="4119372"/>
           </a:xfrm>
           <a:prstGeom prst="roundRect">
             <a:avLst>
-              <a:gd name="adj" fmla="val 2632"/>
+              <a:gd name="adj" fmla="val 2220"/>
             </a:avLst>
           </a:prstGeom>
           <a:solidFill>
-            <a:srgbClr val="FFF7ED"/>
+            <a:srgbClr val="F8F4F0"/>
           </a:solidFill>
           <a:ln w="12700">
             <a:solidFill>
-              <a:srgbClr val="FFF7ED"/>
+              <a:srgbClr val="EFEAE3"/>
             </a:solidFill>
             <a:prstDash val="solid"/>
           </a:ln>
           <a:effectLst>
-            <a:outerShdw sx="100000" sy="100000" kx="0" ky="0" algn="bl" rotWithShape="0" blurRad="88900" dist="25400" dir="2700000">
+            <a:outerShdw sx="100000" sy="100000" kx="0" ky="0" algn="bl" rotWithShape="0" blurRad="152400" dist="38100" dir="2700000">
               <a:srgbClr val="000000">
-                <a:alpha val="9000"/>
+                <a:alpha val="12000"/>
               </a:srgbClr>
             </a:outerShdw>
           </a:effectLst>
@@ -9183,8 +9254,8 @@
         </p:nvSpPr>
         <p:spPr>
           <a:xfrm>
-            <a:off x="521208" y="932688"/>
-            <a:ext cx="3200400" cy="320040"/>
+            <a:off x="548640" y="932688"/>
+            <a:ext cx="8046720" cy="411480"/>
           </a:xfrm>
           <a:prstGeom prst="rect">
             <a:avLst/>
@@ -9200,17 +9271,17 @@
               <a:buNone/>
             </a:pPr>
             <a:r>
-              <a:rPr lang="en-US" sz="1300" b="1" dirty="0">
-                <a:solidFill>
-                  <a:srgbClr val="0F1E36"/>
+              <a:rPr lang="en-US" sz="1200" b="1" dirty="0">
+                <a:solidFill>
+                  <a:srgbClr val="1A1A2E"/>
                 </a:solidFill>
                 <a:latin typeface="Cambria" pitchFamily="34" charset="0"/>
                 <a:ea typeface="Cambria" pitchFamily="34" charset="-122"/>
                 <a:cs typeface="Cambria" pitchFamily="34" charset="-120"/>
               </a:rPr>
-              <a:t>Преимущества типизации</a:t>
-            </a:r>
-            <a:endParaRPr lang="en-US" sz="1300" dirty="0"/>
+              <a:t>Изоляция базы данных и имитация внешних систем</a:t>
+            </a:r>
+            <a:endParaRPr lang="en-US" sz="1200" dirty="0"/>
           </a:p>
         </p:txBody>
       </p:sp>
@@ -9222,108 +9293,8 @@
         </p:nvSpPr>
         <p:spPr>
           <a:xfrm>
-            <a:off x="521208" y="1325880"/>
-            <a:ext cx="3200400" cy="3387852"/>
-          </a:xfrm>
-          <a:prstGeom prst="rect">
-            <a:avLst/>
-          </a:prstGeom>
-          <a:noFill/>
-          <a:ln/>
-        </p:spPr>
-        <p:txBody>
-          <a:bodyPr wrap="square" rtlCol="0" anchor="ctr"/>
-          <a:lstStyle/>
-          <a:p>
-            <a:pPr indent="0" marL="0">
-              <a:buNone/>
-            </a:pPr>
-            <a:r>
-              <a:rPr lang="en-US" sz="1100" dirty="0">
-                <a:solidFill>
-                  <a:srgbClr val="1E293B"/>
-                </a:solidFill>
-                <a:latin typeface="Calibri" pitchFamily="34" charset="0"/>
-                <a:ea typeface="Calibri" pitchFamily="34" charset="-122"/>
-                <a:cs typeface="Calibri" pitchFamily="34" charset="-120"/>
-              </a:rPr>
-              <a:t>• Обнаружение 90% глупых ошибок опечаток на этапе компиляции.</a:t>
-            </a:r>
-            <a:endParaRPr lang="en-US" sz="1100" dirty="0"/>
-          </a:p>
-          <a:p>
-            <a:pPr indent="0" marL="0">
-              <a:buNone/>
-            </a:pPr>
-            <a:r>
-              <a:rPr lang="en-US" sz="1100" dirty="0">
-                <a:solidFill>
-                  <a:srgbClr val="1E293B"/>
-                </a:solidFill>
-                <a:latin typeface="Calibri" pitchFamily="34" charset="0"/>
-                <a:ea typeface="Calibri" pitchFamily="34" charset="-122"/>
-                <a:cs typeface="Calibri" pitchFamily="34" charset="-120"/>
-              </a:rPr>
-              <a:t>• Удобное автодополнение (IntelliSense) в редакторах.</a:t>
-            </a:r>
-            <a:endParaRPr lang="en-US" sz="1100" dirty="0"/>
-          </a:p>
-          <a:p>
-            <a:pPr indent="0" marL="0">
-              <a:buNone/>
-            </a:pPr>
-            <a:r>
-              <a:rPr lang="en-US" sz="1100" dirty="0">
-                <a:solidFill>
-                  <a:srgbClr val="1E293B"/>
-                </a:solidFill>
-                <a:latin typeface="Calibri" pitchFamily="34" charset="0"/>
-                <a:ea typeface="Calibri" pitchFamily="34" charset="-122"/>
-                <a:cs typeface="Calibri" pitchFamily="34" charset="-120"/>
-              </a:rPr>
-              <a:t>• Безопасный рефакторинг: при изменении структуры полей компилятор сразу подсветит все ошибочные места.</a:t>
-            </a:r>
-            <a:endParaRPr lang="en-US" sz="1100" dirty="0"/>
-          </a:p>
-        </p:txBody>
-      </p:sp>
-      <p:sp>
-        <p:nvSpPr>
-          <p:cNvPr id="6" name="Shape 4"/>
-          <p:cNvSpPr/>
-          <p:nvPr/>
-        </p:nvSpPr>
-        <p:spPr>
-          <a:xfrm>
-            <a:off x="4133088" y="822960"/>
-            <a:ext cx="4626864" cy="4119372"/>
-          </a:xfrm>
-          <a:prstGeom prst="roundRect">
-            <a:avLst>
-              <a:gd name="adj" fmla="val 1776"/>
-            </a:avLst>
-          </a:prstGeom>
-          <a:solidFill>
-            <a:srgbClr val="0B132B"/>
-          </a:solidFill>
-          <a:ln w="12700">
-            <a:solidFill>
-              <a:srgbClr val="1E4070"/>
-            </a:solidFill>
-            <a:prstDash val="solid"/>
-          </a:ln>
-        </p:spPr>
-      </p:sp>
-      <p:sp>
-        <p:nvSpPr>
-          <p:cNvPr id="7" name="Text 5"/>
-          <p:cNvSpPr/>
-          <p:nvPr/>
-        </p:nvSpPr>
-        <p:spPr>
-          <a:xfrm>
-            <a:off x="4270248" y="905256"/>
-            <a:ext cx="4352544" cy="3954780"/>
+            <a:off x="548640" y="1417320"/>
+            <a:ext cx="8046720" cy="3296412"/>
           </a:xfrm>
           <a:prstGeom prst="rect">
             <a:avLst/>
@@ -9339,278 +9310,91 @@
               <a:buNone/>
             </a:pPr>
             <a:r>
-              <a:rPr lang="en-US" sz="1000" dirty="0">
-                <a:solidFill>
-                  <a:srgbClr val="FFEDD5"/>
-                </a:solidFill>
-                <a:latin typeface="Courier New" pitchFamily="34" charset="0"/>
-                <a:ea typeface="Courier New" pitchFamily="34" charset="-122"/>
-                <a:cs typeface="Courier New" pitchFamily="34" charset="-120"/>
-              </a:rPr>
-              <a:t>export interface ITicket {</a:t>
-            </a:r>
-            <a:endParaRPr lang="en-US" sz="1000" dirty="0"/>
-          </a:p>
-          <a:p>
-            <a:pPr algn="l" indent="0" marL="0">
-              <a:buNone/>
-            </a:pPr>
-            <a:r>
-              <a:rPr lang="en-US" sz="1000" dirty="0">
-                <a:solidFill>
-                  <a:srgbClr val="FFEDD5"/>
-                </a:solidFill>
-                <a:latin typeface="Courier New" pitchFamily="34" charset="0"/>
-                <a:ea typeface="Courier New" pitchFamily="34" charset="-122"/>
-                <a:cs typeface="Courier New" pitchFamily="34" charset="-120"/>
-              </a:rPr>
-              <a:t>  id: string;</a:t>
-            </a:r>
-            <a:endParaRPr lang="en-US" sz="1000" dirty="0"/>
-          </a:p>
-          <a:p>
-            <a:pPr algn="l" indent="0" marL="0">
-              <a:buNone/>
-            </a:pPr>
-            <a:r>
-              <a:rPr lang="en-US" sz="1000" dirty="0">
-                <a:solidFill>
-                  <a:srgbClr val="FFEDD5"/>
-                </a:solidFill>
-                <a:latin typeface="Courier New" pitchFamily="34" charset="0"/>
-                <a:ea typeface="Courier New" pitchFamily="34" charset="-122"/>
-                <a:cs typeface="Courier New" pitchFamily="34" charset="-120"/>
-              </a:rPr>
-              <a:t>  title: string;</a:t>
-            </a:r>
-            <a:endParaRPr lang="en-US" sz="1000" dirty="0"/>
-          </a:p>
-          <a:p>
-            <a:pPr algn="l" indent="0" marL="0">
-              <a:buNone/>
-            </a:pPr>
-            <a:r>
-              <a:rPr lang="en-US" sz="1000" dirty="0">
-                <a:solidFill>
-                  <a:srgbClr val="FFEDD5"/>
-                </a:solidFill>
-                <a:latin typeface="Courier New" pitchFamily="34" charset="0"/>
-                <a:ea typeface="Courier New" pitchFamily="34" charset="-122"/>
-                <a:cs typeface="Courier New" pitchFamily="34" charset="-120"/>
-              </a:rPr>
-              <a:t>  description: string;</a:t>
-            </a:r>
-            <a:endParaRPr lang="en-US" sz="1000" dirty="0"/>
-          </a:p>
-          <a:p>
-            <a:pPr algn="l" indent="0" marL="0">
-              <a:buNone/>
-            </a:pPr>
-            <a:r>
-              <a:rPr lang="en-US" sz="1000" dirty="0">
-                <a:solidFill>
-                  <a:srgbClr val="FFEDD5"/>
-                </a:solidFill>
-                <a:latin typeface="Courier New" pitchFamily="34" charset="0"/>
-                <a:ea typeface="Courier New" pitchFamily="34" charset="-122"/>
-                <a:cs typeface="Courier New" pitchFamily="34" charset="-120"/>
-              </a:rPr>
-              <a:t>  status: 'new' | 'active' | 'closed';</a:t>
-            </a:r>
-            <a:endParaRPr lang="en-US" sz="1000" dirty="0"/>
-          </a:p>
-          <a:p>
-            <a:pPr algn="l" indent="0" marL="0">
-              <a:buNone/>
-            </a:pPr>
-            <a:r>
-              <a:rPr lang="en-US" sz="1000" dirty="0">
-                <a:solidFill>
-                  <a:srgbClr val="FFEDD5"/>
-                </a:solidFill>
-                <a:latin typeface="Courier New" pitchFamily="34" charset="0"/>
-                <a:ea typeface="Courier New" pitchFamily="34" charset="-122"/>
-                <a:cs typeface="Courier New" pitchFamily="34" charset="-120"/>
-              </a:rPr>
-              <a:t>  client_id: string;</a:t>
-            </a:r>
-            <a:endParaRPr lang="en-US" sz="1000" dirty="0"/>
-          </a:p>
-          <a:p>
-            <a:pPr algn="l" indent="0" marL="0">
-              <a:buNone/>
-            </a:pPr>
-            <a:r>
-              <a:rPr lang="en-US" sz="1000" dirty="0">
-                <a:solidFill>
-                  <a:srgbClr val="FFEDD5"/>
-                </a:solidFill>
-                <a:latin typeface="Courier New" pitchFamily="34" charset="0"/>
-                <a:ea typeface="Courier New" pitchFamily="34" charset="-122"/>
-                <a:cs typeface="Courier New" pitchFamily="34" charset="-120"/>
-              </a:rPr>
-              <a:t>  version: number;</a:t>
-            </a:r>
-            <a:endParaRPr lang="en-US" sz="1000" dirty="0"/>
-          </a:p>
-          <a:p>
-            <a:pPr algn="l" indent="0" marL="0">
-              <a:buNone/>
-            </a:pPr>
-            <a:r>
-              <a:rPr lang="en-US" sz="1000" dirty="0">
-                <a:solidFill>
-                  <a:srgbClr val="FFEDD5"/>
-                </a:solidFill>
-                <a:latin typeface="Courier New" pitchFamily="34" charset="0"/>
-                <a:ea typeface="Courier New" pitchFamily="34" charset="-122"/>
-                <a:cs typeface="Courier New" pitchFamily="34" charset="-120"/>
-              </a:rPr>
-              <a:t>  created_at: Date;</a:t>
-            </a:r>
-            <a:endParaRPr lang="en-US" sz="1000" dirty="0"/>
-          </a:p>
-          <a:p>
-            <a:pPr algn="l" indent="0" marL="0">
-              <a:buNone/>
-            </a:pPr>
-            <a:r>
-              <a:rPr lang="en-US" sz="1000" dirty="0">
-                <a:solidFill>
-                  <a:srgbClr val="FFEDD5"/>
-                </a:solidFill>
-                <a:latin typeface="Courier New" pitchFamily="34" charset="0"/>
-                <a:ea typeface="Courier New" pitchFamily="34" charset="-122"/>
-                <a:cs typeface="Courier New" pitchFamily="34" charset="-120"/>
-              </a:rPr>
-              <a:t>}</a:t>
-            </a:r>
-            <a:endParaRPr lang="en-US" sz="1000" dirty="0"/>
-          </a:p>
-          <a:p>
-            <a:pPr algn="l" indent="0" marL="0">
-              <a:buNone/>
-            </a:pPr>
-            <a:endParaRPr lang="en-US" sz="1000" dirty="0"/>
-          </a:p>
-          <a:p>
-            <a:pPr algn="l" indent="0" marL="0">
-              <a:buNone/>
-            </a:pPr>
-            <a:r>
-              <a:rPr lang="en-US" sz="1000" dirty="0">
-                <a:solidFill>
-                  <a:srgbClr val="FFEDD5"/>
-                </a:solidFill>
-                <a:latin typeface="Courier New" pitchFamily="34" charset="0"/>
-                <a:ea typeface="Courier New" pitchFamily="34" charset="-122"/>
-                <a:cs typeface="Courier New" pitchFamily="34" charset="-120"/>
-              </a:rPr>
-              <a:t>export interface IMessage {</a:t>
-            </a:r>
-            <a:endParaRPr lang="en-US" sz="1000" dirty="0"/>
-          </a:p>
-          <a:p>
-            <a:pPr algn="l" indent="0" marL="0">
-              <a:buNone/>
-            </a:pPr>
-            <a:r>
-              <a:rPr lang="en-US" sz="1000" dirty="0">
-                <a:solidFill>
-                  <a:srgbClr val="FFEDD5"/>
-                </a:solidFill>
-                <a:latin typeface="Courier New" pitchFamily="34" charset="0"/>
-                <a:ea typeface="Courier New" pitchFamily="34" charset="-122"/>
-                <a:cs typeface="Courier New" pitchFamily="34" charset="-120"/>
-              </a:rPr>
-              <a:t>  id: string;</a:t>
-            </a:r>
-            <a:endParaRPr lang="en-US" sz="1000" dirty="0"/>
-          </a:p>
-          <a:p>
-            <a:pPr algn="l" indent="0" marL="0">
-              <a:buNone/>
-            </a:pPr>
-            <a:r>
-              <a:rPr lang="en-US" sz="1000" dirty="0">
-                <a:solidFill>
-                  <a:srgbClr val="FFEDD5"/>
-                </a:solidFill>
-                <a:latin typeface="Courier New" pitchFamily="34" charset="0"/>
-                <a:ea typeface="Courier New" pitchFamily="34" charset="-122"/>
-                <a:cs typeface="Courier New" pitchFamily="34" charset="-120"/>
-              </a:rPr>
-              <a:t>  ticket_id: string;</a:t>
-            </a:r>
-            <a:endParaRPr lang="en-US" sz="1000" dirty="0"/>
-          </a:p>
-          <a:p>
-            <a:pPr algn="l" indent="0" marL="0">
-              <a:buNone/>
-            </a:pPr>
-            <a:r>
-              <a:rPr lang="en-US" sz="1000" dirty="0">
-                <a:solidFill>
-                  <a:srgbClr val="FFEDD5"/>
-                </a:solidFill>
-                <a:latin typeface="Courier New" pitchFamily="34" charset="0"/>
-                <a:ea typeface="Courier New" pitchFamily="34" charset="-122"/>
-                <a:cs typeface="Courier New" pitchFamily="34" charset="-120"/>
-              </a:rPr>
-              <a:t>  sender_id: string;</a:t>
-            </a:r>
-            <a:endParaRPr lang="en-US" sz="1000" dirty="0"/>
-          </a:p>
-          <a:p>
-            <a:pPr algn="l" indent="0" marL="0">
-              <a:buNone/>
-            </a:pPr>
-            <a:r>
-              <a:rPr lang="en-US" sz="1000" dirty="0">
-                <a:solidFill>
-                  <a:srgbClr val="FFEDD5"/>
-                </a:solidFill>
-                <a:latin typeface="Courier New" pitchFamily="34" charset="0"/>
-                <a:ea typeface="Courier New" pitchFamily="34" charset="-122"/>
-                <a:cs typeface="Courier New" pitchFamily="34" charset="-120"/>
-              </a:rPr>
-              <a:t>  text: string;</a:t>
-            </a:r>
-            <a:endParaRPr lang="en-US" sz="1000" dirty="0"/>
-          </a:p>
-          <a:p>
-            <a:pPr algn="l" indent="0" marL="0">
-              <a:buNone/>
-            </a:pPr>
-            <a:r>
-              <a:rPr lang="en-US" sz="1000" dirty="0">
-                <a:solidFill>
-                  <a:srgbClr val="FFEDD5"/>
-                </a:solidFill>
-                <a:latin typeface="Courier New" pitchFamily="34" charset="0"/>
-                <a:ea typeface="Courier New" pitchFamily="34" charset="-122"/>
-                <a:cs typeface="Courier New" pitchFamily="34" charset="-120"/>
-              </a:rPr>
-              <a:t>  sync_status: 'pending' | 'synced';</a:t>
-            </a:r>
-            <a:endParaRPr lang="en-US" sz="1000" dirty="0"/>
-          </a:p>
-          <a:p>
-            <a:pPr algn="l" indent="0" marL="0">
-              <a:buNone/>
-            </a:pPr>
-            <a:r>
-              <a:rPr lang="en-US" sz="1000" dirty="0">
-                <a:solidFill>
-                  <a:srgbClr val="FFEDD5"/>
-                </a:solidFill>
-                <a:latin typeface="Courier New" pitchFamily="34" charset="0"/>
-                <a:ea typeface="Courier New" pitchFamily="34" charset="-122"/>
-                <a:cs typeface="Courier New" pitchFamily="34" charset="-120"/>
-              </a:rPr>
-              <a:t>}</a:t>
-            </a:r>
-            <a:endParaRPr lang="en-US" sz="1000" dirty="0"/>
+              <a:rPr lang="en-US" sz="1600" dirty="0">
+                <a:solidFill>
+                  <a:srgbClr val="2D2D3A"/>
+                </a:solidFill>
+                <a:latin typeface="Times New Roman" pitchFamily="34" charset="0"/>
+                <a:ea typeface="Times New Roman" pitchFamily="34" charset="-122"/>
+                <a:cs typeface="Times New Roman" pitchFamily="34" charset="-120"/>
+              </a:rPr>
+              <a:t>Изоляция базы данных:</a:t>
+            </a:r>
+            <a:endParaRPr lang="en-US" sz="1600" dirty="0"/>
+          </a:p>
+          <a:p>
+            <a:pPr algn="l" indent="0" marL="0">
+              <a:buNone/>
+            </a:pPr>
+            <a:r>
+              <a:rPr lang="en-US" sz="1600" dirty="0">
+                <a:solidFill>
+                  <a:srgbClr val="2D2D3A"/>
+                </a:solidFill>
+                <a:latin typeface="Times New Roman" pitchFamily="34" charset="0"/>
+                <a:ea typeface="Times New Roman" pitchFamily="34" charset="-122"/>
+                <a:cs typeface="Times New Roman" pitchFamily="34" charset="-120"/>
+              </a:rPr>
+              <a:t>Для тестирования роутов API реальная СУБД PostgreSQL подменяется мок-пулом `pg-mock`. Это исключает загрязнение тестовой базы данных и обеспечивает скорость выполнения тестов (миллисекунды вместо минут).</a:t>
+            </a:r>
+            <a:endParaRPr lang="en-US" sz="1600" dirty="0"/>
+          </a:p>
+          <a:p>
+            <a:pPr algn="l" indent="0" marL="0">
+              <a:buNone/>
+            </a:pPr>
+            <a:endParaRPr lang="en-US" sz="1600" dirty="0"/>
+          </a:p>
+          <a:p>
+            <a:pPr algn="l" indent="0" marL="0">
+              <a:buNone/>
+            </a:pPr>
+            <a:r>
+              <a:rPr lang="en-US" sz="1600" dirty="0">
+                <a:solidFill>
+                  <a:srgbClr val="2D2D3A"/>
+                </a:solidFill>
+                <a:latin typeface="Times New Roman" pitchFamily="34" charset="0"/>
+                <a:ea typeface="Times New Roman" pitchFamily="34" charset="-122"/>
+                <a:cs typeface="Times New Roman" pitchFamily="34" charset="-120"/>
+              </a:rPr>
+              <a:t>Имитация внешних систем (1С, MinIO):</a:t>
+            </a:r>
+            <a:endParaRPr lang="en-US" sz="1600" dirty="0"/>
+          </a:p>
+          <a:p>
+            <a:pPr algn="l" indent="0" marL="0">
+              <a:buNone/>
+            </a:pPr>
+            <a:r>
+              <a:rPr lang="en-US" sz="1600" dirty="0">
+                <a:solidFill>
+                  <a:srgbClr val="2D2D3A"/>
+                </a:solidFill>
+                <a:latin typeface="Times New Roman" pitchFamily="34" charset="0"/>
+                <a:ea typeface="Times New Roman" pitchFamily="34" charset="-122"/>
+                <a:cs typeface="Times New Roman" pitchFamily="34" charset="-120"/>
+              </a:rPr>
+              <a:t>• Вместо вызовов к боевому серверу 1С используется легковесный мок-сервер API.</a:t>
+            </a:r>
+            <a:endParaRPr lang="en-US" sz="1600" dirty="0"/>
+          </a:p>
+          <a:p>
+            <a:pPr algn="l" indent="0" marL="0">
+              <a:buNone/>
+            </a:pPr>
+            <a:r>
+              <a:rPr lang="en-US" sz="1600" dirty="0">
+                <a:solidFill>
+                  <a:srgbClr val="2D2D3A"/>
+                </a:solidFill>
+                <a:latin typeface="Times New Roman" pitchFamily="34" charset="0"/>
+                <a:ea typeface="Times New Roman" pitchFamily="34" charset="-122"/>
+                <a:cs typeface="Times New Roman" pitchFamily="34" charset="-120"/>
+              </a:rPr>
+              <a:t>• Пакет AWS SDK S3 настраивается на локальную заглушку, которая не загружает файлы в облако, а симулирует сохранение в оперативной памяти.</a:t>
+            </a:r>
+            <a:endParaRPr lang="en-US" sz="1600" dirty="0"/>
           </a:p>
         </p:txBody>
       </p:sp>
@@ -9671,17 +9455,17 @@
               <a:buNone/>
             </a:pPr>
             <a:r>
-              <a:rPr lang="en-US" sz="2000" b="1" dirty="0">
-                <a:solidFill>
-                  <a:srgbClr val="0F1E36"/>
-                </a:solidFill>
-                <a:latin typeface="Cambria" pitchFamily="34" charset="0"/>
-                <a:ea typeface="Cambria" pitchFamily="34" charset="-122"/>
-                <a:cs typeface="Cambria" pitchFamily="34" charset="-120"/>
-              </a:rPr>
-              <a:t>Схемы валидации данных (Zod)</a:t>
-            </a:r>
-            <a:endParaRPr lang="en-US" sz="2000" dirty="0"/>
+              <a:rPr lang="en-US" sz="1600" b="1" dirty="0">
+                <a:solidFill>
+                  <a:srgbClr val="1A1A2E"/>
+                </a:solidFill>
+                <a:latin typeface="Georgia" pitchFamily="34" charset="0"/>
+                <a:ea typeface="Georgia" pitchFamily="34" charset="-122"/>
+                <a:cs typeface="Georgia" pitchFamily="34" charset="-120"/>
+              </a:rPr>
+              <a:t>Поддерживаемость: типизация TypeScript</a:t>
+            </a:r>
+            <a:endParaRPr lang="en-US" sz="1600" dirty="0"/>
           </a:p>
         </p:txBody>
       </p:sp>
@@ -9702,18 +9486,18 @@
             </a:avLst>
           </a:prstGeom>
           <a:solidFill>
-            <a:srgbClr val="FFF7ED"/>
+            <a:srgbClr val="F8F4F0"/>
           </a:solidFill>
           <a:ln w="12700">
             <a:solidFill>
-              <a:srgbClr val="FFF7ED"/>
+              <a:srgbClr val="EFEAE3"/>
             </a:solidFill>
             <a:prstDash val="solid"/>
           </a:ln>
           <a:effectLst>
-            <a:outerShdw sx="100000" sy="100000" kx="0" ky="0" algn="bl" rotWithShape="0" blurRad="88900" dist="25400" dir="2700000">
+            <a:outerShdw sx="100000" sy="100000" kx="0" ky="0" algn="bl" rotWithShape="0" blurRad="152400" dist="38100" dir="2700000">
               <a:srgbClr val="000000">
-                <a:alpha val="9000"/>
+                <a:alpha val="12000"/>
               </a:srgbClr>
             </a:outerShdw>
           </a:effectLst>
@@ -9744,17 +9528,17 @@
               <a:buNone/>
             </a:pPr>
             <a:r>
-              <a:rPr lang="en-US" sz="1300" b="1" dirty="0">
-                <a:solidFill>
-                  <a:srgbClr val="0F1E36"/>
+              <a:rPr lang="en-US" sz="1200" b="1" dirty="0">
+                <a:solidFill>
+                  <a:srgbClr val="1A1A2E"/>
                 </a:solidFill>
                 <a:latin typeface="Cambria" pitchFamily="34" charset="0"/>
                 <a:ea typeface="Cambria" pitchFamily="34" charset="-122"/>
                 <a:cs typeface="Cambria" pitchFamily="34" charset="-120"/>
               </a:rPr>
-              <a:t>Безопасный парсинг данных</a:t>
-            </a:r>
-            <a:endParaRPr lang="en-US" sz="1300" dirty="0"/>
+              <a:t>Преимущества типизации</a:t>
+            </a:r>
+            <a:endParaRPr lang="en-US" sz="1200" dirty="0"/>
           </a:p>
         </p:txBody>
       </p:sp>
@@ -9776,73 +9560,56 @@
           <a:ln/>
         </p:spPr>
         <p:txBody>
-          <a:bodyPr wrap="square" rtlCol="0" anchor="ctr"/>
+          <a:bodyPr wrap="square" rtlCol="0" anchor="t"/>
           <a:lstStyle/>
           <a:p>
-            <a:pPr indent="0" marL="0">
+            <a:pPr algn="l" indent="0" marL="0">
               <a:buNone/>
             </a:pPr>
             <a:r>
               <a:rPr lang="en-US" sz="1100" dirty="0">
                 <a:solidFill>
-                  <a:srgbClr val="1E293B"/>
-                </a:solidFill>
-                <a:latin typeface="Calibri" pitchFamily="34" charset="0"/>
-                <a:ea typeface="Calibri" pitchFamily="34" charset="-122"/>
-                <a:cs typeface="Calibri" pitchFamily="34" charset="-120"/>
-              </a:rPr>
-              <a:t>• Zod проверяет входящие HTTP-запросы (body, query, params) до выполнения логики.</a:t>
+                  <a:srgbClr val="2D2D3A"/>
+                </a:solidFill>
+                <a:latin typeface="Times New Roman" pitchFamily="34" charset="0"/>
+                <a:ea typeface="Times New Roman" pitchFamily="34" charset="-122"/>
+                <a:cs typeface="Times New Roman" pitchFamily="34" charset="-120"/>
+              </a:rPr>
+              <a:t>• Обнаружение 90% глупых ошибок опечаток на этапе компиляции.</a:t>
             </a:r>
             <a:endParaRPr lang="en-US" sz="1100" dirty="0"/>
           </a:p>
           <a:p>
-            <a:pPr indent="0" marL="0">
+            <a:pPr algn="l" indent="0" marL="0">
               <a:buNone/>
             </a:pPr>
             <a:r>
               <a:rPr lang="en-US" sz="1100" dirty="0">
                 <a:solidFill>
-                  <a:srgbClr val="1E293B"/>
-                </a:solidFill>
-                <a:latin typeface="Calibri" pitchFamily="34" charset="0"/>
-                <a:ea typeface="Calibri" pitchFamily="34" charset="-122"/>
-                <a:cs typeface="Calibri" pitchFamily="34" charset="-120"/>
-              </a:rPr>
-              <a:t>• Автоматически отсекает лишние поля (защита от mass assignment).</a:t>
+                  <a:srgbClr val="2D2D3A"/>
+                </a:solidFill>
+                <a:latin typeface="Times New Roman" pitchFamily="34" charset="0"/>
+                <a:ea typeface="Times New Roman" pitchFamily="34" charset="-122"/>
+                <a:cs typeface="Times New Roman" pitchFamily="34" charset="-120"/>
+              </a:rPr>
+              <a:t>• Удобное автодополнение (IntelliSense) в редакторах.</a:t>
             </a:r>
             <a:endParaRPr lang="en-US" sz="1100" dirty="0"/>
           </a:p>
           <a:p>
-            <a:pPr indent="0" marL="0">
+            <a:pPr algn="l" indent="0" marL="0">
               <a:buNone/>
             </a:pPr>
             <a:r>
               <a:rPr lang="en-US" sz="1100" dirty="0">
                 <a:solidFill>
-                  <a:srgbClr val="1E293B"/>
-                </a:solidFill>
-                <a:latin typeface="Calibri" pitchFamily="34" charset="0"/>
-                <a:ea typeface="Calibri" pitchFamily="34" charset="-122"/>
-                <a:cs typeface="Calibri" pitchFamily="34" charset="-120"/>
-              </a:rPr>
-              <a:t>• Преобразует строковые типы в числа/даты.</a:t>
-            </a:r>
-            <a:endParaRPr lang="en-US" sz="1100" dirty="0"/>
-          </a:p>
-          <a:p>
-            <a:pPr indent="0" marL="0">
-              <a:buNone/>
-            </a:pPr>
-            <a:r>
-              <a:rPr lang="en-US" sz="1100" dirty="0">
-                <a:solidFill>
-                  <a:srgbClr val="1E293B"/>
-                </a:solidFill>
-                <a:latin typeface="Calibri" pitchFamily="34" charset="0"/>
-                <a:ea typeface="Calibri" pitchFamily="34" charset="-122"/>
-                <a:cs typeface="Calibri" pitchFamily="34" charset="-120"/>
-              </a:rPr>
-              <a:t>• Из схем Zod автоматически выводятся типы TS (`z.infer&lt;T&gt;`).</a:t>
+                  <a:srgbClr val="2D2D3A"/>
+                </a:solidFill>
+                <a:latin typeface="Times New Roman" pitchFamily="34" charset="0"/>
+                <a:ea typeface="Times New Roman" pitchFamily="34" charset="-122"/>
+                <a:cs typeface="Times New Roman" pitchFamily="34" charset="-120"/>
+              </a:rPr>
+              <a:t>• Безопасный рефакторинг: при изменении структуры полей компилятор сразу подсветит все ошибочные места.</a:t>
             </a:r>
             <a:endParaRPr lang="en-US" sz="1100" dirty="0"/>
           </a:p>
@@ -9865,11 +9632,11 @@
             </a:avLst>
           </a:prstGeom>
           <a:solidFill>
-            <a:srgbClr val="0B132B"/>
+            <a:srgbClr val="1A1A2E"/>
           </a:solidFill>
           <a:ln w="12700">
             <a:solidFill>
-              <a:srgbClr val="1E4070"/>
+              <a:srgbClr val="2A2A4A"/>
             </a:solidFill>
             <a:prstDash val="solid"/>
           </a:ln>
@@ -9902,13 +9669,13 @@
             <a:r>
               <a:rPr lang="en-US" sz="1000" dirty="0">
                 <a:solidFill>
-                  <a:srgbClr val="FFEDD5"/>
+                  <a:srgbClr val="F8F4F0"/>
                 </a:solidFill>
                 <a:latin typeface="Courier New" pitchFamily="34" charset="0"/>
                 <a:ea typeface="Courier New" pitchFamily="34" charset="-122"/>
                 <a:cs typeface="Courier New" pitchFamily="34" charset="-120"/>
               </a:rPr>
-              <a:t>import { z } from 'zod';</a:t>
+              <a:t>export interface ITicket {</a:t>
             </a:r>
             <a:endParaRPr lang="en-US" sz="1000" dirty="0"/>
           </a:p>
@@ -9916,22 +9683,16 @@
             <a:pPr algn="l" indent="0" marL="0">
               <a:buNone/>
             </a:pPr>
-            <a:endParaRPr lang="en-US" sz="1000" dirty="0"/>
-          </a:p>
-          <a:p>
-            <a:pPr algn="l" indent="0" marL="0">
-              <a:buNone/>
-            </a:pPr>
             <a:r>
               <a:rPr lang="en-US" sz="1000" dirty="0">
                 <a:solidFill>
-                  <a:srgbClr val="FFEDD5"/>
+                  <a:srgbClr val="F8F4F0"/>
                 </a:solidFill>
                 <a:latin typeface="Courier New" pitchFamily="34" charset="0"/>
                 <a:ea typeface="Courier New" pitchFamily="34" charset="-122"/>
                 <a:cs typeface="Courier New" pitchFamily="34" charset="-120"/>
               </a:rPr>
-              <a:t>export const CreateTicketSchema = z.object({</a:t>
+              <a:t>  id: string;</a:t>
             </a:r>
             <a:endParaRPr lang="en-US" sz="1000" dirty="0"/>
           </a:p>
@@ -9942,13 +9703,13 @@
             <a:r>
               <a:rPr lang="en-US" sz="1000" dirty="0">
                 <a:solidFill>
-                  <a:srgbClr val="FFEDD5"/>
+                  <a:srgbClr val="F8F4F0"/>
                 </a:solidFill>
                 <a:latin typeface="Courier New" pitchFamily="34" charset="0"/>
                 <a:ea typeface="Courier New" pitchFamily="34" charset="-122"/>
                 <a:cs typeface="Courier New" pitchFamily="34" charset="-120"/>
               </a:rPr>
-              <a:t>  title: z.string().min(3).max(100),</a:t>
+              <a:t>  title: string;</a:t>
             </a:r>
             <a:endParaRPr lang="en-US" sz="1000" dirty="0"/>
           </a:p>
@@ -9959,13 +9720,13 @@
             <a:r>
               <a:rPr lang="en-US" sz="1000" dirty="0">
                 <a:solidFill>
-                  <a:srgbClr val="FFEDD5"/>
+                  <a:srgbClr val="F8F4F0"/>
                 </a:solidFill>
                 <a:latin typeface="Courier New" pitchFamily="34" charset="0"/>
                 <a:ea typeface="Courier New" pitchFamily="34" charset="-122"/>
                 <a:cs typeface="Courier New" pitchFamily="34" charset="-120"/>
               </a:rPr>
-              <a:t>  description: z.string().min(10),</a:t>
+              <a:t>  description: string;</a:t>
             </a:r>
             <a:endParaRPr lang="en-US" sz="1000" dirty="0"/>
           </a:p>
@@ -9976,13 +9737,13 @@
             <a:r>
               <a:rPr lang="en-US" sz="1000" dirty="0">
                 <a:solidFill>
-                  <a:srgbClr val="FFEDD5"/>
+                  <a:srgbClr val="F8F4F0"/>
                 </a:solidFill>
                 <a:latin typeface="Courier New" pitchFamily="34" charset="0"/>
                 <a:ea typeface="Courier New" pitchFamily="34" charset="-122"/>
                 <a:cs typeface="Courier New" pitchFamily="34" charset="-120"/>
               </a:rPr>
-              <a:t>  category: z.enum(['1C_ERP', '1C_Accounting', 'Other']),</a:t>
+              <a:t>  status: 'new' | 'active' | 'closed';</a:t>
             </a:r>
             <a:endParaRPr lang="en-US" sz="1000" dirty="0"/>
           </a:p>
@@ -9993,13 +9754,13 @@
             <a:r>
               <a:rPr lang="en-US" sz="1000" dirty="0">
                 <a:solidFill>
-                  <a:srgbClr val="FFEDD5"/>
+                  <a:srgbClr val="F8F4F0"/>
                 </a:solidFill>
                 <a:latin typeface="Courier New" pitchFamily="34" charset="0"/>
                 <a:ea typeface="Courier New" pitchFamily="34" charset="-122"/>
                 <a:cs typeface="Courier New" pitchFamily="34" charset="-120"/>
               </a:rPr>
-              <a:t>  attachments: z.array(z.string().uuid()).optional(),</a:t>
+              <a:t>  client_id: string;</a:t>
             </a:r>
             <a:endParaRPr lang="en-US" sz="1000" dirty="0"/>
           </a:p>
@@ -10010,13 +9771,13 @@
             <a:r>
               <a:rPr lang="en-US" sz="1000" dirty="0">
                 <a:solidFill>
-                  <a:srgbClr val="FFEDD5"/>
+                  <a:srgbClr val="F8F4F0"/>
                 </a:solidFill>
                 <a:latin typeface="Courier New" pitchFamily="34" charset="0"/>
                 <a:ea typeface="Courier New" pitchFamily="34" charset="-122"/>
                 <a:cs typeface="Courier New" pitchFamily="34" charset="-120"/>
               </a:rPr>
-              <a:t>});</a:t>
+              <a:t>  version: number;</a:t>
             </a:r>
             <a:endParaRPr lang="en-US" sz="1000" dirty="0"/>
           </a:p>
@@ -10024,22 +9785,158 @@
             <a:pPr algn="l" indent="0" marL="0">
               <a:buNone/>
             </a:pPr>
-            <a:endParaRPr lang="en-US" sz="1000" dirty="0"/>
-          </a:p>
-          <a:p>
-            <a:pPr algn="l" indent="0" marL="0">
-              <a:buNone/>
-            </a:pPr>
             <a:r>
               <a:rPr lang="en-US" sz="1000" dirty="0">
                 <a:solidFill>
-                  <a:srgbClr val="FFEDD5"/>
+                  <a:srgbClr val="F8F4F0"/>
                 </a:solidFill>
                 <a:latin typeface="Courier New" pitchFamily="34" charset="0"/>
                 <a:ea typeface="Courier New" pitchFamily="34" charset="-122"/>
                 <a:cs typeface="Courier New" pitchFamily="34" charset="-120"/>
               </a:rPr>
-              <a:t>type CreateTicketDto = z.infer&lt;typeof CreateTicketSchema&gt;;</a:t>
+              <a:t>  created_at: Date;</a:t>
+            </a:r>
+            <a:endParaRPr lang="en-US" sz="1000" dirty="0"/>
+          </a:p>
+          <a:p>
+            <a:pPr algn="l" indent="0" marL="0">
+              <a:buNone/>
+            </a:pPr>
+            <a:r>
+              <a:rPr lang="en-US" sz="1000" dirty="0">
+                <a:solidFill>
+                  <a:srgbClr val="F8F4F0"/>
+                </a:solidFill>
+                <a:latin typeface="Courier New" pitchFamily="34" charset="0"/>
+                <a:ea typeface="Courier New" pitchFamily="34" charset="-122"/>
+                <a:cs typeface="Courier New" pitchFamily="34" charset="-120"/>
+              </a:rPr>
+              <a:t>}</a:t>
+            </a:r>
+            <a:endParaRPr lang="en-US" sz="1000" dirty="0"/>
+          </a:p>
+          <a:p>
+            <a:pPr algn="l" indent="0" marL="0">
+              <a:buNone/>
+            </a:pPr>
+            <a:endParaRPr lang="en-US" sz="1000" dirty="0"/>
+          </a:p>
+          <a:p>
+            <a:pPr algn="l" indent="0" marL="0">
+              <a:buNone/>
+            </a:pPr>
+            <a:r>
+              <a:rPr lang="en-US" sz="1000" dirty="0">
+                <a:solidFill>
+                  <a:srgbClr val="F8F4F0"/>
+                </a:solidFill>
+                <a:latin typeface="Courier New" pitchFamily="34" charset="0"/>
+                <a:ea typeface="Courier New" pitchFamily="34" charset="-122"/>
+                <a:cs typeface="Courier New" pitchFamily="34" charset="-120"/>
+              </a:rPr>
+              <a:t>export interface IMessage {</a:t>
+            </a:r>
+            <a:endParaRPr lang="en-US" sz="1000" dirty="0"/>
+          </a:p>
+          <a:p>
+            <a:pPr algn="l" indent="0" marL="0">
+              <a:buNone/>
+            </a:pPr>
+            <a:r>
+              <a:rPr lang="en-US" sz="1000" dirty="0">
+                <a:solidFill>
+                  <a:srgbClr val="F8F4F0"/>
+                </a:solidFill>
+                <a:latin typeface="Courier New" pitchFamily="34" charset="0"/>
+                <a:ea typeface="Courier New" pitchFamily="34" charset="-122"/>
+                <a:cs typeface="Courier New" pitchFamily="34" charset="-120"/>
+              </a:rPr>
+              <a:t>  id: string;</a:t>
+            </a:r>
+            <a:endParaRPr lang="en-US" sz="1000" dirty="0"/>
+          </a:p>
+          <a:p>
+            <a:pPr algn="l" indent="0" marL="0">
+              <a:buNone/>
+            </a:pPr>
+            <a:r>
+              <a:rPr lang="en-US" sz="1000" dirty="0">
+                <a:solidFill>
+                  <a:srgbClr val="F8F4F0"/>
+                </a:solidFill>
+                <a:latin typeface="Courier New" pitchFamily="34" charset="0"/>
+                <a:ea typeface="Courier New" pitchFamily="34" charset="-122"/>
+                <a:cs typeface="Courier New" pitchFamily="34" charset="-120"/>
+              </a:rPr>
+              <a:t>  ticket_id: string;</a:t>
+            </a:r>
+            <a:endParaRPr lang="en-US" sz="1000" dirty="0"/>
+          </a:p>
+          <a:p>
+            <a:pPr algn="l" indent="0" marL="0">
+              <a:buNone/>
+            </a:pPr>
+            <a:r>
+              <a:rPr lang="en-US" sz="1000" dirty="0">
+                <a:solidFill>
+                  <a:srgbClr val="F8F4F0"/>
+                </a:solidFill>
+                <a:latin typeface="Courier New" pitchFamily="34" charset="0"/>
+                <a:ea typeface="Courier New" pitchFamily="34" charset="-122"/>
+                <a:cs typeface="Courier New" pitchFamily="34" charset="-120"/>
+              </a:rPr>
+              <a:t>  sender_id: string;</a:t>
+            </a:r>
+            <a:endParaRPr lang="en-US" sz="1000" dirty="0"/>
+          </a:p>
+          <a:p>
+            <a:pPr algn="l" indent="0" marL="0">
+              <a:buNone/>
+            </a:pPr>
+            <a:r>
+              <a:rPr lang="en-US" sz="1000" dirty="0">
+                <a:solidFill>
+                  <a:srgbClr val="F8F4F0"/>
+                </a:solidFill>
+                <a:latin typeface="Courier New" pitchFamily="34" charset="0"/>
+                <a:ea typeface="Courier New" pitchFamily="34" charset="-122"/>
+                <a:cs typeface="Courier New" pitchFamily="34" charset="-120"/>
+              </a:rPr>
+              <a:t>  text: string;</a:t>
+            </a:r>
+            <a:endParaRPr lang="en-US" sz="1000" dirty="0"/>
+          </a:p>
+          <a:p>
+            <a:pPr algn="l" indent="0" marL="0">
+              <a:buNone/>
+            </a:pPr>
+            <a:r>
+              <a:rPr lang="en-US" sz="1000" dirty="0">
+                <a:solidFill>
+                  <a:srgbClr val="F8F4F0"/>
+                </a:solidFill>
+                <a:latin typeface="Courier New" pitchFamily="34" charset="0"/>
+                <a:ea typeface="Courier New" pitchFamily="34" charset="-122"/>
+                <a:cs typeface="Courier New" pitchFamily="34" charset="-120"/>
+              </a:rPr>
+              <a:t>  sync_status: 'pending' | 'synced';</a:t>
+            </a:r>
+            <a:endParaRPr lang="en-US" sz="1000" dirty="0"/>
+          </a:p>
+          <a:p>
+            <a:pPr algn="l" indent="0" marL="0">
+              <a:buNone/>
+            </a:pPr>
+            <a:r>
+              <a:rPr lang="en-US" sz="1000" dirty="0">
+                <a:solidFill>
+                  <a:srgbClr val="F8F4F0"/>
+                </a:solidFill>
+                <a:latin typeface="Courier New" pitchFamily="34" charset="0"/>
+                <a:ea typeface="Courier New" pitchFamily="34" charset="-122"/>
+                <a:cs typeface="Courier New" pitchFamily="34" charset="-120"/>
+              </a:rPr>
+              <a:t>}</a:t>
             </a:r>
             <a:endParaRPr lang="en-US" sz="1000" dirty="0"/>
           </a:p>

--- a/presentations/output/P2_Атрибуты_качества.pptx
+++ b/presentations/output/P2_Атрибуты_качества.pptx
@@ -2623,7 +2623,7 @@
               <a:buNone/>
             </a:pPr>
             <a:r>
-              <a:rPr lang="en-US" sz="1200" b="1" dirty="0">
+              <a:rPr lang="en-US" sz="1400" b="1" dirty="0">
                 <a:solidFill>
                   <a:srgbClr val="1A1A2E"/>
                 </a:solidFill>
@@ -2633,7 +2633,7 @@
               </a:rPr>
               <a:t>Безопасный парсинг данных</a:t>
             </a:r>
-            <a:endParaRPr lang="en-US" sz="1200" dirty="0"/>
+            <a:endParaRPr lang="en-US" sz="1400" dirty="0"/>
           </a:p>
         </p:txBody>
       </p:sp>
@@ -2662,7 +2662,7 @@
               <a:buNone/>
             </a:pPr>
             <a:r>
-              <a:rPr lang="en-US" sz="1100" dirty="0">
+              <a:rPr lang="en-US" sz="1400" dirty="0">
                 <a:solidFill>
                   <a:srgbClr val="2D2D3A"/>
                 </a:solidFill>
@@ -2672,14 +2672,14 @@
               </a:rPr>
               <a:t>• Zod проверяет входящие HTTP-запросы (body, query, params) до выполнения логики.</a:t>
             </a:r>
-            <a:endParaRPr lang="en-US" sz="1100" dirty="0"/>
-          </a:p>
-          <a:p>
-            <a:pPr algn="l" indent="0" marL="0">
-              <a:buNone/>
-            </a:pPr>
-            <a:r>
-              <a:rPr lang="en-US" sz="1100" dirty="0">
+            <a:endParaRPr lang="en-US" sz="1400" dirty="0"/>
+          </a:p>
+          <a:p>
+            <a:pPr algn="l" indent="0" marL="0">
+              <a:buNone/>
+            </a:pPr>
+            <a:r>
+              <a:rPr lang="en-US" sz="1400" dirty="0">
                 <a:solidFill>
                   <a:srgbClr val="2D2D3A"/>
                 </a:solidFill>
@@ -2689,14 +2689,14 @@
               </a:rPr>
               <a:t>• Автоматически отсекает лишние поля (защита от mass assignment).</a:t>
             </a:r>
-            <a:endParaRPr lang="en-US" sz="1100" dirty="0"/>
-          </a:p>
-          <a:p>
-            <a:pPr algn="l" indent="0" marL="0">
-              <a:buNone/>
-            </a:pPr>
-            <a:r>
-              <a:rPr lang="en-US" sz="1100" dirty="0">
+            <a:endParaRPr lang="en-US" sz="1400" dirty="0"/>
+          </a:p>
+          <a:p>
+            <a:pPr algn="l" indent="0" marL="0">
+              <a:buNone/>
+            </a:pPr>
+            <a:r>
+              <a:rPr lang="en-US" sz="1400" dirty="0">
                 <a:solidFill>
                   <a:srgbClr val="2D2D3A"/>
                 </a:solidFill>
@@ -2706,14 +2706,14 @@
               </a:rPr>
               <a:t>• Преобразует строковые типы в числа/даты.</a:t>
             </a:r>
-            <a:endParaRPr lang="en-US" sz="1100" dirty="0"/>
-          </a:p>
-          <a:p>
-            <a:pPr algn="l" indent="0" marL="0">
-              <a:buNone/>
-            </a:pPr>
-            <a:r>
-              <a:rPr lang="en-US" sz="1100" dirty="0">
+            <a:endParaRPr lang="en-US" sz="1400" dirty="0"/>
+          </a:p>
+          <a:p>
+            <a:pPr algn="l" indent="0" marL="0">
+              <a:buNone/>
+            </a:pPr>
+            <a:r>
+              <a:rPr lang="en-US" sz="1400" dirty="0">
                 <a:solidFill>
                   <a:srgbClr val="2D2D3A"/>
                 </a:solidFill>
@@ -2723,7 +2723,7 @@
               </a:rPr>
               <a:t>• Из схем Zod автоматически выводятся типы TS (`z.infer&lt;T&gt;`).</a:t>
             </a:r>
-            <a:endParaRPr lang="en-US" sz="1100" dirty="0"/>
+            <a:endParaRPr lang="en-US" sz="1400" dirty="0"/>
           </a:p>
         </p:txBody>
       </p:sp>
@@ -3054,7 +3054,7 @@
               <a:buNone/>
             </a:pPr>
             <a:r>
-              <a:rPr lang="en-US" sz="1200" b="1" dirty="0">
+              <a:rPr lang="en-US" sz="1400" b="1" dirty="0">
                 <a:solidFill>
                   <a:srgbClr val="1A1A2E"/>
                 </a:solidFill>
@@ -3064,7 +3064,7 @@
               </a:rPr>
               <a:t>Паттерн Стратегия и слабая связанность хранилищ</a:t>
             </a:r>
-            <a:endParaRPr lang="en-US" sz="1200" dirty="0"/>
+            <a:endParaRPr lang="en-US" sz="1400" dirty="0"/>
           </a:p>
         </p:txBody>
       </p:sp>
@@ -3093,7 +3093,7 @@
               <a:buNone/>
             </a:pPr>
             <a:r>
-              <a:rPr lang="en-US" sz="1600" dirty="0">
+              <a:rPr lang="en-US" sz="1800" dirty="0">
                 <a:solidFill>
                   <a:srgbClr val="2D2D3A"/>
                 </a:solidFill>
@@ -3103,14 +3103,14 @@
               </a:rPr>
               <a:t>Паттерн Стратегия (Strategy):</a:t>
             </a:r>
-            <a:endParaRPr lang="en-US" sz="1600" dirty="0"/>
-          </a:p>
-          <a:p>
-            <a:pPr algn="l" indent="0" marL="0">
-              <a:buNone/>
-            </a:pPr>
-            <a:r>
-              <a:rPr lang="en-US" sz="1600" dirty="0">
+            <a:endParaRPr lang="en-US" sz="1800" dirty="0"/>
+          </a:p>
+          <a:p>
+            <a:pPr algn="l" indent="0" marL="0">
+              <a:buNone/>
+            </a:pPr>
+            <a:r>
+              <a:rPr lang="en-US" sz="1800" dirty="0">
                 <a:solidFill>
                   <a:srgbClr val="2D2D3A"/>
                 </a:solidFill>
@@ -3120,20 +3120,20 @@
               </a:rPr>
               <a:t>Для отправки уведомлений используется паттерн 'Стратегия'. Это позволяет легко добавить новый канал (например, Telegram, E-mail, Push) без изменения логики создания тикета. Достаточно зарегистрировать класс, реализующий интерфейс `INotificationProvider`.</a:t>
             </a:r>
-            <a:endParaRPr lang="en-US" sz="1600" dirty="0"/>
-          </a:p>
-          <a:p>
-            <a:pPr algn="l" indent="0" marL="0">
-              <a:buNone/>
-            </a:pPr>
-            <a:endParaRPr lang="en-US" sz="1600" dirty="0"/>
-          </a:p>
-          <a:p>
-            <a:pPr algn="l" indent="0" marL="0">
-              <a:buNone/>
-            </a:pPr>
-            <a:r>
-              <a:rPr lang="en-US" sz="1600" dirty="0">
+            <a:endParaRPr lang="en-US" sz="1800" dirty="0"/>
+          </a:p>
+          <a:p>
+            <a:pPr algn="l" indent="0" marL="0">
+              <a:buNone/>
+            </a:pPr>
+            <a:endParaRPr lang="en-US" sz="1800" dirty="0"/>
+          </a:p>
+          <a:p>
+            <a:pPr algn="l" indent="0" marL="0">
+              <a:buNone/>
+            </a:pPr>
+            <a:r>
+              <a:rPr lang="en-US" sz="1800" dirty="0">
                 <a:solidFill>
                   <a:srgbClr val="2D2D3A"/>
                 </a:solidFill>
@@ -3143,14 +3143,14 @@
               </a:rPr>
               <a:t>Слабая связанность хранилищ файлов:</a:t>
             </a:r>
-            <a:endParaRPr lang="en-US" sz="1600" dirty="0"/>
-          </a:p>
-          <a:p>
-            <a:pPr algn="l" indent="0" marL="0">
-              <a:buNone/>
-            </a:pPr>
-            <a:r>
-              <a:rPr lang="en-US" sz="1600" dirty="0">
+            <a:endParaRPr lang="en-US" sz="1800" dirty="0"/>
+          </a:p>
+          <a:p>
+            <a:pPr algn="l" indent="0" marL="0">
+              <a:buNone/>
+            </a:pPr>
+            <a:r>
+              <a:rPr lang="en-US" sz="1800" dirty="0">
                 <a:solidFill>
                   <a:srgbClr val="2D2D3A"/>
                 </a:solidFill>
@@ -3160,7 +3160,7 @@
               </a:rPr>
               <a:t>Интеграция с S3 скрыта за абстракцией `IFileStorage`. В процессе разработки мы используем локальный MinIO, но при развертывании в облаке можем переключиться на AWS S3 или Yandex Object Storage простым изменением переменной среды в `.env`.</a:t>
             </a:r>
-            <a:endParaRPr lang="en-US" sz="1600" dirty="0"/>
+            <a:endParaRPr lang="en-US" sz="1800" dirty="0"/>
           </a:p>
         </p:txBody>
       </p:sp>
@@ -3294,7 +3294,7 @@
               <a:buNone/>
             </a:pPr>
             <a:r>
-              <a:rPr lang="en-US" sz="1200" b="1" dirty="0">
+              <a:rPr lang="en-US" sz="1400" b="1" dirty="0">
                 <a:solidFill>
                   <a:srgbClr val="1A1A2E"/>
                 </a:solidFill>
@@ -3304,7 +3304,7 @@
               </a:rPr>
               <a:t>Двухфакторный вход и Bearer JWT</a:t>
             </a:r>
-            <a:endParaRPr lang="en-US" sz="1200" dirty="0"/>
+            <a:endParaRPr lang="en-US" sz="1400" dirty="0"/>
           </a:p>
         </p:txBody>
       </p:sp>
@@ -3333,7 +3333,7 @@
               <a:buNone/>
             </a:pPr>
             <a:r>
-              <a:rPr lang="en-US" sz="1600" dirty="0">
+              <a:rPr lang="en-US" sz="1800" dirty="0">
                 <a:solidFill>
                   <a:srgbClr val="2D2D3A"/>
                 </a:solidFill>
@@ -3343,14 +3343,14 @@
               </a:rPr>
               <a:t>Двухфакторный вход по SMS:</a:t>
             </a:r>
-            <a:endParaRPr lang="en-US" sz="1600" dirty="0"/>
-          </a:p>
-          <a:p>
-            <a:pPr algn="l" indent="0" marL="0">
-              <a:buNone/>
-            </a:pPr>
-            <a:r>
-              <a:rPr lang="en-US" sz="1600" dirty="0">
+            <a:endParaRPr lang="en-US" sz="1800" dirty="0"/>
+          </a:p>
+          <a:p>
+            <a:pPr algn="l" indent="0" marL="0">
+              <a:buNone/>
+            </a:pPr>
+            <a:r>
+              <a:rPr lang="en-US" sz="1800" dirty="0">
                 <a:solidFill>
                   <a:srgbClr val="2D2D3A"/>
                 </a:solidFill>
@@ -3360,20 +3360,20 @@
               </a:rPr>
               <a:t>Пользователь вводит номер телефона, система генерирует случайный 6-значный код и отправляет по SMS. Код хэшируется в БД с ограничением жизни в 5 минут. При успешном вводе генерируется пара токенов.</a:t>
             </a:r>
-            <a:endParaRPr lang="en-US" sz="1600" dirty="0"/>
-          </a:p>
-          <a:p>
-            <a:pPr algn="l" indent="0" marL="0">
-              <a:buNone/>
-            </a:pPr>
-            <a:endParaRPr lang="en-US" sz="1600" dirty="0"/>
-          </a:p>
-          <a:p>
-            <a:pPr algn="l" indent="0" marL="0">
-              <a:buNone/>
-            </a:pPr>
-            <a:r>
-              <a:rPr lang="en-US" sz="1600" dirty="0">
+            <a:endParaRPr lang="en-US" sz="1800" dirty="0"/>
+          </a:p>
+          <a:p>
+            <a:pPr algn="l" indent="0" marL="0">
+              <a:buNone/>
+            </a:pPr>
+            <a:endParaRPr lang="en-US" sz="1800" dirty="0"/>
+          </a:p>
+          <a:p>
+            <a:pPr algn="l" indent="0" marL="0">
+              <a:buNone/>
+            </a:pPr>
+            <a:r>
+              <a:rPr lang="en-US" sz="1800" dirty="0">
                 <a:solidFill>
                   <a:srgbClr val="2D2D3A"/>
                 </a:solidFill>
@@ -3383,14 +3383,14 @@
               </a:rPr>
               <a:t>Bearer JWT (Access &amp; Refresh):</a:t>
             </a:r>
-            <a:endParaRPr lang="en-US" sz="1600" dirty="0"/>
-          </a:p>
-          <a:p>
-            <a:pPr algn="l" indent="0" marL="0">
-              <a:buNone/>
-            </a:pPr>
-            <a:r>
-              <a:rPr lang="en-US" sz="1600" dirty="0">
+            <a:endParaRPr lang="en-US" sz="1800" dirty="0"/>
+          </a:p>
+          <a:p>
+            <a:pPr algn="l" indent="0" marL="0">
+              <a:buNone/>
+            </a:pPr>
+            <a:r>
+              <a:rPr lang="en-US" sz="1800" dirty="0">
                 <a:solidFill>
                   <a:srgbClr val="2D2D3A"/>
                 </a:solidFill>
@@ -3400,14 +3400,14 @@
               </a:rPr>
               <a:t>• Access Token: живет 15 минут, хранится в памяти, используется для авторизации запросов.</a:t>
             </a:r>
-            <a:endParaRPr lang="en-US" sz="1600" dirty="0"/>
-          </a:p>
-          <a:p>
-            <a:pPr algn="l" indent="0" marL="0">
-              <a:buNone/>
-            </a:pPr>
-            <a:r>
-              <a:rPr lang="en-US" sz="1600" dirty="0">
+            <a:endParaRPr lang="en-US" sz="1800" dirty="0"/>
+          </a:p>
+          <a:p>
+            <a:pPr algn="l" indent="0" marL="0">
+              <a:buNone/>
+            </a:pPr>
+            <a:r>
+              <a:rPr lang="en-US" sz="1800" dirty="0">
                 <a:solidFill>
                   <a:srgbClr val="2D2D3A"/>
                 </a:solidFill>
@@ -3417,14 +3417,14 @@
               </a:rPr>
               <a:t>• Refresh Token: живет 7 дней, хранится в Cookie HTTPOnly, используется для безопасного обновления access-токена.</a:t>
             </a:r>
-            <a:endParaRPr lang="en-US" sz="1600" dirty="0"/>
-          </a:p>
-          <a:p>
-            <a:pPr algn="l" indent="0" marL="0">
-              <a:buNone/>
-            </a:pPr>
-            <a:r>
-              <a:rPr lang="en-US" sz="1600" dirty="0">
+            <a:endParaRPr lang="en-US" sz="1800" dirty="0"/>
+          </a:p>
+          <a:p>
+            <a:pPr algn="l" indent="0" marL="0">
+              <a:buNone/>
+            </a:pPr>
+            <a:r>
+              <a:rPr lang="en-US" sz="1800" dirty="0">
                 <a:solidFill>
                   <a:srgbClr val="2D2D3A"/>
                 </a:solidFill>
@@ -3434,7 +3434,7 @@
               </a:rPr>
               <a:t>• Это исключает кражу токенов через XSS-скрипты.</a:t>
             </a:r>
-            <a:endParaRPr lang="en-US" sz="1600" dirty="0"/>
+            <a:endParaRPr lang="en-US" sz="1800" dirty="0"/>
           </a:p>
         </p:txBody>
       </p:sp>
@@ -3568,7 +3568,7 @@
               <a:buNone/>
             </a:pPr>
             <a:r>
-              <a:rPr lang="en-US" sz="1200" b="1" dirty="0">
+              <a:rPr lang="en-US" sz="1400" b="1" dirty="0">
                 <a:solidFill>
                   <a:srgbClr val="1A1A2E"/>
                 </a:solidFill>
@@ -3578,7 +3578,7 @@
               </a:rPr>
               <a:t>Защита данных и валидация трафика</a:t>
             </a:r>
-            <a:endParaRPr lang="en-US" sz="1200" dirty="0"/>
+            <a:endParaRPr lang="en-US" sz="1400" dirty="0"/>
           </a:p>
         </p:txBody>
       </p:sp>
@@ -3607,7 +3607,7 @@
               <a:buNone/>
             </a:pPr>
             <a:r>
-              <a:rPr lang="en-US" sz="1600" dirty="0">
+              <a:rPr lang="en-US" sz="1800" dirty="0">
                 <a:solidFill>
                   <a:srgbClr val="2D2D3A"/>
                 </a:solidFill>
@@ -3617,14 +3617,14 @@
               </a:rPr>
               <a:t>Защита данных и S3:</a:t>
             </a:r>
-            <a:endParaRPr lang="en-US" sz="1600" dirty="0"/>
-          </a:p>
-          <a:p>
-            <a:pPr algn="l" indent="0" marL="0">
-              <a:buNone/>
-            </a:pPr>
-            <a:r>
-              <a:rPr lang="en-US" sz="1600" dirty="0">
+            <a:endParaRPr lang="en-US" sz="1800" dirty="0"/>
+          </a:p>
+          <a:p>
+            <a:pPr algn="l" indent="0" marL="0">
+              <a:buNone/>
+            </a:pPr>
+            <a:r>
+              <a:rPr lang="en-US" sz="1800" dirty="0">
                 <a:solidFill>
                   <a:srgbClr val="2D2D3A"/>
                 </a:solidFill>
@@ -3634,20 +3634,20 @@
               </a:rPr>
               <a:t>Файлы клиентов не хранятся в публичном доступе. Ссылка на скачивание имеет срок жизни 15 минут. На сервере включена библиотека `helmet` для защиты заголовков HTTP и CORS для блокировки посторонних доменов.</a:t>
             </a:r>
-            <a:endParaRPr lang="en-US" sz="1600" dirty="0"/>
-          </a:p>
-          <a:p>
-            <a:pPr algn="l" indent="0" marL="0">
-              <a:buNone/>
-            </a:pPr>
-            <a:endParaRPr lang="en-US" sz="1600" dirty="0"/>
-          </a:p>
-          <a:p>
-            <a:pPr algn="l" indent="0" marL="0">
-              <a:buNone/>
-            </a:pPr>
-            <a:r>
-              <a:rPr lang="en-US" sz="1600" dirty="0">
+            <a:endParaRPr lang="en-US" sz="1800" dirty="0"/>
+          </a:p>
+          <a:p>
+            <a:pPr algn="l" indent="0" marL="0">
+              <a:buNone/>
+            </a:pPr>
+            <a:endParaRPr lang="en-US" sz="1800" dirty="0"/>
+          </a:p>
+          <a:p>
+            <a:pPr algn="l" indent="0" marL="0">
+              <a:buNone/>
+            </a:pPr>
+            <a:r>
+              <a:rPr lang="en-US" sz="1800" dirty="0">
                 <a:solidFill>
                   <a:srgbClr val="2D2D3A"/>
                 </a:solidFill>
@@ -3657,14 +3657,14 @@
               </a:rPr>
               <a:t>Валидация входящего трафика:</a:t>
             </a:r>
-            <a:endParaRPr lang="en-US" sz="1600" dirty="0"/>
-          </a:p>
-          <a:p>
-            <a:pPr algn="l" indent="0" marL="0">
-              <a:buNone/>
-            </a:pPr>
-            <a:r>
-              <a:rPr lang="en-US" sz="1600" dirty="0">
+            <a:endParaRPr lang="en-US" sz="1800" dirty="0"/>
+          </a:p>
+          <a:p>
+            <a:pPr algn="l" indent="0" marL="0">
+              <a:buNone/>
+            </a:pPr>
+            <a:r>
+              <a:rPr lang="en-US" sz="1800" dirty="0">
                 <a:solidFill>
                   <a:srgbClr val="2D2D3A"/>
                 </a:solidFill>
@@ -3674,14 +3674,14 @@
               </a:rPr>
               <a:t>• Полная очистка входящих строк от HTML-тегов (XSS Clean).</a:t>
             </a:r>
-            <a:endParaRPr lang="en-US" sz="1600" dirty="0"/>
-          </a:p>
-          <a:p>
-            <a:pPr algn="l" indent="0" marL="0">
-              <a:buNone/>
-            </a:pPr>
-            <a:r>
-              <a:rPr lang="en-US" sz="1600" dirty="0">
+            <a:endParaRPr lang="en-US" sz="1800" dirty="0"/>
+          </a:p>
+          <a:p>
+            <a:pPr algn="l" indent="0" marL="0">
+              <a:buNone/>
+            </a:pPr>
+            <a:r>
+              <a:rPr lang="en-US" sz="1800" dirty="0">
                 <a:solidFill>
                   <a:srgbClr val="2D2D3A"/>
                 </a:solidFill>
@@ -3691,14 +3691,14 @@
               </a:rPr>
               <a:t>• Параметризованные SQL-запросы в Drizzle полностью исключают SQL-инъекции.</a:t>
             </a:r>
-            <a:endParaRPr lang="en-US" sz="1600" dirty="0"/>
-          </a:p>
-          <a:p>
-            <a:pPr algn="l" indent="0" marL="0">
-              <a:buNone/>
-            </a:pPr>
-            <a:r>
-              <a:rPr lang="en-US" sz="1600" dirty="0">
+            <a:endParaRPr lang="en-US" sz="1800" dirty="0"/>
+          </a:p>
+          <a:p>
+            <a:pPr algn="l" indent="0" marL="0">
+              <a:buNone/>
+            </a:pPr>
+            <a:r>
+              <a:rPr lang="en-US" sz="1800" dirty="0">
                 <a:solidFill>
                   <a:srgbClr val="2D2D3A"/>
                 </a:solidFill>
@@ -3708,7 +3708,7 @@
               </a:rPr>
               <a:t>• Ограничение частоты запросов (Rate Limiter) спасает авторизацию и отправку SMS от перебора (Brute Force).</a:t>
             </a:r>
-            <a:endParaRPr lang="en-US" sz="1600" dirty="0"/>
+            <a:endParaRPr lang="en-US" sz="1800" dirty="0"/>
           </a:p>
         </p:txBody>
       </p:sp>
@@ -3842,7 +3842,7 @@
               <a:buNone/>
             </a:pPr>
             <a:r>
-              <a:rPr lang="en-US" sz="1200" b="1" dirty="0">
+              <a:rPr lang="en-US" sz="1400" b="1" dirty="0">
                 <a:solidFill>
                   <a:srgbClr val="1A1A2E"/>
                 </a:solidFill>
@@ -3852,7 +3852,7 @@
               </a:rPr>
               <a:t>Зачем нужна блокировка и механизм версии</a:t>
             </a:r>
-            <a:endParaRPr lang="en-US" sz="1200" dirty="0"/>
+            <a:endParaRPr lang="en-US" sz="1400" dirty="0"/>
           </a:p>
         </p:txBody>
       </p:sp>
@@ -3881,7 +3881,7 @@
               <a:buNone/>
             </a:pPr>
             <a:r>
-              <a:rPr lang="en-US" sz="1600" dirty="0">
+              <a:rPr lang="en-US" sz="1800" dirty="0">
                 <a:solidFill>
                   <a:srgbClr val="2D2D3A"/>
                 </a:solidFill>
@@ -3891,14 +3891,14 @@
               </a:rPr>
               <a:t>Зачем нужна блокировка?</a:t>
             </a:r>
-            <a:endParaRPr lang="en-US" sz="1600" dirty="0"/>
-          </a:p>
-          <a:p>
-            <a:pPr algn="l" indent="0" marL="0">
-              <a:buNone/>
-            </a:pPr>
-            <a:r>
-              <a:rPr lang="en-US" sz="1600" dirty="0">
+            <a:endParaRPr lang="en-US" sz="1800" dirty="0"/>
+          </a:p>
+          <a:p>
+            <a:pPr algn="l" indent="0" marL="0">
+              <a:buNone/>
+            </a:pPr>
+            <a:r>
+              <a:rPr lang="en-US" sz="1800" dirty="0">
                 <a:solidFill>
                   <a:srgbClr val="2D2D3A"/>
                 </a:solidFill>
@@ -3908,20 +3908,20 @@
               </a:rPr>
               <a:t>Если Клиент и Менеджер откроют один и тот же тикет одновременно, сделают разные правки и сохранят, то последнее сохранение перезапишет первое (проблема 'lost update'). Оптимистичная блокировка решает это без блокирования таблиц БД.</a:t>
             </a:r>
-            <a:endParaRPr lang="en-US" sz="1600" dirty="0"/>
-          </a:p>
-          <a:p>
-            <a:pPr algn="l" indent="0" marL="0">
-              <a:buNone/>
-            </a:pPr>
-            <a:endParaRPr lang="en-US" sz="1600" dirty="0"/>
-          </a:p>
-          <a:p>
-            <a:pPr algn="l" indent="0" marL="0">
-              <a:buNone/>
-            </a:pPr>
-            <a:r>
-              <a:rPr lang="en-US" sz="1600" dirty="0">
+            <a:endParaRPr lang="en-US" sz="1800" dirty="0"/>
+          </a:p>
+          <a:p>
+            <a:pPr algn="l" indent="0" marL="0">
+              <a:buNone/>
+            </a:pPr>
+            <a:endParaRPr lang="en-US" sz="1800" dirty="0"/>
+          </a:p>
+          <a:p>
+            <a:pPr algn="l" indent="0" marL="0">
+              <a:buNone/>
+            </a:pPr>
+            <a:r>
+              <a:rPr lang="en-US" sz="1800" dirty="0">
                 <a:solidFill>
                   <a:srgbClr val="2D2D3A"/>
                 </a:solidFill>
@@ -3931,14 +3931,14 @@
               </a:rPr>
               <a:t>Механизм версии (version):</a:t>
             </a:r>
-            <a:endParaRPr lang="en-US" sz="1600" dirty="0"/>
-          </a:p>
-          <a:p>
-            <a:pPr algn="l" indent="0" marL="0">
-              <a:buNone/>
-            </a:pPr>
-            <a:r>
-              <a:rPr lang="en-US" sz="1600" dirty="0">
+            <a:endParaRPr lang="en-US" sz="1800" dirty="0"/>
+          </a:p>
+          <a:p>
+            <a:pPr algn="l" indent="0" marL="0">
+              <a:buNone/>
+            </a:pPr>
+            <a:r>
+              <a:rPr lang="en-US" sz="1800" dirty="0">
                 <a:solidFill>
                   <a:srgbClr val="2D2D3A"/>
                 </a:solidFill>
@@ -3948,14 +3948,14 @@
               </a:rPr>
               <a:t>• Каждая запись тикета содержит поле `version` (например, 5).</a:t>
             </a:r>
-            <a:endParaRPr lang="en-US" sz="1600" dirty="0"/>
-          </a:p>
-          <a:p>
-            <a:pPr algn="l" indent="0" marL="0">
-              <a:buNone/>
-            </a:pPr>
-            <a:r>
-              <a:rPr lang="en-US" sz="1600" dirty="0">
+            <a:endParaRPr lang="en-US" sz="1800" dirty="0"/>
+          </a:p>
+          <a:p>
+            <a:pPr algn="l" indent="0" marL="0">
+              <a:buNone/>
+            </a:pPr>
+            <a:r>
+              <a:rPr lang="en-US" sz="1800" dirty="0">
                 <a:solidFill>
                   <a:srgbClr val="2D2D3A"/>
                 </a:solidFill>
@@ -3965,14 +3965,14 @@
               </a:rPr>
               <a:t>• При PUT-запросе бэкенд проверяет: `UPDATE tickets SET title = ?, version = version + 1 WHERE id = ? AND version = 5`.</a:t>
             </a:r>
-            <a:endParaRPr lang="en-US" sz="1600" dirty="0"/>
-          </a:p>
-          <a:p>
-            <a:pPr algn="l" indent="0" marL="0">
-              <a:buNone/>
-            </a:pPr>
-            <a:r>
-              <a:rPr lang="en-US" sz="1600" dirty="0">
+            <a:endParaRPr lang="en-US" sz="1800" dirty="0"/>
+          </a:p>
+          <a:p>
+            <a:pPr algn="l" indent="0" marL="0">
+              <a:buNone/>
+            </a:pPr>
+            <a:r>
+              <a:rPr lang="en-US" sz="1800" dirty="0">
                 <a:solidFill>
                   <a:srgbClr val="2D2D3A"/>
                 </a:solidFill>
@@ -3982,7 +3982,7 @@
               </a:rPr>
               <a:t>• Если версия в базе изменилась, запрос вернет 0 измененных строк. Система выдаст конфликт 409.</a:t>
             </a:r>
-            <a:endParaRPr lang="en-US" sz="1600" dirty="0"/>
+            <a:endParaRPr lang="en-US" sz="1800" dirty="0"/>
           </a:p>
         </p:txBody>
       </p:sp>
@@ -4094,7 +4094,7 @@
                         <a:buNone/>
                       </a:pPr>
                       <a:r>
-                        <a:rPr lang="en-US" sz="1100" b="1" dirty="0">
+                        <a:rPr lang="en-US" sz="1300" b="1" dirty="0">
                           <a:solidFill>
                             <a:srgbClr val="FFFFFF"/>
                           </a:solidFill>
@@ -4104,7 +4104,7 @@
                         </a:rPr>
                         <a:t>Инструмент</a:t>
                       </a:r>
-                      <a:endParaRPr lang="en-US" sz="1100" dirty="0">
+                      <a:endParaRPr lang="en-US" sz="1300" dirty="0">
                         <a:latin typeface="Times New Roman" charset="0"/>
                         <a:ea typeface="Times New Roman" charset="0"/>
                         <a:cs typeface="Times New Roman" charset="0"/>
@@ -4162,7 +4162,7 @@
                         <a:buNone/>
                       </a:pPr>
                       <a:r>
-                        <a:rPr lang="en-US" sz="1100" b="1" dirty="0">
+                        <a:rPr lang="en-US" sz="1300" b="1" dirty="0">
                           <a:solidFill>
                             <a:srgbClr val="FFFFFF"/>
                           </a:solidFill>
@@ -4172,7 +4172,7 @@
                         </a:rPr>
                         <a:t>Тип анализа</a:t>
                       </a:r>
-                      <a:endParaRPr lang="en-US" sz="1100" dirty="0">
+                      <a:endParaRPr lang="en-US" sz="1300" dirty="0">
                         <a:latin typeface="Times New Roman" charset="0"/>
                         <a:ea typeface="Times New Roman" charset="0"/>
                         <a:cs typeface="Times New Roman" charset="0"/>
@@ -4230,7 +4230,7 @@
                         <a:buNone/>
                       </a:pPr>
                       <a:r>
-                        <a:rPr lang="en-US" sz="1100" b="1" dirty="0">
+                        <a:rPr lang="en-US" sz="1300" b="1" dirty="0">
                           <a:solidFill>
                             <a:srgbClr val="FFFFFF"/>
                           </a:solidFill>
@@ -4240,7 +4240,7 @@
                         </a:rPr>
                         <a:t>Что проверяет в нашем проекте</a:t>
                       </a:r>
-                      <a:endParaRPr lang="en-US" sz="1100" dirty="0">
+                      <a:endParaRPr lang="en-US" sz="1300" dirty="0">
                         <a:latin typeface="Times New Roman" charset="0"/>
                         <a:ea typeface="Times New Roman" charset="0"/>
                         <a:cs typeface="Times New Roman" charset="0"/>
@@ -4300,7 +4300,7 @@
                         <a:buNone/>
                       </a:pPr>
                       <a:r>
-                        <a:rPr lang="en-US" sz="1100" dirty="0">
+                        <a:rPr lang="en-US" sz="1300" dirty="0">
                           <a:solidFill>
                             <a:srgbClr val="2D2D3A"/>
                           </a:solidFill>
@@ -4310,7 +4310,7 @@
                         </a:rPr>
                         <a:t>ESLint</a:t>
                       </a:r>
-                      <a:endParaRPr lang="en-US" sz="1100" dirty="0">
+                      <a:endParaRPr lang="en-US" sz="1300" dirty="0">
                         <a:latin typeface="Times New Roman" charset="0"/>
                         <a:ea typeface="Times New Roman" charset="0"/>
                         <a:cs typeface="Times New Roman" charset="0"/>
@@ -4368,7 +4368,7 @@
                         <a:buNone/>
                       </a:pPr>
                       <a:r>
-                        <a:rPr lang="en-US" sz="1100" dirty="0">
+                        <a:rPr lang="en-US" sz="1300" dirty="0">
                           <a:solidFill>
                             <a:srgbClr val="2D2D3A"/>
                           </a:solidFill>
@@ -4378,7 +4378,7 @@
                         </a:rPr>
                         <a:t>Статический</a:t>
                       </a:r>
-                      <a:endParaRPr lang="en-US" sz="1100" dirty="0">
+                      <a:endParaRPr lang="en-US" sz="1300" dirty="0">
                         <a:latin typeface="Times New Roman" charset="0"/>
                         <a:ea typeface="Times New Roman" charset="0"/>
                         <a:cs typeface="Times New Roman" charset="0"/>
@@ -4436,7 +4436,7 @@
                         <a:buNone/>
                       </a:pPr>
                       <a:r>
-                        <a:rPr lang="en-US" sz="1100" dirty="0">
+                        <a:rPr lang="en-US" sz="1300" dirty="0">
                           <a:solidFill>
                             <a:srgbClr val="2D2D3A"/>
                           </a:solidFill>
@@ -4446,7 +4446,7 @@
                         </a:rPr>
                         <a:t>Качество синтаксиса JS/TS, соответствие стандартам кодирования</a:t>
                       </a:r>
-                      <a:endParaRPr lang="en-US" sz="1100" dirty="0">
+                      <a:endParaRPr lang="en-US" sz="1300" dirty="0">
                         <a:latin typeface="Times New Roman" charset="0"/>
                         <a:ea typeface="Times New Roman" charset="0"/>
                         <a:cs typeface="Times New Roman" charset="0"/>
@@ -4506,7 +4506,7 @@
                         <a:buNone/>
                       </a:pPr>
                       <a:r>
-                        <a:rPr lang="en-US" sz="1100" dirty="0">
+                        <a:rPr lang="en-US" sz="1300" dirty="0">
                           <a:solidFill>
                             <a:srgbClr val="2D2D3A"/>
                           </a:solidFill>
@@ -4516,7 +4516,7 @@
                         </a:rPr>
                         <a:t>TypeScript</a:t>
                       </a:r>
-                      <a:endParaRPr lang="en-US" sz="1100" dirty="0">
+                      <a:endParaRPr lang="en-US" sz="1300" dirty="0">
                         <a:latin typeface="Times New Roman" charset="0"/>
                         <a:ea typeface="Times New Roman" charset="0"/>
                         <a:cs typeface="Times New Roman" charset="0"/>
@@ -4574,7 +4574,7 @@
                         <a:buNone/>
                       </a:pPr>
                       <a:r>
-                        <a:rPr lang="en-US" sz="1100" dirty="0">
+                        <a:rPr lang="en-US" sz="1300" dirty="0">
                           <a:solidFill>
                             <a:srgbClr val="2D2D3A"/>
                           </a:solidFill>
@@ -4584,7 +4584,7 @@
                         </a:rPr>
                         <a:t>Статический</a:t>
                       </a:r>
-                      <a:endParaRPr lang="en-US" sz="1100" dirty="0">
+                      <a:endParaRPr lang="en-US" sz="1300" dirty="0">
                         <a:latin typeface="Times New Roman" charset="0"/>
                         <a:ea typeface="Times New Roman" charset="0"/>
                         <a:cs typeface="Times New Roman" charset="0"/>
@@ -4642,7 +4642,7 @@
                         <a:buNone/>
                       </a:pPr>
                       <a:r>
-                        <a:rPr lang="en-US" sz="1100" dirty="0">
+                        <a:rPr lang="en-US" sz="1300" dirty="0">
                           <a:solidFill>
                             <a:srgbClr val="2D2D3A"/>
                           </a:solidFill>
@@ -4652,7 +4652,7 @@
                         </a:rPr>
                         <a:t>Корректность типов, сигнатур вызовов функций, отсутствие undefined</a:t>
                       </a:r>
-                      <a:endParaRPr lang="en-US" sz="1100" dirty="0">
+                      <a:endParaRPr lang="en-US" sz="1300" dirty="0">
                         <a:latin typeface="Times New Roman" charset="0"/>
                         <a:ea typeface="Times New Roman" charset="0"/>
                         <a:cs typeface="Times New Roman" charset="0"/>
@@ -4712,7 +4712,7 @@
                         <a:buNone/>
                       </a:pPr>
                       <a:r>
-                        <a:rPr lang="en-US" sz="1100" dirty="0">
+                        <a:rPr lang="en-US" sz="1300" dirty="0">
                           <a:solidFill>
                             <a:srgbClr val="2D2D3A"/>
                           </a:solidFill>
@@ -4722,7 +4722,7 @@
                         </a:rPr>
                         <a:t>Jest Coverage</a:t>
                       </a:r>
-                      <a:endParaRPr lang="en-US" sz="1100" dirty="0">
+                      <a:endParaRPr lang="en-US" sz="1300" dirty="0">
                         <a:latin typeface="Times New Roman" charset="0"/>
                         <a:ea typeface="Times New Roman" charset="0"/>
                         <a:cs typeface="Times New Roman" charset="0"/>
@@ -4780,7 +4780,7 @@
                         <a:buNone/>
                       </a:pPr>
                       <a:r>
-                        <a:rPr lang="en-US" sz="1100" dirty="0">
+                        <a:rPr lang="en-US" sz="1300" dirty="0">
                           <a:solidFill>
                             <a:srgbClr val="2D2D3A"/>
                           </a:solidFill>
@@ -4790,7 +4790,7 @@
                         </a:rPr>
                         <a:t>Динамический</a:t>
                       </a:r>
-                      <a:endParaRPr lang="en-US" sz="1100" dirty="0">
+                      <a:endParaRPr lang="en-US" sz="1300" dirty="0">
                         <a:latin typeface="Times New Roman" charset="0"/>
                         <a:ea typeface="Times New Roman" charset="0"/>
                         <a:cs typeface="Times New Roman" charset="0"/>
@@ -4848,7 +4848,7 @@
                         <a:buNone/>
                       </a:pPr>
                       <a:r>
-                        <a:rPr lang="en-US" sz="1100" dirty="0">
+                        <a:rPr lang="en-US" sz="1300" dirty="0">
                           <a:solidFill>
                             <a:srgbClr val="2D2D3A"/>
                           </a:solidFill>
@@ -4858,7 +4858,7 @@
                         </a:rPr>
                         <a:t>Процент покрытия строк кода автотестами (цель &gt;80%)</a:t>
                       </a:r>
-                      <a:endParaRPr lang="en-US" sz="1100" dirty="0">
+                      <a:endParaRPr lang="en-US" sz="1300" dirty="0">
                         <a:latin typeface="Times New Roman" charset="0"/>
                         <a:ea typeface="Times New Roman" charset="0"/>
                         <a:cs typeface="Times New Roman" charset="0"/>
@@ -4918,7 +4918,7 @@
                         <a:buNone/>
                       </a:pPr>
                       <a:r>
-                        <a:rPr lang="en-US" sz="1100" dirty="0">
+                        <a:rPr lang="en-US" sz="1300" dirty="0">
                           <a:solidFill>
                             <a:srgbClr val="2D2D3A"/>
                           </a:solidFill>
@@ -4928,7 +4928,7 @@
                         </a:rPr>
                         <a:t>npm audit</a:t>
                       </a:r>
-                      <a:endParaRPr lang="en-US" sz="1100" dirty="0">
+                      <a:endParaRPr lang="en-US" sz="1300" dirty="0">
                         <a:latin typeface="Times New Roman" charset="0"/>
                         <a:ea typeface="Times New Roman" charset="0"/>
                         <a:cs typeface="Times New Roman" charset="0"/>
@@ -4986,7 +4986,7 @@
                         <a:buNone/>
                       </a:pPr>
                       <a:r>
-                        <a:rPr lang="en-US" sz="1100" dirty="0">
+                        <a:rPr lang="en-US" sz="1300" dirty="0">
                           <a:solidFill>
                             <a:srgbClr val="2D2D3A"/>
                           </a:solidFill>
@@ -4996,7 +4996,7 @@
                         </a:rPr>
                         <a:t>Статический</a:t>
                       </a:r>
-                      <a:endParaRPr lang="en-US" sz="1100" dirty="0">
+                      <a:endParaRPr lang="en-US" sz="1300" dirty="0">
                         <a:latin typeface="Times New Roman" charset="0"/>
                         <a:ea typeface="Times New Roman" charset="0"/>
                         <a:cs typeface="Times New Roman" charset="0"/>
@@ -5054,7 +5054,7 @@
                         <a:buNone/>
                       </a:pPr>
                       <a:r>
-                        <a:rPr lang="en-US" sz="1100" dirty="0">
+                        <a:rPr lang="en-US" sz="1300" dirty="0">
                           <a:solidFill>
                             <a:srgbClr val="2D2D3A"/>
                           </a:solidFill>
@@ -5064,7 +5064,7 @@
                         </a:rPr>
                         <a:t>Сканирование зависимостей на уязвимости (OWASP база)</a:t>
                       </a:r>
-                      <a:endParaRPr lang="en-US" sz="1100" dirty="0">
+                      <a:endParaRPr lang="en-US" sz="1300" dirty="0">
                         <a:latin typeface="Times New Roman" charset="0"/>
                         <a:ea typeface="Times New Roman" charset="0"/>
                         <a:cs typeface="Times New Roman" charset="0"/>
@@ -5124,7 +5124,7 @@
                         <a:buNone/>
                       </a:pPr>
                       <a:r>
-                        <a:rPr lang="en-US" sz="1100" dirty="0">
+                        <a:rPr lang="en-US" sz="1300" dirty="0">
                           <a:solidFill>
                             <a:srgbClr val="2D2D3A"/>
                           </a:solidFill>
@@ -5134,7 +5134,7 @@
                         </a:rPr>
                         <a:t>Artillery</a:t>
                       </a:r>
-                      <a:endParaRPr lang="en-US" sz="1100" dirty="0">
+                      <a:endParaRPr lang="en-US" sz="1300" dirty="0">
                         <a:latin typeface="Times New Roman" charset="0"/>
                         <a:ea typeface="Times New Roman" charset="0"/>
                         <a:cs typeface="Times New Roman" charset="0"/>
@@ -5192,7 +5192,7 @@
                         <a:buNone/>
                       </a:pPr>
                       <a:r>
-                        <a:rPr lang="en-US" sz="1100" dirty="0">
+                        <a:rPr lang="en-US" sz="1300" dirty="0">
                           <a:solidFill>
                             <a:srgbClr val="2D2D3A"/>
                           </a:solidFill>
@@ -5202,7 +5202,7 @@
                         </a:rPr>
                         <a:t>Динамический</a:t>
                       </a:r>
-                      <a:endParaRPr lang="en-US" sz="1100" dirty="0">
+                      <a:endParaRPr lang="en-US" sz="1300" dirty="0">
                         <a:latin typeface="Times New Roman" charset="0"/>
                         <a:ea typeface="Times New Roman" charset="0"/>
                         <a:cs typeface="Times New Roman" charset="0"/>
@@ -5260,7 +5260,7 @@
                         <a:buNone/>
                       </a:pPr>
                       <a:r>
-                        <a:rPr lang="en-US" sz="1100" dirty="0">
+                        <a:rPr lang="en-US" sz="1300" dirty="0">
                           <a:solidFill>
                             <a:srgbClr val="2D2D3A"/>
                           </a:solidFill>
@@ -5270,7 +5270,7 @@
                         </a:rPr>
                         <a:t>Нагрузочное тестирование критических сценариев (RPS, Latency)</a:t>
                       </a:r>
-                      <a:endParaRPr lang="en-US" sz="1100" dirty="0">
+                      <a:endParaRPr lang="en-US" sz="1300" dirty="0">
                         <a:latin typeface="Times New Roman" charset="0"/>
                         <a:ea typeface="Times New Roman" charset="0"/>
                         <a:cs typeface="Times New Roman" charset="0"/>
@@ -5567,7 +5567,7 @@
               <a:buNone/>
             </a:pPr>
             <a:r>
-              <a:rPr lang="en-US" sz="1200" b="1" dirty="0">
+              <a:rPr lang="en-US" sz="1400" b="1" dirty="0">
                 <a:solidFill>
                   <a:srgbClr val="1A1A2E"/>
                 </a:solidFill>
@@ -5577,7 +5577,7 @@
               </a:rPr>
               <a:t>Постановка практической задачи</a:t>
             </a:r>
-            <a:endParaRPr lang="en-US" sz="1200" dirty="0"/>
+            <a:endParaRPr lang="en-US" sz="1400" dirty="0"/>
           </a:p>
         </p:txBody>
       </p:sp>
@@ -5606,7 +5606,7 @@
               <a:buNone/>
             </a:pPr>
             <a:r>
-              <a:rPr lang="en-US" sz="1600" dirty="0">
+              <a:rPr lang="en-US" sz="1800" dirty="0">
                 <a:solidFill>
                   <a:srgbClr val="2D2D3A"/>
                 </a:solidFill>
@@ -5616,20 +5616,20 @@
               </a:rPr>
               <a:t>• Команда должна длительно поддерживать и масштабировать клиентский портал (интеграция с 1С, рост числа клиентов).</a:t>
             </a:r>
-            <a:endParaRPr lang="en-US" sz="1600" dirty="0"/>
-          </a:p>
-          <a:p>
-            <a:pPr algn="l" indent="0" marL="0">
-              <a:buNone/>
-            </a:pPr>
-            <a:endParaRPr lang="en-US" sz="1600" dirty="0"/>
-          </a:p>
-          <a:p>
-            <a:pPr algn="l" indent="0" marL="0">
-              <a:buNone/>
-            </a:pPr>
-            <a:r>
-              <a:rPr lang="en-US" sz="1600" dirty="0">
+            <a:endParaRPr lang="en-US" sz="1800" dirty="0"/>
+          </a:p>
+          <a:p>
+            <a:pPr algn="l" indent="0" marL="0">
+              <a:buNone/>
+            </a:pPr>
+            <a:endParaRPr lang="en-US" sz="1800" dirty="0"/>
+          </a:p>
+          <a:p>
+            <a:pPr algn="l" indent="0" marL="0">
+              <a:buNone/>
+            </a:pPr>
+            <a:r>
+              <a:rPr lang="en-US" sz="1800" dirty="0">
                 <a:solidFill>
                   <a:srgbClr val="2D2D3A"/>
                 </a:solidFill>
@@ -5639,14 +5639,14 @@
               </a:rPr>
               <a:t>Конкретная задача моделирования:</a:t>
             </a:r>
-            <a:endParaRPr lang="en-US" sz="1600" dirty="0"/>
-          </a:p>
-          <a:p>
-            <a:pPr algn="l" indent="0" marL="0">
-              <a:buNone/>
-            </a:pPr>
-            <a:r>
-              <a:rPr lang="en-US" sz="1600" dirty="0">
+            <a:endParaRPr lang="en-US" sz="1800" dirty="0"/>
+          </a:p>
+          <a:p>
+            <a:pPr algn="l" indent="0" marL="0">
+              <a:buNone/>
+            </a:pPr>
+            <a:r>
+              <a:rPr lang="en-US" sz="1800" dirty="0">
                 <a:solidFill>
                   <a:srgbClr val="2D2D3A"/>
                 </a:solidFill>
@@ -5656,7 +5656,7 @@
               </a:rPr>
               <a:t>• Определить и оценить внутренние атрибуты качества ПО (модульность, тестируемость, поддерживаемость, безопасность), важные именно для разработчиков и архитекторов проекта TPPO.</a:t>
             </a:r>
-            <a:endParaRPr lang="en-US" sz="1600" dirty="0"/>
+            <a:endParaRPr lang="en-US" sz="1800" dirty="0"/>
           </a:p>
         </p:txBody>
       </p:sp>
@@ -5790,7 +5790,7 @@
               <a:buNone/>
             </a:pPr>
             <a:r>
-              <a:rPr lang="en-US" sz="1200" b="1" dirty="0">
+              <a:rPr lang="en-US" sz="1400" b="1" dirty="0">
                 <a:solidFill>
                   <a:srgbClr val="1A1A2E"/>
                 </a:solidFill>
@@ -5800,7 +5800,7 @@
               </a:rPr>
               <a:t>Атрибуты качества: пользователь vs разработчик</a:t>
             </a:r>
-            <a:endParaRPr lang="en-US" sz="1200" dirty="0"/>
+            <a:endParaRPr lang="en-US" sz="1400" dirty="0"/>
           </a:p>
         </p:txBody>
       </p:sp>
@@ -5829,7 +5829,7 @@
               <a:buNone/>
             </a:pPr>
             <a:r>
-              <a:rPr lang="en-US" sz="1600" dirty="0">
+              <a:rPr lang="en-US" sz="1800" dirty="0">
                 <a:solidFill>
                   <a:srgbClr val="2D2D3A"/>
                 </a:solidFill>
@@ -5839,14 +5839,14 @@
               </a:rPr>
               <a:t>Что видит конечный пользователь?</a:t>
             </a:r>
-            <a:endParaRPr lang="en-US" sz="1600" dirty="0"/>
-          </a:p>
-          <a:p>
-            <a:pPr algn="l" indent="0" marL="0">
-              <a:buNone/>
-            </a:pPr>
-            <a:r>
-              <a:rPr lang="en-US" sz="1600" dirty="0">
+            <a:endParaRPr lang="en-US" sz="1800" dirty="0"/>
+          </a:p>
+          <a:p>
+            <a:pPr algn="l" indent="0" marL="0">
+              <a:buNone/>
+            </a:pPr>
+            <a:r>
+              <a:rPr lang="en-US" sz="1800" dirty="0">
                 <a:solidFill>
                   <a:srgbClr val="2D2D3A"/>
                 </a:solidFill>
@@ -5856,14 +5856,14 @@
               </a:rPr>
               <a:t>• Простоту и отзывчивость интерфейса (Usability).</a:t>
             </a:r>
-            <a:endParaRPr lang="en-US" sz="1600" dirty="0"/>
-          </a:p>
-          <a:p>
-            <a:pPr algn="l" indent="0" marL="0">
-              <a:buNone/>
-            </a:pPr>
-            <a:r>
-              <a:rPr lang="en-US" sz="1600" dirty="0">
+            <a:endParaRPr lang="en-US" sz="1800" dirty="0"/>
+          </a:p>
+          <a:p>
+            <a:pPr algn="l" indent="0" marL="0">
+              <a:buNone/>
+            </a:pPr>
+            <a:r>
+              <a:rPr lang="en-US" sz="1800" dirty="0">
                 <a:solidFill>
                   <a:srgbClr val="2D2D3A"/>
                 </a:solidFill>
@@ -5873,14 +5873,14 @@
               </a:rPr>
               <a:t>• Высокую скорость отклика системы (Performance).</a:t>
             </a:r>
-            <a:endParaRPr lang="en-US" sz="1600" dirty="0"/>
-          </a:p>
-          <a:p>
-            <a:pPr algn="l" indent="0" marL="0">
-              <a:buNone/>
-            </a:pPr>
-            <a:r>
-              <a:rPr lang="en-US" sz="1600" dirty="0">
+            <a:endParaRPr lang="en-US" sz="1800" dirty="0"/>
+          </a:p>
+          <a:p>
+            <a:pPr algn="l" indent="0" marL="0">
+              <a:buNone/>
+            </a:pPr>
+            <a:r>
+              <a:rPr lang="en-US" sz="1800" dirty="0">
                 <a:solidFill>
                   <a:srgbClr val="2D2D3A"/>
                 </a:solidFill>
@@ -5890,20 +5890,20 @@
               </a:rPr>
               <a:t>• Постоянную доступность без сбоев (Uptime / Reliability).</a:t>
             </a:r>
-            <a:endParaRPr lang="en-US" sz="1600" dirty="0"/>
-          </a:p>
-          <a:p>
-            <a:pPr algn="l" indent="0" marL="0">
-              <a:buNone/>
-            </a:pPr>
-            <a:endParaRPr lang="en-US" sz="1600" dirty="0"/>
-          </a:p>
-          <a:p>
-            <a:pPr algn="l" indent="0" marL="0">
-              <a:buNone/>
-            </a:pPr>
-            <a:r>
-              <a:rPr lang="en-US" sz="1600" dirty="0">
+            <a:endParaRPr lang="en-US" sz="1800" dirty="0"/>
+          </a:p>
+          <a:p>
+            <a:pPr algn="l" indent="0" marL="0">
+              <a:buNone/>
+            </a:pPr>
+            <a:endParaRPr lang="en-US" sz="1800" dirty="0"/>
+          </a:p>
+          <a:p>
+            <a:pPr algn="l" indent="0" marL="0">
+              <a:buNone/>
+            </a:pPr>
+            <a:r>
+              <a:rPr lang="en-US" sz="1800" dirty="0">
                 <a:solidFill>
                   <a:srgbClr val="2D2D3A"/>
                 </a:solidFill>
@@ -5913,14 +5913,14 @@
               </a:rPr>
               <a:t>Что важно инженеру и архитектору?</a:t>
             </a:r>
-            <a:endParaRPr lang="en-US" sz="1600" dirty="0"/>
-          </a:p>
-          <a:p>
-            <a:pPr algn="l" indent="0" marL="0">
-              <a:buNone/>
-            </a:pPr>
-            <a:r>
-              <a:rPr lang="en-US" sz="1600" dirty="0">
+            <a:endParaRPr lang="en-US" sz="1800" dirty="0"/>
+          </a:p>
+          <a:p>
+            <a:pPr algn="l" indent="0" marL="0">
+              <a:buNone/>
+            </a:pPr>
+            <a:r>
+              <a:rPr lang="en-US" sz="1800" dirty="0">
                 <a:solidFill>
                   <a:srgbClr val="2D2D3A"/>
                 </a:solidFill>
@@ -5930,14 +5930,14 @@
               </a:rPr>
               <a:t>• Модульность: легкое разделение на изолированные блоки.</a:t>
             </a:r>
-            <a:endParaRPr lang="en-US" sz="1600" dirty="0"/>
-          </a:p>
-          <a:p>
-            <a:pPr algn="l" indent="0" marL="0">
-              <a:buNone/>
-            </a:pPr>
-            <a:r>
-              <a:rPr lang="en-US" sz="1600" dirty="0">
+            <a:endParaRPr lang="en-US" sz="1800" dirty="0"/>
+          </a:p>
+          <a:p>
+            <a:pPr algn="l" indent="0" marL="0">
+              <a:buNone/>
+            </a:pPr>
+            <a:r>
+              <a:rPr lang="en-US" sz="1800" dirty="0">
                 <a:solidFill>
                   <a:srgbClr val="2D2D3A"/>
                 </a:solidFill>
@@ -5947,14 +5947,14 @@
               </a:rPr>
               <a:t>• Тестируемость: простое написание автотестов.</a:t>
             </a:r>
-            <a:endParaRPr lang="en-US" sz="1600" dirty="0"/>
-          </a:p>
-          <a:p>
-            <a:pPr algn="l" indent="0" marL="0">
-              <a:buNone/>
-            </a:pPr>
-            <a:r>
-              <a:rPr lang="en-US" sz="1600" dirty="0">
+            <a:endParaRPr lang="en-US" sz="1800" dirty="0"/>
+          </a:p>
+          <a:p>
+            <a:pPr algn="l" indent="0" marL="0">
+              <a:buNone/>
+            </a:pPr>
+            <a:r>
+              <a:rPr lang="en-US" sz="1800" dirty="0">
                 <a:solidFill>
                   <a:srgbClr val="2D2D3A"/>
                 </a:solidFill>
@@ -5964,7 +5964,7 @@
               </a:rPr>
               <a:t>• Поддерживаемость и расширяемость кодовой базы.</a:t>
             </a:r>
-            <a:endParaRPr lang="en-US" sz="1600" dirty="0"/>
+            <a:endParaRPr lang="en-US" sz="1800" dirty="0"/>
           </a:p>
         </p:txBody>
       </p:sp>
@@ -6098,7 +6098,7 @@
               <a:buNone/>
             </a:pPr>
             <a:r>
-              <a:rPr lang="en-US" sz="1200" b="1" dirty="0">
+              <a:rPr lang="en-US" sz="1400" b="1" dirty="0">
                 <a:solidFill>
                   <a:srgbClr val="1A1A2E"/>
                 </a:solidFill>
@@ -6108,7 +6108,7 @@
               </a:rPr>
               <a:t>1. Модульность</a:t>
             </a:r>
-            <a:endParaRPr lang="en-US" sz="1200" dirty="0"/>
+            <a:endParaRPr lang="en-US" sz="1400" dirty="0"/>
           </a:p>
         </p:txBody>
       </p:sp>
@@ -6130,14 +6130,14 @@
           <a:ln/>
         </p:spPr>
         <p:txBody>
-          <a:bodyPr wrap="square" rtlCol="0" anchor="ctr"/>
+          <a:bodyPr wrap="square" rtlCol="0" anchor="t"/>
           <a:lstStyle/>
           <a:p>
-            <a:pPr indent="0" marL="0">
-              <a:buNone/>
-            </a:pPr>
-            <a:r>
-              <a:rPr lang="en-US" sz="1200" dirty="0">
+            <a:pPr algn="l" indent="0" marL="0">
+              <a:buNone/>
+            </a:pPr>
+            <a:r>
+              <a:rPr lang="en-US" sz="1400" dirty="0">
                 <a:solidFill>
                   <a:srgbClr val="2D2D3A"/>
                 </a:solidFill>
@@ -6147,7 +6147,7 @@
               </a:rPr>
               <a:t>Строгое разделение ответственности слоев (REST, Services, DB) для снижения зацепления (coupling).</a:t>
             </a:r>
-            <a:endParaRPr lang="en-US" sz="1200" dirty="0"/>
+            <a:endParaRPr lang="en-US" sz="1400" dirty="0"/>
           </a:p>
         </p:txBody>
       </p:sp>
@@ -6210,7 +6210,7 @@
               <a:buNone/>
             </a:pPr>
             <a:r>
-              <a:rPr lang="en-US" sz="1200" b="1" dirty="0">
+              <a:rPr lang="en-US" sz="1400" b="1" dirty="0">
                 <a:solidFill>
                   <a:srgbClr val="1A1A2E"/>
                 </a:solidFill>
@@ -6220,7 +6220,7 @@
               </a:rPr>
               <a:t>2. Тестируемость</a:t>
             </a:r>
-            <a:endParaRPr lang="en-US" sz="1200" dirty="0"/>
+            <a:endParaRPr lang="en-US" sz="1400" dirty="0"/>
           </a:p>
         </p:txBody>
       </p:sp>
@@ -6242,14 +6242,14 @@
           <a:ln/>
         </p:spPr>
         <p:txBody>
-          <a:bodyPr wrap="square" rtlCol="0" anchor="ctr"/>
+          <a:bodyPr wrap="square" rtlCol="0" anchor="t"/>
           <a:lstStyle/>
           <a:p>
-            <a:pPr indent="0" marL="0">
-              <a:buNone/>
-            </a:pPr>
-            <a:r>
-              <a:rPr lang="en-US" sz="1200" dirty="0">
+            <a:pPr algn="l" indent="0" marL="0">
+              <a:buNone/>
+            </a:pPr>
+            <a:r>
+              <a:rPr lang="en-US" sz="1400" dirty="0">
                 <a:solidFill>
                   <a:srgbClr val="2D2D3A"/>
                 </a:solidFill>
@@ -6259,7 +6259,7 @@
               </a:rPr>
               <a:t>Возможность легкого модульного, интеграционного и нагрузочного автоматического тестирования.</a:t>
             </a:r>
-            <a:endParaRPr lang="en-US" sz="1200" dirty="0"/>
+            <a:endParaRPr lang="en-US" sz="1400" dirty="0"/>
           </a:p>
         </p:txBody>
       </p:sp>
@@ -6322,7 +6322,7 @@
               <a:buNone/>
             </a:pPr>
             <a:r>
-              <a:rPr lang="en-US" sz="1200" b="1" dirty="0">
+              <a:rPr lang="en-US" sz="1400" b="1" dirty="0">
                 <a:solidFill>
                   <a:srgbClr val="1A1A2E"/>
                 </a:solidFill>
@@ -6332,7 +6332,7 @@
               </a:rPr>
               <a:t>3. Читаемость/Поддерживаемость</a:t>
             </a:r>
-            <a:endParaRPr lang="en-US" sz="1200" dirty="0"/>
+            <a:endParaRPr lang="en-US" sz="1400" dirty="0"/>
           </a:p>
         </p:txBody>
       </p:sp>
@@ -6354,14 +6354,14 @@
           <a:ln/>
         </p:spPr>
         <p:txBody>
-          <a:bodyPr wrap="square" rtlCol="0" anchor="ctr"/>
+          <a:bodyPr wrap="square" rtlCol="0" anchor="t"/>
           <a:lstStyle/>
           <a:p>
-            <a:pPr indent="0" marL="0">
-              <a:buNone/>
-            </a:pPr>
-            <a:r>
-              <a:rPr lang="en-US" sz="1200" dirty="0">
+            <a:pPr algn="l" indent="0" marL="0">
+              <a:buNone/>
+            </a:pPr>
+            <a:r>
+              <a:rPr lang="en-US" sz="1400" dirty="0">
                 <a:solidFill>
                   <a:srgbClr val="2D2D3A"/>
                 </a:solidFill>
@@ -6371,7 +6371,7 @@
               </a:rPr>
               <a:t>Единообразие структуры кода, строгая типизация и самодокументируемость.</a:t>
             </a:r>
-            <a:endParaRPr lang="en-US" sz="1200" dirty="0"/>
+            <a:endParaRPr lang="en-US" sz="1400" dirty="0"/>
           </a:p>
         </p:txBody>
       </p:sp>
@@ -6434,7 +6434,7 @@
               <a:buNone/>
             </a:pPr>
             <a:r>
-              <a:rPr lang="en-US" sz="1200" b="1" dirty="0">
+              <a:rPr lang="en-US" sz="1400" b="1" dirty="0">
                 <a:solidFill>
                   <a:srgbClr val="1A1A2E"/>
                 </a:solidFill>
@@ -6444,7 +6444,7 @@
               </a:rPr>
               <a:t>4. Расширяемость</a:t>
             </a:r>
-            <a:endParaRPr lang="en-US" sz="1200" dirty="0"/>
+            <a:endParaRPr lang="en-US" sz="1400" dirty="0"/>
           </a:p>
         </p:txBody>
       </p:sp>
@@ -6466,14 +6466,14 @@
           <a:ln/>
         </p:spPr>
         <p:txBody>
-          <a:bodyPr wrap="square" rtlCol="0" anchor="ctr"/>
+          <a:bodyPr wrap="square" rtlCol="0" anchor="t"/>
           <a:lstStyle/>
           <a:p>
-            <a:pPr indent="0" marL="0">
-              <a:buNone/>
-            </a:pPr>
-            <a:r>
-              <a:rPr lang="en-US" sz="1200" dirty="0">
+            <a:pPr algn="l" indent="0" marL="0">
+              <a:buNone/>
+            </a:pPr>
+            <a:r>
+              <a:rPr lang="en-US" sz="1400" dirty="0">
                 <a:solidFill>
                   <a:srgbClr val="2D2D3A"/>
                 </a:solidFill>
@@ -6483,7 +6483,7 @@
               </a:rPr>
               <a:t>Слабая связанность модулей позволяет быстро добавлять новые типы услуг и уведомлений.</a:t>
             </a:r>
-            <a:endParaRPr lang="en-US" sz="1200" dirty="0"/>
+            <a:endParaRPr lang="en-US" sz="1400" dirty="0"/>
           </a:p>
         </p:txBody>
       </p:sp>
@@ -6546,7 +6546,7 @@
               <a:buNone/>
             </a:pPr>
             <a:r>
-              <a:rPr lang="en-US" sz="1200" b="1" dirty="0">
+              <a:rPr lang="en-US" sz="1400" b="1" dirty="0">
                 <a:solidFill>
                   <a:srgbClr val="1A1A2E"/>
                 </a:solidFill>
@@ -6556,7 +6556,7 @@
               </a:rPr>
               <a:t>5. Безопасность</a:t>
             </a:r>
-            <a:endParaRPr lang="en-US" sz="1200" dirty="0"/>
+            <a:endParaRPr lang="en-US" sz="1400" dirty="0"/>
           </a:p>
         </p:txBody>
       </p:sp>
@@ -6578,14 +6578,14 @@
           <a:ln/>
         </p:spPr>
         <p:txBody>
-          <a:bodyPr wrap="square" rtlCol="0" anchor="ctr"/>
+          <a:bodyPr wrap="square" rtlCol="0" anchor="t"/>
           <a:lstStyle/>
           <a:p>
-            <a:pPr indent="0" marL="0">
-              <a:buNone/>
-            </a:pPr>
-            <a:r>
-              <a:rPr lang="en-US" sz="1200" dirty="0">
+            <a:pPr algn="l" indent="0" marL="0">
+              <a:buNone/>
+            </a:pPr>
+            <a:r>
+              <a:rPr lang="en-US" sz="1400" dirty="0">
                 <a:solidFill>
                   <a:srgbClr val="2D2D3A"/>
                 </a:solidFill>
@@ -6595,7 +6595,7 @@
               </a:rPr>
               <a:t>Надежная авторизация, разграничение прав и защита от внедрения вредоносного кода.</a:t>
             </a:r>
-            <a:endParaRPr lang="en-US" sz="1200" dirty="0"/>
+            <a:endParaRPr lang="en-US" sz="1400" dirty="0"/>
           </a:p>
         </p:txBody>
       </p:sp>
@@ -6708,7 +6708,7 @@
                         <a:buNone/>
                       </a:pPr>
                       <a:r>
-                        <a:rPr lang="en-US" sz="1200" b="1" dirty="0">
+                        <a:rPr lang="en-US" sz="1300" b="1" dirty="0">
                           <a:solidFill>
                             <a:srgbClr val="FFFFFF"/>
                           </a:solidFill>
@@ -6718,7 +6718,7 @@
                         </a:rPr>
                         <a:t>Атрибут качества</a:t>
                       </a:r>
-                      <a:endParaRPr lang="en-US" sz="1200" dirty="0">
+                      <a:endParaRPr lang="en-US" sz="1300" dirty="0">
                         <a:latin typeface="Times New Roman" charset="0"/>
                         <a:ea typeface="Times New Roman" charset="0"/>
                         <a:cs typeface="Times New Roman" charset="0"/>
@@ -6776,7 +6776,7 @@
                         <a:buNone/>
                       </a:pPr>
                       <a:r>
-                        <a:rPr lang="en-US" sz="1200" b="1" dirty="0">
+                        <a:rPr lang="en-US" sz="1300" b="1" dirty="0">
                           <a:solidFill>
                             <a:srgbClr val="FFFFFF"/>
                           </a:solidFill>
@@ -6786,7 +6786,7 @@
                         </a:rPr>
                         <a:t>Количественная метрика</a:t>
                       </a:r>
-                      <a:endParaRPr lang="en-US" sz="1200" dirty="0">
+                      <a:endParaRPr lang="en-US" sz="1300" dirty="0">
                         <a:latin typeface="Times New Roman" charset="0"/>
                         <a:ea typeface="Times New Roman" charset="0"/>
                         <a:cs typeface="Times New Roman" charset="0"/>
@@ -6844,7 +6844,7 @@
                         <a:buNone/>
                       </a:pPr>
                       <a:r>
-                        <a:rPr lang="en-US" sz="1200" b="1" dirty="0">
+                        <a:rPr lang="en-US" sz="1300" b="1" dirty="0">
                           <a:solidFill>
                             <a:srgbClr val="FFFFFF"/>
                           </a:solidFill>
@@ -6854,7 +6854,7 @@
                         </a:rPr>
                         <a:t>Целевое значение</a:t>
                       </a:r>
-                      <a:endParaRPr lang="en-US" sz="1200" dirty="0">
+                      <a:endParaRPr lang="en-US" sz="1300" dirty="0">
                         <a:latin typeface="Times New Roman" charset="0"/>
                         <a:ea typeface="Times New Roman" charset="0"/>
                         <a:cs typeface="Times New Roman" charset="0"/>
@@ -6912,7 +6912,7 @@
                         <a:buNone/>
                       </a:pPr>
                       <a:r>
-                        <a:rPr lang="en-US" sz="1200" b="1" dirty="0">
+                        <a:rPr lang="en-US" sz="1300" b="1" dirty="0">
                           <a:solidFill>
                             <a:srgbClr val="FFFFFF"/>
                           </a:solidFill>
@@ -6922,7 +6922,7 @@
                         </a:rPr>
                         <a:t>Способ контроля</a:t>
                       </a:r>
-                      <a:endParaRPr lang="en-US" sz="1200" dirty="0">
+                      <a:endParaRPr lang="en-US" sz="1300" dirty="0">
                         <a:latin typeface="Times New Roman" charset="0"/>
                         <a:ea typeface="Times New Roman" charset="0"/>
                         <a:cs typeface="Times New Roman" charset="0"/>
@@ -6982,7 +6982,7 @@
                         <a:buNone/>
                       </a:pPr>
                       <a:r>
-                        <a:rPr lang="en-US" sz="1200" dirty="0">
+                        <a:rPr lang="en-US" sz="1300" dirty="0">
                           <a:solidFill>
                             <a:srgbClr val="2D2D3A"/>
                           </a:solidFill>
@@ -6992,7 +6992,7 @@
                         </a:rPr>
                         <a:t>Модульность</a:t>
                       </a:r>
-                      <a:endParaRPr lang="en-US" sz="1200" dirty="0">
+                      <a:endParaRPr lang="en-US" sz="1300" dirty="0">
                         <a:latin typeface="Times New Roman" charset="0"/>
                         <a:ea typeface="Times New Roman" charset="0"/>
                         <a:cs typeface="Times New Roman" charset="0"/>
@@ -7050,7 +7050,7 @@
                         <a:buNone/>
                       </a:pPr>
                       <a:r>
-                        <a:rPr lang="en-US" sz="1200" dirty="0">
+                        <a:rPr lang="en-US" sz="1300" dirty="0">
                           <a:solidFill>
                             <a:srgbClr val="2D2D3A"/>
                           </a:solidFill>
@@ -7060,7 +7060,7 @@
                         </a:rPr>
                         <a:t>Размер модуля (строк кода / SLOC)</a:t>
                       </a:r>
-                      <a:endParaRPr lang="en-US" sz="1200" dirty="0">
+                      <a:endParaRPr lang="en-US" sz="1300" dirty="0">
                         <a:latin typeface="Times New Roman" charset="0"/>
                         <a:ea typeface="Times New Roman" charset="0"/>
                         <a:cs typeface="Times New Roman" charset="0"/>
@@ -7118,7 +7118,7 @@
                         <a:buNone/>
                       </a:pPr>
                       <a:r>
-                        <a:rPr lang="en-US" sz="1200" dirty="0">
+                        <a:rPr lang="en-US" sz="1300" dirty="0">
                           <a:solidFill>
                             <a:srgbClr val="2D2D3A"/>
                           </a:solidFill>
@@ -7128,7 +7128,7 @@
                         </a:rPr>
                         <a:t>≤ 250 строк на файл / класс</a:t>
                       </a:r>
-                      <a:endParaRPr lang="en-US" sz="1200" dirty="0">
+                      <a:endParaRPr lang="en-US" sz="1300" dirty="0">
                         <a:latin typeface="Times New Roman" charset="0"/>
                         <a:ea typeface="Times New Roman" charset="0"/>
                         <a:cs typeface="Times New Roman" charset="0"/>
@@ -7186,7 +7186,7 @@
                         <a:buNone/>
                       </a:pPr>
                       <a:r>
-                        <a:rPr lang="en-US" sz="1200" dirty="0">
+                        <a:rPr lang="en-US" sz="1300" dirty="0">
                           <a:solidFill>
                             <a:srgbClr val="2D2D3A"/>
                           </a:solidFill>
@@ -7196,7 +7196,7 @@
                         </a:rPr>
                         <a:t>Линтер (ESLint max-lines)</a:t>
                       </a:r>
-                      <a:endParaRPr lang="en-US" sz="1200" dirty="0">
+                      <a:endParaRPr lang="en-US" sz="1300" dirty="0">
                         <a:latin typeface="Times New Roman" charset="0"/>
                         <a:ea typeface="Times New Roman" charset="0"/>
                         <a:cs typeface="Times New Roman" charset="0"/>
@@ -7256,7 +7256,7 @@
                         <a:buNone/>
                       </a:pPr>
                       <a:r>
-                        <a:rPr lang="en-US" sz="1200" dirty="0">
+                        <a:rPr lang="en-US" sz="1300" dirty="0">
                           <a:solidFill>
                             <a:srgbClr val="2D2D3A"/>
                           </a:solidFill>
@@ -7266,7 +7266,7 @@
                         </a:rPr>
                         <a:t>Тестируемость</a:t>
                       </a:r>
-                      <a:endParaRPr lang="en-US" sz="1200" dirty="0">
+                      <a:endParaRPr lang="en-US" sz="1300" dirty="0">
                         <a:latin typeface="Times New Roman" charset="0"/>
                         <a:ea typeface="Times New Roman" charset="0"/>
                         <a:cs typeface="Times New Roman" charset="0"/>
@@ -7324,7 +7324,7 @@
                         <a:buNone/>
                       </a:pPr>
                       <a:r>
-                        <a:rPr lang="en-US" sz="1200" dirty="0">
+                        <a:rPr lang="en-US" sz="1300" dirty="0">
                           <a:solidFill>
                             <a:srgbClr val="2D2D3A"/>
                           </a:solidFill>
@@ -7334,7 +7334,7 @@
                         </a:rPr>
                         <a:t>Покрытие операторов кодовой базы</a:t>
                       </a:r>
-                      <a:endParaRPr lang="en-US" sz="1200" dirty="0">
+                      <a:endParaRPr lang="en-US" sz="1300" dirty="0">
                         <a:latin typeface="Times New Roman" charset="0"/>
                         <a:ea typeface="Times New Roman" charset="0"/>
                         <a:cs typeface="Times New Roman" charset="0"/>
@@ -7392,7 +7392,7 @@
                         <a:buNone/>
                       </a:pPr>
                       <a:r>
-                        <a:rPr lang="en-US" sz="1200" dirty="0">
+                        <a:rPr lang="en-US" sz="1300" dirty="0">
                           <a:solidFill>
                             <a:srgbClr val="2D2D3A"/>
                           </a:solidFill>
@@ -7402,7 +7402,7 @@
                         </a:rPr>
                         <a:t>≥ 80% (для бизнес-логики)</a:t>
                       </a:r>
-                      <a:endParaRPr lang="en-US" sz="1200" dirty="0">
+                      <a:endParaRPr lang="en-US" sz="1300" dirty="0">
                         <a:latin typeface="Times New Roman" charset="0"/>
                         <a:ea typeface="Times New Roman" charset="0"/>
                         <a:cs typeface="Times New Roman" charset="0"/>
@@ -7460,7 +7460,7 @@
                         <a:buNone/>
                       </a:pPr>
                       <a:r>
-                        <a:rPr lang="en-US" sz="1200" dirty="0">
+                        <a:rPr lang="en-US" sz="1300" dirty="0">
                           <a:solidFill>
                             <a:srgbClr val="2D2D3A"/>
                           </a:solidFill>
@@ -7470,7 +7470,7 @@
                         </a:rPr>
                         <a:t>Jest Coverage Report</a:t>
                       </a:r>
-                      <a:endParaRPr lang="en-US" sz="1200" dirty="0">
+                      <a:endParaRPr lang="en-US" sz="1300" dirty="0">
                         <a:latin typeface="Times New Roman" charset="0"/>
                         <a:ea typeface="Times New Roman" charset="0"/>
                         <a:cs typeface="Times New Roman" charset="0"/>
@@ -7530,7 +7530,7 @@
                         <a:buNone/>
                       </a:pPr>
                       <a:r>
-                        <a:rPr lang="en-US" sz="1200" dirty="0">
+                        <a:rPr lang="en-US" sz="1300" dirty="0">
                           <a:solidFill>
                             <a:srgbClr val="2D2D3A"/>
                           </a:solidFill>
@@ -7540,7 +7540,7 @@
                         </a:rPr>
                         <a:t>Производительность</a:t>
                       </a:r>
-                      <a:endParaRPr lang="en-US" sz="1200" dirty="0">
+                      <a:endParaRPr lang="en-US" sz="1300" dirty="0">
                         <a:latin typeface="Times New Roman" charset="0"/>
                         <a:ea typeface="Times New Roman" charset="0"/>
                         <a:cs typeface="Times New Roman" charset="0"/>
@@ -7598,7 +7598,7 @@
                         <a:buNone/>
                       </a:pPr>
                       <a:r>
-                        <a:rPr lang="en-US" sz="1200" dirty="0">
+                        <a:rPr lang="en-US" sz="1300" dirty="0">
                           <a:solidFill>
                             <a:srgbClr val="2D2D3A"/>
                           </a:solidFill>
@@ -7608,7 +7608,7 @@
                         </a:rPr>
                         <a:t>Время отклика API (95-й процентиль)</a:t>
                       </a:r>
-                      <a:endParaRPr lang="en-US" sz="1200" dirty="0">
+                      <a:endParaRPr lang="en-US" sz="1300" dirty="0">
                         <a:latin typeface="Times New Roman" charset="0"/>
                         <a:ea typeface="Times New Roman" charset="0"/>
                         <a:cs typeface="Times New Roman" charset="0"/>
@@ -7666,7 +7666,7 @@
                         <a:buNone/>
                       </a:pPr>
                       <a:r>
-                        <a:rPr lang="en-US" sz="1200" dirty="0">
+                        <a:rPr lang="en-US" sz="1300" dirty="0">
                           <a:solidFill>
                             <a:srgbClr val="2D2D3A"/>
                           </a:solidFill>
@@ -7676,7 +7676,7 @@
                         </a:rPr>
                         <a:t>≤ 150 мс под нагрузкой 50 rps</a:t>
                       </a:r>
-                      <a:endParaRPr lang="en-US" sz="1200" dirty="0">
+                      <a:endParaRPr lang="en-US" sz="1300" dirty="0">
                         <a:latin typeface="Times New Roman" charset="0"/>
                         <a:ea typeface="Times New Roman" charset="0"/>
                         <a:cs typeface="Times New Roman" charset="0"/>
@@ -7734,7 +7734,7 @@
                         <a:buNone/>
                       </a:pPr>
                       <a:r>
-                        <a:rPr lang="en-US" sz="1200" dirty="0">
+                        <a:rPr lang="en-US" sz="1300" dirty="0">
                           <a:solidFill>
                             <a:srgbClr val="2D2D3A"/>
                           </a:solidFill>
@@ -7744,7 +7744,7 @@
                         </a:rPr>
                         <a:t>Artillery Load Test</a:t>
                       </a:r>
-                      <a:endParaRPr lang="en-US" sz="1200" dirty="0">
+                      <a:endParaRPr lang="en-US" sz="1300" dirty="0">
                         <a:latin typeface="Times New Roman" charset="0"/>
                         <a:ea typeface="Times New Roman" charset="0"/>
                         <a:cs typeface="Times New Roman" charset="0"/>
@@ -7804,7 +7804,7 @@
                         <a:buNone/>
                       </a:pPr>
                       <a:r>
-                        <a:rPr lang="en-US" sz="1200" dirty="0">
+                        <a:rPr lang="en-US" sz="1300" dirty="0">
                           <a:solidFill>
                             <a:srgbClr val="2D2D3A"/>
                           </a:solidFill>
@@ -7814,7 +7814,7 @@
                         </a:rPr>
                         <a:t>Надежность</a:t>
                       </a:r>
-                      <a:endParaRPr lang="en-US" sz="1200" dirty="0">
+                      <a:endParaRPr lang="en-US" sz="1300" dirty="0">
                         <a:latin typeface="Times New Roman" charset="0"/>
                         <a:ea typeface="Times New Roman" charset="0"/>
                         <a:cs typeface="Times New Roman" charset="0"/>
@@ -7872,7 +7872,7 @@
                         <a:buNone/>
                       </a:pPr>
                       <a:r>
-                        <a:rPr lang="en-US" sz="1200" dirty="0">
+                        <a:rPr lang="en-US" sz="1300" dirty="0">
                           <a:solidFill>
                             <a:srgbClr val="2D2D3A"/>
                           </a:solidFill>
@@ -7882,7 +7882,7 @@
                         </a:rPr>
                         <a:t>Время доступности сервиса (Uptime)</a:t>
                       </a:r>
-                      <a:endParaRPr lang="en-US" sz="1200" dirty="0">
+                      <a:endParaRPr lang="en-US" sz="1300" dirty="0">
                         <a:latin typeface="Times New Roman" charset="0"/>
                         <a:ea typeface="Times New Roman" charset="0"/>
                         <a:cs typeface="Times New Roman" charset="0"/>
@@ -7940,7 +7940,7 @@
                         <a:buNone/>
                       </a:pPr>
                       <a:r>
-                        <a:rPr lang="en-US" sz="1200" dirty="0">
+                        <a:rPr lang="en-US" sz="1300" dirty="0">
                           <a:solidFill>
                             <a:srgbClr val="2D2D3A"/>
                           </a:solidFill>
@@ -7950,7 +7950,7 @@
                         </a:rPr>
                         <a:t>≥ 99.9% годового аптайма</a:t>
                       </a:r>
-                      <a:endParaRPr lang="en-US" sz="1200" dirty="0">
+                      <a:endParaRPr lang="en-US" sz="1300" dirty="0">
                         <a:latin typeface="Times New Roman" charset="0"/>
                         <a:ea typeface="Times New Roman" charset="0"/>
                         <a:cs typeface="Times New Roman" charset="0"/>
@@ -8008,7 +8008,7 @@
                         <a:buNone/>
                       </a:pPr>
                       <a:r>
-                        <a:rPr lang="en-US" sz="1200" dirty="0">
+                        <a:rPr lang="en-US" sz="1300" dirty="0">
                           <a:solidFill>
                             <a:srgbClr val="2D2D3A"/>
                           </a:solidFill>
@@ -8018,7 +8018,7 @@
                         </a:rPr>
                         <a:t>UptimeRobot / Promtail</a:t>
                       </a:r>
-                      <a:endParaRPr lang="en-US" sz="1200" dirty="0">
+                      <a:endParaRPr lang="en-US" sz="1300" dirty="0">
                         <a:latin typeface="Times New Roman" charset="0"/>
                         <a:ea typeface="Times New Roman" charset="0"/>
                         <a:cs typeface="Times New Roman" charset="0"/>
@@ -8078,7 +8078,7 @@
                         <a:buNone/>
                       </a:pPr>
                       <a:r>
-                        <a:rPr lang="en-US" sz="1200" dirty="0">
+                        <a:rPr lang="en-US" sz="1300" dirty="0">
                           <a:solidFill>
                             <a:srgbClr val="2D2D3A"/>
                           </a:solidFill>
@@ -8088,7 +8088,7 @@
                         </a:rPr>
                         <a:t>Безопасность</a:t>
                       </a:r>
-                      <a:endParaRPr lang="en-US" sz="1200" dirty="0">
+                      <a:endParaRPr lang="en-US" sz="1300" dirty="0">
                         <a:latin typeface="Times New Roman" charset="0"/>
                         <a:ea typeface="Times New Roman" charset="0"/>
                         <a:cs typeface="Times New Roman" charset="0"/>
@@ -8146,7 +8146,7 @@
                         <a:buNone/>
                       </a:pPr>
                       <a:r>
-                        <a:rPr lang="en-US" sz="1200" dirty="0">
+                        <a:rPr lang="en-US" sz="1300" dirty="0">
                           <a:solidFill>
                             <a:srgbClr val="2D2D3A"/>
                           </a:solidFill>
@@ -8156,7 +8156,7 @@
                         </a:rPr>
                         <a:t>Критические уязвимости в зависимостях</a:t>
                       </a:r>
-                      <a:endParaRPr lang="en-US" sz="1200" dirty="0">
+                      <a:endParaRPr lang="en-US" sz="1300" dirty="0">
                         <a:latin typeface="Times New Roman" charset="0"/>
                         <a:ea typeface="Times New Roman" charset="0"/>
                         <a:cs typeface="Times New Roman" charset="0"/>
@@ -8214,7 +8214,7 @@
                         <a:buNone/>
                       </a:pPr>
                       <a:r>
-                        <a:rPr lang="en-US" sz="1200" dirty="0">
+                        <a:rPr lang="en-US" sz="1300" dirty="0">
                           <a:solidFill>
                             <a:srgbClr val="2D2D3A"/>
                           </a:solidFill>
@@ -8224,7 +8224,7 @@
                         </a:rPr>
                         <a:t>0 уязвимостей (High / Critical)</a:t>
                       </a:r>
-                      <a:endParaRPr lang="en-US" sz="1200" dirty="0">
+                      <a:endParaRPr lang="en-US" sz="1300" dirty="0">
                         <a:latin typeface="Times New Roman" charset="0"/>
                         <a:ea typeface="Times New Roman" charset="0"/>
                         <a:cs typeface="Times New Roman" charset="0"/>
@@ -8282,7 +8282,7 @@
                         <a:buNone/>
                       </a:pPr>
                       <a:r>
-                        <a:rPr lang="en-US" sz="1200" dirty="0">
+                        <a:rPr lang="en-US" sz="1300" dirty="0">
                           <a:solidFill>
                             <a:srgbClr val="2D2D3A"/>
                           </a:solidFill>
@@ -8292,7 +8292,7 @@
                         </a:rPr>
                         <a:t>npm audit / Snyk CI</a:t>
                       </a:r>
-                      <a:endParaRPr lang="en-US" sz="1200" dirty="0">
+                      <a:endParaRPr lang="en-US" sz="1300" dirty="0">
                         <a:latin typeface="Times New Roman" charset="0"/>
                         <a:ea typeface="Times New Roman" charset="0"/>
                         <a:cs typeface="Times New Roman" charset="0"/>
@@ -8476,7 +8476,7 @@
               <a:buNone/>
             </a:pPr>
             <a:r>
-              <a:rPr lang="en-US" sz="1200" b="1" dirty="0">
+              <a:rPr lang="en-US" sz="1400" b="1" dirty="0">
                 <a:solidFill>
                   <a:srgbClr val="1A1A2E"/>
                 </a:solidFill>
@@ -8486,7 +8486,7 @@
               </a:rPr>
               <a:t>Преимущества структуры</a:t>
             </a:r>
-            <a:endParaRPr lang="en-US" sz="1200" dirty="0"/>
+            <a:endParaRPr lang="en-US" sz="1400" dirty="0"/>
           </a:p>
         </p:txBody>
       </p:sp>
@@ -8508,14 +8508,14 @@
           <a:ln/>
         </p:spPr>
         <p:txBody>
-          <a:bodyPr wrap="square" rtlCol="0" anchor="ctr"/>
+          <a:bodyPr wrap="square" rtlCol="0" anchor="t"/>
           <a:lstStyle/>
           <a:p>
-            <a:pPr indent="0" marL="0">
-              <a:buNone/>
-            </a:pPr>
-            <a:r>
-              <a:rPr lang="en-US" sz="1100" dirty="0">
+            <a:pPr algn="l" indent="0" marL="0">
+              <a:buNone/>
+            </a:pPr>
+            <a:r>
+              <a:rPr lang="en-US" sz="1400" dirty="0">
                 <a:solidFill>
                   <a:srgbClr val="2D2D3A"/>
                 </a:solidFill>
@@ -8525,14 +8525,14 @@
               </a:rPr>
               <a:t>• Разделение ответственности слоев.</a:t>
             </a:r>
-            <a:endParaRPr lang="en-US" sz="1100" dirty="0"/>
-          </a:p>
-          <a:p>
-            <a:pPr indent="0" marL="0">
-              <a:buNone/>
-            </a:pPr>
-            <a:r>
-              <a:rPr lang="en-US" sz="1100" dirty="0">
+            <a:endParaRPr lang="en-US" sz="1400" dirty="0"/>
+          </a:p>
+          <a:p>
+            <a:pPr algn="l" indent="0" marL="0">
+              <a:buNone/>
+            </a:pPr>
+            <a:r>
+              <a:rPr lang="en-US" sz="1400" dirty="0">
                 <a:solidFill>
                   <a:srgbClr val="2D2D3A"/>
                 </a:solidFill>
@@ -8542,14 +8542,14 @@
               </a:rPr>
               <a:t>• Эндпоинты (routes) не содержат сырых запросов к SQL.</a:t>
             </a:r>
-            <a:endParaRPr lang="en-US" sz="1100" dirty="0"/>
-          </a:p>
-          <a:p>
-            <a:pPr indent="0" marL="0">
-              <a:buNone/>
-            </a:pPr>
-            <a:r>
-              <a:rPr lang="en-US" sz="1100" dirty="0">
+            <a:endParaRPr lang="en-US" sz="1400" dirty="0"/>
+          </a:p>
+          <a:p>
+            <a:pPr algn="l" indent="0" marL="0">
+              <a:buNone/>
+            </a:pPr>
+            <a:r>
+              <a:rPr lang="en-US" sz="1400" dirty="0">
                 <a:solidFill>
                   <a:srgbClr val="2D2D3A"/>
                 </a:solidFill>
@@ -8559,14 +8559,14 @@
               </a:rPr>
               <a:t>• Вся бизнес-логика вынесена в сервисы (services).</a:t>
             </a:r>
-            <a:endParaRPr lang="en-US" sz="1100" dirty="0"/>
-          </a:p>
-          <a:p>
-            <a:pPr indent="0" marL="0">
-              <a:buNone/>
-            </a:pPr>
-            <a:r>
-              <a:rPr lang="en-US" sz="1100" dirty="0">
+            <a:endParaRPr lang="en-US" sz="1400" dirty="0"/>
+          </a:p>
+          <a:p>
+            <a:pPr algn="l" indent="0" marL="0">
+              <a:buNone/>
+            </a:pPr>
+            <a:r>
+              <a:rPr lang="en-US" sz="1400" dirty="0">
                 <a:solidFill>
                   <a:srgbClr val="2D2D3A"/>
                 </a:solidFill>
@@ -8576,7 +8576,7 @@
               </a:rPr>
               <a:t>• Доступ к СУБД изолирован в слое миграций и репозиториев (db).</a:t>
             </a:r>
-            <a:endParaRPr lang="en-US" sz="1100" dirty="0"/>
+            <a:endParaRPr lang="en-US" sz="1400" dirty="0"/>
           </a:p>
         </p:txBody>
       </p:sp>
@@ -8895,7 +8895,7 @@
               <a:buNone/>
             </a:pPr>
             <a:r>
-              <a:rPr lang="en-US" sz="1200" b="1" dirty="0">
+              <a:rPr lang="en-US" sz="1400" b="1" dirty="0">
                 <a:solidFill>
                   <a:srgbClr val="1A1A2E"/>
                 </a:solidFill>
@@ -8905,7 +8905,7 @@
               </a:rPr>
               <a:t>Нарушение связанности (Плохой подход) vs Разделение слоев (Хороший подход)</a:t>
             </a:r>
-            <a:endParaRPr lang="en-US" sz="1200" dirty="0"/>
+            <a:endParaRPr lang="en-US" sz="1400" dirty="0"/>
           </a:p>
         </p:txBody>
       </p:sp>
@@ -8934,7 +8934,7 @@
               <a:buNone/>
             </a:pPr>
             <a:r>
-              <a:rPr lang="en-US" sz="1600" dirty="0">
+              <a:rPr lang="en-US" sz="1800" dirty="0">
                 <a:solidFill>
                   <a:srgbClr val="2D2D3A"/>
                 </a:solidFill>
@@ -8944,14 +8944,14 @@
               </a:rPr>
               <a:t>Нарушение связанности (Плохой подход):</a:t>
             </a:r>
-            <a:endParaRPr lang="en-US" sz="1600" dirty="0"/>
-          </a:p>
-          <a:p>
-            <a:pPr algn="l" indent="0" marL="0">
-              <a:buNone/>
-            </a:pPr>
-            <a:r>
-              <a:rPr lang="en-US" sz="1600" dirty="0">
+            <a:endParaRPr lang="en-US" sz="1800" dirty="0"/>
+          </a:p>
+          <a:p>
+            <a:pPr algn="l" indent="0" marL="0">
+              <a:buNone/>
+            </a:pPr>
+            <a:r>
+              <a:rPr lang="en-US" sz="1800" dirty="0">
                 <a:solidFill>
                   <a:srgbClr val="2D2D3A"/>
                 </a:solidFill>
@@ -8961,14 +8961,14 @@
               </a:rPr>
               <a:t>• Роутер напрямую делает SQL-запрос `SELECT * FROM tickets`.</a:t>
             </a:r>
-            <a:endParaRPr lang="en-US" sz="1600" dirty="0"/>
-          </a:p>
-          <a:p>
-            <a:pPr algn="l" indent="0" marL="0">
-              <a:buNone/>
-            </a:pPr>
-            <a:r>
-              <a:rPr lang="en-US" sz="1600" dirty="0">
+            <a:endParaRPr lang="en-US" sz="1800" dirty="0"/>
+          </a:p>
+          <a:p>
+            <a:pPr algn="l" indent="0" marL="0">
+              <a:buNone/>
+            </a:pPr>
+            <a:r>
+              <a:rPr lang="en-US" sz="1800" dirty="0">
                 <a:solidFill>
                   <a:srgbClr val="2D2D3A"/>
                 </a:solidFill>
@@ -8978,14 +8978,14 @@
               </a:rPr>
               <a:t>• Смешивание логики авторизации и рендеринга.</a:t>
             </a:r>
-            <a:endParaRPr lang="en-US" sz="1600" dirty="0"/>
-          </a:p>
-          <a:p>
-            <a:pPr algn="l" indent="0" marL="0">
-              <a:buNone/>
-            </a:pPr>
-            <a:r>
-              <a:rPr lang="en-US" sz="1600" dirty="0">
+            <a:endParaRPr lang="en-US" sz="1800" dirty="0"/>
+          </a:p>
+          <a:p>
+            <a:pPr algn="l" indent="0" marL="0">
+              <a:buNone/>
+            </a:pPr>
+            <a:r>
+              <a:rPr lang="en-US" sz="1800" dirty="0">
                 <a:solidFill>
                   <a:srgbClr val="2D2D3A"/>
                 </a:solidFill>
@@ -8995,14 +8995,14 @@
               </a:rPr>
               <a:t>• Фронтенд обращается к базе данных напрямую.</a:t>
             </a:r>
-            <a:endParaRPr lang="en-US" sz="1600" dirty="0"/>
-          </a:p>
-          <a:p>
-            <a:pPr algn="l" indent="0" marL="0">
-              <a:buNone/>
-            </a:pPr>
-            <a:r>
-              <a:rPr lang="en-US" sz="1600" dirty="0">
+            <a:endParaRPr lang="en-US" sz="1800" dirty="0"/>
+          </a:p>
+          <a:p>
+            <a:pPr algn="l" indent="0" marL="0">
+              <a:buNone/>
+            </a:pPr>
+            <a:r>
+              <a:rPr lang="en-US" sz="1800" dirty="0">
                 <a:solidFill>
                   <a:srgbClr val="2D2D3A"/>
                 </a:solidFill>
@@ -9012,14 +9012,14 @@
               </a:rPr>
               <a:t>• Любые изменения в СУБД ломают клиентский код.</a:t>
             </a:r>
-            <a:endParaRPr lang="en-US" sz="1600" dirty="0"/>
-          </a:p>
-          <a:p>
-            <a:pPr algn="l" indent="0" marL="0">
-              <a:buNone/>
-            </a:pPr>
-            <a:r>
-              <a:rPr lang="en-US" sz="1600" dirty="0">
+            <a:endParaRPr lang="en-US" sz="1800" dirty="0"/>
+          </a:p>
+          <a:p>
+            <a:pPr algn="l" indent="0" marL="0">
+              <a:buNone/>
+            </a:pPr>
+            <a:r>
+              <a:rPr lang="en-US" sz="1800" dirty="0">
                 <a:solidFill>
                   <a:srgbClr val="2D2D3A"/>
                 </a:solidFill>
@@ -9029,20 +9029,20 @@
               </a:rPr>
               <a:t>• Сложно писать изолированные тесты, так как все связано.</a:t>
             </a:r>
-            <a:endParaRPr lang="en-US" sz="1600" dirty="0"/>
-          </a:p>
-          <a:p>
-            <a:pPr algn="l" indent="0" marL="0">
-              <a:buNone/>
-            </a:pPr>
-            <a:endParaRPr lang="en-US" sz="1600" dirty="0"/>
-          </a:p>
-          <a:p>
-            <a:pPr algn="l" indent="0" marL="0">
-              <a:buNone/>
-            </a:pPr>
-            <a:r>
-              <a:rPr lang="en-US" sz="1600" dirty="0">
+            <a:endParaRPr lang="en-US" sz="1800" dirty="0"/>
+          </a:p>
+          <a:p>
+            <a:pPr algn="l" indent="0" marL="0">
+              <a:buNone/>
+            </a:pPr>
+            <a:endParaRPr lang="en-US" sz="1800" dirty="0"/>
+          </a:p>
+          <a:p>
+            <a:pPr algn="l" indent="0" marL="0">
+              <a:buNone/>
+            </a:pPr>
+            <a:r>
+              <a:rPr lang="en-US" sz="1800" dirty="0">
                 <a:solidFill>
                   <a:srgbClr val="2D2D3A"/>
                 </a:solidFill>
@@ -9052,14 +9052,14 @@
               </a:rPr>
               <a:t>Разделение слоев (Хороший подход):</a:t>
             </a:r>
-            <a:endParaRPr lang="en-US" sz="1600" dirty="0"/>
-          </a:p>
-          <a:p>
-            <a:pPr algn="l" indent="0" marL="0">
-              <a:buNone/>
-            </a:pPr>
-            <a:r>
-              <a:rPr lang="en-US" sz="1600" dirty="0">
+            <a:endParaRPr lang="en-US" sz="1800" dirty="0"/>
+          </a:p>
+          <a:p>
+            <a:pPr algn="l" indent="0" marL="0">
+              <a:buNone/>
+            </a:pPr>
+            <a:r>
+              <a:rPr lang="en-US" sz="1800" dirty="0">
                 <a:solidFill>
                   <a:srgbClr val="2D2D3A"/>
                 </a:solidFill>
@@ -9069,14 +9069,14 @@
               </a:rPr>
               <a:t>• Контроллер лишь принимает запрос и отдает ответ.</a:t>
             </a:r>
-            <a:endParaRPr lang="en-US" sz="1600" dirty="0"/>
-          </a:p>
-          <a:p>
-            <a:pPr algn="l" indent="0" marL="0">
-              <a:buNone/>
-            </a:pPr>
-            <a:r>
-              <a:rPr lang="en-US" sz="1600" dirty="0">
+            <a:endParaRPr lang="en-US" sz="1800" dirty="0"/>
+          </a:p>
+          <a:p>
+            <a:pPr algn="l" indent="0" marL="0">
+              <a:buNone/>
+            </a:pPr>
+            <a:r>
+              <a:rPr lang="en-US" sz="1800" dirty="0">
                 <a:solidFill>
                   <a:srgbClr val="2D2D3A"/>
                 </a:solidFill>
@@ -9086,14 +9086,14 @@
               </a:rPr>
               <a:t>• Бизнес-логика живет в `TicketService`.</a:t>
             </a:r>
-            <a:endParaRPr lang="en-US" sz="1600" dirty="0"/>
-          </a:p>
-          <a:p>
-            <a:pPr algn="l" indent="0" marL="0">
-              <a:buNone/>
-            </a:pPr>
-            <a:r>
-              <a:rPr lang="en-US" sz="1600" dirty="0">
+            <a:endParaRPr lang="en-US" sz="1800" dirty="0"/>
+          </a:p>
+          <a:p>
+            <a:pPr algn="l" indent="0" marL="0">
+              <a:buNone/>
+            </a:pPr>
+            <a:r>
+              <a:rPr lang="en-US" sz="1800" dirty="0">
                 <a:solidFill>
                   <a:srgbClr val="2D2D3A"/>
                 </a:solidFill>
@@ -9103,14 +9103,14 @@
               </a:rPr>
               <a:t>• Работа с Postgres идет через `Drizzle` репозиторий.</a:t>
             </a:r>
-            <a:endParaRPr lang="en-US" sz="1600" dirty="0"/>
-          </a:p>
-          <a:p>
-            <a:pPr algn="l" indent="0" marL="0">
-              <a:buNone/>
-            </a:pPr>
-            <a:r>
-              <a:rPr lang="en-US" sz="1600" dirty="0">
+            <a:endParaRPr lang="en-US" sz="1800" dirty="0"/>
+          </a:p>
+          <a:p>
+            <a:pPr algn="l" indent="0" marL="0">
+              <a:buNone/>
+            </a:pPr>
+            <a:r>
+              <a:rPr lang="en-US" sz="1800" dirty="0">
                 <a:solidFill>
                   <a:srgbClr val="2D2D3A"/>
                 </a:solidFill>
@@ -9120,14 +9120,14 @@
               </a:rPr>
               <a:t>• Интеграция с 1С асинхронна через outbox-очередь.</a:t>
             </a:r>
-            <a:endParaRPr lang="en-US" sz="1600" dirty="0"/>
-          </a:p>
-          <a:p>
-            <a:pPr algn="l" indent="0" marL="0">
-              <a:buNone/>
-            </a:pPr>
-            <a:r>
-              <a:rPr lang="en-US" sz="1600" dirty="0">
+            <a:endParaRPr lang="en-US" sz="1800" dirty="0"/>
+          </a:p>
+          <a:p>
+            <a:pPr algn="l" indent="0" marL="0">
+              <a:buNone/>
+            </a:pPr>
+            <a:r>
+              <a:rPr lang="en-US" sz="1800" dirty="0">
                 <a:solidFill>
                   <a:srgbClr val="2D2D3A"/>
                 </a:solidFill>
@@ -9137,7 +9137,7 @@
               </a:rPr>
               <a:t>• Любой слой можно легко заменить или протестировать.</a:t>
             </a:r>
-            <a:endParaRPr lang="en-US" sz="1600" dirty="0"/>
+            <a:endParaRPr lang="en-US" sz="1800" dirty="0"/>
           </a:p>
         </p:txBody>
       </p:sp>
@@ -9271,7 +9271,7 @@
               <a:buNone/>
             </a:pPr>
             <a:r>
-              <a:rPr lang="en-US" sz="1200" b="1" dirty="0">
+              <a:rPr lang="en-US" sz="1400" b="1" dirty="0">
                 <a:solidFill>
                   <a:srgbClr val="1A1A2E"/>
                 </a:solidFill>
@@ -9281,7 +9281,7 @@
               </a:rPr>
               <a:t>Изоляция базы данных и имитация внешних систем</a:t>
             </a:r>
-            <a:endParaRPr lang="en-US" sz="1200" dirty="0"/>
+            <a:endParaRPr lang="en-US" sz="1400" dirty="0"/>
           </a:p>
         </p:txBody>
       </p:sp>
@@ -9310,7 +9310,7 @@
               <a:buNone/>
             </a:pPr>
             <a:r>
-              <a:rPr lang="en-US" sz="1600" dirty="0">
+              <a:rPr lang="en-US" sz="1800" dirty="0">
                 <a:solidFill>
                   <a:srgbClr val="2D2D3A"/>
                 </a:solidFill>
@@ -9320,14 +9320,14 @@
               </a:rPr>
               <a:t>Изоляция базы данных:</a:t>
             </a:r>
-            <a:endParaRPr lang="en-US" sz="1600" dirty="0"/>
-          </a:p>
-          <a:p>
-            <a:pPr algn="l" indent="0" marL="0">
-              <a:buNone/>
-            </a:pPr>
-            <a:r>
-              <a:rPr lang="en-US" sz="1600" dirty="0">
+            <a:endParaRPr lang="en-US" sz="1800" dirty="0"/>
+          </a:p>
+          <a:p>
+            <a:pPr algn="l" indent="0" marL="0">
+              <a:buNone/>
+            </a:pPr>
+            <a:r>
+              <a:rPr lang="en-US" sz="1800" dirty="0">
                 <a:solidFill>
                   <a:srgbClr val="2D2D3A"/>
                 </a:solidFill>
@@ -9337,20 +9337,20 @@
               </a:rPr>
               <a:t>Для тестирования роутов API реальная СУБД PostgreSQL подменяется мок-пулом `pg-mock`. Это исключает загрязнение тестовой базы данных и обеспечивает скорость выполнения тестов (миллисекунды вместо минут).</a:t>
             </a:r>
-            <a:endParaRPr lang="en-US" sz="1600" dirty="0"/>
-          </a:p>
-          <a:p>
-            <a:pPr algn="l" indent="0" marL="0">
-              <a:buNone/>
-            </a:pPr>
-            <a:endParaRPr lang="en-US" sz="1600" dirty="0"/>
-          </a:p>
-          <a:p>
-            <a:pPr algn="l" indent="0" marL="0">
-              <a:buNone/>
-            </a:pPr>
-            <a:r>
-              <a:rPr lang="en-US" sz="1600" dirty="0">
+            <a:endParaRPr lang="en-US" sz="1800" dirty="0"/>
+          </a:p>
+          <a:p>
+            <a:pPr algn="l" indent="0" marL="0">
+              <a:buNone/>
+            </a:pPr>
+            <a:endParaRPr lang="en-US" sz="1800" dirty="0"/>
+          </a:p>
+          <a:p>
+            <a:pPr algn="l" indent="0" marL="0">
+              <a:buNone/>
+            </a:pPr>
+            <a:r>
+              <a:rPr lang="en-US" sz="1800" dirty="0">
                 <a:solidFill>
                   <a:srgbClr val="2D2D3A"/>
                 </a:solidFill>
@@ -9360,14 +9360,14 @@
               </a:rPr>
               <a:t>Имитация внешних систем (1С, MinIO):</a:t>
             </a:r>
-            <a:endParaRPr lang="en-US" sz="1600" dirty="0"/>
-          </a:p>
-          <a:p>
-            <a:pPr algn="l" indent="0" marL="0">
-              <a:buNone/>
-            </a:pPr>
-            <a:r>
-              <a:rPr lang="en-US" sz="1600" dirty="0">
+            <a:endParaRPr lang="en-US" sz="1800" dirty="0"/>
+          </a:p>
+          <a:p>
+            <a:pPr algn="l" indent="0" marL="0">
+              <a:buNone/>
+            </a:pPr>
+            <a:r>
+              <a:rPr lang="en-US" sz="1800" dirty="0">
                 <a:solidFill>
                   <a:srgbClr val="2D2D3A"/>
                 </a:solidFill>
@@ -9377,14 +9377,14 @@
               </a:rPr>
               <a:t>• Вместо вызовов к боевому серверу 1С используется легковесный мок-сервер API.</a:t>
             </a:r>
-            <a:endParaRPr lang="en-US" sz="1600" dirty="0"/>
-          </a:p>
-          <a:p>
-            <a:pPr algn="l" indent="0" marL="0">
-              <a:buNone/>
-            </a:pPr>
-            <a:r>
-              <a:rPr lang="en-US" sz="1600" dirty="0">
+            <a:endParaRPr lang="en-US" sz="1800" dirty="0"/>
+          </a:p>
+          <a:p>
+            <a:pPr algn="l" indent="0" marL="0">
+              <a:buNone/>
+            </a:pPr>
+            <a:r>
+              <a:rPr lang="en-US" sz="1800" dirty="0">
                 <a:solidFill>
                   <a:srgbClr val="2D2D3A"/>
                 </a:solidFill>
@@ -9394,7 +9394,7 @@
               </a:rPr>
               <a:t>• Пакет AWS SDK S3 настраивается на локальную заглушку, которая не загружает файлы в облако, а симулирует сохранение в оперативной памяти.</a:t>
             </a:r>
-            <a:endParaRPr lang="en-US" sz="1600" dirty="0"/>
+            <a:endParaRPr lang="en-US" sz="1800" dirty="0"/>
           </a:p>
         </p:txBody>
       </p:sp>
@@ -9528,7 +9528,7 @@
               <a:buNone/>
             </a:pPr>
             <a:r>
-              <a:rPr lang="en-US" sz="1200" b="1" dirty="0">
+              <a:rPr lang="en-US" sz="1400" b="1" dirty="0">
                 <a:solidFill>
                   <a:srgbClr val="1A1A2E"/>
                 </a:solidFill>
@@ -9538,7 +9538,7 @@
               </a:rPr>
               <a:t>Преимущества типизации</a:t>
             </a:r>
-            <a:endParaRPr lang="en-US" sz="1200" dirty="0"/>
+            <a:endParaRPr lang="en-US" sz="1400" dirty="0"/>
           </a:p>
         </p:txBody>
       </p:sp>
@@ -9567,7 +9567,7 @@
               <a:buNone/>
             </a:pPr>
             <a:r>
-              <a:rPr lang="en-US" sz="1100" dirty="0">
+              <a:rPr lang="en-US" sz="1400" dirty="0">
                 <a:solidFill>
                   <a:srgbClr val="2D2D3A"/>
                 </a:solidFill>
@@ -9577,14 +9577,14 @@
               </a:rPr>
               <a:t>• Обнаружение 90% глупых ошибок опечаток на этапе компиляции.</a:t>
             </a:r>
-            <a:endParaRPr lang="en-US" sz="1100" dirty="0"/>
-          </a:p>
-          <a:p>
-            <a:pPr algn="l" indent="0" marL="0">
-              <a:buNone/>
-            </a:pPr>
-            <a:r>
-              <a:rPr lang="en-US" sz="1100" dirty="0">
+            <a:endParaRPr lang="en-US" sz="1400" dirty="0"/>
+          </a:p>
+          <a:p>
+            <a:pPr algn="l" indent="0" marL="0">
+              <a:buNone/>
+            </a:pPr>
+            <a:r>
+              <a:rPr lang="en-US" sz="1400" dirty="0">
                 <a:solidFill>
                   <a:srgbClr val="2D2D3A"/>
                 </a:solidFill>
@@ -9594,14 +9594,14 @@
               </a:rPr>
               <a:t>• Удобное автодополнение (IntelliSense) в редакторах.</a:t>
             </a:r>
-            <a:endParaRPr lang="en-US" sz="1100" dirty="0"/>
-          </a:p>
-          <a:p>
-            <a:pPr algn="l" indent="0" marL="0">
-              <a:buNone/>
-            </a:pPr>
-            <a:r>
-              <a:rPr lang="en-US" sz="1100" dirty="0">
+            <a:endParaRPr lang="en-US" sz="1400" dirty="0"/>
+          </a:p>
+          <a:p>
+            <a:pPr algn="l" indent="0" marL="0">
+              <a:buNone/>
+            </a:pPr>
+            <a:r>
+              <a:rPr lang="en-US" sz="1400" dirty="0">
                 <a:solidFill>
                   <a:srgbClr val="2D2D3A"/>
                 </a:solidFill>
@@ -9611,7 +9611,7 @@
               </a:rPr>
               <a:t>• Безопасный рефакторинг: при изменении структуры полей компилятор сразу подсветит все ошибочные места.</a:t>
             </a:r>
-            <a:endParaRPr lang="en-US" sz="1100" dirty="0"/>
+            <a:endParaRPr lang="en-US" sz="1400" dirty="0"/>
           </a:p>
         </p:txBody>
       </p:sp>
